--- a/design/templates/integral-dark/template.pptx
+++ b/design/templates/integral-dark/template.pptx
@@ -254,7 +254,7 @@
             </a:lvl1pPr>
           </a:lstStyle>
           <a:p>
-            <a:fld id="{DAA401AF-96B9-4795-80AC-645028D14909}" type="datetimeFigureOut">
+            <a:fld id="{C108DDE1-F741-4F4F-A7D2-FBD0359B97CD}" type="datetimeFigureOut">
               <a:rPr lang="en-US" smtClean="0"/>
               <a:t>10/3/2026</a:t>
             </a:fld>
@@ -296,7 +296,7 @@
           <a:bodyPr/>
           <a:lstStyle/>
           <a:p>
-            <a:fld id="{EB0BFBF9-3444-4A23-A691-88293893E3E4}" type="slidenum">
+            <a:fld id="{D07356AB-B086-4690-8078-803F810DAE76}" type="slidenum">
               <a:rPr lang="en-US" smtClean="0"/>
               <a:t>‹#›</a:t>
             </a:fld>
@@ -380,7 +380,7 @@
     </p:spTree>
     <p:extLst>
       <p:ext uri="{BB962C8B-B14F-4D97-AF65-F5344CB8AC3E}">
-        <p14:creationId xmlns:p14="http://schemas.microsoft.com/office/powerpoint/2010/main" val="2938790354"/>
+        <p14:creationId xmlns:p14="http://schemas.microsoft.com/office/powerpoint/2010/main" val="2125133260"/>
       </p:ext>
     </p:extLst>
   </p:cSld>
@@ -449,7 +449,7 @@
           <a:bodyPr/>
           <a:lstStyle/>
           <a:p>
-            <a:fld id="{DAA401AF-96B9-4795-80AC-645028D14909}" type="datetimeFigureOut">
+            <a:fld id="{C108DDE1-F741-4F4F-A7D2-FBD0359B97CD}" type="datetimeFigureOut">
               <a:rPr lang="en-US" smtClean="0"/>
               <a:t>10/3/2026</a:t>
             </a:fld>
@@ -491,7 +491,7 @@
           <a:bodyPr/>
           <a:lstStyle/>
           <a:p>
-            <a:fld id="{EB0BFBF9-3444-4A23-A691-88293893E3E4}" type="slidenum">
+            <a:fld id="{D07356AB-B086-4690-8078-803F810DAE76}" type="slidenum">
               <a:rPr lang="en-US" smtClean="0"/>
               <a:t>‹#›</a:t>
             </a:fld>
@@ -504,7 +504,7 @@
           <p:cNvPr id="6" name="body">
             <a:extLst>
               <a:ext uri="{FF2B5EF4-FFF2-40B4-BE49-F238E27FC236}">
-                <a16:creationId xmlns:a16="http://schemas.microsoft.com/office/drawing/2014/main" id="{9B635EC8-5190-B991-9E76-A0B52559A4F6}"/>
+                <a16:creationId xmlns:a16="http://schemas.microsoft.com/office/drawing/2014/main" id="{236C50CD-FDD2-5F49-7501-A92B563C3F44}"/>
               </a:ext>
             </a:extLst>
           </p:cNvPr>
@@ -544,7 +544,7 @@
           <p:cNvPr id="7" name="source">
             <a:extLst>
               <a:ext uri="{FF2B5EF4-FFF2-40B4-BE49-F238E27FC236}">
-                <a16:creationId xmlns:a16="http://schemas.microsoft.com/office/drawing/2014/main" id="{E5B10A9D-0810-AF8F-8CF1-1050F94CCA38}"/>
+                <a16:creationId xmlns:a16="http://schemas.microsoft.com/office/drawing/2014/main" id="{67E5DC49-8B07-F4ED-6805-D05A56C8D823}"/>
               </a:ext>
             </a:extLst>
           </p:cNvPr>
@@ -599,7 +599,7 @@
     </p:spTree>
     <p:extLst>
       <p:ext uri="{BB962C8B-B14F-4D97-AF65-F5344CB8AC3E}">
-        <p14:creationId xmlns:p14="http://schemas.microsoft.com/office/powerpoint/2010/main" val="2740177123"/>
+        <p14:creationId xmlns:p14="http://schemas.microsoft.com/office/powerpoint/2010/main" val="3747923268"/>
       </p:ext>
     </p:extLst>
   </p:cSld>
@@ -668,7 +668,7 @@
           <a:bodyPr/>
           <a:lstStyle/>
           <a:p>
-            <a:fld id="{DAA401AF-96B9-4795-80AC-645028D14909}" type="datetimeFigureOut">
+            <a:fld id="{C108DDE1-F741-4F4F-A7D2-FBD0359B97CD}" type="datetimeFigureOut">
               <a:rPr lang="en-US" smtClean="0"/>
               <a:t>10/3/2026</a:t>
             </a:fld>
@@ -710,7 +710,7 @@
           <a:bodyPr/>
           <a:lstStyle/>
           <a:p>
-            <a:fld id="{EB0BFBF9-3444-4A23-A691-88293893E3E4}" type="slidenum">
+            <a:fld id="{D07356AB-B086-4690-8078-803F810DAE76}" type="slidenum">
               <a:rPr lang="en-US" smtClean="0"/>
               <a:t>‹#›</a:t>
             </a:fld>
@@ -723,7 +723,7 @@
           <p:cNvPr id="6" name="body">
             <a:extLst>
               <a:ext uri="{FF2B5EF4-FFF2-40B4-BE49-F238E27FC236}">
-                <a16:creationId xmlns:a16="http://schemas.microsoft.com/office/drawing/2014/main" id="{5C4E43CF-EF2B-B692-4B6F-08C0CA6083EF}"/>
+                <a16:creationId xmlns:a16="http://schemas.microsoft.com/office/drawing/2014/main" id="{F244C694-AB8D-A635-4077-44EF943D1F66}"/>
               </a:ext>
             </a:extLst>
           </p:cNvPr>
@@ -766,7 +766,7 @@
     </p:spTree>
     <p:extLst>
       <p:ext uri="{BB962C8B-B14F-4D97-AF65-F5344CB8AC3E}">
-        <p14:creationId xmlns:p14="http://schemas.microsoft.com/office/powerpoint/2010/main" val="3637714665"/>
+        <p14:creationId xmlns:p14="http://schemas.microsoft.com/office/powerpoint/2010/main" val="2604019529"/>
       </p:ext>
     </p:extLst>
   </p:cSld>
@@ -842,7 +842,7 @@
           <p:cNvPr id="6" name="section_number">
             <a:extLst>
               <a:ext uri="{FF2B5EF4-FFF2-40B4-BE49-F238E27FC236}">
-                <a16:creationId xmlns:a16="http://schemas.microsoft.com/office/drawing/2014/main" id="{D3119A77-553E-DA63-8A93-705B1AE4910A}"/>
+                <a16:creationId xmlns:a16="http://schemas.microsoft.com/office/drawing/2014/main" id="{E812351D-71F6-53D8-D74C-4078D0C3B78B}"/>
               </a:ext>
             </a:extLst>
           </p:cNvPr>
@@ -895,7 +895,7 @@
           <p:cNvPr id="7" name="subtitle">
             <a:extLst>
               <a:ext uri="{FF2B5EF4-FFF2-40B4-BE49-F238E27FC236}">
-                <a16:creationId xmlns:a16="http://schemas.microsoft.com/office/drawing/2014/main" id="{085876A3-BAF4-7026-3A6C-E2B4244E9CC5}"/>
+                <a16:creationId xmlns:a16="http://schemas.microsoft.com/office/drawing/2014/main" id="{E24ACF78-88F1-DFDF-0D08-209A36FB9D1B}"/>
               </a:ext>
             </a:extLst>
           </p:cNvPr>
@@ -947,7 +947,7 @@
           <p:cNvPr id="8" name="pattern">
             <a:extLst>
               <a:ext uri="{FF2B5EF4-FFF2-40B4-BE49-F238E27FC236}">
-                <a16:creationId xmlns:a16="http://schemas.microsoft.com/office/drawing/2014/main" id="{E709D0DC-766F-4D42-4B7B-E33EB00D59B9}"/>
+                <a16:creationId xmlns:a16="http://schemas.microsoft.com/office/drawing/2014/main" id="{E5BEAAA9-B4BE-C957-5014-9F015A796B65}"/>
               </a:ext>
             </a:extLst>
           </p:cNvPr>
@@ -1003,7 +1003,7 @@
           <p:cNvPr id="9" name="pattern">
             <a:extLst>
               <a:ext uri="{FF2B5EF4-FFF2-40B4-BE49-F238E27FC236}">
-                <a16:creationId xmlns:a16="http://schemas.microsoft.com/office/drawing/2014/main" id="{BCC49D8B-6F2C-2FCD-5B1B-011898158E48}"/>
+                <a16:creationId xmlns:a16="http://schemas.microsoft.com/office/drawing/2014/main" id="{4FC770B1-CD04-672D-A4D7-6DD61F832BD6}"/>
               </a:ext>
             </a:extLst>
           </p:cNvPr>
@@ -1059,7 +1059,7 @@
           <p:cNvPr id="10" name="pattern">
             <a:extLst>
               <a:ext uri="{FF2B5EF4-FFF2-40B4-BE49-F238E27FC236}">
-                <a16:creationId xmlns:a16="http://schemas.microsoft.com/office/drawing/2014/main" id="{3B010D57-B57B-CB55-5E8B-BA04D43B0533}"/>
+                <a16:creationId xmlns:a16="http://schemas.microsoft.com/office/drawing/2014/main" id="{B9BFE567-7C51-4550-1AE9-3F30E216FAA1}"/>
               </a:ext>
             </a:extLst>
           </p:cNvPr>
@@ -1115,7 +1115,7 @@
           <p:cNvPr id="11" name="pattern">
             <a:extLst>
               <a:ext uri="{FF2B5EF4-FFF2-40B4-BE49-F238E27FC236}">
-                <a16:creationId xmlns:a16="http://schemas.microsoft.com/office/drawing/2014/main" id="{DD502AB7-115F-1F17-C830-F0AC53355276}"/>
+                <a16:creationId xmlns:a16="http://schemas.microsoft.com/office/drawing/2014/main" id="{C535706F-EBE4-7DD9-34FB-5A30B0BF56D8}"/>
               </a:ext>
             </a:extLst>
           </p:cNvPr>
@@ -1171,7 +1171,7 @@
           <p:cNvPr id="12" name="pattern">
             <a:extLst>
               <a:ext uri="{FF2B5EF4-FFF2-40B4-BE49-F238E27FC236}">
-                <a16:creationId xmlns:a16="http://schemas.microsoft.com/office/drawing/2014/main" id="{BC456BD9-96B3-63D4-778A-F9BB0135E0BC}"/>
+                <a16:creationId xmlns:a16="http://schemas.microsoft.com/office/drawing/2014/main" id="{C795891C-FBFC-FA03-153B-9A27219F43CD}"/>
               </a:ext>
             </a:extLst>
           </p:cNvPr>
@@ -1227,7 +1227,7 @@
           <p:cNvPr id="13" name="pattern">
             <a:extLst>
               <a:ext uri="{FF2B5EF4-FFF2-40B4-BE49-F238E27FC236}">
-                <a16:creationId xmlns:a16="http://schemas.microsoft.com/office/drawing/2014/main" id="{1E14F499-E93B-6842-C7B5-7E9F49670E6A}"/>
+                <a16:creationId xmlns:a16="http://schemas.microsoft.com/office/drawing/2014/main" id="{A847760E-F507-FBF8-4929-79541E523090}"/>
               </a:ext>
             </a:extLst>
           </p:cNvPr>
@@ -1283,7 +1283,7 @@
           <p:cNvPr id="14" name="pattern">
             <a:extLst>
               <a:ext uri="{FF2B5EF4-FFF2-40B4-BE49-F238E27FC236}">
-                <a16:creationId xmlns:a16="http://schemas.microsoft.com/office/drawing/2014/main" id="{3BFAF11C-DE36-FEDC-B59A-5E214C88DF1B}"/>
+                <a16:creationId xmlns:a16="http://schemas.microsoft.com/office/drawing/2014/main" id="{82B4F0F6-95A1-5653-7276-ED21C977F49E}"/>
               </a:ext>
             </a:extLst>
           </p:cNvPr>
@@ -1339,7 +1339,7 @@
           <p:cNvPr id="15" name="pattern">
             <a:extLst>
               <a:ext uri="{FF2B5EF4-FFF2-40B4-BE49-F238E27FC236}">
-                <a16:creationId xmlns:a16="http://schemas.microsoft.com/office/drawing/2014/main" id="{BD88DD97-3ADB-9C04-B0B0-E7914F14E9F6}"/>
+                <a16:creationId xmlns:a16="http://schemas.microsoft.com/office/drawing/2014/main" id="{35FC1D7B-FCDB-1BEE-12BB-AA6377C15307}"/>
               </a:ext>
             </a:extLst>
           </p:cNvPr>
@@ -1395,7 +1395,7 @@
           <p:cNvPr id="16" name="pattern">
             <a:extLst>
               <a:ext uri="{FF2B5EF4-FFF2-40B4-BE49-F238E27FC236}">
-                <a16:creationId xmlns:a16="http://schemas.microsoft.com/office/drawing/2014/main" id="{C3E4B849-4D4E-F7D5-FB8B-3D6246C3C5C5}"/>
+                <a16:creationId xmlns:a16="http://schemas.microsoft.com/office/drawing/2014/main" id="{9E0942DA-58FF-D737-4B75-6321D62220DB}"/>
               </a:ext>
             </a:extLst>
           </p:cNvPr>
@@ -1451,7 +1451,7 @@
           <p:cNvPr id="17" name="pattern">
             <a:extLst>
               <a:ext uri="{FF2B5EF4-FFF2-40B4-BE49-F238E27FC236}">
-                <a16:creationId xmlns:a16="http://schemas.microsoft.com/office/drawing/2014/main" id="{B5D3587A-8882-D53F-18E3-B338CC7B7CA5}"/>
+                <a16:creationId xmlns:a16="http://schemas.microsoft.com/office/drawing/2014/main" id="{FBA91507-1C04-526E-4AC2-797D159D14C7}"/>
               </a:ext>
             </a:extLst>
           </p:cNvPr>
@@ -1507,7 +1507,7 @@
           <p:cNvPr id="18" name="pattern">
             <a:extLst>
               <a:ext uri="{FF2B5EF4-FFF2-40B4-BE49-F238E27FC236}">
-                <a16:creationId xmlns:a16="http://schemas.microsoft.com/office/drawing/2014/main" id="{70B39351-783A-16A1-CA56-F882C3B2DBC0}"/>
+                <a16:creationId xmlns:a16="http://schemas.microsoft.com/office/drawing/2014/main" id="{9A1C9AFA-C737-276D-4DD8-FAB3262FCCBF}"/>
               </a:ext>
             </a:extLst>
           </p:cNvPr>
@@ -1563,7 +1563,7 @@
           <p:cNvPr id="19" name="pattern">
             <a:extLst>
               <a:ext uri="{FF2B5EF4-FFF2-40B4-BE49-F238E27FC236}">
-                <a16:creationId xmlns:a16="http://schemas.microsoft.com/office/drawing/2014/main" id="{6B581AF1-1487-4F07-2E50-5D7CF9F92ADB}"/>
+                <a16:creationId xmlns:a16="http://schemas.microsoft.com/office/drawing/2014/main" id="{6DA53B56-3094-11F1-EFE0-AF416CA02F2C}"/>
               </a:ext>
             </a:extLst>
           </p:cNvPr>
@@ -1619,7 +1619,7 @@
           <p:cNvPr id="20" name="pattern">
             <a:extLst>
               <a:ext uri="{FF2B5EF4-FFF2-40B4-BE49-F238E27FC236}">
-                <a16:creationId xmlns:a16="http://schemas.microsoft.com/office/drawing/2014/main" id="{BCB809E3-5F2F-9D19-6893-A0427D8EEAC5}"/>
+                <a16:creationId xmlns:a16="http://schemas.microsoft.com/office/drawing/2014/main" id="{9E416101-37C7-5134-6724-17B749FA0B75}"/>
               </a:ext>
             </a:extLst>
           </p:cNvPr>
@@ -1675,7 +1675,7 @@
           <p:cNvPr id="21" name="pattern">
             <a:extLst>
               <a:ext uri="{FF2B5EF4-FFF2-40B4-BE49-F238E27FC236}">
-                <a16:creationId xmlns:a16="http://schemas.microsoft.com/office/drawing/2014/main" id="{E6270C91-E21E-5891-DFBD-22B1FB9E4E8E}"/>
+                <a16:creationId xmlns:a16="http://schemas.microsoft.com/office/drawing/2014/main" id="{D1176870-2974-D19A-D11A-3262CE0220F7}"/>
               </a:ext>
             </a:extLst>
           </p:cNvPr>
@@ -1731,7 +1731,7 @@
           <p:cNvPr id="22" name="pattern">
             <a:extLst>
               <a:ext uri="{FF2B5EF4-FFF2-40B4-BE49-F238E27FC236}">
-                <a16:creationId xmlns:a16="http://schemas.microsoft.com/office/drawing/2014/main" id="{3FCAE85E-511F-AC96-48A3-90BDD479732B}"/>
+                <a16:creationId xmlns:a16="http://schemas.microsoft.com/office/drawing/2014/main" id="{FFBE3031-C3EC-5703-A1A1-F031F159B700}"/>
               </a:ext>
             </a:extLst>
           </p:cNvPr>
@@ -1787,7 +1787,7 @@
           <p:cNvPr id="23" name="pattern">
             <a:extLst>
               <a:ext uri="{FF2B5EF4-FFF2-40B4-BE49-F238E27FC236}">
-                <a16:creationId xmlns:a16="http://schemas.microsoft.com/office/drawing/2014/main" id="{97D373BF-131D-0400-2A05-7910D21B13EA}"/>
+                <a16:creationId xmlns:a16="http://schemas.microsoft.com/office/drawing/2014/main" id="{BFB3B72B-E2FB-7C71-9F9A-0EAD1DEAF0C3}"/>
               </a:ext>
             </a:extLst>
           </p:cNvPr>
@@ -1843,7 +1843,7 @@
           <p:cNvPr id="24" name="pattern">
             <a:extLst>
               <a:ext uri="{FF2B5EF4-FFF2-40B4-BE49-F238E27FC236}">
-                <a16:creationId xmlns:a16="http://schemas.microsoft.com/office/drawing/2014/main" id="{4D433FCC-0ABC-5349-01BA-A012A41F0619}"/>
+                <a16:creationId xmlns:a16="http://schemas.microsoft.com/office/drawing/2014/main" id="{8EE912C9-0AA2-2200-21E1-D1832DB26F8A}"/>
               </a:ext>
             </a:extLst>
           </p:cNvPr>
@@ -1899,7 +1899,7 @@
           <p:cNvPr id="25" name="pattern">
             <a:extLst>
               <a:ext uri="{FF2B5EF4-FFF2-40B4-BE49-F238E27FC236}">
-                <a16:creationId xmlns:a16="http://schemas.microsoft.com/office/drawing/2014/main" id="{8331BDC2-4FE5-17B5-1E64-891079335C86}"/>
+                <a16:creationId xmlns:a16="http://schemas.microsoft.com/office/drawing/2014/main" id="{DA1AD45D-6AF2-CC45-0FCD-115B372AD569}"/>
               </a:ext>
             </a:extLst>
           </p:cNvPr>
@@ -1955,7 +1955,7 @@
           <p:cNvPr id="26" name="pattern">
             <a:extLst>
               <a:ext uri="{FF2B5EF4-FFF2-40B4-BE49-F238E27FC236}">
-                <a16:creationId xmlns:a16="http://schemas.microsoft.com/office/drawing/2014/main" id="{C785341D-CC5B-3CA5-0A4E-9B6E297C42E8}"/>
+                <a16:creationId xmlns:a16="http://schemas.microsoft.com/office/drawing/2014/main" id="{53A28099-67A5-90DE-83E1-B8CC1B6B7099}"/>
               </a:ext>
             </a:extLst>
           </p:cNvPr>
@@ -2011,7 +2011,7 @@
           <p:cNvPr id="27" name="pattern">
             <a:extLst>
               <a:ext uri="{FF2B5EF4-FFF2-40B4-BE49-F238E27FC236}">
-                <a16:creationId xmlns:a16="http://schemas.microsoft.com/office/drawing/2014/main" id="{E215D981-3DA2-94FA-0941-8BD8D5D5D70D}"/>
+                <a16:creationId xmlns:a16="http://schemas.microsoft.com/office/drawing/2014/main" id="{5AEFF656-32D5-0AA5-B53D-E8AF74A577BB}"/>
               </a:ext>
             </a:extLst>
           </p:cNvPr>
@@ -2067,7 +2067,7 @@
           <p:cNvPr id="28" name="pattern">
             <a:extLst>
               <a:ext uri="{FF2B5EF4-FFF2-40B4-BE49-F238E27FC236}">
-                <a16:creationId xmlns:a16="http://schemas.microsoft.com/office/drawing/2014/main" id="{574F9332-D1FB-0421-8EFE-9C998DE3899E}"/>
+                <a16:creationId xmlns:a16="http://schemas.microsoft.com/office/drawing/2014/main" id="{C906645C-640F-A5D8-61E7-528DD769E1E3}"/>
               </a:ext>
             </a:extLst>
           </p:cNvPr>
@@ -2123,7 +2123,7 @@
           <p:cNvPr id="29" name="pattern">
             <a:extLst>
               <a:ext uri="{FF2B5EF4-FFF2-40B4-BE49-F238E27FC236}">
-                <a16:creationId xmlns:a16="http://schemas.microsoft.com/office/drawing/2014/main" id="{0CD850BB-91D7-B5A6-2F1D-789A48AF12EB}"/>
+                <a16:creationId xmlns:a16="http://schemas.microsoft.com/office/drawing/2014/main" id="{24744F7D-6038-FCE8-06A8-C5E0F0B46147}"/>
               </a:ext>
             </a:extLst>
           </p:cNvPr>
@@ -2179,7 +2179,7 @@
           <p:cNvPr id="30" name="pattern">
             <a:extLst>
               <a:ext uri="{FF2B5EF4-FFF2-40B4-BE49-F238E27FC236}">
-                <a16:creationId xmlns:a16="http://schemas.microsoft.com/office/drawing/2014/main" id="{BF8CF6DB-20C1-7711-CB14-C9989619E221}"/>
+                <a16:creationId xmlns:a16="http://schemas.microsoft.com/office/drawing/2014/main" id="{58F7736D-C6AE-9CEF-E7DB-CAAEC3851385}"/>
               </a:ext>
             </a:extLst>
           </p:cNvPr>
@@ -2235,7 +2235,7 @@
           <p:cNvPr id="31" name="pattern">
             <a:extLst>
               <a:ext uri="{FF2B5EF4-FFF2-40B4-BE49-F238E27FC236}">
-                <a16:creationId xmlns:a16="http://schemas.microsoft.com/office/drawing/2014/main" id="{BB8A14A4-0868-3D4D-0F7F-C54FFED2DF14}"/>
+                <a16:creationId xmlns:a16="http://schemas.microsoft.com/office/drawing/2014/main" id="{B85B1023-EB92-F57E-FA22-1D090ED9F891}"/>
               </a:ext>
             </a:extLst>
           </p:cNvPr>
@@ -2291,7 +2291,7 @@
           <p:cNvPr id="32" name="pattern">
             <a:extLst>
               <a:ext uri="{FF2B5EF4-FFF2-40B4-BE49-F238E27FC236}">
-                <a16:creationId xmlns:a16="http://schemas.microsoft.com/office/drawing/2014/main" id="{144C9204-3403-FF50-D9E8-3EFA4E759347}"/>
+                <a16:creationId xmlns:a16="http://schemas.microsoft.com/office/drawing/2014/main" id="{9532040D-9966-1362-7B68-7E515EF9C9BF}"/>
               </a:ext>
             </a:extLst>
           </p:cNvPr>
@@ -2347,7 +2347,7 @@
           <p:cNvPr id="33" name="pattern">
             <a:extLst>
               <a:ext uri="{FF2B5EF4-FFF2-40B4-BE49-F238E27FC236}">
-                <a16:creationId xmlns:a16="http://schemas.microsoft.com/office/drawing/2014/main" id="{7BAACBF3-5725-9542-2364-B43B3B334EDF}"/>
+                <a16:creationId xmlns:a16="http://schemas.microsoft.com/office/drawing/2014/main" id="{43D6355A-479F-EEBF-57D7-B8175B34FDFA}"/>
               </a:ext>
             </a:extLst>
           </p:cNvPr>
@@ -2403,7 +2403,7 @@
           <p:cNvPr id="34" name="pattern">
             <a:extLst>
               <a:ext uri="{FF2B5EF4-FFF2-40B4-BE49-F238E27FC236}">
-                <a16:creationId xmlns:a16="http://schemas.microsoft.com/office/drawing/2014/main" id="{3504202A-BF4A-9549-CF91-B74B5CF1D2F1}"/>
+                <a16:creationId xmlns:a16="http://schemas.microsoft.com/office/drawing/2014/main" id="{56E2426F-2C2B-6EA0-0D59-C40223317543}"/>
               </a:ext>
             </a:extLst>
           </p:cNvPr>
@@ -2459,7 +2459,7 @@
           <p:cNvPr id="35" name="pattern">
             <a:extLst>
               <a:ext uri="{FF2B5EF4-FFF2-40B4-BE49-F238E27FC236}">
-                <a16:creationId xmlns:a16="http://schemas.microsoft.com/office/drawing/2014/main" id="{1665DBB7-1A3F-26A5-13A1-68C26419F16F}"/>
+                <a16:creationId xmlns:a16="http://schemas.microsoft.com/office/drawing/2014/main" id="{080A51B5-3E14-5F6D-1F3D-1387212D9F57}"/>
               </a:ext>
             </a:extLst>
           </p:cNvPr>
@@ -2515,7 +2515,7 @@
           <p:cNvPr id="36" name="pattern">
             <a:extLst>
               <a:ext uri="{FF2B5EF4-FFF2-40B4-BE49-F238E27FC236}">
-                <a16:creationId xmlns:a16="http://schemas.microsoft.com/office/drawing/2014/main" id="{5E8F88AB-AC00-A495-6FD1-15451361A597}"/>
+                <a16:creationId xmlns:a16="http://schemas.microsoft.com/office/drawing/2014/main" id="{DEC81A24-0AE1-E60F-984D-73990E72BBDF}"/>
               </a:ext>
             </a:extLst>
           </p:cNvPr>
@@ -2571,7 +2571,7 @@
           <p:cNvPr id="37" name="pattern">
             <a:extLst>
               <a:ext uri="{FF2B5EF4-FFF2-40B4-BE49-F238E27FC236}">
-                <a16:creationId xmlns:a16="http://schemas.microsoft.com/office/drawing/2014/main" id="{7ED71DCC-C422-1BCF-BB53-AC09CD03F82A}"/>
+                <a16:creationId xmlns:a16="http://schemas.microsoft.com/office/drawing/2014/main" id="{9CC02622-39F4-0419-D65D-66F956BEA77E}"/>
               </a:ext>
             </a:extLst>
           </p:cNvPr>
@@ -2627,7 +2627,7 @@
           <p:cNvPr id="38" name="pattern">
             <a:extLst>
               <a:ext uri="{FF2B5EF4-FFF2-40B4-BE49-F238E27FC236}">
-                <a16:creationId xmlns:a16="http://schemas.microsoft.com/office/drawing/2014/main" id="{D15522E8-F29D-4E9E-B127-E524DD01285B}"/>
+                <a16:creationId xmlns:a16="http://schemas.microsoft.com/office/drawing/2014/main" id="{657F0E46-819D-4BA9-8B15-FC46D6C6F388}"/>
               </a:ext>
             </a:extLst>
           </p:cNvPr>
@@ -2683,7 +2683,7 @@
           <p:cNvPr id="39" name="pattern">
             <a:extLst>
               <a:ext uri="{FF2B5EF4-FFF2-40B4-BE49-F238E27FC236}">
-                <a16:creationId xmlns:a16="http://schemas.microsoft.com/office/drawing/2014/main" id="{3D9EDAEA-6ACD-2855-9153-5FA2AA7E7B9F}"/>
+                <a16:creationId xmlns:a16="http://schemas.microsoft.com/office/drawing/2014/main" id="{CAE6CF45-1733-BCA2-0863-10FDFBFA09C0}"/>
               </a:ext>
             </a:extLst>
           </p:cNvPr>
@@ -2739,7 +2739,7 @@
           <p:cNvPr id="40" name="pattern">
             <a:extLst>
               <a:ext uri="{FF2B5EF4-FFF2-40B4-BE49-F238E27FC236}">
-                <a16:creationId xmlns:a16="http://schemas.microsoft.com/office/drawing/2014/main" id="{0FF7B3E7-42B8-F229-DA17-FF849E40CF90}"/>
+                <a16:creationId xmlns:a16="http://schemas.microsoft.com/office/drawing/2014/main" id="{BE853025-8ED6-9EA5-D31D-7CC771E6C6B3}"/>
               </a:ext>
             </a:extLst>
           </p:cNvPr>
@@ -2795,7 +2795,7 @@
           <p:cNvPr id="41" name="pattern">
             <a:extLst>
               <a:ext uri="{FF2B5EF4-FFF2-40B4-BE49-F238E27FC236}">
-                <a16:creationId xmlns:a16="http://schemas.microsoft.com/office/drawing/2014/main" id="{18A75534-A845-F71C-4D8C-D43D3CF1BFDD}"/>
+                <a16:creationId xmlns:a16="http://schemas.microsoft.com/office/drawing/2014/main" id="{D2832FBC-28B1-4CFD-D505-9ECCAA9FF9A5}"/>
               </a:ext>
             </a:extLst>
           </p:cNvPr>
@@ -2851,7 +2851,7 @@
           <p:cNvPr id="42" name="pattern">
             <a:extLst>
               <a:ext uri="{FF2B5EF4-FFF2-40B4-BE49-F238E27FC236}">
-                <a16:creationId xmlns:a16="http://schemas.microsoft.com/office/drawing/2014/main" id="{C16F7285-F4A6-A9BA-0697-DC6056F511E2}"/>
+                <a16:creationId xmlns:a16="http://schemas.microsoft.com/office/drawing/2014/main" id="{B2188872-35A9-5E0D-0F0F-E2E704DB787E}"/>
               </a:ext>
             </a:extLst>
           </p:cNvPr>
@@ -2907,7 +2907,7 @@
           <p:cNvPr id="43" name="pattern">
             <a:extLst>
               <a:ext uri="{FF2B5EF4-FFF2-40B4-BE49-F238E27FC236}">
-                <a16:creationId xmlns:a16="http://schemas.microsoft.com/office/drawing/2014/main" id="{3F0EC9C1-45A9-58C3-49B1-F69378E5829B}"/>
+                <a16:creationId xmlns:a16="http://schemas.microsoft.com/office/drawing/2014/main" id="{34A13E8A-357D-47E5-0965-51EC915CDF51}"/>
               </a:ext>
             </a:extLst>
           </p:cNvPr>
@@ -2963,7 +2963,7 @@
           <p:cNvPr id="44" name="pattern">
             <a:extLst>
               <a:ext uri="{FF2B5EF4-FFF2-40B4-BE49-F238E27FC236}">
-                <a16:creationId xmlns:a16="http://schemas.microsoft.com/office/drawing/2014/main" id="{AC65F23B-7263-33C6-13F0-E43E63BD382A}"/>
+                <a16:creationId xmlns:a16="http://schemas.microsoft.com/office/drawing/2014/main" id="{BF68FAA9-3ABC-7E63-CAA1-2DBD99C15DDB}"/>
               </a:ext>
             </a:extLst>
           </p:cNvPr>
@@ -3019,7 +3019,7 @@
           <p:cNvPr id="45" name="pattern">
             <a:extLst>
               <a:ext uri="{FF2B5EF4-FFF2-40B4-BE49-F238E27FC236}">
-                <a16:creationId xmlns:a16="http://schemas.microsoft.com/office/drawing/2014/main" id="{C0AC4231-D45E-D53D-44AD-EBC0B74EC886}"/>
+                <a16:creationId xmlns:a16="http://schemas.microsoft.com/office/drawing/2014/main" id="{75DA0B24-6BA9-C25A-22A5-15701E80D7CF}"/>
               </a:ext>
             </a:extLst>
           </p:cNvPr>
@@ -3075,7 +3075,7 @@
           <p:cNvPr id="46" name="pattern">
             <a:extLst>
               <a:ext uri="{FF2B5EF4-FFF2-40B4-BE49-F238E27FC236}">
-                <a16:creationId xmlns:a16="http://schemas.microsoft.com/office/drawing/2014/main" id="{974F1EFF-B21E-F0C2-16D1-6F6F128832AA}"/>
+                <a16:creationId xmlns:a16="http://schemas.microsoft.com/office/drawing/2014/main" id="{2732E469-C1C5-1B2A-BD8E-67E63D6CF31B}"/>
               </a:ext>
             </a:extLst>
           </p:cNvPr>
@@ -3131,7 +3131,7 @@
           <p:cNvPr id="47" name="pattern">
             <a:extLst>
               <a:ext uri="{FF2B5EF4-FFF2-40B4-BE49-F238E27FC236}">
-                <a16:creationId xmlns:a16="http://schemas.microsoft.com/office/drawing/2014/main" id="{63AF5C9A-1F37-DE28-E550-5F2E249FF118}"/>
+                <a16:creationId xmlns:a16="http://schemas.microsoft.com/office/drawing/2014/main" id="{2A08F928-B8E1-92E2-F721-A6F53A693B6F}"/>
               </a:ext>
             </a:extLst>
           </p:cNvPr>
@@ -3187,7 +3187,7 @@
           <p:cNvPr id="48" name="pattern">
             <a:extLst>
               <a:ext uri="{FF2B5EF4-FFF2-40B4-BE49-F238E27FC236}">
-                <a16:creationId xmlns:a16="http://schemas.microsoft.com/office/drawing/2014/main" id="{40F9F56A-FEE1-026D-7D26-1DFD0E1694B2}"/>
+                <a16:creationId xmlns:a16="http://schemas.microsoft.com/office/drawing/2014/main" id="{481F1902-44AB-83F2-118F-E1890326CCC9}"/>
               </a:ext>
             </a:extLst>
           </p:cNvPr>
@@ -3243,7 +3243,7 @@
           <p:cNvPr id="49" name="pattern">
             <a:extLst>
               <a:ext uri="{FF2B5EF4-FFF2-40B4-BE49-F238E27FC236}">
-                <a16:creationId xmlns:a16="http://schemas.microsoft.com/office/drawing/2014/main" id="{DB585068-C4D0-2A0F-558D-71EF94527869}"/>
+                <a16:creationId xmlns:a16="http://schemas.microsoft.com/office/drawing/2014/main" id="{3252892D-1357-9A11-3A4C-FF12CC842713}"/>
               </a:ext>
             </a:extLst>
           </p:cNvPr>
@@ -3299,7 +3299,7 @@
           <p:cNvPr id="50" name="pattern">
             <a:extLst>
               <a:ext uri="{FF2B5EF4-FFF2-40B4-BE49-F238E27FC236}">
-                <a16:creationId xmlns:a16="http://schemas.microsoft.com/office/drawing/2014/main" id="{836C20C5-9B2A-075D-150A-72E7EB2A6D39}"/>
+                <a16:creationId xmlns:a16="http://schemas.microsoft.com/office/drawing/2014/main" id="{2A1CC637-1F77-6186-BBF8-8CC065CDFF87}"/>
               </a:ext>
             </a:extLst>
           </p:cNvPr>
@@ -3355,7 +3355,7 @@
           <p:cNvPr id="51" name="pattern">
             <a:extLst>
               <a:ext uri="{FF2B5EF4-FFF2-40B4-BE49-F238E27FC236}">
-                <a16:creationId xmlns:a16="http://schemas.microsoft.com/office/drawing/2014/main" id="{10E8BF63-471E-5EAE-1D24-42345904E458}"/>
+                <a16:creationId xmlns:a16="http://schemas.microsoft.com/office/drawing/2014/main" id="{2930C1E9-5561-3C11-74FA-EFEE02720F67}"/>
               </a:ext>
             </a:extLst>
           </p:cNvPr>
@@ -3411,7 +3411,7 @@
           <p:cNvPr id="52" name="pattern">
             <a:extLst>
               <a:ext uri="{FF2B5EF4-FFF2-40B4-BE49-F238E27FC236}">
-                <a16:creationId xmlns:a16="http://schemas.microsoft.com/office/drawing/2014/main" id="{4BE9D7A9-A79D-C8CE-CC9E-0F6C2A037333}"/>
+                <a16:creationId xmlns:a16="http://schemas.microsoft.com/office/drawing/2014/main" id="{3A998171-C381-6895-F4F4-ED7A56C9D507}"/>
               </a:ext>
             </a:extLst>
           </p:cNvPr>
@@ -3467,7 +3467,7 @@
           <p:cNvPr id="53" name="pattern">
             <a:extLst>
               <a:ext uri="{FF2B5EF4-FFF2-40B4-BE49-F238E27FC236}">
-                <a16:creationId xmlns:a16="http://schemas.microsoft.com/office/drawing/2014/main" id="{486E1DC7-50A9-FAB2-7C1C-CC361A449F39}"/>
+                <a16:creationId xmlns:a16="http://schemas.microsoft.com/office/drawing/2014/main" id="{1379548D-7205-E9C0-7F2D-67AD76C91EFA}"/>
               </a:ext>
             </a:extLst>
           </p:cNvPr>
@@ -3523,7 +3523,7 @@
           <p:cNvPr id="54" name="pattern">
             <a:extLst>
               <a:ext uri="{FF2B5EF4-FFF2-40B4-BE49-F238E27FC236}">
-                <a16:creationId xmlns:a16="http://schemas.microsoft.com/office/drawing/2014/main" id="{2C998131-36F0-A2A3-11BC-0F4E2DC2A8F8}"/>
+                <a16:creationId xmlns:a16="http://schemas.microsoft.com/office/drawing/2014/main" id="{D712CB25-CFE8-901F-8764-387DE053B180}"/>
               </a:ext>
             </a:extLst>
           </p:cNvPr>
@@ -3579,7 +3579,7 @@
           <p:cNvPr id="55" name="pattern">
             <a:extLst>
               <a:ext uri="{FF2B5EF4-FFF2-40B4-BE49-F238E27FC236}">
-                <a16:creationId xmlns:a16="http://schemas.microsoft.com/office/drawing/2014/main" id="{4A830C51-0B2A-545F-E5EB-801AA24DB4DC}"/>
+                <a16:creationId xmlns:a16="http://schemas.microsoft.com/office/drawing/2014/main" id="{79B41B6B-079C-0CB3-FE6D-1910EC9BE5D3}"/>
               </a:ext>
             </a:extLst>
           </p:cNvPr>
@@ -3635,7 +3635,7 @@
           <p:cNvPr id="56" name="pattern">
             <a:extLst>
               <a:ext uri="{FF2B5EF4-FFF2-40B4-BE49-F238E27FC236}">
-                <a16:creationId xmlns:a16="http://schemas.microsoft.com/office/drawing/2014/main" id="{64C38F5A-2903-CDF1-8C78-31FE4961316A}"/>
+                <a16:creationId xmlns:a16="http://schemas.microsoft.com/office/drawing/2014/main" id="{B9AA99F5-275D-643E-06C2-ABA958B5F44A}"/>
               </a:ext>
             </a:extLst>
           </p:cNvPr>
@@ -3691,7 +3691,7 @@
           <p:cNvPr id="57" name="pattern">
             <a:extLst>
               <a:ext uri="{FF2B5EF4-FFF2-40B4-BE49-F238E27FC236}">
-                <a16:creationId xmlns:a16="http://schemas.microsoft.com/office/drawing/2014/main" id="{FEDCDFC7-7929-0A2B-0460-80146A51E011}"/>
+                <a16:creationId xmlns:a16="http://schemas.microsoft.com/office/drawing/2014/main" id="{F40A5D44-80A9-F8BC-5F96-7787FDC1DDD8}"/>
               </a:ext>
             </a:extLst>
           </p:cNvPr>
@@ -3747,7 +3747,7 @@
           <p:cNvPr id="58" name="pattern">
             <a:extLst>
               <a:ext uri="{FF2B5EF4-FFF2-40B4-BE49-F238E27FC236}">
-                <a16:creationId xmlns:a16="http://schemas.microsoft.com/office/drawing/2014/main" id="{2E8802BB-63AD-C782-C3BF-48CEC2CD49D7}"/>
+                <a16:creationId xmlns:a16="http://schemas.microsoft.com/office/drawing/2014/main" id="{5C8F9967-DE1D-AF8D-2217-488819DA8356}"/>
               </a:ext>
             </a:extLst>
           </p:cNvPr>
@@ -3803,7 +3803,7 @@
           <p:cNvPr id="59" name="pattern">
             <a:extLst>
               <a:ext uri="{FF2B5EF4-FFF2-40B4-BE49-F238E27FC236}">
-                <a16:creationId xmlns:a16="http://schemas.microsoft.com/office/drawing/2014/main" id="{6A5DAB91-8706-963A-F233-E629BED54F96}"/>
+                <a16:creationId xmlns:a16="http://schemas.microsoft.com/office/drawing/2014/main" id="{D40AA1DE-1ED3-26EC-CB89-3BC4DFC8F471}"/>
               </a:ext>
             </a:extLst>
           </p:cNvPr>
@@ -3859,7 +3859,7 @@
           <p:cNvPr id="60" name="pattern">
             <a:extLst>
               <a:ext uri="{FF2B5EF4-FFF2-40B4-BE49-F238E27FC236}">
-                <a16:creationId xmlns:a16="http://schemas.microsoft.com/office/drawing/2014/main" id="{1E710806-ED8B-1789-A4B4-798711BD79C0}"/>
+                <a16:creationId xmlns:a16="http://schemas.microsoft.com/office/drawing/2014/main" id="{BE853CF1-4F3F-8470-E806-8ACB3AEE5042}"/>
               </a:ext>
             </a:extLst>
           </p:cNvPr>
@@ -3915,7 +3915,7 @@
           <p:cNvPr id="61" name="pattern">
             <a:extLst>
               <a:ext uri="{FF2B5EF4-FFF2-40B4-BE49-F238E27FC236}">
-                <a16:creationId xmlns:a16="http://schemas.microsoft.com/office/drawing/2014/main" id="{BE9DFDF2-09E4-3A87-2010-FFDD063B8CAF}"/>
+                <a16:creationId xmlns:a16="http://schemas.microsoft.com/office/drawing/2014/main" id="{AA0BADEE-D7F6-3C18-6EA1-716F73D6C82B}"/>
               </a:ext>
             </a:extLst>
           </p:cNvPr>
@@ -3971,7 +3971,7 @@
           <p:cNvPr id="62" name="pattern">
             <a:extLst>
               <a:ext uri="{FF2B5EF4-FFF2-40B4-BE49-F238E27FC236}">
-                <a16:creationId xmlns:a16="http://schemas.microsoft.com/office/drawing/2014/main" id="{416FB3C9-3BC7-FA35-777D-45D12D19E17E}"/>
+                <a16:creationId xmlns:a16="http://schemas.microsoft.com/office/drawing/2014/main" id="{DFB81486-4059-E841-A50E-361238B75821}"/>
               </a:ext>
             </a:extLst>
           </p:cNvPr>
@@ -4027,7 +4027,7 @@
           <p:cNvPr id="63" name="pattern">
             <a:extLst>
               <a:ext uri="{FF2B5EF4-FFF2-40B4-BE49-F238E27FC236}">
-                <a16:creationId xmlns:a16="http://schemas.microsoft.com/office/drawing/2014/main" id="{EBB2F011-D00B-B34F-8EA9-B8D2286BFE51}"/>
+                <a16:creationId xmlns:a16="http://schemas.microsoft.com/office/drawing/2014/main" id="{75BE1F63-1F44-447F-BD4F-982D8A2D0D7C}"/>
               </a:ext>
             </a:extLst>
           </p:cNvPr>
@@ -4083,7 +4083,7 @@
           <p:cNvPr id="64" name="pattern">
             <a:extLst>
               <a:ext uri="{FF2B5EF4-FFF2-40B4-BE49-F238E27FC236}">
-                <a16:creationId xmlns:a16="http://schemas.microsoft.com/office/drawing/2014/main" id="{A73F4525-1F84-D31D-F969-2E92E4D80523}"/>
+                <a16:creationId xmlns:a16="http://schemas.microsoft.com/office/drawing/2014/main" id="{5CF25524-0B29-3862-993D-A4EAEC2EFDD2}"/>
               </a:ext>
             </a:extLst>
           </p:cNvPr>
@@ -4139,7 +4139,7 @@
           <p:cNvPr id="65" name="pattern">
             <a:extLst>
               <a:ext uri="{FF2B5EF4-FFF2-40B4-BE49-F238E27FC236}">
-                <a16:creationId xmlns:a16="http://schemas.microsoft.com/office/drawing/2014/main" id="{121BEDFE-6AA9-F636-7B56-7A023620582A}"/>
+                <a16:creationId xmlns:a16="http://schemas.microsoft.com/office/drawing/2014/main" id="{CD5534CA-59A4-CD55-A921-0808E1367FDD}"/>
               </a:ext>
             </a:extLst>
           </p:cNvPr>
@@ -4195,7 +4195,7 @@
           <p:cNvPr id="66" name="pattern">
             <a:extLst>
               <a:ext uri="{FF2B5EF4-FFF2-40B4-BE49-F238E27FC236}">
-                <a16:creationId xmlns:a16="http://schemas.microsoft.com/office/drawing/2014/main" id="{07F65B6C-0E22-906C-BEC7-2205683E295C}"/>
+                <a16:creationId xmlns:a16="http://schemas.microsoft.com/office/drawing/2014/main" id="{A6394896-933F-20E8-A757-C6D55AB0B072}"/>
               </a:ext>
             </a:extLst>
           </p:cNvPr>
@@ -4251,7 +4251,7 @@
           <p:cNvPr id="67" name="pattern">
             <a:extLst>
               <a:ext uri="{FF2B5EF4-FFF2-40B4-BE49-F238E27FC236}">
-                <a16:creationId xmlns:a16="http://schemas.microsoft.com/office/drawing/2014/main" id="{EA4A5D02-B5C7-7A42-759F-BC40EFD16595}"/>
+                <a16:creationId xmlns:a16="http://schemas.microsoft.com/office/drawing/2014/main" id="{B17926E3-048F-6B50-E8F5-159940C9BFDF}"/>
               </a:ext>
             </a:extLst>
           </p:cNvPr>
@@ -4307,7 +4307,7 @@
           <p:cNvPr id="68" name="pattern">
             <a:extLst>
               <a:ext uri="{FF2B5EF4-FFF2-40B4-BE49-F238E27FC236}">
-                <a16:creationId xmlns:a16="http://schemas.microsoft.com/office/drawing/2014/main" id="{4559965B-E7AB-0054-A964-5465D30C3F96}"/>
+                <a16:creationId xmlns:a16="http://schemas.microsoft.com/office/drawing/2014/main" id="{7716C7EB-D722-574A-417E-3E3BF8331021}"/>
               </a:ext>
             </a:extLst>
           </p:cNvPr>
@@ -4363,7 +4363,7 @@
           <p:cNvPr id="69" name="pattern">
             <a:extLst>
               <a:ext uri="{FF2B5EF4-FFF2-40B4-BE49-F238E27FC236}">
-                <a16:creationId xmlns:a16="http://schemas.microsoft.com/office/drawing/2014/main" id="{2117A09F-925E-CA5D-C9C5-ABDCB2BC693F}"/>
+                <a16:creationId xmlns:a16="http://schemas.microsoft.com/office/drawing/2014/main" id="{7CB4134F-24C7-1ECE-B5B4-A404293FEF30}"/>
               </a:ext>
             </a:extLst>
           </p:cNvPr>
@@ -4419,7 +4419,7 @@
           <p:cNvPr id="70" name="pattern">
             <a:extLst>
               <a:ext uri="{FF2B5EF4-FFF2-40B4-BE49-F238E27FC236}">
-                <a16:creationId xmlns:a16="http://schemas.microsoft.com/office/drawing/2014/main" id="{14A9B91B-341A-6F7C-9C12-DCBC522F875D}"/>
+                <a16:creationId xmlns:a16="http://schemas.microsoft.com/office/drawing/2014/main" id="{7594A24C-F31B-CB02-3153-26DA7FC25828}"/>
               </a:ext>
             </a:extLst>
           </p:cNvPr>
@@ -4475,7 +4475,7 @@
           <p:cNvPr id="71" name="pattern">
             <a:extLst>
               <a:ext uri="{FF2B5EF4-FFF2-40B4-BE49-F238E27FC236}">
-                <a16:creationId xmlns:a16="http://schemas.microsoft.com/office/drawing/2014/main" id="{2FD3C49F-03A9-196C-8D23-79A76C73C8A8}"/>
+                <a16:creationId xmlns:a16="http://schemas.microsoft.com/office/drawing/2014/main" id="{E09C5CF7-4535-F11A-6EEF-A8D94DA0E6B4}"/>
               </a:ext>
             </a:extLst>
           </p:cNvPr>
@@ -4531,7 +4531,7 @@
           <p:cNvPr id="72" name="pattern">
             <a:extLst>
               <a:ext uri="{FF2B5EF4-FFF2-40B4-BE49-F238E27FC236}">
-                <a16:creationId xmlns:a16="http://schemas.microsoft.com/office/drawing/2014/main" id="{EF58D5A0-9FCA-75DA-764B-90FDD5B76BDB}"/>
+                <a16:creationId xmlns:a16="http://schemas.microsoft.com/office/drawing/2014/main" id="{B57A1A42-9335-7B94-9B67-628011AC9298}"/>
               </a:ext>
             </a:extLst>
           </p:cNvPr>
@@ -4587,7 +4587,7 @@
           <p:cNvPr id="73" name="pattern">
             <a:extLst>
               <a:ext uri="{FF2B5EF4-FFF2-40B4-BE49-F238E27FC236}">
-                <a16:creationId xmlns:a16="http://schemas.microsoft.com/office/drawing/2014/main" id="{2A4509B3-06BC-50CE-E45B-6AF3BBDFB98A}"/>
+                <a16:creationId xmlns:a16="http://schemas.microsoft.com/office/drawing/2014/main" id="{D0455DF5-75CC-56A3-DF71-EB00B91907C9}"/>
               </a:ext>
             </a:extLst>
           </p:cNvPr>
@@ -4643,7 +4643,7 @@
           <p:cNvPr id="74" name="pattern">
             <a:extLst>
               <a:ext uri="{FF2B5EF4-FFF2-40B4-BE49-F238E27FC236}">
-                <a16:creationId xmlns:a16="http://schemas.microsoft.com/office/drawing/2014/main" id="{31AB96A9-AA3C-48DA-9555-CD4A460662DB}"/>
+                <a16:creationId xmlns:a16="http://schemas.microsoft.com/office/drawing/2014/main" id="{1728EE4B-8861-148C-792D-A80C8857267A}"/>
               </a:ext>
             </a:extLst>
           </p:cNvPr>
@@ -4699,7 +4699,7 @@
           <p:cNvPr id="75" name="pattern">
             <a:extLst>
               <a:ext uri="{FF2B5EF4-FFF2-40B4-BE49-F238E27FC236}">
-                <a16:creationId xmlns:a16="http://schemas.microsoft.com/office/drawing/2014/main" id="{61B7E474-6224-669F-E370-2A73C2EC3FAC}"/>
+                <a16:creationId xmlns:a16="http://schemas.microsoft.com/office/drawing/2014/main" id="{5B19B26A-FE20-CBB2-B291-B46667CBBC77}"/>
               </a:ext>
             </a:extLst>
           </p:cNvPr>
@@ -4755,7 +4755,7 @@
           <p:cNvPr id="76" name="pattern">
             <a:extLst>
               <a:ext uri="{FF2B5EF4-FFF2-40B4-BE49-F238E27FC236}">
-                <a16:creationId xmlns:a16="http://schemas.microsoft.com/office/drawing/2014/main" id="{92F0F832-BC49-3941-822C-2CADA5ECC9F9}"/>
+                <a16:creationId xmlns:a16="http://schemas.microsoft.com/office/drawing/2014/main" id="{68B785E6-73F2-7A01-2969-865D9814AB73}"/>
               </a:ext>
             </a:extLst>
           </p:cNvPr>
@@ -4811,7 +4811,7 @@
           <p:cNvPr id="77" name="pattern">
             <a:extLst>
               <a:ext uri="{FF2B5EF4-FFF2-40B4-BE49-F238E27FC236}">
-                <a16:creationId xmlns:a16="http://schemas.microsoft.com/office/drawing/2014/main" id="{EE917BC8-6510-7B6C-FD20-C5CB3A7CF4AB}"/>
+                <a16:creationId xmlns:a16="http://schemas.microsoft.com/office/drawing/2014/main" id="{B2C5932B-5E7D-CEC2-3C51-8AA577989895}"/>
               </a:ext>
             </a:extLst>
           </p:cNvPr>
@@ -4867,7 +4867,7 @@
           <p:cNvPr id="78" name="pattern">
             <a:extLst>
               <a:ext uri="{FF2B5EF4-FFF2-40B4-BE49-F238E27FC236}">
-                <a16:creationId xmlns:a16="http://schemas.microsoft.com/office/drawing/2014/main" id="{72BEF777-472F-7115-2F42-9E84077540D3}"/>
+                <a16:creationId xmlns:a16="http://schemas.microsoft.com/office/drawing/2014/main" id="{61F1EF8E-D19F-7D13-72BF-04CF95F06FD3}"/>
               </a:ext>
             </a:extLst>
           </p:cNvPr>
@@ -4923,7 +4923,7 @@
           <p:cNvPr id="79" name="pattern">
             <a:extLst>
               <a:ext uri="{FF2B5EF4-FFF2-40B4-BE49-F238E27FC236}">
-                <a16:creationId xmlns:a16="http://schemas.microsoft.com/office/drawing/2014/main" id="{34B4CBE9-D83E-3F9B-D236-24DFB7D671F2}"/>
+                <a16:creationId xmlns:a16="http://schemas.microsoft.com/office/drawing/2014/main" id="{1E215634-37A0-6E8A-CE75-CC3A2B558539}"/>
               </a:ext>
             </a:extLst>
           </p:cNvPr>
@@ -4979,7 +4979,7 @@
           <p:cNvPr id="80" name="pattern">
             <a:extLst>
               <a:ext uri="{FF2B5EF4-FFF2-40B4-BE49-F238E27FC236}">
-                <a16:creationId xmlns:a16="http://schemas.microsoft.com/office/drawing/2014/main" id="{48ADF610-6073-6903-5977-4FBE6251A551}"/>
+                <a16:creationId xmlns:a16="http://schemas.microsoft.com/office/drawing/2014/main" id="{A9A8E704-D50B-E5EE-89E1-594D7162F4F7}"/>
               </a:ext>
             </a:extLst>
           </p:cNvPr>
@@ -5035,7 +5035,7 @@
           <p:cNvPr id="81" name="pattern">
             <a:extLst>
               <a:ext uri="{FF2B5EF4-FFF2-40B4-BE49-F238E27FC236}">
-                <a16:creationId xmlns:a16="http://schemas.microsoft.com/office/drawing/2014/main" id="{AC73D0FD-120A-9371-D326-BEA04D6F810F}"/>
+                <a16:creationId xmlns:a16="http://schemas.microsoft.com/office/drawing/2014/main" id="{038ED6F3-3BD7-0574-6E03-CEECA015C31F}"/>
               </a:ext>
             </a:extLst>
           </p:cNvPr>
@@ -5091,7 +5091,7 @@
           <p:cNvPr id="82" name="pattern">
             <a:extLst>
               <a:ext uri="{FF2B5EF4-FFF2-40B4-BE49-F238E27FC236}">
-                <a16:creationId xmlns:a16="http://schemas.microsoft.com/office/drawing/2014/main" id="{DB4BF420-0F9C-B929-2FD1-D248D8132817}"/>
+                <a16:creationId xmlns:a16="http://schemas.microsoft.com/office/drawing/2014/main" id="{530F4A5B-48E8-6FCB-C2A2-0C935E8FFF5F}"/>
               </a:ext>
             </a:extLst>
           </p:cNvPr>
@@ -5147,7 +5147,7 @@
           <p:cNvPr id="83" name="pattern">
             <a:extLst>
               <a:ext uri="{FF2B5EF4-FFF2-40B4-BE49-F238E27FC236}">
-                <a16:creationId xmlns:a16="http://schemas.microsoft.com/office/drawing/2014/main" id="{8215C3D7-E616-B09E-2AC9-5C7CB8CF75E8}"/>
+                <a16:creationId xmlns:a16="http://schemas.microsoft.com/office/drawing/2014/main" id="{52E5AED6-589F-69C4-55CA-89536BC8670F}"/>
               </a:ext>
             </a:extLst>
           </p:cNvPr>
@@ -5203,7 +5203,7 @@
           <p:cNvPr id="84" name="pattern">
             <a:extLst>
               <a:ext uri="{FF2B5EF4-FFF2-40B4-BE49-F238E27FC236}">
-                <a16:creationId xmlns:a16="http://schemas.microsoft.com/office/drawing/2014/main" id="{9B4290F4-8AC4-E974-2F22-613A77C393BD}"/>
+                <a16:creationId xmlns:a16="http://schemas.microsoft.com/office/drawing/2014/main" id="{D51BBE2A-1522-3187-7DC7-E9FE49F1B248}"/>
               </a:ext>
             </a:extLst>
           </p:cNvPr>
@@ -5259,7 +5259,7 @@
           <p:cNvPr id="85" name="pattern">
             <a:extLst>
               <a:ext uri="{FF2B5EF4-FFF2-40B4-BE49-F238E27FC236}">
-                <a16:creationId xmlns:a16="http://schemas.microsoft.com/office/drawing/2014/main" id="{23430E72-59AE-3305-F42C-071A03153332}"/>
+                <a16:creationId xmlns:a16="http://schemas.microsoft.com/office/drawing/2014/main" id="{8B343D5A-781C-BAA9-0EF9-B541D20E4658}"/>
               </a:ext>
             </a:extLst>
           </p:cNvPr>
@@ -5315,7 +5315,7 @@
           <p:cNvPr id="86" name="pattern">
             <a:extLst>
               <a:ext uri="{FF2B5EF4-FFF2-40B4-BE49-F238E27FC236}">
-                <a16:creationId xmlns:a16="http://schemas.microsoft.com/office/drawing/2014/main" id="{04BF2D42-2C7E-48B4-6415-40B4ED11325E}"/>
+                <a16:creationId xmlns:a16="http://schemas.microsoft.com/office/drawing/2014/main" id="{75FA0B61-E40A-F75F-FC57-DD5499A6A296}"/>
               </a:ext>
             </a:extLst>
           </p:cNvPr>
@@ -5371,7 +5371,7 @@
           <p:cNvPr id="87" name="pattern">
             <a:extLst>
               <a:ext uri="{FF2B5EF4-FFF2-40B4-BE49-F238E27FC236}">
-                <a16:creationId xmlns:a16="http://schemas.microsoft.com/office/drawing/2014/main" id="{F94B58A3-44E4-8C69-F5D1-BB7C910C9752}"/>
+                <a16:creationId xmlns:a16="http://schemas.microsoft.com/office/drawing/2014/main" id="{1B6BFC54-4D5A-E550-5CF4-C95BE519BF96}"/>
               </a:ext>
             </a:extLst>
           </p:cNvPr>
@@ -5427,7 +5427,7 @@
           <p:cNvPr id="88" name="pattern">
             <a:extLst>
               <a:ext uri="{FF2B5EF4-FFF2-40B4-BE49-F238E27FC236}">
-                <a16:creationId xmlns:a16="http://schemas.microsoft.com/office/drawing/2014/main" id="{27A082AB-9DEB-26DA-7B15-806D96D5B007}"/>
+                <a16:creationId xmlns:a16="http://schemas.microsoft.com/office/drawing/2014/main" id="{12FB7757-40EE-3F8A-E75C-F5C2AA5A2988}"/>
               </a:ext>
             </a:extLst>
           </p:cNvPr>
@@ -5483,7 +5483,7 @@
           <p:cNvPr id="89" name="pattern">
             <a:extLst>
               <a:ext uri="{FF2B5EF4-FFF2-40B4-BE49-F238E27FC236}">
-                <a16:creationId xmlns:a16="http://schemas.microsoft.com/office/drawing/2014/main" id="{3971B339-2790-341C-EE6F-E2C6261AFEBA}"/>
+                <a16:creationId xmlns:a16="http://schemas.microsoft.com/office/drawing/2014/main" id="{4CA87FD4-14F4-958C-8C82-DFC7BD2C18A1}"/>
               </a:ext>
             </a:extLst>
           </p:cNvPr>
@@ -5539,7 +5539,7 @@
           <p:cNvPr id="90" name="pattern">
             <a:extLst>
               <a:ext uri="{FF2B5EF4-FFF2-40B4-BE49-F238E27FC236}">
-                <a16:creationId xmlns:a16="http://schemas.microsoft.com/office/drawing/2014/main" id="{F6A25B6C-DB4F-B8D8-FE2D-592372A3994F}"/>
+                <a16:creationId xmlns:a16="http://schemas.microsoft.com/office/drawing/2014/main" id="{FA853841-C7EA-A167-171C-61CB7DE0B397}"/>
               </a:ext>
             </a:extLst>
           </p:cNvPr>
@@ -5595,7 +5595,7 @@
           <p:cNvPr id="91" name="pattern">
             <a:extLst>
               <a:ext uri="{FF2B5EF4-FFF2-40B4-BE49-F238E27FC236}">
-                <a16:creationId xmlns:a16="http://schemas.microsoft.com/office/drawing/2014/main" id="{0C415FCA-9F8A-FFEB-35D8-748C0AFB0B25}"/>
+                <a16:creationId xmlns:a16="http://schemas.microsoft.com/office/drawing/2014/main" id="{0A02AEBB-F77F-5508-A6A2-0B82E8D2C6C0}"/>
               </a:ext>
             </a:extLst>
           </p:cNvPr>
@@ -5651,7 +5651,7 @@
           <p:cNvPr id="92" name="pattern">
             <a:extLst>
               <a:ext uri="{FF2B5EF4-FFF2-40B4-BE49-F238E27FC236}">
-                <a16:creationId xmlns:a16="http://schemas.microsoft.com/office/drawing/2014/main" id="{890FB4EE-0E3F-1D58-2670-D5A15704BFE5}"/>
+                <a16:creationId xmlns:a16="http://schemas.microsoft.com/office/drawing/2014/main" id="{857ED371-BC21-8059-FC43-42F45CCED697}"/>
               </a:ext>
             </a:extLst>
           </p:cNvPr>
@@ -5707,7 +5707,7 @@
           <p:cNvPr id="93" name="pattern">
             <a:extLst>
               <a:ext uri="{FF2B5EF4-FFF2-40B4-BE49-F238E27FC236}">
-                <a16:creationId xmlns:a16="http://schemas.microsoft.com/office/drawing/2014/main" id="{F5494628-25E1-D4D8-5E4F-85B3801AD0E9}"/>
+                <a16:creationId xmlns:a16="http://schemas.microsoft.com/office/drawing/2014/main" id="{4A023D98-205F-01F1-F9B4-E2CFB35A6026}"/>
               </a:ext>
             </a:extLst>
           </p:cNvPr>
@@ -5763,7 +5763,7 @@
           <p:cNvPr id="94" name="pattern">
             <a:extLst>
               <a:ext uri="{FF2B5EF4-FFF2-40B4-BE49-F238E27FC236}">
-                <a16:creationId xmlns:a16="http://schemas.microsoft.com/office/drawing/2014/main" id="{5EF6B17C-43DB-BC97-BB43-033B14F40349}"/>
+                <a16:creationId xmlns:a16="http://schemas.microsoft.com/office/drawing/2014/main" id="{6EBF5745-A0DC-C814-ABAD-29934CBE5BA1}"/>
               </a:ext>
             </a:extLst>
           </p:cNvPr>
@@ -5819,7 +5819,7 @@
           <p:cNvPr id="95" name="pattern">
             <a:extLst>
               <a:ext uri="{FF2B5EF4-FFF2-40B4-BE49-F238E27FC236}">
-                <a16:creationId xmlns:a16="http://schemas.microsoft.com/office/drawing/2014/main" id="{2B5C3A20-2330-99F8-523F-B04E23264F11}"/>
+                <a16:creationId xmlns:a16="http://schemas.microsoft.com/office/drawing/2014/main" id="{D6C7AD6A-D429-B18A-45ED-35777895041A}"/>
               </a:ext>
             </a:extLst>
           </p:cNvPr>
@@ -5875,7 +5875,7 @@
           <p:cNvPr id="96" name="pattern">
             <a:extLst>
               <a:ext uri="{FF2B5EF4-FFF2-40B4-BE49-F238E27FC236}">
-                <a16:creationId xmlns:a16="http://schemas.microsoft.com/office/drawing/2014/main" id="{6525B3D5-8F46-3C2F-5E5A-A6E96C7CBAC5}"/>
+                <a16:creationId xmlns:a16="http://schemas.microsoft.com/office/drawing/2014/main" id="{D950BF47-D14E-DF40-5FBD-65D31E14A084}"/>
               </a:ext>
             </a:extLst>
           </p:cNvPr>
@@ -5931,7 +5931,7 @@
           <p:cNvPr id="97" name="pattern">
             <a:extLst>
               <a:ext uri="{FF2B5EF4-FFF2-40B4-BE49-F238E27FC236}">
-                <a16:creationId xmlns:a16="http://schemas.microsoft.com/office/drawing/2014/main" id="{488FDFD7-B261-337F-53C2-BB0FAF1B2106}"/>
+                <a16:creationId xmlns:a16="http://schemas.microsoft.com/office/drawing/2014/main" id="{2247C44D-F356-92D1-695B-7864D34EEA46}"/>
               </a:ext>
             </a:extLst>
           </p:cNvPr>
@@ -5987,7 +5987,7 @@
           <p:cNvPr id="98" name="pattern">
             <a:extLst>
               <a:ext uri="{FF2B5EF4-FFF2-40B4-BE49-F238E27FC236}">
-                <a16:creationId xmlns:a16="http://schemas.microsoft.com/office/drawing/2014/main" id="{AAFDEBA9-BE09-488B-553A-64C05EBF18BF}"/>
+                <a16:creationId xmlns:a16="http://schemas.microsoft.com/office/drawing/2014/main" id="{CB1013F1-D8DC-4BBD-0DBD-BCD86EB65B0C}"/>
               </a:ext>
             </a:extLst>
           </p:cNvPr>
@@ -6043,7 +6043,7 @@
           <p:cNvPr id="99" name="pattern">
             <a:extLst>
               <a:ext uri="{FF2B5EF4-FFF2-40B4-BE49-F238E27FC236}">
-                <a16:creationId xmlns:a16="http://schemas.microsoft.com/office/drawing/2014/main" id="{B798CA99-80D8-B721-29DB-B0B79996E7BC}"/>
+                <a16:creationId xmlns:a16="http://schemas.microsoft.com/office/drawing/2014/main" id="{FC6A9D96-6E06-B5C9-E7C9-3C353824FECC}"/>
               </a:ext>
             </a:extLst>
           </p:cNvPr>
@@ -6099,7 +6099,7 @@
           <p:cNvPr id="100" name="pattern">
             <a:extLst>
               <a:ext uri="{FF2B5EF4-FFF2-40B4-BE49-F238E27FC236}">
-                <a16:creationId xmlns:a16="http://schemas.microsoft.com/office/drawing/2014/main" id="{42ED91E2-54BA-9026-6F35-EE893A2FBE89}"/>
+                <a16:creationId xmlns:a16="http://schemas.microsoft.com/office/drawing/2014/main" id="{DDCE6FD4-2475-C5E8-CFBB-0E6841927DCC}"/>
               </a:ext>
             </a:extLst>
           </p:cNvPr>
@@ -6155,7 +6155,7 @@
           <p:cNvPr id="101" name="pattern">
             <a:extLst>
               <a:ext uri="{FF2B5EF4-FFF2-40B4-BE49-F238E27FC236}">
-                <a16:creationId xmlns:a16="http://schemas.microsoft.com/office/drawing/2014/main" id="{29A904A8-CA70-E30F-83C3-AC877536A055}"/>
+                <a16:creationId xmlns:a16="http://schemas.microsoft.com/office/drawing/2014/main" id="{3BF927BB-BBCC-5CEF-0E49-E8DFD480FE9E}"/>
               </a:ext>
             </a:extLst>
           </p:cNvPr>
@@ -6211,7 +6211,7 @@
           <p:cNvPr id="102" name="pattern">
             <a:extLst>
               <a:ext uri="{FF2B5EF4-FFF2-40B4-BE49-F238E27FC236}">
-                <a16:creationId xmlns:a16="http://schemas.microsoft.com/office/drawing/2014/main" id="{3E196439-0136-73A9-5902-E5457E768126}"/>
+                <a16:creationId xmlns:a16="http://schemas.microsoft.com/office/drawing/2014/main" id="{66588D37-0C13-7593-B7F5-E8FD18CCE7F9}"/>
               </a:ext>
             </a:extLst>
           </p:cNvPr>
@@ -6267,7 +6267,7 @@
           <p:cNvPr id="103" name="pattern">
             <a:extLst>
               <a:ext uri="{FF2B5EF4-FFF2-40B4-BE49-F238E27FC236}">
-                <a16:creationId xmlns:a16="http://schemas.microsoft.com/office/drawing/2014/main" id="{BE2885A5-9081-E1A8-A51F-51D90565BD0E}"/>
+                <a16:creationId xmlns:a16="http://schemas.microsoft.com/office/drawing/2014/main" id="{49B186C9-7D7D-C759-368A-E55307C9DF54}"/>
               </a:ext>
             </a:extLst>
           </p:cNvPr>
@@ -6323,7 +6323,7 @@
           <p:cNvPr id="104" name="pattern">
             <a:extLst>
               <a:ext uri="{FF2B5EF4-FFF2-40B4-BE49-F238E27FC236}">
-                <a16:creationId xmlns:a16="http://schemas.microsoft.com/office/drawing/2014/main" id="{853CDD19-17B5-B161-997E-D6FCA6ADB71A}"/>
+                <a16:creationId xmlns:a16="http://schemas.microsoft.com/office/drawing/2014/main" id="{812B62BC-7886-9A11-5789-4A133FD87894}"/>
               </a:ext>
             </a:extLst>
           </p:cNvPr>
@@ -6379,7 +6379,7 @@
           <p:cNvPr id="105" name="pattern">
             <a:extLst>
               <a:ext uri="{FF2B5EF4-FFF2-40B4-BE49-F238E27FC236}">
-                <a16:creationId xmlns:a16="http://schemas.microsoft.com/office/drawing/2014/main" id="{754D836D-47D7-D3D4-5459-CA77A6BC3751}"/>
+                <a16:creationId xmlns:a16="http://schemas.microsoft.com/office/drawing/2014/main" id="{50A21FFF-1260-2615-6544-C6237A65FE57}"/>
               </a:ext>
             </a:extLst>
           </p:cNvPr>
@@ -6435,7 +6435,7 @@
           <p:cNvPr id="106" name="pattern">
             <a:extLst>
               <a:ext uri="{FF2B5EF4-FFF2-40B4-BE49-F238E27FC236}">
-                <a16:creationId xmlns:a16="http://schemas.microsoft.com/office/drawing/2014/main" id="{6C614708-4369-8620-E416-DA8C2E92993B}"/>
+                <a16:creationId xmlns:a16="http://schemas.microsoft.com/office/drawing/2014/main" id="{C6F41388-70DE-CCCC-F552-C83DE087C3EC}"/>
               </a:ext>
             </a:extLst>
           </p:cNvPr>
@@ -6491,7 +6491,7 @@
           <p:cNvPr id="107" name="pattern">
             <a:extLst>
               <a:ext uri="{FF2B5EF4-FFF2-40B4-BE49-F238E27FC236}">
-                <a16:creationId xmlns:a16="http://schemas.microsoft.com/office/drawing/2014/main" id="{D4637C8E-FCE3-C181-A76F-2B1050625464}"/>
+                <a16:creationId xmlns:a16="http://schemas.microsoft.com/office/drawing/2014/main" id="{19B54BF4-8FCA-F269-D234-A6BE3D532051}"/>
               </a:ext>
             </a:extLst>
           </p:cNvPr>
@@ -6547,7 +6547,7 @@
           <p:cNvPr id="108" name="pattern">
             <a:extLst>
               <a:ext uri="{FF2B5EF4-FFF2-40B4-BE49-F238E27FC236}">
-                <a16:creationId xmlns:a16="http://schemas.microsoft.com/office/drawing/2014/main" id="{175EE552-A1C1-6B88-5B07-4196A500A317}"/>
+                <a16:creationId xmlns:a16="http://schemas.microsoft.com/office/drawing/2014/main" id="{4B1D3F61-0F3A-E7EB-9BAB-A4A26281ABDB}"/>
               </a:ext>
             </a:extLst>
           </p:cNvPr>
@@ -6603,7 +6603,7 @@
           <p:cNvPr id="109" name="pattern">
             <a:extLst>
               <a:ext uri="{FF2B5EF4-FFF2-40B4-BE49-F238E27FC236}">
-                <a16:creationId xmlns:a16="http://schemas.microsoft.com/office/drawing/2014/main" id="{C5984769-C1FF-488D-4DA9-3780D67DB716}"/>
+                <a16:creationId xmlns:a16="http://schemas.microsoft.com/office/drawing/2014/main" id="{2007F4AD-A9E5-A0B9-8725-F29B93939DA5}"/>
               </a:ext>
             </a:extLst>
           </p:cNvPr>
@@ -6659,7 +6659,7 @@
           <p:cNvPr id="110" name="pattern">
             <a:extLst>
               <a:ext uri="{FF2B5EF4-FFF2-40B4-BE49-F238E27FC236}">
-                <a16:creationId xmlns:a16="http://schemas.microsoft.com/office/drawing/2014/main" id="{5AB23DB1-B603-8ED2-DFDC-0C41FF2426BE}"/>
+                <a16:creationId xmlns:a16="http://schemas.microsoft.com/office/drawing/2014/main" id="{5CEFE3F8-0D5C-6AA9-9CA8-9B91E13F8EE9}"/>
               </a:ext>
             </a:extLst>
           </p:cNvPr>
@@ -6715,7 +6715,7 @@
           <p:cNvPr id="111" name="pattern">
             <a:extLst>
               <a:ext uri="{FF2B5EF4-FFF2-40B4-BE49-F238E27FC236}">
-                <a16:creationId xmlns:a16="http://schemas.microsoft.com/office/drawing/2014/main" id="{B329BDE9-778A-0A18-1967-27985A5E4960}"/>
+                <a16:creationId xmlns:a16="http://schemas.microsoft.com/office/drawing/2014/main" id="{55CBA628-B58D-B9E5-8C2E-6B7BA4D5FD58}"/>
               </a:ext>
             </a:extLst>
           </p:cNvPr>
@@ -6771,7 +6771,7 @@
           <p:cNvPr id="112" name="pattern">
             <a:extLst>
               <a:ext uri="{FF2B5EF4-FFF2-40B4-BE49-F238E27FC236}">
-                <a16:creationId xmlns:a16="http://schemas.microsoft.com/office/drawing/2014/main" id="{A7DCB7B2-B516-2EF2-9121-133FBCCCB3D2}"/>
+                <a16:creationId xmlns:a16="http://schemas.microsoft.com/office/drawing/2014/main" id="{40F8FF98-4385-BF6C-85D9-837CEE514F4B}"/>
               </a:ext>
             </a:extLst>
           </p:cNvPr>
@@ -6827,7 +6827,7 @@
           <p:cNvPr id="113" name="pattern">
             <a:extLst>
               <a:ext uri="{FF2B5EF4-FFF2-40B4-BE49-F238E27FC236}">
-                <a16:creationId xmlns:a16="http://schemas.microsoft.com/office/drawing/2014/main" id="{9A6D9824-A88A-9778-F401-15E3D2681B3F}"/>
+                <a16:creationId xmlns:a16="http://schemas.microsoft.com/office/drawing/2014/main" id="{57E855FD-6563-A85D-1292-5CD919786E6B}"/>
               </a:ext>
             </a:extLst>
           </p:cNvPr>
@@ -6883,7 +6883,7 @@
           <p:cNvPr id="114" name="pattern">
             <a:extLst>
               <a:ext uri="{FF2B5EF4-FFF2-40B4-BE49-F238E27FC236}">
-                <a16:creationId xmlns:a16="http://schemas.microsoft.com/office/drawing/2014/main" id="{AC657B6B-9F50-9DD9-4BDF-5547FB746C17}"/>
+                <a16:creationId xmlns:a16="http://schemas.microsoft.com/office/drawing/2014/main" id="{80C21E16-6660-B307-8354-2DEBE7C0DFDB}"/>
               </a:ext>
             </a:extLst>
           </p:cNvPr>
@@ -6939,7 +6939,7 @@
           <p:cNvPr id="115" name="pattern">
             <a:extLst>
               <a:ext uri="{FF2B5EF4-FFF2-40B4-BE49-F238E27FC236}">
-                <a16:creationId xmlns:a16="http://schemas.microsoft.com/office/drawing/2014/main" id="{D62B2F4A-A7B8-7E85-5C3C-972AE943ED23}"/>
+                <a16:creationId xmlns:a16="http://schemas.microsoft.com/office/drawing/2014/main" id="{EBB6FE3D-5023-B1BE-D371-2AE45D1708B0}"/>
               </a:ext>
             </a:extLst>
           </p:cNvPr>
@@ -6995,7 +6995,7 @@
           <p:cNvPr id="116" name="pattern">
             <a:extLst>
               <a:ext uri="{FF2B5EF4-FFF2-40B4-BE49-F238E27FC236}">
-                <a16:creationId xmlns:a16="http://schemas.microsoft.com/office/drawing/2014/main" id="{6AA39709-315C-B16D-7D17-DF00E3181AB0}"/>
+                <a16:creationId xmlns:a16="http://schemas.microsoft.com/office/drawing/2014/main" id="{348E9D5B-865D-3853-9126-DD89694AA049}"/>
               </a:ext>
             </a:extLst>
           </p:cNvPr>
@@ -7051,7 +7051,7 @@
           <p:cNvPr id="117" name="pattern">
             <a:extLst>
               <a:ext uri="{FF2B5EF4-FFF2-40B4-BE49-F238E27FC236}">
-                <a16:creationId xmlns:a16="http://schemas.microsoft.com/office/drawing/2014/main" id="{9EB284C2-0859-E0F4-5437-C42F22F0029D}"/>
+                <a16:creationId xmlns:a16="http://schemas.microsoft.com/office/drawing/2014/main" id="{7AFB9538-A7AE-9E35-9FE6-61F43375BC5D}"/>
               </a:ext>
             </a:extLst>
           </p:cNvPr>
@@ -7107,7 +7107,7 @@
           <p:cNvPr id="118" name="pattern">
             <a:extLst>
               <a:ext uri="{FF2B5EF4-FFF2-40B4-BE49-F238E27FC236}">
-                <a16:creationId xmlns:a16="http://schemas.microsoft.com/office/drawing/2014/main" id="{4D9D65F0-587E-B5A5-1809-F921A1F7AA04}"/>
+                <a16:creationId xmlns:a16="http://schemas.microsoft.com/office/drawing/2014/main" id="{409149B6-1699-0F5C-3F21-3236F1A020B1}"/>
               </a:ext>
             </a:extLst>
           </p:cNvPr>
@@ -7163,7 +7163,7 @@
           <p:cNvPr id="119" name="pattern">
             <a:extLst>
               <a:ext uri="{FF2B5EF4-FFF2-40B4-BE49-F238E27FC236}">
-                <a16:creationId xmlns:a16="http://schemas.microsoft.com/office/drawing/2014/main" id="{C1CCFE3B-CF8D-4E0B-AF8B-5EA72FBEEE62}"/>
+                <a16:creationId xmlns:a16="http://schemas.microsoft.com/office/drawing/2014/main" id="{BBB805BD-5ACE-169E-D902-E3631E771D6D}"/>
               </a:ext>
             </a:extLst>
           </p:cNvPr>
@@ -7219,7 +7219,7 @@
           <p:cNvPr id="120" name="pattern">
             <a:extLst>
               <a:ext uri="{FF2B5EF4-FFF2-40B4-BE49-F238E27FC236}">
-                <a16:creationId xmlns:a16="http://schemas.microsoft.com/office/drawing/2014/main" id="{BB38F073-3155-9827-161C-75A4D6D525AE}"/>
+                <a16:creationId xmlns:a16="http://schemas.microsoft.com/office/drawing/2014/main" id="{0249D732-E2D9-BE82-C326-33FA4BFDF09A}"/>
               </a:ext>
             </a:extLst>
           </p:cNvPr>
@@ -7275,7 +7275,7 @@
           <p:cNvPr id="121" name="pattern">
             <a:extLst>
               <a:ext uri="{FF2B5EF4-FFF2-40B4-BE49-F238E27FC236}">
-                <a16:creationId xmlns:a16="http://schemas.microsoft.com/office/drawing/2014/main" id="{FE07A7B9-9FF4-99E1-DF5D-EE7BE8FC65F5}"/>
+                <a16:creationId xmlns:a16="http://schemas.microsoft.com/office/drawing/2014/main" id="{AC5C6A3A-C3E7-D473-30A2-DA07E6643ED8}"/>
               </a:ext>
             </a:extLst>
           </p:cNvPr>
@@ -7331,7 +7331,7 @@
           <p:cNvPr id="122" name="pattern">
             <a:extLst>
               <a:ext uri="{FF2B5EF4-FFF2-40B4-BE49-F238E27FC236}">
-                <a16:creationId xmlns:a16="http://schemas.microsoft.com/office/drawing/2014/main" id="{09644CDA-259E-E720-0DC4-1AFEE743C680}"/>
+                <a16:creationId xmlns:a16="http://schemas.microsoft.com/office/drawing/2014/main" id="{B50DE9A5-72CE-6C73-F744-FEE7FAF25B41}"/>
               </a:ext>
             </a:extLst>
           </p:cNvPr>
@@ -7387,7 +7387,7 @@
           <p:cNvPr id="123" name="pattern">
             <a:extLst>
               <a:ext uri="{FF2B5EF4-FFF2-40B4-BE49-F238E27FC236}">
-                <a16:creationId xmlns:a16="http://schemas.microsoft.com/office/drawing/2014/main" id="{9F5198D2-4243-8E15-9D18-F190C84850C9}"/>
+                <a16:creationId xmlns:a16="http://schemas.microsoft.com/office/drawing/2014/main" id="{55D3D598-6261-92B5-DBA3-7E958A1400C2}"/>
               </a:ext>
             </a:extLst>
           </p:cNvPr>
@@ -7443,7 +7443,7 @@
           <p:cNvPr id="124" name="pattern">
             <a:extLst>
               <a:ext uri="{FF2B5EF4-FFF2-40B4-BE49-F238E27FC236}">
-                <a16:creationId xmlns:a16="http://schemas.microsoft.com/office/drawing/2014/main" id="{D8966DA5-1914-4A0C-1B17-D626E73EEC8F}"/>
+                <a16:creationId xmlns:a16="http://schemas.microsoft.com/office/drawing/2014/main" id="{2812FF9F-CAC4-DF45-4C82-9DA1C1B46A37}"/>
               </a:ext>
             </a:extLst>
           </p:cNvPr>
@@ -7499,7 +7499,7 @@
           <p:cNvPr id="125" name="pattern">
             <a:extLst>
               <a:ext uri="{FF2B5EF4-FFF2-40B4-BE49-F238E27FC236}">
-                <a16:creationId xmlns:a16="http://schemas.microsoft.com/office/drawing/2014/main" id="{B535119A-F1F9-5F72-A727-69108C5950D1}"/>
+                <a16:creationId xmlns:a16="http://schemas.microsoft.com/office/drawing/2014/main" id="{BA78407F-BECD-17CC-58EB-DCAC1ABCDB34}"/>
               </a:ext>
             </a:extLst>
           </p:cNvPr>
@@ -7555,7 +7555,7 @@
           <p:cNvPr id="126" name="pattern">
             <a:extLst>
               <a:ext uri="{FF2B5EF4-FFF2-40B4-BE49-F238E27FC236}">
-                <a16:creationId xmlns:a16="http://schemas.microsoft.com/office/drawing/2014/main" id="{A3AF5EA3-EC42-F7A8-F5EF-AB0B22CC29CB}"/>
+                <a16:creationId xmlns:a16="http://schemas.microsoft.com/office/drawing/2014/main" id="{2F42A7D9-E27C-CC6A-0A0B-7D1DEE003E7A}"/>
               </a:ext>
             </a:extLst>
           </p:cNvPr>
@@ -7611,7 +7611,7 @@
           <p:cNvPr id="127" name="pattern">
             <a:extLst>
               <a:ext uri="{FF2B5EF4-FFF2-40B4-BE49-F238E27FC236}">
-                <a16:creationId xmlns:a16="http://schemas.microsoft.com/office/drawing/2014/main" id="{2D8740A3-2595-9F84-737A-4477BD63C900}"/>
+                <a16:creationId xmlns:a16="http://schemas.microsoft.com/office/drawing/2014/main" id="{476FD1FD-EE2C-971C-BC0B-360329BE2544}"/>
               </a:ext>
             </a:extLst>
           </p:cNvPr>
@@ -7667,7 +7667,7 @@
           <p:cNvPr id="128" name="pattern">
             <a:extLst>
               <a:ext uri="{FF2B5EF4-FFF2-40B4-BE49-F238E27FC236}">
-                <a16:creationId xmlns:a16="http://schemas.microsoft.com/office/drawing/2014/main" id="{79D1F6E5-FDC0-55B1-1E7A-A12CDE6611E1}"/>
+                <a16:creationId xmlns:a16="http://schemas.microsoft.com/office/drawing/2014/main" id="{52D2155C-53F3-A2E0-572B-9749A1AAB593}"/>
               </a:ext>
             </a:extLst>
           </p:cNvPr>
@@ -7723,7 +7723,7 @@
           <p:cNvPr id="129" name="pattern">
             <a:extLst>
               <a:ext uri="{FF2B5EF4-FFF2-40B4-BE49-F238E27FC236}">
-                <a16:creationId xmlns:a16="http://schemas.microsoft.com/office/drawing/2014/main" id="{040E9217-3ACA-B981-3C2E-DD41746B7F64}"/>
+                <a16:creationId xmlns:a16="http://schemas.microsoft.com/office/drawing/2014/main" id="{E734070C-A54D-9A4B-F4FA-DAB67E67147B}"/>
               </a:ext>
             </a:extLst>
           </p:cNvPr>
@@ -7779,7 +7779,7 @@
           <p:cNvPr id="130" name="pattern">
             <a:extLst>
               <a:ext uri="{FF2B5EF4-FFF2-40B4-BE49-F238E27FC236}">
-                <a16:creationId xmlns:a16="http://schemas.microsoft.com/office/drawing/2014/main" id="{B2675922-C1A3-CD1D-45B7-83416A552D13}"/>
+                <a16:creationId xmlns:a16="http://schemas.microsoft.com/office/drawing/2014/main" id="{2A827C0F-E0B7-1861-946D-9F46BF489969}"/>
               </a:ext>
             </a:extLst>
           </p:cNvPr>
@@ -7835,7 +7835,7 @@
           <p:cNvPr id="131" name="pattern">
             <a:extLst>
               <a:ext uri="{FF2B5EF4-FFF2-40B4-BE49-F238E27FC236}">
-                <a16:creationId xmlns:a16="http://schemas.microsoft.com/office/drawing/2014/main" id="{3FA5307D-7082-B713-FDAC-D4453DBCCDE8}"/>
+                <a16:creationId xmlns:a16="http://schemas.microsoft.com/office/drawing/2014/main" id="{B83A3A56-79CA-58EA-2A91-0070B1504ED4}"/>
               </a:ext>
             </a:extLst>
           </p:cNvPr>
@@ -7891,7 +7891,7 @@
           <p:cNvPr id="132" name="pattern">
             <a:extLst>
               <a:ext uri="{FF2B5EF4-FFF2-40B4-BE49-F238E27FC236}">
-                <a16:creationId xmlns:a16="http://schemas.microsoft.com/office/drawing/2014/main" id="{BA4B5286-5DB5-B7B0-285A-102794A1792E}"/>
+                <a16:creationId xmlns:a16="http://schemas.microsoft.com/office/drawing/2014/main" id="{9BFC0019-EC13-EC38-5F6C-C0A47D239FB6}"/>
               </a:ext>
             </a:extLst>
           </p:cNvPr>
@@ -7947,7 +7947,7 @@
           <p:cNvPr id="133" name="pattern">
             <a:extLst>
               <a:ext uri="{FF2B5EF4-FFF2-40B4-BE49-F238E27FC236}">
-                <a16:creationId xmlns:a16="http://schemas.microsoft.com/office/drawing/2014/main" id="{1D6250CE-89D7-49F8-B6E1-084C78A99F67}"/>
+                <a16:creationId xmlns:a16="http://schemas.microsoft.com/office/drawing/2014/main" id="{556CFB9C-AA26-4F23-7183-95E18EAE6C7E}"/>
               </a:ext>
             </a:extLst>
           </p:cNvPr>
@@ -8003,7 +8003,7 @@
           <p:cNvPr id="134" name="pattern">
             <a:extLst>
               <a:ext uri="{FF2B5EF4-FFF2-40B4-BE49-F238E27FC236}">
-                <a16:creationId xmlns:a16="http://schemas.microsoft.com/office/drawing/2014/main" id="{89D4C97E-3127-AD40-3EF3-9ADE47D7C448}"/>
+                <a16:creationId xmlns:a16="http://schemas.microsoft.com/office/drawing/2014/main" id="{F3E4EDDD-24D4-08B7-D0D6-975DF8B10F22}"/>
               </a:ext>
             </a:extLst>
           </p:cNvPr>
@@ -8059,7 +8059,7 @@
           <p:cNvPr id="135" name="pattern">
             <a:extLst>
               <a:ext uri="{FF2B5EF4-FFF2-40B4-BE49-F238E27FC236}">
-                <a16:creationId xmlns:a16="http://schemas.microsoft.com/office/drawing/2014/main" id="{26B25DAC-849F-80C4-E705-BA021B134989}"/>
+                <a16:creationId xmlns:a16="http://schemas.microsoft.com/office/drawing/2014/main" id="{60CACDC4-5F49-01B4-22C9-B239CC2E513A}"/>
               </a:ext>
             </a:extLst>
           </p:cNvPr>
@@ -8113,7 +8113,7 @@
     </p:spTree>
     <p:extLst>
       <p:ext uri="{BB962C8B-B14F-4D97-AF65-F5344CB8AC3E}">
-        <p14:creationId xmlns:p14="http://schemas.microsoft.com/office/powerpoint/2010/main" val="1806981082"/>
+        <p14:creationId xmlns:p14="http://schemas.microsoft.com/office/powerpoint/2010/main" val="3372789891"/>
       </p:ext>
     </p:extLst>
   </p:cSld>
@@ -8182,7 +8182,7 @@
           <a:bodyPr/>
           <a:lstStyle/>
           <a:p>
-            <a:fld id="{DAA401AF-96B9-4795-80AC-645028D14909}" type="datetimeFigureOut">
+            <a:fld id="{C108DDE1-F741-4F4F-A7D2-FBD0359B97CD}" type="datetimeFigureOut">
               <a:rPr lang="en-US" smtClean="0"/>
               <a:t>10/3/2026</a:t>
             </a:fld>
@@ -8224,7 +8224,7 @@
           <a:bodyPr/>
           <a:lstStyle/>
           <a:p>
-            <a:fld id="{EB0BFBF9-3444-4A23-A691-88293893E3E4}" type="slidenum">
+            <a:fld id="{D07356AB-B086-4690-8078-803F810DAE76}" type="slidenum">
               <a:rPr lang="en-US" smtClean="0"/>
               <a:t>‹#›</a:t>
             </a:fld>
@@ -8237,7 +8237,7 @@
           <p:cNvPr id="6" name="item_1_title">
             <a:extLst>
               <a:ext uri="{FF2B5EF4-FFF2-40B4-BE49-F238E27FC236}">
-                <a16:creationId xmlns:a16="http://schemas.microsoft.com/office/drawing/2014/main" id="{3123F04F-DBAD-2C28-1FB2-B6310085C657}"/>
+                <a16:creationId xmlns:a16="http://schemas.microsoft.com/office/drawing/2014/main" id="{7B728075-A05A-0908-4DAE-15676F9716B8}"/>
               </a:ext>
             </a:extLst>
           </p:cNvPr>
@@ -8265,7 +8265,7 @@
               </a:spcBef>
               <a:buFontTx/>
               <a:buNone/>
-              <a:defRPr sz="2200" b="1">
+              <a:defRPr sz="2000" b="1">
                 <a:solidFill>
                   <a:schemeClr val="accent1"/>
                 </a:solidFill>
@@ -8287,7 +8287,7 @@
           <p:cNvPr id="7" name="item_1">
             <a:extLst>
               <a:ext uri="{FF2B5EF4-FFF2-40B4-BE49-F238E27FC236}">
-                <a16:creationId xmlns:a16="http://schemas.microsoft.com/office/drawing/2014/main" id="{454AF5FF-AFD7-1C41-F515-45E2A2E3B616}"/>
+                <a16:creationId xmlns:a16="http://schemas.microsoft.com/office/drawing/2014/main" id="{5FADFB86-53C6-F716-F8A5-3A4EF5154BD6}"/>
               </a:ext>
             </a:extLst>
           </p:cNvPr>
@@ -8335,7 +8335,7 @@
           <p:cNvPr id="8" name="item_2_title">
             <a:extLst>
               <a:ext uri="{FF2B5EF4-FFF2-40B4-BE49-F238E27FC236}">
-                <a16:creationId xmlns:a16="http://schemas.microsoft.com/office/drawing/2014/main" id="{D3C3886A-4EA9-E75E-49CC-754D61C58E3E}"/>
+                <a16:creationId xmlns:a16="http://schemas.microsoft.com/office/drawing/2014/main" id="{3FCF97EF-3ACF-8BFF-C016-ABE92FDFE3DD}"/>
               </a:ext>
             </a:extLst>
           </p:cNvPr>
@@ -8366,7 +8366,7 @@
               </a:spcBef>
               <a:buFontTx/>
               <a:buNone/>
-              <a:defRPr sz="2200" b="1">
+              <a:defRPr sz="2000" b="1">
                 <a:solidFill>
                   <a:schemeClr val="accent1"/>
                 </a:solidFill>
@@ -8388,7 +8388,7 @@
           <p:cNvPr id="9" name="item_2">
             <a:extLst>
               <a:ext uri="{FF2B5EF4-FFF2-40B4-BE49-F238E27FC236}">
-                <a16:creationId xmlns:a16="http://schemas.microsoft.com/office/drawing/2014/main" id="{7B8F1436-F69F-D5B0-C1A0-198902122AC1}"/>
+                <a16:creationId xmlns:a16="http://schemas.microsoft.com/office/drawing/2014/main" id="{35EC9EE8-38C1-8A99-C8CD-10C5D75B7BF6}"/>
               </a:ext>
             </a:extLst>
           </p:cNvPr>
@@ -8436,7 +8436,7 @@
           <p:cNvPr id="10" name="item_3_title">
             <a:extLst>
               <a:ext uri="{FF2B5EF4-FFF2-40B4-BE49-F238E27FC236}">
-                <a16:creationId xmlns:a16="http://schemas.microsoft.com/office/drawing/2014/main" id="{755004A5-4069-58F4-73EF-F23B4AB6A62F}"/>
+                <a16:creationId xmlns:a16="http://schemas.microsoft.com/office/drawing/2014/main" id="{3C769890-77C3-1EC1-75A6-417B5F874837}"/>
               </a:ext>
             </a:extLst>
           </p:cNvPr>
@@ -8467,7 +8467,7 @@
               </a:spcBef>
               <a:buFontTx/>
               <a:buNone/>
-              <a:defRPr sz="2200" b="1">
+              <a:defRPr sz="2000" b="1">
                 <a:solidFill>
                   <a:schemeClr val="accent1"/>
                 </a:solidFill>
@@ -8489,7 +8489,7 @@
           <p:cNvPr id="11" name="item_3">
             <a:extLst>
               <a:ext uri="{FF2B5EF4-FFF2-40B4-BE49-F238E27FC236}">
-                <a16:creationId xmlns:a16="http://schemas.microsoft.com/office/drawing/2014/main" id="{12EB7C71-D724-2679-C09D-62FB883DA4A0}"/>
+                <a16:creationId xmlns:a16="http://schemas.microsoft.com/office/drawing/2014/main" id="{C592A8F2-0A54-5347-F4B2-7D865075BEAC}"/>
               </a:ext>
             </a:extLst>
           </p:cNvPr>
@@ -8537,7 +8537,7 @@
           <p:cNvPr id="12" name="item_4_title">
             <a:extLst>
               <a:ext uri="{FF2B5EF4-FFF2-40B4-BE49-F238E27FC236}">
-                <a16:creationId xmlns:a16="http://schemas.microsoft.com/office/drawing/2014/main" id="{6F5A750D-8FC3-FC45-3CE5-136DB956F8ED}"/>
+                <a16:creationId xmlns:a16="http://schemas.microsoft.com/office/drawing/2014/main" id="{B9CAD7C2-CEBF-AA35-5178-837A4222DF2A}"/>
               </a:ext>
             </a:extLst>
           </p:cNvPr>
@@ -8568,7 +8568,7 @@
               </a:spcBef>
               <a:buFontTx/>
               <a:buNone/>
-              <a:defRPr sz="2200" b="1">
+              <a:defRPr sz="2000" b="1">
                 <a:solidFill>
                   <a:schemeClr val="accent1"/>
                 </a:solidFill>
@@ -8590,7 +8590,7 @@
           <p:cNvPr id="13" name="item_4">
             <a:extLst>
               <a:ext uri="{FF2B5EF4-FFF2-40B4-BE49-F238E27FC236}">
-                <a16:creationId xmlns:a16="http://schemas.microsoft.com/office/drawing/2014/main" id="{A58DAB2F-1C07-881F-5A0B-C7FF9D7F17FC}"/>
+                <a16:creationId xmlns:a16="http://schemas.microsoft.com/office/drawing/2014/main" id="{1C67D4AE-11D5-215A-3A33-BCCB6A0D17BB}"/>
               </a:ext>
             </a:extLst>
           </p:cNvPr>
@@ -8638,7 +8638,7 @@
           <p:cNvPr id="14" name="source">
             <a:extLst>
               <a:ext uri="{FF2B5EF4-FFF2-40B4-BE49-F238E27FC236}">
-                <a16:creationId xmlns:a16="http://schemas.microsoft.com/office/drawing/2014/main" id="{2B0404C3-73A0-CC13-92EC-D39F7F11919B}"/>
+                <a16:creationId xmlns:a16="http://schemas.microsoft.com/office/drawing/2014/main" id="{E69262F6-612A-6FC6-D1C7-B07A747264BD}"/>
               </a:ext>
             </a:extLst>
           </p:cNvPr>
@@ -8693,7 +8693,7 @@
     </p:spTree>
     <p:extLst>
       <p:ext uri="{BB962C8B-B14F-4D97-AF65-F5344CB8AC3E}">
-        <p14:creationId xmlns:p14="http://schemas.microsoft.com/office/powerpoint/2010/main" val="3270062508"/>
+        <p14:creationId xmlns:p14="http://schemas.microsoft.com/office/powerpoint/2010/main" val="1641658708"/>
       </p:ext>
     </p:extLst>
   </p:cSld>
@@ -8762,7 +8762,7 @@
           <a:bodyPr/>
           <a:lstStyle/>
           <a:p>
-            <a:fld id="{DAA401AF-96B9-4795-80AC-645028D14909}" type="datetimeFigureOut">
+            <a:fld id="{C108DDE1-F741-4F4F-A7D2-FBD0359B97CD}" type="datetimeFigureOut">
               <a:rPr lang="en-US" smtClean="0"/>
               <a:t>10/3/2026</a:t>
             </a:fld>
@@ -8804,7 +8804,7 @@
           <a:bodyPr/>
           <a:lstStyle/>
           <a:p>
-            <a:fld id="{EB0BFBF9-3444-4A23-A691-88293893E3E4}" type="slidenum">
+            <a:fld id="{D07356AB-B086-4690-8078-803F810DAE76}" type="slidenum">
               <a:rPr lang="en-US" smtClean="0"/>
               <a:t>‹#›</a:t>
             </a:fld>
@@ -8817,7 +8817,7 @@
           <p:cNvPr id="6" name="body">
             <a:extLst>
               <a:ext uri="{FF2B5EF4-FFF2-40B4-BE49-F238E27FC236}">
-                <a16:creationId xmlns:a16="http://schemas.microsoft.com/office/drawing/2014/main" id="{537E9479-C991-B461-88B9-5F81B69F824A}"/>
+                <a16:creationId xmlns:a16="http://schemas.microsoft.com/office/drawing/2014/main" id="{0D47DDF1-66F4-1F8B-0635-8E5913439104}"/>
               </a:ext>
             </a:extLst>
           </p:cNvPr>
@@ -8862,7 +8862,7 @@
           <p:cNvPr id="7" name="source">
             <a:extLst>
               <a:ext uri="{FF2B5EF4-FFF2-40B4-BE49-F238E27FC236}">
-                <a16:creationId xmlns:a16="http://schemas.microsoft.com/office/drawing/2014/main" id="{F2531963-BB7E-5323-F900-D631293300C6}"/>
+                <a16:creationId xmlns:a16="http://schemas.microsoft.com/office/drawing/2014/main" id="{A819CB76-8A0B-5C4E-BBDD-6D56E9C649F6}"/>
               </a:ext>
             </a:extLst>
           </p:cNvPr>
@@ -8917,7 +8917,7 @@
     </p:spTree>
     <p:extLst>
       <p:ext uri="{BB962C8B-B14F-4D97-AF65-F5344CB8AC3E}">
-        <p14:creationId xmlns:p14="http://schemas.microsoft.com/office/powerpoint/2010/main" val="391762468"/>
+        <p14:creationId xmlns:p14="http://schemas.microsoft.com/office/powerpoint/2010/main" val="306713155"/>
       </p:ext>
     </p:extLst>
   </p:cSld>
@@ -8986,7 +8986,7 @@
           <a:bodyPr/>
           <a:lstStyle/>
           <a:p>
-            <a:fld id="{DAA401AF-96B9-4795-80AC-645028D14909}" type="datetimeFigureOut">
+            <a:fld id="{C108DDE1-F741-4F4F-A7D2-FBD0359B97CD}" type="datetimeFigureOut">
               <a:rPr lang="en-US" smtClean="0"/>
               <a:t>10/3/2026</a:t>
             </a:fld>
@@ -9028,7 +9028,7 @@
           <a:bodyPr/>
           <a:lstStyle/>
           <a:p>
-            <a:fld id="{EB0BFBF9-3444-4A23-A691-88293893E3E4}" type="slidenum">
+            <a:fld id="{D07356AB-B086-4690-8078-803F810DAE76}" type="slidenum">
               <a:rPr lang="en-US" smtClean="0"/>
               <a:t>‹#›</a:t>
             </a:fld>
@@ -9041,7 +9041,7 @@
           <p:cNvPr id="6" name="item_1_title">
             <a:extLst>
               <a:ext uri="{FF2B5EF4-FFF2-40B4-BE49-F238E27FC236}">
-                <a16:creationId xmlns:a16="http://schemas.microsoft.com/office/drawing/2014/main" id="{3C6F2B22-774A-66DB-F3E5-15CC5FFFCAF0}"/>
+                <a16:creationId xmlns:a16="http://schemas.microsoft.com/office/drawing/2014/main" id="{3576AE53-4B45-0995-39E6-95C5747E93F3}"/>
               </a:ext>
             </a:extLst>
           </p:cNvPr>
@@ -9054,8 +9054,8 @@
         </p:nvSpPr>
         <p:spPr>
           <a:xfrm>
-            <a:off x="1223514" y="2498833"/>
-            <a:ext cx="4361571" cy="371676"/>
+            <a:off x="1198591" y="2472230"/>
+            <a:ext cx="4411418" cy="387325"/>
           </a:xfrm>
         </p:spPr>
         <p:txBody>
@@ -9069,7 +9069,7 @@
               </a:spcBef>
               <a:buFontTx/>
               <a:buNone/>
-              <a:defRPr sz="2200" b="1">
+              <a:defRPr sz="2000" b="1">
                 <a:solidFill>
                   <a:schemeClr val="accent1"/>
                 </a:solidFill>
@@ -9091,7 +9091,7 @@
           <p:cNvPr id="7" name="item_1">
             <a:extLst>
               <a:ext uri="{FF2B5EF4-FFF2-40B4-BE49-F238E27FC236}">
-                <a16:creationId xmlns:a16="http://schemas.microsoft.com/office/drawing/2014/main" id="{A7A1503D-C9B9-9A77-61FD-EC8F05C24009}"/>
+                <a16:creationId xmlns:a16="http://schemas.microsoft.com/office/drawing/2014/main" id="{552C669E-49BF-D11F-933C-2BEF9701DB1E}"/>
               </a:ext>
             </a:extLst>
           </p:cNvPr>
@@ -9104,8 +9104,8 @@
         </p:nvSpPr>
         <p:spPr>
           <a:xfrm>
-            <a:off x="1223515" y="2870510"/>
-            <a:ext cx="4361571" cy="892021"/>
+            <a:off x="1198591" y="2859554"/>
+            <a:ext cx="4411418" cy="929580"/>
           </a:xfrm>
           <a:prstGeom prst="rect">
             <a:avLst/>
@@ -9139,7 +9139,7 @@
           <p:cNvPr id="8" name="item_2_title">
             <a:extLst>
               <a:ext uri="{FF2B5EF4-FFF2-40B4-BE49-F238E27FC236}">
-                <a16:creationId xmlns:a16="http://schemas.microsoft.com/office/drawing/2014/main" id="{AC30F824-C22D-D5F6-0250-A10EF402DB31}"/>
+                <a16:creationId xmlns:a16="http://schemas.microsoft.com/office/drawing/2014/main" id="{856A7375-8290-BA71-8A38-9EC350E1DD96}"/>
               </a:ext>
             </a:extLst>
           </p:cNvPr>
@@ -9152,8 +9152,8 @@
         </p:nvSpPr>
         <p:spPr>
           <a:xfrm>
-            <a:off x="6183245" y="2498833"/>
-            <a:ext cx="4361571" cy="371676"/>
+            <a:off x="6158321" y="2472230"/>
+            <a:ext cx="4411418" cy="387325"/>
           </a:xfrm>
           <a:prstGeom prst="rect">
             <a:avLst/>
@@ -9170,7 +9170,7 @@
               </a:spcBef>
               <a:buFontTx/>
               <a:buNone/>
-              <a:defRPr sz="2200" b="1">
+              <a:defRPr sz="2000" b="1">
                 <a:solidFill>
                   <a:schemeClr val="accent1"/>
                 </a:solidFill>
@@ -9192,7 +9192,7 @@
           <p:cNvPr id="9" name="item_2">
             <a:extLst>
               <a:ext uri="{FF2B5EF4-FFF2-40B4-BE49-F238E27FC236}">
-                <a16:creationId xmlns:a16="http://schemas.microsoft.com/office/drawing/2014/main" id="{23E5396E-215C-1ADE-46E5-82485751ABF5}"/>
+                <a16:creationId xmlns:a16="http://schemas.microsoft.com/office/drawing/2014/main" id="{7AC0D024-2B6C-08EC-F3C2-D7BB7657553E}"/>
               </a:ext>
             </a:extLst>
           </p:cNvPr>
@@ -9205,8 +9205,8 @@
         </p:nvSpPr>
         <p:spPr>
           <a:xfrm>
-            <a:off x="6183245" y="2870510"/>
-            <a:ext cx="4361571" cy="892021"/>
+            <a:off x="6158321" y="2859554"/>
+            <a:ext cx="4411418" cy="929580"/>
           </a:xfrm>
           <a:prstGeom prst="rect">
             <a:avLst/>
@@ -9240,7 +9240,7 @@
           <p:cNvPr id="10" name="item_3_title">
             <a:extLst>
               <a:ext uri="{FF2B5EF4-FFF2-40B4-BE49-F238E27FC236}">
-                <a16:creationId xmlns:a16="http://schemas.microsoft.com/office/drawing/2014/main" id="{8751D992-CA5A-198E-25EB-37CCE39AFC9D}"/>
+                <a16:creationId xmlns:a16="http://schemas.microsoft.com/office/drawing/2014/main" id="{9051F988-8B79-FEE4-F085-1921116AE2E4}"/>
               </a:ext>
             </a:extLst>
           </p:cNvPr>
@@ -9253,8 +9253,8 @@
         </p:nvSpPr>
         <p:spPr>
           <a:xfrm>
-            <a:off x="1223515" y="4401030"/>
-            <a:ext cx="4361571" cy="371676"/>
+            <a:off x="1198591" y="4374427"/>
+            <a:ext cx="4411418" cy="387325"/>
           </a:xfrm>
           <a:prstGeom prst="rect">
             <a:avLst/>
@@ -9271,7 +9271,7 @@
               </a:spcBef>
               <a:buFontTx/>
               <a:buNone/>
-              <a:defRPr sz="2200" b="1">
+              <a:defRPr sz="2000" b="1">
                 <a:solidFill>
                   <a:schemeClr val="accent1"/>
                 </a:solidFill>
@@ -9293,7 +9293,7 @@
           <p:cNvPr id="11" name="item_3">
             <a:extLst>
               <a:ext uri="{FF2B5EF4-FFF2-40B4-BE49-F238E27FC236}">
-                <a16:creationId xmlns:a16="http://schemas.microsoft.com/office/drawing/2014/main" id="{E9839E00-A511-0A5F-A312-04806BC8BE94}"/>
+                <a16:creationId xmlns:a16="http://schemas.microsoft.com/office/drawing/2014/main" id="{A79B037C-2A57-001C-3572-B8180F7EF82C}"/>
               </a:ext>
             </a:extLst>
           </p:cNvPr>
@@ -9306,8 +9306,8 @@
         </p:nvSpPr>
         <p:spPr>
           <a:xfrm>
-            <a:off x="1223515" y="4772706"/>
-            <a:ext cx="4361571" cy="892021"/>
+            <a:off x="1198591" y="4761750"/>
+            <a:ext cx="4411418" cy="929580"/>
           </a:xfrm>
           <a:prstGeom prst="rect">
             <a:avLst/>
@@ -9341,7 +9341,7 @@
           <p:cNvPr id="12" name="item_4_title">
             <a:extLst>
               <a:ext uri="{FF2B5EF4-FFF2-40B4-BE49-F238E27FC236}">
-                <a16:creationId xmlns:a16="http://schemas.microsoft.com/office/drawing/2014/main" id="{5DB16EF9-4712-F382-27E5-BBBB630B8F93}"/>
+                <a16:creationId xmlns:a16="http://schemas.microsoft.com/office/drawing/2014/main" id="{1CFE5F6D-1089-40EE-A9A7-CCFEDDAADC79}"/>
               </a:ext>
             </a:extLst>
           </p:cNvPr>
@@ -9354,8 +9354,8 @@
         </p:nvSpPr>
         <p:spPr>
           <a:xfrm>
-            <a:off x="6183245" y="4401030"/>
-            <a:ext cx="4361571" cy="371676"/>
+            <a:off x="6158321" y="4374427"/>
+            <a:ext cx="4411418" cy="387325"/>
           </a:xfrm>
           <a:prstGeom prst="rect">
             <a:avLst/>
@@ -9372,7 +9372,7 @@
               </a:spcBef>
               <a:buFontTx/>
               <a:buNone/>
-              <a:defRPr sz="2200" b="1">
+              <a:defRPr sz="2000" b="1">
                 <a:solidFill>
                   <a:schemeClr val="accent1"/>
                 </a:solidFill>
@@ -9394,7 +9394,7 @@
           <p:cNvPr id="13" name="item_4">
             <a:extLst>
               <a:ext uri="{FF2B5EF4-FFF2-40B4-BE49-F238E27FC236}">
-                <a16:creationId xmlns:a16="http://schemas.microsoft.com/office/drawing/2014/main" id="{594A3132-017A-9640-BDAA-7310D60DE966}"/>
+                <a16:creationId xmlns:a16="http://schemas.microsoft.com/office/drawing/2014/main" id="{47F08F29-EC1D-F0A1-D7FE-AD19CB071FD0}"/>
               </a:ext>
             </a:extLst>
           </p:cNvPr>
@@ -9407,8 +9407,8 @@
         </p:nvSpPr>
         <p:spPr>
           <a:xfrm>
-            <a:off x="6183245" y="4772706"/>
-            <a:ext cx="4361571" cy="892021"/>
+            <a:off x="6158321" y="4761750"/>
+            <a:ext cx="4411418" cy="929580"/>
           </a:xfrm>
           <a:prstGeom prst="rect">
             <a:avLst/>
@@ -9442,7 +9442,7 @@
           <p:cNvPr id="14" name="source">
             <a:extLst>
               <a:ext uri="{FF2B5EF4-FFF2-40B4-BE49-F238E27FC236}">
-                <a16:creationId xmlns:a16="http://schemas.microsoft.com/office/drawing/2014/main" id="{BF3DBF45-F71B-A3B2-A759-3FF4A17574D9}"/>
+                <a16:creationId xmlns:a16="http://schemas.microsoft.com/office/drawing/2014/main" id="{791347C7-3819-A660-89DC-A2B38B9DC9F6}"/>
               </a:ext>
             </a:extLst>
           </p:cNvPr>
@@ -9497,7 +9497,7 @@
     </p:spTree>
     <p:extLst>
       <p:ext uri="{BB962C8B-B14F-4D97-AF65-F5344CB8AC3E}">
-        <p14:creationId xmlns:p14="http://schemas.microsoft.com/office/powerpoint/2010/main" val="2039035590"/>
+        <p14:creationId xmlns:p14="http://schemas.microsoft.com/office/powerpoint/2010/main" val="2707144094"/>
       </p:ext>
     </p:extLst>
   </p:cSld>
@@ -9566,7 +9566,7 @@
           <a:bodyPr/>
           <a:lstStyle/>
           <a:p>
-            <a:fld id="{DAA401AF-96B9-4795-80AC-645028D14909}" type="datetimeFigureOut">
+            <a:fld id="{C108DDE1-F741-4F4F-A7D2-FBD0359B97CD}" type="datetimeFigureOut">
               <a:rPr lang="en-US" smtClean="0"/>
               <a:t>10/3/2026</a:t>
             </a:fld>
@@ -9608,7 +9608,7 @@
           <a:bodyPr/>
           <a:lstStyle/>
           <a:p>
-            <a:fld id="{EB0BFBF9-3444-4A23-A691-88293893E3E4}" type="slidenum">
+            <a:fld id="{D07356AB-B086-4690-8078-803F810DAE76}" type="slidenum">
               <a:rPr lang="en-US" smtClean="0"/>
               <a:t>‹#›</a:t>
             </a:fld>
@@ -9621,7 +9621,7 @@
           <p:cNvPr id="6" name="body">
             <a:extLst>
               <a:ext uri="{FF2B5EF4-FFF2-40B4-BE49-F238E27FC236}">
-                <a16:creationId xmlns:a16="http://schemas.microsoft.com/office/drawing/2014/main" id="{AA541402-2A53-135B-55CF-9716D4AA48BF}"/>
+                <a16:creationId xmlns:a16="http://schemas.microsoft.com/office/drawing/2014/main" id="{AA9F9B61-AE52-A053-8094-2C9563494F0F}"/>
               </a:ext>
             </a:extLst>
           </p:cNvPr>
@@ -9661,7 +9661,7 @@
           <p:cNvPr id="7" name="kpi_value_1">
             <a:extLst>
               <a:ext uri="{FF2B5EF4-FFF2-40B4-BE49-F238E27FC236}">
-                <a16:creationId xmlns:a16="http://schemas.microsoft.com/office/drawing/2014/main" id="{37987255-0595-E36D-F624-0FE86C97DC61}"/>
+                <a16:creationId xmlns:a16="http://schemas.microsoft.com/office/drawing/2014/main" id="{1BAB1ECF-740E-C059-211E-03670886DA84}"/>
               </a:ext>
             </a:extLst>
           </p:cNvPr>
@@ -9714,7 +9714,7 @@
           <p:cNvPr id="8" name="kpi_label_1">
             <a:extLst>
               <a:ext uri="{FF2B5EF4-FFF2-40B4-BE49-F238E27FC236}">
-                <a16:creationId xmlns:a16="http://schemas.microsoft.com/office/drawing/2014/main" id="{6AD41F42-2369-3C5A-58B6-1E4FB8AAAB34}"/>
+                <a16:creationId xmlns:a16="http://schemas.microsoft.com/office/drawing/2014/main" id="{4C786D92-2A15-7F64-2A00-31E96DCDC08F}"/>
               </a:ext>
             </a:extLst>
           </p:cNvPr>
@@ -9745,7 +9745,7 @@
               </a:spcBef>
               <a:buFontTx/>
               <a:buNone/>
-              <a:defRPr sz="1800"/>
+              <a:defRPr sz="2000"/>
             </a:lvl1pPr>
           </a:lstStyle>
           <a:p>
@@ -9762,7 +9762,7 @@
           <p:cNvPr id="9" name="source">
             <a:extLst>
               <a:ext uri="{FF2B5EF4-FFF2-40B4-BE49-F238E27FC236}">
-                <a16:creationId xmlns:a16="http://schemas.microsoft.com/office/drawing/2014/main" id="{C2D71C7A-6281-F0D2-F7E2-C6F26787701E}"/>
+                <a16:creationId xmlns:a16="http://schemas.microsoft.com/office/drawing/2014/main" id="{99E5B426-3820-CC2B-58FA-3573352E9B3D}"/>
               </a:ext>
             </a:extLst>
           </p:cNvPr>
@@ -9817,7 +9817,7 @@
     </p:spTree>
     <p:extLst>
       <p:ext uri="{BB962C8B-B14F-4D97-AF65-F5344CB8AC3E}">
-        <p14:creationId xmlns:p14="http://schemas.microsoft.com/office/powerpoint/2010/main" val="2349865587"/>
+        <p14:creationId xmlns:p14="http://schemas.microsoft.com/office/powerpoint/2010/main" val="2105279642"/>
       </p:ext>
     </p:extLst>
   </p:cSld>
@@ -9886,7 +9886,7 @@
           <a:bodyPr/>
           <a:lstStyle/>
           <a:p>
-            <a:fld id="{DAA401AF-96B9-4795-80AC-645028D14909}" type="datetimeFigureOut">
+            <a:fld id="{C108DDE1-F741-4F4F-A7D2-FBD0359B97CD}" type="datetimeFigureOut">
               <a:rPr lang="en-US" smtClean="0"/>
               <a:t>10/3/2026</a:t>
             </a:fld>
@@ -9928,7 +9928,7 @@
           <a:bodyPr/>
           <a:lstStyle/>
           <a:p>
-            <a:fld id="{EB0BFBF9-3444-4A23-A691-88293893E3E4}" type="slidenum">
+            <a:fld id="{D07356AB-B086-4690-8078-803F810DAE76}" type="slidenum">
               <a:rPr lang="en-US" smtClean="0"/>
               <a:t>‹#›</a:t>
             </a:fld>
@@ -9941,7 +9941,7 @@
           <p:cNvPr id="6" name="body">
             <a:extLst>
               <a:ext uri="{FF2B5EF4-FFF2-40B4-BE49-F238E27FC236}">
-                <a16:creationId xmlns:a16="http://schemas.microsoft.com/office/drawing/2014/main" id="{C61F2F1A-B553-1E26-9097-71C20C36591B}"/>
+                <a16:creationId xmlns:a16="http://schemas.microsoft.com/office/drawing/2014/main" id="{834E57AC-E0D6-DC19-1AA9-2BE72B1A3141}"/>
               </a:ext>
             </a:extLst>
           </p:cNvPr>
@@ -9981,7 +9981,7 @@
           <p:cNvPr id="7" name="kpi_value_1">
             <a:extLst>
               <a:ext uri="{FF2B5EF4-FFF2-40B4-BE49-F238E27FC236}">
-                <a16:creationId xmlns:a16="http://schemas.microsoft.com/office/drawing/2014/main" id="{8F403F2D-DE22-4DD7-2DD7-C73B9006473C}"/>
+                <a16:creationId xmlns:a16="http://schemas.microsoft.com/office/drawing/2014/main" id="{D98DB76E-DB97-41E3-E225-F9DDFB174EDC}"/>
               </a:ext>
             </a:extLst>
           </p:cNvPr>
@@ -9994,109 +9994,8 @@
         </p:nvSpPr>
         <p:spPr>
           <a:xfrm>
-            <a:off x="1223515" y="2498833"/>
-            <a:ext cx="4461265" cy="1527268"/>
-          </a:xfrm>
-          <a:prstGeom prst="rect">
-            <a:avLst/>
-          </a:prstGeom>
-        </p:spPr>
-        <p:txBody>
-          <a:bodyPr wrap="square" anchor="t">
-            <a:noAutofit/>
-          </a:bodyPr>
-          <a:lstStyle>
-            <a:lvl1pPr marL="0" indent="0">
-              <a:spcBef>
-                <a:spcPts val="0"/>
-              </a:spcBef>
-              <a:buFontTx/>
-              <a:buNone/>
-              <a:defRPr sz="8400" b="1">
-                <a:solidFill>
-                  <a:schemeClr val="accent1"/>
-                </a:solidFill>
-                <a:latin typeface="+mj-lt"/>
-              </a:defRPr>
-            </a:lvl1pPr>
-          </a:lstStyle>
-          <a:p>
-            <a:pPr lvl="0"/>
-            <a:r>
-              <a:rPr lang="en-US"/>
-              <a:t>kpi_value_1</a:t>
-            </a:r>
-          </a:p>
-        </p:txBody>
-      </p:sp>
-      <p:sp>
-        <p:nvSpPr>
-          <p:cNvPr id="8" name="kpi_label_1">
-            <a:extLst>
-              <a:ext uri="{FF2B5EF4-FFF2-40B4-BE49-F238E27FC236}">
-                <a16:creationId xmlns:a16="http://schemas.microsoft.com/office/drawing/2014/main" id="{6967F372-963E-571E-6FFE-989A0CCEF0F3}"/>
-              </a:ext>
-            </a:extLst>
-          </p:cNvPr>
-          <p:cNvSpPr>
-            <a:spLocks noGrp="1"/>
-          </p:cNvSpPr>
-          <p:nvPr>
-            <p:ph type="body" sz="quarter" idx="15" hasCustomPrompt="1"/>
-          </p:nvPr>
-        </p:nvSpPr>
-        <p:spPr>
-          <a:xfrm>
-            <a:off x="1223515" y="4026101"/>
-            <a:ext cx="4461265" cy="848482"/>
-          </a:xfrm>
-          <a:prstGeom prst="rect">
-            <a:avLst/>
-          </a:prstGeom>
-        </p:spPr>
-        <p:txBody>
-          <a:bodyPr wrap="square" anchor="t">
-            <a:noAutofit/>
-          </a:bodyPr>
-          <a:lstStyle>
-            <a:lvl1pPr marL="0" indent="0">
-              <a:spcBef>
-                <a:spcPts val="0"/>
-              </a:spcBef>
-              <a:buFontTx/>
-              <a:buNone/>
-              <a:defRPr sz="1800"/>
-            </a:lvl1pPr>
-          </a:lstStyle>
-          <a:p>
-            <a:pPr lvl="0"/>
-            <a:r>
-              <a:rPr lang="en-US"/>
-              <a:t>kpi_label_1</a:t>
-            </a:r>
-          </a:p>
-        </p:txBody>
-      </p:sp>
-      <p:sp>
-        <p:nvSpPr>
-          <p:cNvPr id="9" name="kpi_value_2">
-            <a:extLst>
-              <a:ext uri="{FF2B5EF4-FFF2-40B4-BE49-F238E27FC236}">
-                <a16:creationId xmlns:a16="http://schemas.microsoft.com/office/drawing/2014/main" id="{048441CC-DCE9-E3B1-3970-51967E71A6E9}"/>
-              </a:ext>
-            </a:extLst>
-          </p:cNvPr>
-          <p:cNvSpPr>
-            <a:spLocks noGrp="1"/>
-          </p:cNvSpPr>
-          <p:nvPr>
-            <p:ph type="body" sz="quarter" idx="16" hasCustomPrompt="1"/>
-          </p:nvPr>
-        </p:nvSpPr>
-        <p:spPr>
-          <a:xfrm>
-            <a:off x="6282937" y="2498833"/>
-            <a:ext cx="4261878" cy="558402"/>
+            <a:off x="1198592" y="2472230"/>
+            <a:ext cx="4511111" cy="1561473"/>
           </a:xfrm>
           <a:prstGeom prst="rect">
             <a:avLst/>
@@ -10125,31 +10024,31 @@
             <a:pPr lvl="0"/>
             <a:r>
               <a:rPr lang="en-US"/>
-              <a:t>kpi_value_2</a:t>
-            </a:r>
-          </a:p>
-        </p:txBody>
-      </p:sp>
-      <p:sp>
-        <p:nvSpPr>
-          <p:cNvPr id="10" name="kpi_label_2">
-            <a:extLst>
-              <a:ext uri="{FF2B5EF4-FFF2-40B4-BE49-F238E27FC236}">
-                <a16:creationId xmlns:a16="http://schemas.microsoft.com/office/drawing/2014/main" id="{CAD0599C-08EB-E577-F74F-E65DD3B434B3}"/>
-              </a:ext>
-            </a:extLst>
-          </p:cNvPr>
-          <p:cNvSpPr>
-            <a:spLocks noGrp="1"/>
-          </p:cNvSpPr>
-          <p:nvPr>
-            <p:ph type="body" sz="quarter" idx="17" hasCustomPrompt="1"/>
-          </p:nvPr>
-        </p:nvSpPr>
-        <p:spPr>
-          <a:xfrm>
-            <a:off x="6282937" y="3057236"/>
-            <a:ext cx="4261878" cy="310223"/>
+              <a:t>kpi_value_1</a:t>
+            </a:r>
+          </a:p>
+        </p:txBody>
+      </p:sp>
+      <p:sp>
+        <p:nvSpPr>
+          <p:cNvPr id="8" name="kpi_label_1">
+            <a:extLst>
+              <a:ext uri="{FF2B5EF4-FFF2-40B4-BE49-F238E27FC236}">
+                <a16:creationId xmlns:a16="http://schemas.microsoft.com/office/drawing/2014/main" id="{5961E021-3080-CD8D-E529-35A5A329E49A}"/>
+              </a:ext>
+            </a:extLst>
+          </p:cNvPr>
+          <p:cNvSpPr>
+            <a:spLocks noGrp="1"/>
+          </p:cNvSpPr>
+          <p:nvPr>
+            <p:ph type="body" sz="quarter" idx="15" hasCustomPrompt="1"/>
+          </p:nvPr>
+        </p:nvSpPr>
+        <p:spPr>
+          <a:xfrm>
+            <a:off x="1198592" y="4033703"/>
+            <a:ext cx="4511111" cy="867485"/>
           </a:xfrm>
           <a:prstGeom prst="rect">
             <a:avLst/>
@@ -10166,38 +10065,38 @@
               </a:spcBef>
               <a:buFontTx/>
               <a:buNone/>
-              <a:defRPr sz="1800"/>
+              <a:defRPr sz="2000"/>
             </a:lvl1pPr>
           </a:lstStyle>
           <a:p>
             <a:pPr lvl="0"/>
             <a:r>
               <a:rPr lang="en-US"/>
-              <a:t>kpi_label_2</a:t>
-            </a:r>
-          </a:p>
-        </p:txBody>
-      </p:sp>
-      <p:sp>
-        <p:nvSpPr>
-          <p:cNvPr id="11" name="kpi_value_3">
-            <a:extLst>
-              <a:ext uri="{FF2B5EF4-FFF2-40B4-BE49-F238E27FC236}">
-                <a16:creationId xmlns:a16="http://schemas.microsoft.com/office/drawing/2014/main" id="{8BB2FB96-9A52-A76D-9A16-A4D223A7020D}"/>
-              </a:ext>
-            </a:extLst>
-          </p:cNvPr>
-          <p:cNvSpPr>
-            <a:spLocks noGrp="1"/>
-          </p:cNvSpPr>
-          <p:nvPr>
-            <p:ph type="body" sz="quarter" idx="18" hasCustomPrompt="1"/>
-          </p:nvPr>
-        </p:nvSpPr>
-        <p:spPr>
-          <a:xfrm>
-            <a:off x="6282937" y="4005958"/>
-            <a:ext cx="1831860" cy="558402"/>
+              <a:t>kpi_label_1</a:t>
+            </a:r>
+          </a:p>
+        </p:txBody>
+      </p:sp>
+      <p:sp>
+        <p:nvSpPr>
+          <p:cNvPr id="9" name="kpi_value_2">
+            <a:extLst>
+              <a:ext uri="{FF2B5EF4-FFF2-40B4-BE49-F238E27FC236}">
+                <a16:creationId xmlns:a16="http://schemas.microsoft.com/office/drawing/2014/main" id="{27482B2C-26D4-AAAD-961B-F59751D09FBB}"/>
+              </a:ext>
+            </a:extLst>
+          </p:cNvPr>
+          <p:cNvSpPr>
+            <a:spLocks noGrp="1"/>
+          </p:cNvSpPr>
+          <p:nvPr>
+            <p:ph type="body" sz="quarter" idx="16" hasCustomPrompt="1"/>
+          </p:nvPr>
+        </p:nvSpPr>
+        <p:spPr>
+          <a:xfrm>
+            <a:off x="6258015" y="2472230"/>
+            <a:ext cx="4311725" cy="592607"/>
           </a:xfrm>
           <a:prstGeom prst="rect">
             <a:avLst/>
@@ -10226,31 +10125,31 @@
             <a:pPr lvl="0"/>
             <a:r>
               <a:rPr lang="en-US"/>
-              <a:t>kpi_value_3</a:t>
-            </a:r>
-          </a:p>
-        </p:txBody>
-      </p:sp>
-      <p:sp>
-        <p:nvSpPr>
-          <p:cNvPr id="12" name="kpi_label_3">
-            <a:extLst>
-              <a:ext uri="{FF2B5EF4-FFF2-40B4-BE49-F238E27FC236}">
-                <a16:creationId xmlns:a16="http://schemas.microsoft.com/office/drawing/2014/main" id="{54F5FAF2-FCB4-3BCA-1C6C-F0283285B955}"/>
-              </a:ext>
-            </a:extLst>
-          </p:cNvPr>
-          <p:cNvSpPr>
-            <a:spLocks noGrp="1"/>
-          </p:cNvSpPr>
-          <p:nvPr>
-            <p:ph type="body" sz="quarter" idx="19" hasCustomPrompt="1"/>
-          </p:nvPr>
-        </p:nvSpPr>
-        <p:spPr>
-          <a:xfrm>
-            <a:off x="6282937" y="4564361"/>
-            <a:ext cx="1831860" cy="310223"/>
+              <a:t>kpi_value_2</a:t>
+            </a:r>
+          </a:p>
+        </p:txBody>
+      </p:sp>
+      <p:sp>
+        <p:nvSpPr>
+          <p:cNvPr id="10" name="kpi_label_2">
+            <a:extLst>
+              <a:ext uri="{FF2B5EF4-FFF2-40B4-BE49-F238E27FC236}">
+                <a16:creationId xmlns:a16="http://schemas.microsoft.com/office/drawing/2014/main" id="{16EF5D78-35D2-2E57-6E0C-1D12D0737E00}"/>
+              </a:ext>
+            </a:extLst>
+          </p:cNvPr>
+          <p:cNvSpPr>
+            <a:spLocks noGrp="1"/>
+          </p:cNvSpPr>
+          <p:nvPr>
+            <p:ph type="body" sz="quarter" idx="17" hasCustomPrompt="1"/>
+          </p:nvPr>
+        </p:nvSpPr>
+        <p:spPr>
+          <a:xfrm>
+            <a:off x="6258015" y="3064836"/>
+            <a:ext cx="4311725" cy="329226"/>
           </a:xfrm>
           <a:prstGeom prst="rect">
             <a:avLst/>
@@ -10267,38 +10166,38 @@
               </a:spcBef>
               <a:buFontTx/>
               <a:buNone/>
-              <a:defRPr sz="1800"/>
+              <a:defRPr sz="2000"/>
             </a:lvl1pPr>
           </a:lstStyle>
           <a:p>
             <a:pPr lvl="0"/>
             <a:r>
               <a:rPr lang="en-US"/>
-              <a:t>kpi_label_3</a:t>
-            </a:r>
-          </a:p>
-        </p:txBody>
-      </p:sp>
-      <p:sp>
-        <p:nvSpPr>
-          <p:cNvPr id="13" name="kpi_value_4">
-            <a:extLst>
-              <a:ext uri="{FF2B5EF4-FFF2-40B4-BE49-F238E27FC236}">
-                <a16:creationId xmlns:a16="http://schemas.microsoft.com/office/drawing/2014/main" id="{B029E5A3-5BC1-CA3B-60FB-8D102E2E05EE}"/>
-              </a:ext>
-            </a:extLst>
-          </p:cNvPr>
-          <p:cNvSpPr>
-            <a:spLocks noGrp="1"/>
-          </p:cNvSpPr>
-          <p:nvPr>
-            <p:ph type="body" sz="quarter" idx="20" hasCustomPrompt="1"/>
-          </p:nvPr>
-        </p:nvSpPr>
-        <p:spPr>
-          <a:xfrm>
-            <a:off x="8712955" y="4005958"/>
-            <a:ext cx="1831860" cy="558402"/>
+              <a:t>kpi_label_2</a:t>
+            </a:r>
+          </a:p>
+        </p:txBody>
+      </p:sp>
+      <p:sp>
+        <p:nvSpPr>
+          <p:cNvPr id="11" name="kpi_value_3">
+            <a:extLst>
+              <a:ext uri="{FF2B5EF4-FFF2-40B4-BE49-F238E27FC236}">
+                <a16:creationId xmlns:a16="http://schemas.microsoft.com/office/drawing/2014/main" id="{BE768B05-02F5-1994-0041-FF5A77BD5ADE}"/>
+              </a:ext>
+            </a:extLst>
+          </p:cNvPr>
+          <p:cNvSpPr>
+            <a:spLocks noGrp="1"/>
+          </p:cNvSpPr>
+          <p:nvPr>
+            <p:ph type="body" sz="quarter" idx="18" hasCustomPrompt="1"/>
+          </p:nvPr>
+        </p:nvSpPr>
+        <p:spPr>
+          <a:xfrm>
+            <a:off x="6258014" y="3979355"/>
+            <a:ext cx="1881706" cy="592607"/>
           </a:xfrm>
           <a:prstGeom prst="rect">
             <a:avLst/>
@@ -10327,31 +10226,31 @@
             <a:pPr lvl="0"/>
             <a:r>
               <a:rPr lang="en-US"/>
-              <a:t>kpi_value_4</a:t>
-            </a:r>
-          </a:p>
-        </p:txBody>
-      </p:sp>
-      <p:sp>
-        <p:nvSpPr>
-          <p:cNvPr id="14" name="kpi_label_4">
-            <a:extLst>
-              <a:ext uri="{FF2B5EF4-FFF2-40B4-BE49-F238E27FC236}">
-                <a16:creationId xmlns:a16="http://schemas.microsoft.com/office/drawing/2014/main" id="{B48AAE71-3870-3E5A-6B2B-472DA8B6FB90}"/>
-              </a:ext>
-            </a:extLst>
-          </p:cNvPr>
-          <p:cNvSpPr>
-            <a:spLocks noGrp="1"/>
-          </p:cNvSpPr>
-          <p:nvPr>
-            <p:ph type="body" sz="quarter" idx="21" hasCustomPrompt="1"/>
-          </p:nvPr>
-        </p:nvSpPr>
-        <p:spPr>
-          <a:xfrm>
-            <a:off x="8712955" y="4564361"/>
-            <a:ext cx="1831860" cy="310223"/>
+              <a:t>kpi_value_3</a:t>
+            </a:r>
+          </a:p>
+        </p:txBody>
+      </p:sp>
+      <p:sp>
+        <p:nvSpPr>
+          <p:cNvPr id="12" name="kpi_label_3">
+            <a:extLst>
+              <a:ext uri="{FF2B5EF4-FFF2-40B4-BE49-F238E27FC236}">
+                <a16:creationId xmlns:a16="http://schemas.microsoft.com/office/drawing/2014/main" id="{39836E08-18C2-4D21-4AD0-1941AA82C33A}"/>
+              </a:ext>
+            </a:extLst>
+          </p:cNvPr>
+          <p:cNvSpPr>
+            <a:spLocks noGrp="1"/>
+          </p:cNvSpPr>
+          <p:nvPr>
+            <p:ph type="body" sz="quarter" idx="19" hasCustomPrompt="1"/>
+          </p:nvPr>
+        </p:nvSpPr>
+        <p:spPr>
+          <a:xfrm>
+            <a:off x="6258014" y="4571961"/>
+            <a:ext cx="1881706" cy="329226"/>
           </a:xfrm>
           <a:prstGeom prst="rect">
             <a:avLst/>
@@ -10368,13 +10267,114 @@
               </a:spcBef>
               <a:buFontTx/>
               <a:buNone/>
-              <a:defRPr sz="1800"/>
+              <a:defRPr sz="2000"/>
             </a:lvl1pPr>
           </a:lstStyle>
           <a:p>
             <a:pPr lvl="0"/>
             <a:r>
               <a:rPr lang="en-US"/>
+              <a:t>kpi_label_3</a:t>
+            </a:r>
+          </a:p>
+        </p:txBody>
+      </p:sp>
+      <p:sp>
+        <p:nvSpPr>
+          <p:cNvPr id="13" name="kpi_value_4">
+            <a:extLst>
+              <a:ext uri="{FF2B5EF4-FFF2-40B4-BE49-F238E27FC236}">
+                <a16:creationId xmlns:a16="http://schemas.microsoft.com/office/drawing/2014/main" id="{6E851467-8602-30C5-184C-B23003DA3004}"/>
+              </a:ext>
+            </a:extLst>
+          </p:cNvPr>
+          <p:cNvSpPr>
+            <a:spLocks noGrp="1"/>
+          </p:cNvSpPr>
+          <p:nvPr>
+            <p:ph type="body" sz="quarter" idx="20" hasCustomPrompt="1"/>
+          </p:nvPr>
+        </p:nvSpPr>
+        <p:spPr>
+          <a:xfrm>
+            <a:off x="8688032" y="3979355"/>
+            <a:ext cx="1881706" cy="592607"/>
+          </a:xfrm>
+          <a:prstGeom prst="rect">
+            <a:avLst/>
+          </a:prstGeom>
+        </p:spPr>
+        <p:txBody>
+          <a:bodyPr wrap="square" anchor="t">
+            <a:noAutofit/>
+          </a:bodyPr>
+          <a:lstStyle>
+            <a:lvl1pPr marL="0" indent="0">
+              <a:spcBef>
+                <a:spcPts val="0"/>
+              </a:spcBef>
+              <a:buFontTx/>
+              <a:buNone/>
+              <a:defRPr sz="6000" b="1">
+                <a:solidFill>
+                  <a:schemeClr val="accent1"/>
+                </a:solidFill>
+                <a:latin typeface="+mj-lt"/>
+              </a:defRPr>
+            </a:lvl1pPr>
+          </a:lstStyle>
+          <a:p>
+            <a:pPr lvl="0"/>
+            <a:r>
+              <a:rPr lang="en-US"/>
+              <a:t>kpi_value_4</a:t>
+            </a:r>
+          </a:p>
+        </p:txBody>
+      </p:sp>
+      <p:sp>
+        <p:nvSpPr>
+          <p:cNvPr id="14" name="kpi_label_4">
+            <a:extLst>
+              <a:ext uri="{FF2B5EF4-FFF2-40B4-BE49-F238E27FC236}">
+                <a16:creationId xmlns:a16="http://schemas.microsoft.com/office/drawing/2014/main" id="{5AC52E4E-D402-DC47-9949-4F4C41E2EE4A}"/>
+              </a:ext>
+            </a:extLst>
+          </p:cNvPr>
+          <p:cNvSpPr>
+            <a:spLocks noGrp="1"/>
+          </p:cNvSpPr>
+          <p:nvPr>
+            <p:ph type="body" sz="quarter" idx="21" hasCustomPrompt="1"/>
+          </p:nvPr>
+        </p:nvSpPr>
+        <p:spPr>
+          <a:xfrm>
+            <a:off x="8688032" y="4571961"/>
+            <a:ext cx="1881706" cy="329226"/>
+          </a:xfrm>
+          <a:prstGeom prst="rect">
+            <a:avLst/>
+          </a:prstGeom>
+        </p:spPr>
+        <p:txBody>
+          <a:bodyPr wrap="square" anchor="t">
+            <a:noAutofit/>
+          </a:bodyPr>
+          <a:lstStyle>
+            <a:lvl1pPr marL="0" indent="0">
+              <a:spcBef>
+                <a:spcPts val="0"/>
+              </a:spcBef>
+              <a:buFontTx/>
+              <a:buNone/>
+              <a:defRPr sz="2000"/>
+            </a:lvl1pPr>
+          </a:lstStyle>
+          <a:p>
+            <a:pPr lvl="0"/>
+            <a:r>
+              <a:rPr lang="en-US"/>
               <a:t>kpi_label_4</a:t>
             </a:r>
           </a:p>
@@ -10385,7 +10385,7 @@
           <p:cNvPr id="15" name="source">
             <a:extLst>
               <a:ext uri="{FF2B5EF4-FFF2-40B4-BE49-F238E27FC236}">
-                <a16:creationId xmlns:a16="http://schemas.microsoft.com/office/drawing/2014/main" id="{F3FFA2E1-68C1-D17F-BD55-E2C0754D1306}"/>
+                <a16:creationId xmlns:a16="http://schemas.microsoft.com/office/drawing/2014/main" id="{76976E6C-21F3-73B0-F252-E9363CEECF94}"/>
               </a:ext>
             </a:extLst>
           </p:cNvPr>
@@ -10440,7 +10440,7 @@
     </p:spTree>
     <p:extLst>
       <p:ext uri="{BB962C8B-B14F-4D97-AF65-F5344CB8AC3E}">
-        <p14:creationId xmlns:p14="http://schemas.microsoft.com/office/powerpoint/2010/main" val="88947922"/>
+        <p14:creationId xmlns:p14="http://schemas.microsoft.com/office/powerpoint/2010/main" val="821710896"/>
       </p:ext>
     </p:extLst>
   </p:cSld>
@@ -10509,7 +10509,7 @@
           <a:bodyPr/>
           <a:lstStyle/>
           <a:p>
-            <a:fld id="{DAA401AF-96B9-4795-80AC-645028D14909}" type="datetimeFigureOut">
+            <a:fld id="{C108DDE1-F741-4F4F-A7D2-FBD0359B97CD}" type="datetimeFigureOut">
               <a:rPr lang="en-US" smtClean="0"/>
               <a:t>10/3/2026</a:t>
             </a:fld>
@@ -10551,7 +10551,7 @@
           <a:bodyPr/>
           <a:lstStyle/>
           <a:p>
-            <a:fld id="{EB0BFBF9-3444-4A23-A691-88293893E3E4}" type="slidenum">
+            <a:fld id="{D07356AB-B086-4690-8078-803F810DAE76}" type="slidenum">
               <a:rPr lang="en-US" smtClean="0"/>
               <a:t>‹#›</a:t>
             </a:fld>
@@ -10564,7 +10564,7 @@
           <p:cNvPr id="6" name="body">
             <a:extLst>
               <a:ext uri="{FF2B5EF4-FFF2-40B4-BE49-F238E27FC236}">
-                <a16:creationId xmlns:a16="http://schemas.microsoft.com/office/drawing/2014/main" id="{BAD2FB91-AA84-03CA-2604-FFABF3B6AFBC}"/>
+                <a16:creationId xmlns:a16="http://schemas.microsoft.com/office/drawing/2014/main" id="{F898E71E-3751-1FEB-FAB6-3F432A6F238F}"/>
               </a:ext>
             </a:extLst>
           </p:cNvPr>
@@ -10604,7 +10604,7 @@
           <p:cNvPr id="7" name="kpi_value_1">
             <a:extLst>
               <a:ext uri="{FF2B5EF4-FFF2-40B4-BE49-F238E27FC236}">
-                <a16:creationId xmlns:a16="http://schemas.microsoft.com/office/drawing/2014/main" id="{5872BBAB-FAEF-960E-BE29-34B9561182CE}"/>
+                <a16:creationId xmlns:a16="http://schemas.microsoft.com/office/drawing/2014/main" id="{75DEDC43-74DC-048A-2EAB-81F1E0088844}"/>
               </a:ext>
             </a:extLst>
           </p:cNvPr>
@@ -10617,8 +10617,8 @@
         </p:nvSpPr>
         <p:spPr>
           <a:xfrm>
-            <a:off x="1223515" y="2498833"/>
-            <a:ext cx="4361571" cy="1155770"/>
+            <a:off x="1198591" y="2472229"/>
+            <a:ext cx="4411418" cy="1181656"/>
           </a:xfrm>
           <a:prstGeom prst="rect">
             <a:avLst/>
@@ -10657,7 +10657,7 @@
           <p:cNvPr id="8" name="kpi_label_1">
             <a:extLst>
               <a:ext uri="{FF2B5EF4-FFF2-40B4-BE49-F238E27FC236}">
-                <a16:creationId xmlns:a16="http://schemas.microsoft.com/office/drawing/2014/main" id="{84F4B29C-97C1-FA83-FBDE-C6BB112055E7}"/>
+                <a16:creationId xmlns:a16="http://schemas.microsoft.com/office/drawing/2014/main" id="{5801CE97-23DD-4AB2-C5A8-457715C53080}"/>
               </a:ext>
             </a:extLst>
           </p:cNvPr>
@@ -10670,8 +10670,8 @@
         </p:nvSpPr>
         <p:spPr>
           <a:xfrm>
-            <a:off x="1223515" y="3654605"/>
-            <a:ext cx="4361571" cy="642095"/>
+            <a:off x="1198591" y="3653886"/>
+            <a:ext cx="4411418" cy="656475"/>
           </a:xfrm>
           <a:prstGeom prst="rect">
             <a:avLst/>
@@ -10688,7 +10688,7 @@
               </a:spcBef>
               <a:buFontTx/>
               <a:buNone/>
-              <a:defRPr sz="1800"/>
+              <a:defRPr sz="2000"/>
             </a:lvl1pPr>
           </a:lstStyle>
           <a:p>
@@ -10705,7 +10705,7 @@
           <p:cNvPr id="9" name="kpi_value_2">
             <a:extLst>
               <a:ext uri="{FF2B5EF4-FFF2-40B4-BE49-F238E27FC236}">
-                <a16:creationId xmlns:a16="http://schemas.microsoft.com/office/drawing/2014/main" id="{26057D04-5881-EE49-E010-3875E232B1FE}"/>
+                <a16:creationId xmlns:a16="http://schemas.microsoft.com/office/drawing/2014/main" id="{E677F2B5-265C-22EE-DC5E-3C93012845A1}"/>
               </a:ext>
             </a:extLst>
           </p:cNvPr>
@@ -10718,8 +10718,8 @@
         </p:nvSpPr>
         <p:spPr>
           <a:xfrm>
-            <a:off x="6183245" y="2498833"/>
-            <a:ext cx="4361571" cy="1155770"/>
+            <a:off x="6158321" y="2472229"/>
+            <a:ext cx="4411418" cy="1181656"/>
           </a:xfrm>
           <a:prstGeom prst="rect">
             <a:avLst/>
@@ -10758,7 +10758,7 @@
           <p:cNvPr id="10" name="kpi_label_2">
             <a:extLst>
               <a:ext uri="{FF2B5EF4-FFF2-40B4-BE49-F238E27FC236}">
-                <a16:creationId xmlns:a16="http://schemas.microsoft.com/office/drawing/2014/main" id="{73E6F1F6-C4FC-6623-F83F-3CDE1A76F3B4}"/>
+                <a16:creationId xmlns:a16="http://schemas.microsoft.com/office/drawing/2014/main" id="{244B2537-7EFA-6BB9-8248-8DE7D3B7ECEA}"/>
               </a:ext>
             </a:extLst>
           </p:cNvPr>
@@ -10771,8 +10771,8 @@
         </p:nvSpPr>
         <p:spPr>
           <a:xfrm>
-            <a:off x="6183245" y="3654605"/>
-            <a:ext cx="4361571" cy="642095"/>
+            <a:off x="6158321" y="3653886"/>
+            <a:ext cx="4411418" cy="656475"/>
           </a:xfrm>
           <a:prstGeom prst="rect">
             <a:avLst/>
@@ -10789,7 +10789,7 @@
               </a:spcBef>
               <a:buFontTx/>
               <a:buNone/>
-              <a:defRPr sz="1800"/>
+              <a:defRPr sz="2000"/>
             </a:lvl1pPr>
           </a:lstStyle>
           <a:p>
@@ -10806,7 +10806,7 @@
           <p:cNvPr id="11" name="source">
             <a:extLst>
               <a:ext uri="{FF2B5EF4-FFF2-40B4-BE49-F238E27FC236}">
-                <a16:creationId xmlns:a16="http://schemas.microsoft.com/office/drawing/2014/main" id="{9DCDBD28-9A0E-8609-6118-015D764718D8}"/>
+                <a16:creationId xmlns:a16="http://schemas.microsoft.com/office/drawing/2014/main" id="{04D353A9-1ACC-598F-7EE6-936303CAFCD9}"/>
               </a:ext>
             </a:extLst>
           </p:cNvPr>
@@ -10861,7 +10861,7 @@
     </p:spTree>
     <p:extLst>
       <p:ext uri="{BB962C8B-B14F-4D97-AF65-F5344CB8AC3E}">
-        <p14:creationId xmlns:p14="http://schemas.microsoft.com/office/powerpoint/2010/main" val="2185825739"/>
+        <p14:creationId xmlns:p14="http://schemas.microsoft.com/office/powerpoint/2010/main" val="3170605574"/>
       </p:ext>
     </p:extLst>
   </p:cSld>
@@ -10930,7 +10930,7 @@
           <a:bodyPr/>
           <a:lstStyle/>
           <a:p>
-            <a:fld id="{DAA401AF-96B9-4795-80AC-645028D14909}" type="datetimeFigureOut">
+            <a:fld id="{C108DDE1-F741-4F4F-A7D2-FBD0359B97CD}" type="datetimeFigureOut">
               <a:rPr lang="en-US" smtClean="0"/>
               <a:t>10/3/2026</a:t>
             </a:fld>
@@ -10972,7 +10972,7 @@
           <a:bodyPr/>
           <a:lstStyle/>
           <a:p>
-            <a:fld id="{EB0BFBF9-3444-4A23-A691-88293893E3E4}" type="slidenum">
+            <a:fld id="{D07356AB-B086-4690-8078-803F810DAE76}" type="slidenum">
               <a:rPr lang="en-US" smtClean="0"/>
               <a:t>‹#›</a:t>
             </a:fld>
@@ -10985,7 +10985,7 @@
           <p:cNvPr id="6" name="body">
             <a:extLst>
               <a:ext uri="{FF2B5EF4-FFF2-40B4-BE49-F238E27FC236}">
-                <a16:creationId xmlns:a16="http://schemas.microsoft.com/office/drawing/2014/main" id="{F28EF123-67D8-F20C-F4E6-DFC6C1DB8CD1}"/>
+                <a16:creationId xmlns:a16="http://schemas.microsoft.com/office/drawing/2014/main" id="{3F1B8759-0486-0014-AFF3-379E9AB07EB1}"/>
               </a:ext>
             </a:extLst>
           </p:cNvPr>
@@ -11025,7 +11025,7 @@
           <p:cNvPr id="7" name="kpi_value_1">
             <a:extLst>
               <a:ext uri="{FF2B5EF4-FFF2-40B4-BE49-F238E27FC236}">
-                <a16:creationId xmlns:a16="http://schemas.microsoft.com/office/drawing/2014/main" id="{342D7D4A-384D-C093-2467-B7018198CF59}"/>
+                <a16:creationId xmlns:a16="http://schemas.microsoft.com/office/drawing/2014/main" id="{0D29E90A-86C4-8FA6-2DEC-0C85D5999F72}"/>
               </a:ext>
             </a:extLst>
           </p:cNvPr>
@@ -11056,7 +11056,7 @@
               </a:spcBef>
               <a:buFontTx/>
               <a:buNone/>
-              <a:defRPr sz="4000" b="1">
+              <a:defRPr sz="6000" b="1">
                 <a:solidFill>
                   <a:schemeClr val="accent1"/>
                 </a:solidFill>
@@ -11078,7 +11078,7 @@
           <p:cNvPr id="8" name="kpi_label_1">
             <a:extLst>
               <a:ext uri="{FF2B5EF4-FFF2-40B4-BE49-F238E27FC236}">
-                <a16:creationId xmlns:a16="http://schemas.microsoft.com/office/drawing/2014/main" id="{24B6EF14-71F1-7878-31E5-C26B4E59A2E8}"/>
+                <a16:creationId xmlns:a16="http://schemas.microsoft.com/office/drawing/2014/main" id="{6EC6DFB3-F40E-A027-0051-E89BB7D35158}"/>
               </a:ext>
             </a:extLst>
           </p:cNvPr>
@@ -11109,7 +11109,7 @@
               </a:spcBef>
               <a:buFontTx/>
               <a:buNone/>
-              <a:defRPr sz="1800"/>
+              <a:defRPr sz="2000"/>
             </a:lvl1pPr>
           </a:lstStyle>
           <a:p>
@@ -11126,7 +11126,7 @@
           <p:cNvPr id="9" name="kpi_value_2">
             <a:extLst>
               <a:ext uri="{FF2B5EF4-FFF2-40B4-BE49-F238E27FC236}">
-                <a16:creationId xmlns:a16="http://schemas.microsoft.com/office/drawing/2014/main" id="{CEECE2F0-7006-DD76-A236-C6641692AE03}"/>
+                <a16:creationId xmlns:a16="http://schemas.microsoft.com/office/drawing/2014/main" id="{24395A4D-6699-568B-8920-C3666A74562F}"/>
               </a:ext>
             </a:extLst>
           </p:cNvPr>
@@ -11157,7 +11157,7 @@
               </a:spcBef>
               <a:buFontTx/>
               <a:buNone/>
-              <a:defRPr sz="4000" b="1">
+              <a:defRPr sz="6000" b="1">
                 <a:solidFill>
                   <a:schemeClr val="accent1"/>
                 </a:solidFill>
@@ -11179,7 +11179,7 @@
           <p:cNvPr id="10" name="kpi_label_2">
             <a:extLst>
               <a:ext uri="{FF2B5EF4-FFF2-40B4-BE49-F238E27FC236}">
-                <a16:creationId xmlns:a16="http://schemas.microsoft.com/office/drawing/2014/main" id="{0C0DDF2A-F1B5-35CF-01A3-DBF94139507A}"/>
+                <a16:creationId xmlns:a16="http://schemas.microsoft.com/office/drawing/2014/main" id="{29B6E245-03B0-8E16-61BC-1A7691BC56F6}"/>
               </a:ext>
             </a:extLst>
           </p:cNvPr>
@@ -11210,7 +11210,7 @@
               </a:spcBef>
               <a:buFontTx/>
               <a:buNone/>
-              <a:defRPr sz="1800"/>
+              <a:defRPr sz="2000"/>
             </a:lvl1pPr>
           </a:lstStyle>
           <a:p>
@@ -11227,7 +11227,7 @@
           <p:cNvPr id="11" name="kpi_value_3">
             <a:extLst>
               <a:ext uri="{FF2B5EF4-FFF2-40B4-BE49-F238E27FC236}">
-                <a16:creationId xmlns:a16="http://schemas.microsoft.com/office/drawing/2014/main" id="{64DC19BF-BA6F-33F6-5DBE-045F3F8FB35E}"/>
+                <a16:creationId xmlns:a16="http://schemas.microsoft.com/office/drawing/2014/main" id="{93D47B9B-7E39-F27E-426D-81C750F76155}"/>
               </a:ext>
             </a:extLst>
           </p:cNvPr>
@@ -11258,7 +11258,7 @@
               </a:spcBef>
               <a:buFontTx/>
               <a:buNone/>
-              <a:defRPr sz="4000" b="1">
+              <a:defRPr sz="6000" b="1">
                 <a:solidFill>
                   <a:schemeClr val="accent1"/>
                 </a:solidFill>
@@ -11280,7 +11280,7 @@
           <p:cNvPr id="12" name="kpi_label_3">
             <a:extLst>
               <a:ext uri="{FF2B5EF4-FFF2-40B4-BE49-F238E27FC236}">
-                <a16:creationId xmlns:a16="http://schemas.microsoft.com/office/drawing/2014/main" id="{011DB25E-0122-9C78-2ABB-34B85C9E8804}"/>
+                <a16:creationId xmlns:a16="http://schemas.microsoft.com/office/drawing/2014/main" id="{E90E6EDF-265E-C2A2-99D5-2BAE69B11D9F}"/>
               </a:ext>
             </a:extLst>
           </p:cNvPr>
@@ -11311,7 +11311,7 @@
               </a:spcBef>
               <a:buFontTx/>
               <a:buNone/>
-              <a:defRPr sz="1800"/>
+              <a:defRPr sz="2000"/>
             </a:lvl1pPr>
           </a:lstStyle>
           <a:p>
@@ -11328,7 +11328,7 @@
           <p:cNvPr id="13" name="kpi_value_4">
             <a:extLst>
               <a:ext uri="{FF2B5EF4-FFF2-40B4-BE49-F238E27FC236}">
-                <a16:creationId xmlns:a16="http://schemas.microsoft.com/office/drawing/2014/main" id="{4AC2D064-0A0B-7EDB-5452-7087C320C205}"/>
+                <a16:creationId xmlns:a16="http://schemas.microsoft.com/office/drawing/2014/main" id="{AFE603CA-B4CE-C708-9944-1CFD39982579}"/>
               </a:ext>
             </a:extLst>
           </p:cNvPr>
@@ -11359,7 +11359,7 @@
               </a:spcBef>
               <a:buFontTx/>
               <a:buNone/>
-              <a:defRPr sz="4000" b="1">
+              <a:defRPr sz="6000" b="1">
                 <a:solidFill>
                   <a:schemeClr val="accent1"/>
                 </a:solidFill>
@@ -11381,7 +11381,7 @@
           <p:cNvPr id="14" name="kpi_label_4">
             <a:extLst>
               <a:ext uri="{FF2B5EF4-FFF2-40B4-BE49-F238E27FC236}">
-                <a16:creationId xmlns:a16="http://schemas.microsoft.com/office/drawing/2014/main" id="{5A8060D5-9D25-41BF-C9A7-3AC3D13E680D}"/>
+                <a16:creationId xmlns:a16="http://schemas.microsoft.com/office/drawing/2014/main" id="{FAF90D06-9101-6988-AAB7-B2DA757B111E}"/>
               </a:ext>
             </a:extLst>
           </p:cNvPr>
@@ -11412,7 +11412,7 @@
               </a:spcBef>
               <a:buFontTx/>
               <a:buNone/>
-              <a:defRPr sz="1800"/>
+              <a:defRPr sz="2000"/>
             </a:lvl1pPr>
           </a:lstStyle>
           <a:p>
@@ -11429,7 +11429,7 @@
           <p:cNvPr id="15" name="source">
             <a:extLst>
               <a:ext uri="{FF2B5EF4-FFF2-40B4-BE49-F238E27FC236}">
-                <a16:creationId xmlns:a16="http://schemas.microsoft.com/office/drawing/2014/main" id="{11A102C9-2042-DC4E-A090-E0A5E312BE84}"/>
+                <a16:creationId xmlns:a16="http://schemas.microsoft.com/office/drawing/2014/main" id="{01EF0D34-5296-BFD0-242B-2610CF27FE92}"/>
               </a:ext>
             </a:extLst>
           </p:cNvPr>
@@ -11484,7 +11484,7 @@
     </p:spTree>
     <p:extLst>
       <p:ext uri="{BB962C8B-B14F-4D97-AF65-F5344CB8AC3E}">
-        <p14:creationId xmlns:p14="http://schemas.microsoft.com/office/powerpoint/2010/main" val="1865179173"/>
+        <p14:creationId xmlns:p14="http://schemas.microsoft.com/office/powerpoint/2010/main" val="4122462959"/>
       </p:ext>
     </p:extLst>
   </p:cSld>
@@ -11553,7 +11553,7 @@
           <a:bodyPr/>
           <a:lstStyle/>
           <a:p>
-            <a:fld id="{DAA401AF-96B9-4795-80AC-645028D14909}" type="datetimeFigureOut">
+            <a:fld id="{C108DDE1-F741-4F4F-A7D2-FBD0359B97CD}" type="datetimeFigureOut">
               <a:rPr lang="en-US" smtClean="0"/>
               <a:t>10/3/2026</a:t>
             </a:fld>
@@ -11595,7 +11595,7 @@
           <a:bodyPr/>
           <a:lstStyle/>
           <a:p>
-            <a:fld id="{EB0BFBF9-3444-4A23-A691-88293893E3E4}" type="slidenum">
+            <a:fld id="{D07356AB-B086-4690-8078-803F810DAE76}" type="slidenum">
               <a:rPr lang="en-US" smtClean="0"/>
               <a:t>‹#›</a:t>
             </a:fld>
@@ -11608,7 +11608,7 @@
           <p:cNvPr id="6" name="item_1_title">
             <a:extLst>
               <a:ext uri="{FF2B5EF4-FFF2-40B4-BE49-F238E27FC236}">
-                <a16:creationId xmlns:a16="http://schemas.microsoft.com/office/drawing/2014/main" id="{A8B2AD31-0C3C-646D-6A79-4DDEE9F86E4B}"/>
+                <a16:creationId xmlns:a16="http://schemas.microsoft.com/office/drawing/2014/main" id="{2899F7A0-FFBA-0B87-BABD-F1B886778F24}"/>
               </a:ext>
             </a:extLst>
           </p:cNvPr>
@@ -11636,7 +11636,7 @@
               </a:spcBef>
               <a:buFontTx/>
               <a:buNone/>
-              <a:defRPr sz="2200" b="1">
+              <a:defRPr sz="2000" b="1">
                 <a:solidFill>
                   <a:schemeClr val="accent1"/>
                 </a:solidFill>
@@ -11658,7 +11658,7 @@
           <p:cNvPr id="7" name="item_1">
             <a:extLst>
               <a:ext uri="{FF2B5EF4-FFF2-40B4-BE49-F238E27FC236}">
-                <a16:creationId xmlns:a16="http://schemas.microsoft.com/office/drawing/2014/main" id="{8F41DCCC-BF6D-A5C3-EC15-710059B62A2E}"/>
+                <a16:creationId xmlns:a16="http://schemas.microsoft.com/office/drawing/2014/main" id="{C32C9439-EFD8-E54B-8715-46027C3C4246}"/>
               </a:ext>
             </a:extLst>
           </p:cNvPr>
@@ -11706,7 +11706,7 @@
           <p:cNvPr id="8" name="item_2_title">
             <a:extLst>
               <a:ext uri="{FF2B5EF4-FFF2-40B4-BE49-F238E27FC236}">
-                <a16:creationId xmlns:a16="http://schemas.microsoft.com/office/drawing/2014/main" id="{2A3E9F86-94A2-632A-9911-09A8F497272A}"/>
+                <a16:creationId xmlns:a16="http://schemas.microsoft.com/office/drawing/2014/main" id="{E6EF1ABA-C2A3-8885-FB64-18D6E6A34C18}"/>
               </a:ext>
             </a:extLst>
           </p:cNvPr>
@@ -11737,7 +11737,7 @@
               </a:spcBef>
               <a:buFontTx/>
               <a:buNone/>
-              <a:defRPr sz="2200" b="1">
+              <a:defRPr sz="2000" b="1">
                 <a:solidFill>
                   <a:schemeClr val="accent1"/>
                 </a:solidFill>
@@ -11759,7 +11759,7 @@
           <p:cNvPr id="9" name="item_2">
             <a:extLst>
               <a:ext uri="{FF2B5EF4-FFF2-40B4-BE49-F238E27FC236}">
-                <a16:creationId xmlns:a16="http://schemas.microsoft.com/office/drawing/2014/main" id="{1F548D48-48F6-E28D-9493-1AF2FCA7E0C5}"/>
+                <a16:creationId xmlns:a16="http://schemas.microsoft.com/office/drawing/2014/main" id="{E75D14FB-EB9B-F8DC-D117-87F64E1B550B}"/>
               </a:ext>
             </a:extLst>
           </p:cNvPr>
@@ -11807,7 +11807,7 @@
           <p:cNvPr id="10" name="item_3_title">
             <a:extLst>
               <a:ext uri="{FF2B5EF4-FFF2-40B4-BE49-F238E27FC236}">
-                <a16:creationId xmlns:a16="http://schemas.microsoft.com/office/drawing/2014/main" id="{736F9D57-9DEE-D9E5-7A3C-A1F5D69662DC}"/>
+                <a16:creationId xmlns:a16="http://schemas.microsoft.com/office/drawing/2014/main" id="{2E1D670C-CF57-E9E7-66F9-473348291B69}"/>
               </a:ext>
             </a:extLst>
           </p:cNvPr>
@@ -11838,7 +11838,7 @@
               </a:spcBef>
               <a:buFontTx/>
               <a:buNone/>
-              <a:defRPr sz="2200" b="1">
+              <a:defRPr sz="2000" b="1">
                 <a:solidFill>
                   <a:schemeClr val="accent1"/>
                 </a:solidFill>
@@ -11860,7 +11860,7 @@
           <p:cNvPr id="11" name="item_3">
             <a:extLst>
               <a:ext uri="{FF2B5EF4-FFF2-40B4-BE49-F238E27FC236}">
-                <a16:creationId xmlns:a16="http://schemas.microsoft.com/office/drawing/2014/main" id="{CB4A2E22-F94E-B6BA-6851-2F14442F7417}"/>
+                <a16:creationId xmlns:a16="http://schemas.microsoft.com/office/drawing/2014/main" id="{09CBE295-7FDC-412C-818F-148C999DCD84}"/>
               </a:ext>
             </a:extLst>
           </p:cNvPr>
@@ -11908,7 +11908,7 @@
           <p:cNvPr id="12" name="item_4_title">
             <a:extLst>
               <a:ext uri="{FF2B5EF4-FFF2-40B4-BE49-F238E27FC236}">
-                <a16:creationId xmlns:a16="http://schemas.microsoft.com/office/drawing/2014/main" id="{9FEB9D21-471D-4852-AAF2-80B5D5A5CC8C}"/>
+                <a16:creationId xmlns:a16="http://schemas.microsoft.com/office/drawing/2014/main" id="{54A34F54-C78A-0F35-4BD1-E93354345A4B}"/>
               </a:ext>
             </a:extLst>
           </p:cNvPr>
@@ -11939,7 +11939,7 @@
               </a:spcBef>
               <a:buFontTx/>
               <a:buNone/>
-              <a:defRPr sz="2200" b="1">
+              <a:defRPr sz="2000" b="1">
                 <a:solidFill>
                   <a:schemeClr val="accent1"/>
                 </a:solidFill>
@@ -11961,7 +11961,7 @@
           <p:cNvPr id="13" name="item_4">
             <a:extLst>
               <a:ext uri="{FF2B5EF4-FFF2-40B4-BE49-F238E27FC236}">
-                <a16:creationId xmlns:a16="http://schemas.microsoft.com/office/drawing/2014/main" id="{AAB87700-7F2D-9E36-0858-B51D1183F174}"/>
+                <a16:creationId xmlns:a16="http://schemas.microsoft.com/office/drawing/2014/main" id="{B931CDAC-86AF-E576-04B3-F1157D5529CB}"/>
               </a:ext>
             </a:extLst>
           </p:cNvPr>
@@ -12009,7 +12009,7 @@
           <p:cNvPr id="14" name="source">
             <a:extLst>
               <a:ext uri="{FF2B5EF4-FFF2-40B4-BE49-F238E27FC236}">
-                <a16:creationId xmlns:a16="http://schemas.microsoft.com/office/drawing/2014/main" id="{2F740730-F2E9-C27B-F15E-483F6B3DB07E}"/>
+                <a16:creationId xmlns:a16="http://schemas.microsoft.com/office/drawing/2014/main" id="{8C8B4D43-4692-0555-B25A-99805622549C}"/>
               </a:ext>
             </a:extLst>
           </p:cNvPr>
@@ -12064,7 +12064,7 @@
     </p:spTree>
     <p:extLst>
       <p:ext uri="{BB962C8B-B14F-4D97-AF65-F5344CB8AC3E}">
-        <p14:creationId xmlns:p14="http://schemas.microsoft.com/office/powerpoint/2010/main" val="1518598685"/>
+        <p14:creationId xmlns:p14="http://schemas.microsoft.com/office/powerpoint/2010/main" val="3418667386"/>
       </p:ext>
     </p:extLst>
   </p:cSld>
@@ -12133,7 +12133,7 @@
           <a:bodyPr/>
           <a:lstStyle/>
           <a:p>
-            <a:fld id="{DAA401AF-96B9-4795-80AC-645028D14909}" type="datetimeFigureOut">
+            <a:fld id="{C108DDE1-F741-4F4F-A7D2-FBD0359B97CD}" type="datetimeFigureOut">
               <a:rPr lang="en-US" smtClean="0"/>
               <a:t>10/3/2026</a:t>
             </a:fld>
@@ -12175,7 +12175,7 @@
           <a:bodyPr/>
           <a:lstStyle/>
           <a:p>
-            <a:fld id="{EB0BFBF9-3444-4A23-A691-88293893E3E4}" type="slidenum">
+            <a:fld id="{D07356AB-B086-4690-8078-803F810DAE76}" type="slidenum">
               <a:rPr lang="en-US" smtClean="0"/>
               <a:t>‹#›</a:t>
             </a:fld>
@@ -12188,7 +12188,7 @@
           <p:cNvPr id="6" name="marker_1">
             <a:extLst>
               <a:ext uri="{FF2B5EF4-FFF2-40B4-BE49-F238E27FC236}">
-                <a16:creationId xmlns:a16="http://schemas.microsoft.com/office/drawing/2014/main" id="{221065D5-9C6A-1DFF-EF94-609983D241BF}"/>
+                <a16:creationId xmlns:a16="http://schemas.microsoft.com/office/drawing/2014/main" id="{DDFB4738-FA72-5138-0E36-3C52956441C2}"/>
               </a:ext>
             </a:extLst>
           </p:cNvPr>
@@ -12201,7 +12201,7 @@
         </p:nvSpPr>
         <p:spPr>
           <a:xfrm>
-            <a:off x="1223514" y="2498834"/>
+            <a:off x="1198591" y="2472230"/>
             <a:ext cx="548312" cy="585291"/>
           </a:xfrm>
           <a:prstGeom prst="ellipse">
@@ -12222,7 +12222,7 @@
               </a:spcBef>
               <a:buFontTx/>
               <a:buNone/>
-              <a:defRPr sz="2400" b="1">
+              <a:defRPr sz="2000" b="1">
                 <a:solidFill>
                   <a:schemeClr val="bg1"/>
                 </a:solidFill>
@@ -12244,7 +12244,7 @@
           <p:cNvPr id="7" name="item_1_title">
             <a:extLst>
               <a:ext uri="{FF2B5EF4-FFF2-40B4-BE49-F238E27FC236}">
-                <a16:creationId xmlns:a16="http://schemas.microsoft.com/office/drawing/2014/main" id="{E982581C-036A-5018-72AD-C9769D9D99F6}"/>
+                <a16:creationId xmlns:a16="http://schemas.microsoft.com/office/drawing/2014/main" id="{49F0D445-C405-C32F-E85C-9BA98C83E339}"/>
               </a:ext>
             </a:extLst>
           </p:cNvPr>
@@ -12257,8 +12257,8 @@
         </p:nvSpPr>
         <p:spPr>
           <a:xfrm>
-            <a:off x="1871519" y="2498833"/>
-            <a:ext cx="8673296" cy="371676"/>
+            <a:off x="1846597" y="2472230"/>
+            <a:ext cx="8723143" cy="387325"/>
           </a:xfrm>
           <a:prstGeom prst="rect">
             <a:avLst/>
@@ -12275,7 +12275,7 @@
               </a:spcBef>
               <a:buFontTx/>
               <a:buNone/>
-              <a:defRPr sz="2200" b="1">
+              <a:defRPr sz="2000" b="1">
                 <a:solidFill>
                   <a:schemeClr val="accent1"/>
                 </a:solidFill>
@@ -12297,7 +12297,7 @@
           <p:cNvPr id="8" name="item_1">
             <a:extLst>
               <a:ext uri="{FF2B5EF4-FFF2-40B4-BE49-F238E27FC236}">
-                <a16:creationId xmlns:a16="http://schemas.microsoft.com/office/drawing/2014/main" id="{7D95540D-AD73-1D7D-9A5E-A15D2314DCD5}"/>
+                <a16:creationId xmlns:a16="http://schemas.microsoft.com/office/drawing/2014/main" id="{3DAA7F01-B56A-4E86-D0BB-F33423AA3F6E}"/>
               </a:ext>
             </a:extLst>
           </p:cNvPr>
@@ -12310,8 +12310,8 @@
         </p:nvSpPr>
         <p:spPr>
           <a:xfrm>
-            <a:off x="1871519" y="2870510"/>
-            <a:ext cx="8673296" cy="892021"/>
+            <a:off x="1846597" y="2859554"/>
+            <a:ext cx="8723143" cy="929580"/>
           </a:xfrm>
           <a:prstGeom prst="rect">
             <a:avLst/>
@@ -12345,7 +12345,7 @@
           <p:cNvPr id="9" name="marker_2">
             <a:extLst>
               <a:ext uri="{FF2B5EF4-FFF2-40B4-BE49-F238E27FC236}">
-                <a16:creationId xmlns:a16="http://schemas.microsoft.com/office/drawing/2014/main" id="{80BC64D5-0717-CEA4-1BF6-BDCEF0512BEE}"/>
+                <a16:creationId xmlns:a16="http://schemas.microsoft.com/office/drawing/2014/main" id="{4EAEB330-5701-BF9D-4399-6219B36DB004}"/>
               </a:ext>
             </a:extLst>
           </p:cNvPr>
@@ -12358,7 +12358,7 @@
         </p:nvSpPr>
         <p:spPr>
           <a:xfrm>
-            <a:off x="1223514" y="4401031"/>
+            <a:off x="1198591" y="4374427"/>
             <a:ext cx="548312" cy="585291"/>
           </a:xfrm>
           <a:prstGeom prst="ellipse">
@@ -12379,7 +12379,7 @@
               </a:spcBef>
               <a:buFontTx/>
               <a:buNone/>
-              <a:defRPr sz="2400" b="1">
+              <a:defRPr sz="2000" b="1">
                 <a:solidFill>
                   <a:schemeClr val="bg1"/>
                 </a:solidFill>
@@ -12401,7 +12401,7 @@
           <p:cNvPr id="10" name="item_2_title">
             <a:extLst>
               <a:ext uri="{FF2B5EF4-FFF2-40B4-BE49-F238E27FC236}">
-                <a16:creationId xmlns:a16="http://schemas.microsoft.com/office/drawing/2014/main" id="{64547FEB-60A4-5985-9B43-B03DD34C162F}"/>
+                <a16:creationId xmlns:a16="http://schemas.microsoft.com/office/drawing/2014/main" id="{00E7E801-C513-2096-5395-97E177168B1A}"/>
               </a:ext>
             </a:extLst>
           </p:cNvPr>
@@ -12414,8 +12414,8 @@
         </p:nvSpPr>
         <p:spPr>
           <a:xfrm>
-            <a:off x="1871519" y="4401030"/>
-            <a:ext cx="8673296" cy="371676"/>
+            <a:off x="1846597" y="4374427"/>
+            <a:ext cx="8723143" cy="387325"/>
           </a:xfrm>
           <a:prstGeom prst="rect">
             <a:avLst/>
@@ -12432,7 +12432,7 @@
               </a:spcBef>
               <a:buFontTx/>
               <a:buNone/>
-              <a:defRPr sz="2200" b="1">
+              <a:defRPr sz="2000" b="1">
                 <a:solidFill>
                   <a:schemeClr val="accent1"/>
                 </a:solidFill>
@@ -12454,7 +12454,7 @@
           <p:cNvPr id="11" name="item_2">
             <a:extLst>
               <a:ext uri="{FF2B5EF4-FFF2-40B4-BE49-F238E27FC236}">
-                <a16:creationId xmlns:a16="http://schemas.microsoft.com/office/drawing/2014/main" id="{818A896B-4577-A36D-07A7-1F6429B57A1E}"/>
+                <a16:creationId xmlns:a16="http://schemas.microsoft.com/office/drawing/2014/main" id="{A061DC3E-7101-425D-5EAD-669420F2BE20}"/>
               </a:ext>
             </a:extLst>
           </p:cNvPr>
@@ -12467,8 +12467,8 @@
         </p:nvSpPr>
         <p:spPr>
           <a:xfrm>
-            <a:off x="1871519" y="4772706"/>
-            <a:ext cx="8673296" cy="892021"/>
+            <a:off x="1846597" y="4761750"/>
+            <a:ext cx="8723143" cy="929580"/>
           </a:xfrm>
           <a:prstGeom prst="rect">
             <a:avLst/>
@@ -12502,7 +12502,7 @@
           <p:cNvPr id="12" name="source">
             <a:extLst>
               <a:ext uri="{FF2B5EF4-FFF2-40B4-BE49-F238E27FC236}">
-                <a16:creationId xmlns:a16="http://schemas.microsoft.com/office/drawing/2014/main" id="{B6A1397F-A2C9-245C-494D-2BEA3AAD5413}"/>
+                <a16:creationId xmlns:a16="http://schemas.microsoft.com/office/drawing/2014/main" id="{8239092F-B2A4-2EA4-5D29-D2D88F07A8EE}"/>
               </a:ext>
             </a:extLst>
           </p:cNvPr>
@@ -12557,7 +12557,7 @@
     </p:spTree>
     <p:extLst>
       <p:ext uri="{BB962C8B-B14F-4D97-AF65-F5344CB8AC3E}">
-        <p14:creationId xmlns:p14="http://schemas.microsoft.com/office/powerpoint/2010/main" val="264933512"/>
+        <p14:creationId xmlns:p14="http://schemas.microsoft.com/office/powerpoint/2010/main" val="206712502"/>
       </p:ext>
     </p:extLst>
   </p:cSld>
@@ -12626,7 +12626,7 @@
           <a:bodyPr/>
           <a:lstStyle/>
           <a:p>
-            <a:fld id="{DAA401AF-96B9-4795-80AC-645028D14909}" type="datetimeFigureOut">
+            <a:fld id="{C108DDE1-F741-4F4F-A7D2-FBD0359B97CD}" type="datetimeFigureOut">
               <a:rPr lang="en-US" smtClean="0"/>
               <a:t>10/3/2026</a:t>
             </a:fld>
@@ -12668,7 +12668,7 @@
           <a:bodyPr/>
           <a:lstStyle/>
           <a:p>
-            <a:fld id="{EB0BFBF9-3444-4A23-A691-88293893E3E4}" type="slidenum">
+            <a:fld id="{D07356AB-B086-4690-8078-803F810DAE76}" type="slidenum">
               <a:rPr lang="en-US" smtClean="0"/>
               <a:t>‹#›</a:t>
             </a:fld>
@@ -12681,7 +12681,7 @@
           <p:cNvPr id="6" name="item_1_title">
             <a:extLst>
               <a:ext uri="{FF2B5EF4-FFF2-40B4-BE49-F238E27FC236}">
-                <a16:creationId xmlns:a16="http://schemas.microsoft.com/office/drawing/2014/main" id="{FFD82758-42C2-C072-899A-E85117BEC6D9}"/>
+                <a16:creationId xmlns:a16="http://schemas.microsoft.com/office/drawing/2014/main" id="{B2FF1E36-8BCA-FCC4-47AD-CA06DEEB4ECC}"/>
               </a:ext>
             </a:extLst>
           </p:cNvPr>
@@ -12694,8 +12694,8 @@
         </p:nvSpPr>
         <p:spPr>
           <a:xfrm>
-            <a:off x="1223514" y="2498833"/>
-            <a:ext cx="4361571" cy="371676"/>
+            <a:off x="1198591" y="2472230"/>
+            <a:ext cx="4411418" cy="387325"/>
           </a:xfrm>
         </p:spPr>
         <p:txBody>
@@ -12709,7 +12709,7 @@
               </a:spcBef>
               <a:buFontTx/>
               <a:buNone/>
-              <a:defRPr sz="2200" b="1">
+              <a:defRPr sz="2000" b="1">
                 <a:solidFill>
                   <a:schemeClr val="accent1"/>
                 </a:solidFill>
@@ -12731,7 +12731,7 @@
           <p:cNvPr id="7" name="item_1">
             <a:extLst>
               <a:ext uri="{FF2B5EF4-FFF2-40B4-BE49-F238E27FC236}">
-                <a16:creationId xmlns:a16="http://schemas.microsoft.com/office/drawing/2014/main" id="{ABA06CA9-5D5A-B624-F917-271934538827}"/>
+                <a16:creationId xmlns:a16="http://schemas.microsoft.com/office/drawing/2014/main" id="{C1298EF6-7B55-84CB-AE12-950FD40DCAEC}"/>
               </a:ext>
             </a:extLst>
           </p:cNvPr>
@@ -12744,8 +12744,8 @@
         </p:nvSpPr>
         <p:spPr>
           <a:xfrm>
-            <a:off x="1223515" y="2870510"/>
-            <a:ext cx="4361571" cy="892021"/>
+            <a:off x="1198591" y="2859554"/>
+            <a:ext cx="4411418" cy="929580"/>
           </a:xfrm>
           <a:prstGeom prst="rect">
             <a:avLst/>
@@ -12779,7 +12779,7 @@
           <p:cNvPr id="8" name="item_2_title">
             <a:extLst>
               <a:ext uri="{FF2B5EF4-FFF2-40B4-BE49-F238E27FC236}">
-                <a16:creationId xmlns:a16="http://schemas.microsoft.com/office/drawing/2014/main" id="{B5AD2B33-663E-0063-3A2E-9516514A286E}"/>
+                <a16:creationId xmlns:a16="http://schemas.microsoft.com/office/drawing/2014/main" id="{2196C3B6-CFA8-564F-16FF-26EFBD63BE11}"/>
               </a:ext>
             </a:extLst>
           </p:cNvPr>
@@ -12792,8 +12792,8 @@
         </p:nvSpPr>
         <p:spPr>
           <a:xfrm>
-            <a:off x="6183245" y="2498833"/>
-            <a:ext cx="4361571" cy="371676"/>
+            <a:off x="6158321" y="2472230"/>
+            <a:ext cx="4411418" cy="387325"/>
           </a:xfrm>
           <a:prstGeom prst="rect">
             <a:avLst/>
@@ -12810,7 +12810,7 @@
               </a:spcBef>
               <a:buFontTx/>
               <a:buNone/>
-              <a:defRPr sz="2200" b="1">
+              <a:defRPr sz="2000" b="1">
                 <a:solidFill>
                   <a:schemeClr val="accent1"/>
                 </a:solidFill>
@@ -12832,7 +12832,7 @@
           <p:cNvPr id="9" name="item_2">
             <a:extLst>
               <a:ext uri="{FF2B5EF4-FFF2-40B4-BE49-F238E27FC236}">
-                <a16:creationId xmlns:a16="http://schemas.microsoft.com/office/drawing/2014/main" id="{70653820-669D-ECA2-9CB1-2267EE5285D0}"/>
+                <a16:creationId xmlns:a16="http://schemas.microsoft.com/office/drawing/2014/main" id="{53E8CB61-3B3D-876F-5873-158B4E87E4D9}"/>
               </a:ext>
             </a:extLst>
           </p:cNvPr>
@@ -12845,8 +12845,8 @@
         </p:nvSpPr>
         <p:spPr>
           <a:xfrm>
-            <a:off x="6183245" y="2870510"/>
-            <a:ext cx="4361571" cy="892021"/>
+            <a:off x="6158321" y="2859554"/>
+            <a:ext cx="4411418" cy="929580"/>
           </a:xfrm>
           <a:prstGeom prst="rect">
             <a:avLst/>
@@ -12880,7 +12880,7 @@
           <p:cNvPr id="10" name="item_3_title">
             <a:extLst>
               <a:ext uri="{FF2B5EF4-FFF2-40B4-BE49-F238E27FC236}">
-                <a16:creationId xmlns:a16="http://schemas.microsoft.com/office/drawing/2014/main" id="{6EF3FF76-9A46-8D1A-A174-3A4401CE09C5}"/>
+                <a16:creationId xmlns:a16="http://schemas.microsoft.com/office/drawing/2014/main" id="{2455C002-CFF3-5FB7-3F35-B910B12D4F41}"/>
               </a:ext>
             </a:extLst>
           </p:cNvPr>
@@ -12893,8 +12893,8 @@
         </p:nvSpPr>
         <p:spPr>
           <a:xfrm>
-            <a:off x="1223515" y="4401030"/>
-            <a:ext cx="4361571" cy="371676"/>
+            <a:off x="1198591" y="4374427"/>
+            <a:ext cx="4411418" cy="387325"/>
           </a:xfrm>
           <a:prstGeom prst="rect">
             <a:avLst/>
@@ -12911,7 +12911,7 @@
               </a:spcBef>
               <a:buFontTx/>
               <a:buNone/>
-              <a:defRPr sz="2200" b="1">
+              <a:defRPr sz="2000" b="1">
                 <a:solidFill>
                   <a:schemeClr val="accent1"/>
                 </a:solidFill>
@@ -12933,7 +12933,7 @@
           <p:cNvPr id="11" name="item_3">
             <a:extLst>
               <a:ext uri="{FF2B5EF4-FFF2-40B4-BE49-F238E27FC236}">
-                <a16:creationId xmlns:a16="http://schemas.microsoft.com/office/drawing/2014/main" id="{1BC629BD-988F-6A9F-5F9A-5F01E5A4DE1B}"/>
+                <a16:creationId xmlns:a16="http://schemas.microsoft.com/office/drawing/2014/main" id="{3B96DEF9-6D67-E8BB-E417-1D4031990A82}"/>
               </a:ext>
             </a:extLst>
           </p:cNvPr>
@@ -12946,8 +12946,8 @@
         </p:nvSpPr>
         <p:spPr>
           <a:xfrm>
-            <a:off x="1223515" y="4772706"/>
-            <a:ext cx="4361571" cy="892021"/>
+            <a:off x="1198591" y="4761750"/>
+            <a:ext cx="4411418" cy="929580"/>
           </a:xfrm>
           <a:prstGeom prst="rect">
             <a:avLst/>
@@ -12981,7 +12981,7 @@
           <p:cNvPr id="12" name="item_4_title">
             <a:extLst>
               <a:ext uri="{FF2B5EF4-FFF2-40B4-BE49-F238E27FC236}">
-                <a16:creationId xmlns:a16="http://schemas.microsoft.com/office/drawing/2014/main" id="{C4E2B962-28D0-4574-4438-42485078BF29}"/>
+                <a16:creationId xmlns:a16="http://schemas.microsoft.com/office/drawing/2014/main" id="{F87FC2EC-1787-40D1-79C8-29AF1E6DDC71}"/>
               </a:ext>
             </a:extLst>
           </p:cNvPr>
@@ -12994,8 +12994,8 @@
         </p:nvSpPr>
         <p:spPr>
           <a:xfrm>
-            <a:off x="6183245" y="4401030"/>
-            <a:ext cx="4361571" cy="371676"/>
+            <a:off x="6158321" y="4374427"/>
+            <a:ext cx="4411418" cy="387325"/>
           </a:xfrm>
           <a:prstGeom prst="rect">
             <a:avLst/>
@@ -13012,7 +13012,7 @@
               </a:spcBef>
               <a:buFontTx/>
               <a:buNone/>
-              <a:defRPr sz="2200" b="1">
+              <a:defRPr sz="2000" b="1">
                 <a:solidFill>
                   <a:schemeClr val="accent1"/>
                 </a:solidFill>
@@ -13034,7 +13034,7 @@
           <p:cNvPr id="13" name="item_4">
             <a:extLst>
               <a:ext uri="{FF2B5EF4-FFF2-40B4-BE49-F238E27FC236}">
-                <a16:creationId xmlns:a16="http://schemas.microsoft.com/office/drawing/2014/main" id="{78103F52-FA68-B9F7-EB02-B2CAB2E31517}"/>
+                <a16:creationId xmlns:a16="http://schemas.microsoft.com/office/drawing/2014/main" id="{57F73BC3-387D-3A2C-7126-8FAA31FEE357}"/>
               </a:ext>
             </a:extLst>
           </p:cNvPr>
@@ -13047,8 +13047,8 @@
         </p:nvSpPr>
         <p:spPr>
           <a:xfrm>
-            <a:off x="6183245" y="4772706"/>
-            <a:ext cx="4361571" cy="892021"/>
+            <a:off x="6158321" y="4761750"/>
+            <a:ext cx="4411418" cy="929580"/>
           </a:xfrm>
           <a:prstGeom prst="rect">
             <a:avLst/>
@@ -13082,7 +13082,7 @@
           <p:cNvPr id="14" name="source">
             <a:extLst>
               <a:ext uri="{FF2B5EF4-FFF2-40B4-BE49-F238E27FC236}">
-                <a16:creationId xmlns:a16="http://schemas.microsoft.com/office/drawing/2014/main" id="{5E743CA2-9DE7-3795-9FAF-E36504961BCA}"/>
+                <a16:creationId xmlns:a16="http://schemas.microsoft.com/office/drawing/2014/main" id="{A6B224C9-A27C-5084-4137-D352E136CBE9}"/>
               </a:ext>
             </a:extLst>
           </p:cNvPr>
@@ -13137,7 +13137,7 @@
     </p:spTree>
     <p:extLst>
       <p:ext uri="{BB962C8B-B14F-4D97-AF65-F5344CB8AC3E}">
-        <p14:creationId xmlns:p14="http://schemas.microsoft.com/office/powerpoint/2010/main" val="2138895104"/>
+        <p14:creationId xmlns:p14="http://schemas.microsoft.com/office/powerpoint/2010/main" val="2775869166"/>
       </p:ext>
     </p:extLst>
   </p:cSld>
@@ -13206,7 +13206,7 @@
           <a:bodyPr/>
           <a:lstStyle/>
           <a:p>
-            <a:fld id="{DAA401AF-96B9-4795-80AC-645028D14909}" type="datetimeFigureOut">
+            <a:fld id="{C108DDE1-F741-4F4F-A7D2-FBD0359B97CD}" type="datetimeFigureOut">
               <a:rPr lang="en-US" smtClean="0"/>
               <a:t>10/3/2026</a:t>
             </a:fld>
@@ -13248,7 +13248,7 @@
           <a:bodyPr/>
           <a:lstStyle/>
           <a:p>
-            <a:fld id="{EB0BFBF9-3444-4A23-A691-88293893E3E4}" type="slidenum">
+            <a:fld id="{D07356AB-B086-4690-8078-803F810DAE76}" type="slidenum">
               <a:rPr lang="en-US" smtClean="0"/>
               <a:t>‹#›</a:t>
             </a:fld>
@@ -13261,7 +13261,7 @@
           <p:cNvPr id="6" name="item_1_title">
             <a:extLst>
               <a:ext uri="{FF2B5EF4-FFF2-40B4-BE49-F238E27FC236}">
-                <a16:creationId xmlns:a16="http://schemas.microsoft.com/office/drawing/2014/main" id="{D9F340D5-866C-1245-C88B-02CDA5C76F5C}"/>
+                <a16:creationId xmlns:a16="http://schemas.microsoft.com/office/drawing/2014/main" id="{FDE54297-A514-1EB9-B786-75B7488F9DBA}"/>
               </a:ext>
             </a:extLst>
           </p:cNvPr>
@@ -13274,8 +13274,8 @@
         </p:nvSpPr>
         <p:spPr>
           <a:xfrm>
-            <a:off x="1024128" y="2664060"/>
-            <a:ext cx="2280479" cy="945147"/>
+            <a:off x="1198591" y="2811082"/>
+            <a:ext cx="1931553" cy="847132"/>
           </a:xfrm>
         </p:spPr>
         <p:txBody>
@@ -13289,7 +13289,7 @@
               </a:spcBef>
               <a:buFontTx/>
               <a:buNone/>
-              <a:defRPr sz="2200" b="1">
+              <a:defRPr sz="2000" b="1">
                 <a:solidFill>
                   <a:schemeClr val="accent1"/>
                 </a:solidFill>
@@ -13311,7 +13311,7 @@
           <p:cNvPr id="7" name="item_1">
             <a:extLst>
               <a:ext uri="{FF2B5EF4-FFF2-40B4-BE49-F238E27FC236}">
-                <a16:creationId xmlns:a16="http://schemas.microsoft.com/office/drawing/2014/main" id="{30B94C1E-CC97-480F-DF5B-D6F30038F5D1}"/>
+                <a16:creationId xmlns:a16="http://schemas.microsoft.com/office/drawing/2014/main" id="{360B6F34-9785-2B13-FC34-8883F681910C}"/>
               </a:ext>
             </a:extLst>
           </p:cNvPr>
@@ -13324,8 +13324,8 @@
         </p:nvSpPr>
         <p:spPr>
           <a:xfrm>
-            <a:off x="1024129" y="3609206"/>
-            <a:ext cx="2280479" cy="2268354"/>
+            <a:off x="1198592" y="3658215"/>
+            <a:ext cx="1931553" cy="2033117"/>
           </a:xfrm>
           <a:prstGeom prst="rect">
             <a:avLst/>
@@ -13359,7 +13359,7 @@
           <p:cNvPr id="8" name="item_2_title">
             <a:extLst>
               <a:ext uri="{FF2B5EF4-FFF2-40B4-BE49-F238E27FC236}">
-                <a16:creationId xmlns:a16="http://schemas.microsoft.com/office/drawing/2014/main" id="{9CC4CE93-C2D7-B748-A8D0-63A2FC02B762}"/>
+                <a16:creationId xmlns:a16="http://schemas.microsoft.com/office/drawing/2014/main" id="{03218E49-4157-63F3-9E80-A58161ECF103}"/>
               </a:ext>
             </a:extLst>
           </p:cNvPr>
@@ -13372,8 +13372,8 @@
         </p:nvSpPr>
         <p:spPr>
           <a:xfrm>
-            <a:off x="3503994" y="2664060"/>
-            <a:ext cx="2280479" cy="945147"/>
+            <a:off x="3678457" y="2811082"/>
+            <a:ext cx="1931553" cy="847132"/>
           </a:xfrm>
           <a:prstGeom prst="rect">
             <a:avLst/>
@@ -13390,7 +13390,7 @@
               </a:spcBef>
               <a:buFontTx/>
               <a:buNone/>
-              <a:defRPr sz="2200" b="1">
+              <a:defRPr sz="2000" b="1">
                 <a:solidFill>
                   <a:schemeClr val="accent1"/>
                 </a:solidFill>
@@ -13412,7 +13412,7 @@
           <p:cNvPr id="9" name="item_2">
             <a:extLst>
               <a:ext uri="{FF2B5EF4-FFF2-40B4-BE49-F238E27FC236}">
-                <a16:creationId xmlns:a16="http://schemas.microsoft.com/office/drawing/2014/main" id="{F25F85DC-5D80-3BA3-35D8-BB4E7A206282}"/>
+                <a16:creationId xmlns:a16="http://schemas.microsoft.com/office/drawing/2014/main" id="{72AF853C-7AC9-807D-BE98-4EC16E49D8CE}"/>
               </a:ext>
             </a:extLst>
           </p:cNvPr>
@@ -13425,8 +13425,8 @@
         </p:nvSpPr>
         <p:spPr>
           <a:xfrm>
-            <a:off x="3503994" y="3609206"/>
-            <a:ext cx="2280479" cy="2268354"/>
+            <a:off x="3678457" y="3658215"/>
+            <a:ext cx="1931553" cy="2033117"/>
           </a:xfrm>
           <a:prstGeom prst="rect">
             <a:avLst/>
@@ -13460,7 +13460,7 @@
           <p:cNvPr id="10" name="item_3_title">
             <a:extLst>
               <a:ext uri="{FF2B5EF4-FFF2-40B4-BE49-F238E27FC236}">
-                <a16:creationId xmlns:a16="http://schemas.microsoft.com/office/drawing/2014/main" id="{A30DEE7A-29F2-052E-E7EE-51B383AE5C00}"/>
+                <a16:creationId xmlns:a16="http://schemas.microsoft.com/office/drawing/2014/main" id="{5EA3589F-52F4-129B-6325-0F23AF0F2A53}"/>
               </a:ext>
             </a:extLst>
           </p:cNvPr>
@@ -13473,8 +13473,8 @@
         </p:nvSpPr>
         <p:spPr>
           <a:xfrm>
-            <a:off x="5983859" y="2664060"/>
-            <a:ext cx="2280479" cy="945147"/>
+            <a:off x="6158322" y="2811082"/>
+            <a:ext cx="1931553" cy="847132"/>
           </a:xfrm>
           <a:prstGeom prst="rect">
             <a:avLst/>
@@ -13491,7 +13491,7 @@
               </a:spcBef>
               <a:buFontTx/>
               <a:buNone/>
-              <a:defRPr sz="2200" b="1">
+              <a:defRPr sz="2000" b="1">
                 <a:solidFill>
                   <a:schemeClr val="accent1"/>
                 </a:solidFill>
@@ -13513,7 +13513,7 @@
           <p:cNvPr id="11" name="item_3">
             <a:extLst>
               <a:ext uri="{FF2B5EF4-FFF2-40B4-BE49-F238E27FC236}">
-                <a16:creationId xmlns:a16="http://schemas.microsoft.com/office/drawing/2014/main" id="{5EACEE52-9712-2F0E-7A1A-A9ADFA370C63}"/>
+                <a16:creationId xmlns:a16="http://schemas.microsoft.com/office/drawing/2014/main" id="{7BCA203F-622C-9345-8FC0-BD89AE72E3DD}"/>
               </a:ext>
             </a:extLst>
           </p:cNvPr>
@@ -13526,8 +13526,8 @@
         </p:nvSpPr>
         <p:spPr>
           <a:xfrm>
-            <a:off x="5983859" y="3609206"/>
-            <a:ext cx="2280479" cy="2268354"/>
+            <a:off x="6158322" y="3658215"/>
+            <a:ext cx="1931553" cy="2033117"/>
           </a:xfrm>
           <a:prstGeom prst="rect">
             <a:avLst/>
@@ -13561,7 +13561,7 @@
           <p:cNvPr id="12" name="item_4_title">
             <a:extLst>
               <a:ext uri="{FF2B5EF4-FFF2-40B4-BE49-F238E27FC236}">
-                <a16:creationId xmlns:a16="http://schemas.microsoft.com/office/drawing/2014/main" id="{805FAF83-8DAB-6BDF-5171-B82D46204D9E}"/>
+                <a16:creationId xmlns:a16="http://schemas.microsoft.com/office/drawing/2014/main" id="{0C988952-A30E-36D0-6EC3-DF4B740809F9}"/>
               </a:ext>
             </a:extLst>
           </p:cNvPr>
@@ -13574,8 +13574,8 @@
         </p:nvSpPr>
         <p:spPr>
           <a:xfrm>
-            <a:off x="8463724" y="2664060"/>
-            <a:ext cx="2280479" cy="945147"/>
+            <a:off x="8638186" y="2811082"/>
+            <a:ext cx="1931553" cy="847132"/>
           </a:xfrm>
           <a:prstGeom prst="rect">
             <a:avLst/>
@@ -13592,7 +13592,7 @@
               </a:spcBef>
               <a:buFontTx/>
               <a:buNone/>
-              <a:defRPr sz="2200" b="1">
+              <a:defRPr sz="2000" b="1">
                 <a:solidFill>
                   <a:schemeClr val="accent1"/>
                 </a:solidFill>
@@ -13614,7 +13614,7 @@
           <p:cNvPr id="13" name="item_4">
             <a:extLst>
               <a:ext uri="{FF2B5EF4-FFF2-40B4-BE49-F238E27FC236}">
-                <a16:creationId xmlns:a16="http://schemas.microsoft.com/office/drawing/2014/main" id="{A269FFCC-8739-B368-968F-626352822172}"/>
+                <a16:creationId xmlns:a16="http://schemas.microsoft.com/office/drawing/2014/main" id="{3A9CBFFC-48AE-C009-715E-55A9D55D6886}"/>
               </a:ext>
             </a:extLst>
           </p:cNvPr>
@@ -13627,8 +13627,8 @@
         </p:nvSpPr>
         <p:spPr>
           <a:xfrm>
-            <a:off x="8463724" y="3609206"/>
-            <a:ext cx="2280479" cy="2268354"/>
+            <a:off x="8638186" y="3658215"/>
+            <a:ext cx="1931553" cy="2033117"/>
           </a:xfrm>
           <a:prstGeom prst="rect">
             <a:avLst/>
@@ -13662,7 +13662,7 @@
           <p:cNvPr id="14" name="source">
             <a:extLst>
               <a:ext uri="{FF2B5EF4-FFF2-40B4-BE49-F238E27FC236}">
-                <a16:creationId xmlns:a16="http://schemas.microsoft.com/office/drawing/2014/main" id="{36659641-1E7E-613A-CFBB-FCA676889C82}"/>
+                <a16:creationId xmlns:a16="http://schemas.microsoft.com/office/drawing/2014/main" id="{507FDD59-37B6-CF74-2991-4C41C2098191}"/>
               </a:ext>
             </a:extLst>
           </p:cNvPr>
@@ -13717,7 +13717,7 @@
     </p:spTree>
     <p:extLst>
       <p:ext uri="{BB962C8B-B14F-4D97-AF65-F5344CB8AC3E}">
-        <p14:creationId xmlns:p14="http://schemas.microsoft.com/office/powerpoint/2010/main" val="954865458"/>
+        <p14:creationId xmlns:p14="http://schemas.microsoft.com/office/powerpoint/2010/main" val="16847027"/>
       </p:ext>
     </p:extLst>
   </p:cSld>
@@ -13786,7 +13786,7 @@
           <a:bodyPr/>
           <a:lstStyle/>
           <a:p>
-            <a:fld id="{DAA401AF-96B9-4795-80AC-645028D14909}" type="datetimeFigureOut">
+            <a:fld id="{C108DDE1-F741-4F4F-A7D2-FBD0359B97CD}" type="datetimeFigureOut">
               <a:rPr lang="en-US" smtClean="0"/>
               <a:t>10/3/2026</a:t>
             </a:fld>
@@ -13828,7 +13828,7 @@
           <a:bodyPr/>
           <a:lstStyle/>
           <a:p>
-            <a:fld id="{EB0BFBF9-3444-4A23-A691-88293893E3E4}" type="slidenum">
+            <a:fld id="{D07356AB-B086-4690-8078-803F810DAE76}" type="slidenum">
               <a:rPr lang="en-US" smtClean="0"/>
               <a:t>‹#›</a:t>
             </a:fld>
@@ -13841,7 +13841,7 @@
           <p:cNvPr id="6" name="kpi_value_1">
             <a:extLst>
               <a:ext uri="{FF2B5EF4-FFF2-40B4-BE49-F238E27FC236}">
-                <a16:creationId xmlns:a16="http://schemas.microsoft.com/office/drawing/2014/main" id="{7F8763DB-A782-00C1-3E6F-0F69A7A3168C}"/>
+                <a16:creationId xmlns:a16="http://schemas.microsoft.com/office/drawing/2014/main" id="{4CFE0C09-D304-CE8B-5BE3-B62774A033DD}"/>
               </a:ext>
             </a:extLst>
           </p:cNvPr>
@@ -13854,8 +13854,8 @@
         </p:nvSpPr>
         <p:spPr>
           <a:xfrm>
-            <a:off x="1223514" y="2498833"/>
-            <a:ext cx="4655666" cy="1962854"/>
+            <a:off x="1198591" y="2472230"/>
+            <a:ext cx="4705512" cy="1995843"/>
           </a:xfrm>
         </p:spPr>
         <p:txBody>
@@ -13891,7 +13891,7 @@
           <p:cNvPr id="7" name="kpi_label_1">
             <a:extLst>
               <a:ext uri="{FF2B5EF4-FFF2-40B4-BE49-F238E27FC236}">
-                <a16:creationId xmlns:a16="http://schemas.microsoft.com/office/drawing/2014/main" id="{B614653E-C395-48F2-0E5D-3AED819BF91F}"/>
+                <a16:creationId xmlns:a16="http://schemas.microsoft.com/office/drawing/2014/main" id="{B87FF5FB-9859-63BF-FA54-9DFB0529F248}"/>
               </a:ext>
             </a:extLst>
           </p:cNvPr>
@@ -13904,207 +13904,8 @@
         </p:nvSpPr>
         <p:spPr>
           <a:xfrm>
-            <a:off x="1223514" y="4525005"/>
-            <a:ext cx="4655666" cy="1139722"/>
-          </a:xfrm>
-          <a:prstGeom prst="rect">
-            <a:avLst/>
-          </a:prstGeom>
-        </p:spPr>
-        <p:txBody>
-          <a:bodyPr wrap="square" anchor="t">
-            <a:noAutofit/>
-          </a:bodyPr>
-          <a:lstStyle>
-            <a:lvl1pPr marL="0" indent="0">
-              <a:spcBef>
-                <a:spcPts val="0"/>
-              </a:spcBef>
-              <a:buFontTx/>
-              <a:buNone/>
-              <a:defRPr sz="1800"/>
-            </a:lvl1pPr>
-          </a:lstStyle>
-          <a:p>
-            <a:pPr lvl="0"/>
-            <a:r>
-              <a:rPr lang="en-US"/>
-              <a:t>kpi_label_1</a:t>
-            </a:r>
-          </a:p>
-        </p:txBody>
-      </p:sp>
-      <p:sp>
-        <p:nvSpPr>
-          <p:cNvPr id="8" name="quote">
-            <a:extLst>
-              <a:ext uri="{FF2B5EF4-FFF2-40B4-BE49-F238E27FC236}">
-                <a16:creationId xmlns:a16="http://schemas.microsoft.com/office/drawing/2014/main" id="{0D45005F-E811-81B5-DEBF-26A4B3476700}"/>
-              </a:ext>
-            </a:extLst>
-          </p:cNvPr>
-          <p:cNvSpPr>
-            <a:spLocks noGrp="1"/>
-          </p:cNvSpPr>
-          <p:nvPr>
-            <p:ph type="body" sz="quarter" idx="15" hasCustomPrompt="1"/>
-          </p:nvPr>
-        </p:nvSpPr>
-        <p:spPr>
-          <a:xfrm>
-            <a:off x="1223514" y="2498834"/>
-            <a:ext cx="4655666" cy="2469397"/>
-          </a:xfrm>
-          <a:prstGeom prst="rect">
-            <a:avLst/>
-          </a:prstGeom>
-        </p:spPr>
-        <p:txBody>
-          <a:bodyPr wrap="square" anchor="t">
-            <a:noAutofit/>
-          </a:bodyPr>
-          <a:lstStyle>
-            <a:lvl1pPr marL="0" indent="0">
-              <a:spcBef>
-                <a:spcPts val="0"/>
-              </a:spcBef>
-              <a:buFontTx/>
-              <a:buNone/>
-              <a:defRPr sz="2400" i="1">
-                <a:latin typeface="+mj-lt"/>
-              </a:defRPr>
-            </a:lvl1pPr>
-          </a:lstStyle>
-          <a:p>
-            <a:pPr lvl="0"/>
-            <a:r>
-              <a:rPr lang="en-US"/>
-              <a:t>quote</a:t>
-            </a:r>
-          </a:p>
-        </p:txBody>
-      </p:sp>
-      <p:sp>
-        <p:nvSpPr>
-          <p:cNvPr id="9" name="attribution">
-            <a:extLst>
-              <a:ext uri="{FF2B5EF4-FFF2-40B4-BE49-F238E27FC236}">
-                <a16:creationId xmlns:a16="http://schemas.microsoft.com/office/drawing/2014/main" id="{A084AF36-C362-D6A2-BD60-A06568E6AA51}"/>
-              </a:ext>
-            </a:extLst>
-          </p:cNvPr>
-          <p:cNvSpPr>
-            <a:spLocks noGrp="1"/>
-          </p:cNvSpPr>
-          <p:nvPr>
-            <p:ph type="body" sz="quarter" idx="16" hasCustomPrompt="1"/>
-          </p:nvPr>
-        </p:nvSpPr>
-        <p:spPr>
-          <a:xfrm>
-            <a:off x="1223514" y="5031549"/>
-            <a:ext cx="4655666" cy="633179"/>
-          </a:xfrm>
-          <a:prstGeom prst="rect">
-            <a:avLst/>
-          </a:prstGeom>
-        </p:spPr>
-        <p:txBody>
-          <a:bodyPr wrap="square" anchor="t">
-            <a:noAutofit/>
-          </a:bodyPr>
-          <a:lstStyle>
-            <a:lvl1pPr marL="0" indent="0">
-              <a:spcBef>
-                <a:spcPts val="0"/>
-              </a:spcBef>
-              <a:buFontTx/>
-              <a:buNone/>
-              <a:defRPr sz="1400"/>
-            </a:lvl1pPr>
-          </a:lstStyle>
-          <a:p>
-            <a:pPr lvl="0"/>
-            <a:r>
-              <a:rPr lang="en-US"/>
-              <a:t>attribution</a:t>
-            </a:r>
-          </a:p>
-        </p:txBody>
-      </p:sp>
-      <p:sp>
-        <p:nvSpPr>
-          <p:cNvPr id="10" name="item_1_title">
-            <a:extLst>
-              <a:ext uri="{FF2B5EF4-FFF2-40B4-BE49-F238E27FC236}">
-                <a16:creationId xmlns:a16="http://schemas.microsoft.com/office/drawing/2014/main" id="{1EB37F1A-F9BB-E282-A0F7-B4A04034F0A3}"/>
-              </a:ext>
-            </a:extLst>
-          </p:cNvPr>
-          <p:cNvSpPr>
-            <a:spLocks noGrp="1"/>
-          </p:cNvSpPr>
-          <p:nvPr>
-            <p:ph type="body" sz="quarter" idx="17" hasCustomPrompt="1"/>
-          </p:nvPr>
-        </p:nvSpPr>
-        <p:spPr>
-          <a:xfrm>
-            <a:off x="6467369" y="2286001"/>
-            <a:ext cx="4276832" cy="1056341"/>
-          </a:xfrm>
-          <a:prstGeom prst="rect">
-            <a:avLst/>
-          </a:prstGeom>
-        </p:spPr>
-        <p:txBody>
-          <a:bodyPr wrap="square" anchor="t">
-            <a:noAutofit/>
-          </a:bodyPr>
-          <a:lstStyle>
-            <a:lvl1pPr marL="0" indent="0">
-              <a:spcBef>
-                <a:spcPts val="0"/>
-              </a:spcBef>
-              <a:buFontTx/>
-              <a:buNone/>
-              <a:defRPr sz="2200" b="1">
-                <a:solidFill>
-                  <a:schemeClr val="accent1"/>
-                </a:solidFill>
-                <a:latin typeface="+mj-lt"/>
-              </a:defRPr>
-            </a:lvl1pPr>
-          </a:lstStyle>
-          <a:p>
-            <a:pPr lvl="0"/>
-            <a:r>
-              <a:rPr lang="en-US"/>
-              <a:t>item_1_title</a:t>
-            </a:r>
-          </a:p>
-        </p:txBody>
-      </p:sp>
-      <p:sp>
-        <p:nvSpPr>
-          <p:cNvPr id="11" name="item_1">
-            <a:extLst>
-              <a:ext uri="{FF2B5EF4-FFF2-40B4-BE49-F238E27FC236}">
-                <a16:creationId xmlns:a16="http://schemas.microsoft.com/office/drawing/2014/main" id="{A67BE727-1617-2663-2D4F-175FF5EE8763}"/>
-              </a:ext>
-            </a:extLst>
-          </p:cNvPr>
-          <p:cNvSpPr>
-            <a:spLocks noGrp="1"/>
-          </p:cNvSpPr>
-          <p:nvPr>
-            <p:ph type="body" sz="quarter" idx="18" hasCustomPrompt="1"/>
-          </p:nvPr>
-        </p:nvSpPr>
-        <p:spPr>
-          <a:xfrm>
-            <a:off x="6467369" y="3342342"/>
-            <a:ext cx="4276832" cy="2535219"/>
+            <a:off x="1198591" y="4532455"/>
+            <a:ext cx="4705512" cy="1158877"/>
           </a:xfrm>
           <a:prstGeom prst="rect">
             <a:avLst/>
@@ -14128,6 +13929,205 @@
             <a:pPr lvl="0"/>
             <a:r>
               <a:rPr lang="en-US"/>
+              <a:t>kpi_label_1</a:t>
+            </a:r>
+          </a:p>
+        </p:txBody>
+      </p:sp>
+      <p:sp>
+        <p:nvSpPr>
+          <p:cNvPr id="8" name="quote">
+            <a:extLst>
+              <a:ext uri="{FF2B5EF4-FFF2-40B4-BE49-F238E27FC236}">
+                <a16:creationId xmlns:a16="http://schemas.microsoft.com/office/drawing/2014/main" id="{3C1663C2-2D02-0A76-856F-B1C21F2AA99D}"/>
+              </a:ext>
+            </a:extLst>
+          </p:cNvPr>
+          <p:cNvSpPr>
+            <a:spLocks noGrp="1"/>
+          </p:cNvSpPr>
+          <p:nvPr>
+            <p:ph type="body" sz="quarter" idx="15" hasCustomPrompt="1"/>
+          </p:nvPr>
+        </p:nvSpPr>
+        <p:spPr>
+          <a:xfrm>
+            <a:off x="1198591" y="2472230"/>
+            <a:ext cx="4705512" cy="2510899"/>
+          </a:xfrm>
+          <a:prstGeom prst="rect">
+            <a:avLst/>
+          </a:prstGeom>
+        </p:spPr>
+        <p:txBody>
+          <a:bodyPr wrap="square" anchor="t">
+            <a:noAutofit/>
+          </a:bodyPr>
+          <a:lstStyle>
+            <a:lvl1pPr marL="0" indent="0">
+              <a:spcBef>
+                <a:spcPts val="0"/>
+              </a:spcBef>
+              <a:buFontTx/>
+              <a:buNone/>
+              <a:defRPr sz="2000" i="1">
+                <a:latin typeface="+mj-lt"/>
+              </a:defRPr>
+            </a:lvl1pPr>
+          </a:lstStyle>
+          <a:p>
+            <a:pPr lvl="0"/>
+            <a:r>
+              <a:rPr lang="en-US"/>
+              <a:t>quote</a:t>
+            </a:r>
+          </a:p>
+        </p:txBody>
+      </p:sp>
+      <p:sp>
+        <p:nvSpPr>
+          <p:cNvPr id="9" name="attribution">
+            <a:extLst>
+              <a:ext uri="{FF2B5EF4-FFF2-40B4-BE49-F238E27FC236}">
+                <a16:creationId xmlns:a16="http://schemas.microsoft.com/office/drawing/2014/main" id="{FFE397E9-368C-1833-B8E8-2056F4BD2768}"/>
+              </a:ext>
+            </a:extLst>
+          </p:cNvPr>
+          <p:cNvSpPr>
+            <a:spLocks noGrp="1"/>
+          </p:cNvSpPr>
+          <p:nvPr>
+            <p:ph type="body" sz="quarter" idx="16" hasCustomPrompt="1"/>
+          </p:nvPr>
+        </p:nvSpPr>
+        <p:spPr>
+          <a:xfrm>
+            <a:off x="1198591" y="5047511"/>
+            <a:ext cx="4705512" cy="643820"/>
+          </a:xfrm>
+          <a:prstGeom prst="rect">
+            <a:avLst/>
+          </a:prstGeom>
+        </p:spPr>
+        <p:txBody>
+          <a:bodyPr wrap="square" anchor="t">
+            <a:noAutofit/>
+          </a:bodyPr>
+          <a:lstStyle>
+            <a:lvl1pPr marL="0" indent="0">
+              <a:spcBef>
+                <a:spcPts val="0"/>
+              </a:spcBef>
+              <a:buFontTx/>
+              <a:buNone/>
+              <a:defRPr sz="2000"/>
+            </a:lvl1pPr>
+          </a:lstStyle>
+          <a:p>
+            <a:pPr lvl="0"/>
+            <a:r>
+              <a:rPr lang="en-US"/>
+              <a:t>attribution</a:t>
+            </a:r>
+          </a:p>
+        </p:txBody>
+      </p:sp>
+      <p:sp>
+        <p:nvSpPr>
+          <p:cNvPr id="10" name="item_1_title">
+            <a:extLst>
+              <a:ext uri="{FF2B5EF4-FFF2-40B4-BE49-F238E27FC236}">
+                <a16:creationId xmlns:a16="http://schemas.microsoft.com/office/drawing/2014/main" id="{868585D9-6D64-3724-FE35-994A446F7BC7}"/>
+              </a:ext>
+            </a:extLst>
+          </p:cNvPr>
+          <p:cNvSpPr>
+            <a:spLocks noGrp="1"/>
+          </p:cNvSpPr>
+          <p:nvPr>
+            <p:ph type="body" sz="quarter" idx="17" hasCustomPrompt="1"/>
+          </p:nvPr>
+        </p:nvSpPr>
+        <p:spPr>
+          <a:xfrm>
+            <a:off x="6467369" y="2286001"/>
+            <a:ext cx="4276832" cy="1056341"/>
+          </a:xfrm>
+          <a:prstGeom prst="rect">
+            <a:avLst/>
+          </a:prstGeom>
+        </p:spPr>
+        <p:txBody>
+          <a:bodyPr wrap="square" anchor="t">
+            <a:noAutofit/>
+          </a:bodyPr>
+          <a:lstStyle>
+            <a:lvl1pPr marL="0" indent="0">
+              <a:spcBef>
+                <a:spcPts val="0"/>
+              </a:spcBef>
+              <a:buFontTx/>
+              <a:buNone/>
+              <a:defRPr sz="2000" b="1">
+                <a:solidFill>
+                  <a:schemeClr val="accent1"/>
+                </a:solidFill>
+                <a:latin typeface="+mj-lt"/>
+              </a:defRPr>
+            </a:lvl1pPr>
+          </a:lstStyle>
+          <a:p>
+            <a:pPr lvl="0"/>
+            <a:r>
+              <a:rPr lang="en-US"/>
+              <a:t>item_1_title</a:t>
+            </a:r>
+          </a:p>
+        </p:txBody>
+      </p:sp>
+      <p:sp>
+        <p:nvSpPr>
+          <p:cNvPr id="11" name="item_1">
+            <a:extLst>
+              <a:ext uri="{FF2B5EF4-FFF2-40B4-BE49-F238E27FC236}">
+                <a16:creationId xmlns:a16="http://schemas.microsoft.com/office/drawing/2014/main" id="{D5B806FC-BEDE-F50D-DE96-E3F8508948ED}"/>
+              </a:ext>
+            </a:extLst>
+          </p:cNvPr>
+          <p:cNvSpPr>
+            <a:spLocks noGrp="1"/>
+          </p:cNvSpPr>
+          <p:nvPr>
+            <p:ph type="body" sz="quarter" idx="18" hasCustomPrompt="1"/>
+          </p:nvPr>
+        </p:nvSpPr>
+        <p:spPr>
+          <a:xfrm>
+            <a:off x="6467369" y="3342342"/>
+            <a:ext cx="4276832" cy="2535219"/>
+          </a:xfrm>
+          <a:prstGeom prst="rect">
+            <a:avLst/>
+          </a:prstGeom>
+        </p:spPr>
+        <p:txBody>
+          <a:bodyPr wrap="square" anchor="t">
+            <a:noAutofit/>
+          </a:bodyPr>
+          <a:lstStyle>
+            <a:lvl1pPr marL="0" indent="0">
+              <a:spcBef>
+                <a:spcPts val="0"/>
+              </a:spcBef>
+              <a:buFontTx/>
+              <a:buNone/>
+              <a:defRPr sz="2000"/>
+            </a:lvl1pPr>
+          </a:lstStyle>
+          <a:p>
+            <a:pPr lvl="0"/>
+            <a:r>
+              <a:rPr lang="en-US"/>
               <a:t>item_1</a:t>
             </a:r>
           </a:p>
@@ -14138,7 +14138,7 @@
           <p:cNvPr id="12" name="source">
             <a:extLst>
               <a:ext uri="{FF2B5EF4-FFF2-40B4-BE49-F238E27FC236}">
-                <a16:creationId xmlns:a16="http://schemas.microsoft.com/office/drawing/2014/main" id="{2234D804-8F58-CBB0-85A9-7E0936779EC0}"/>
+                <a16:creationId xmlns:a16="http://schemas.microsoft.com/office/drawing/2014/main" id="{36A587C6-929D-F558-9852-AEF65E1A0EE9}"/>
               </a:ext>
             </a:extLst>
           </p:cNvPr>
@@ -14193,7 +14193,7 @@
     </p:spTree>
     <p:extLst>
       <p:ext uri="{BB962C8B-B14F-4D97-AF65-F5344CB8AC3E}">
-        <p14:creationId xmlns:p14="http://schemas.microsoft.com/office/powerpoint/2010/main" val="2155627807"/>
+        <p14:creationId xmlns:p14="http://schemas.microsoft.com/office/powerpoint/2010/main" val="2716927620"/>
       </p:ext>
     </p:extLst>
   </p:cSld>
@@ -14262,7 +14262,7 @@
           <a:bodyPr/>
           <a:lstStyle/>
           <a:p>
-            <a:fld id="{DAA401AF-96B9-4795-80AC-645028D14909}" type="datetimeFigureOut">
+            <a:fld id="{C108DDE1-F741-4F4F-A7D2-FBD0359B97CD}" type="datetimeFigureOut">
               <a:rPr lang="en-US" smtClean="0"/>
               <a:t>10/3/2026</a:t>
             </a:fld>
@@ -14304,7 +14304,7 @@
           <a:bodyPr/>
           <a:lstStyle/>
           <a:p>
-            <a:fld id="{EB0BFBF9-3444-4A23-A691-88293893E3E4}" type="slidenum">
+            <a:fld id="{D07356AB-B086-4690-8078-803F810DAE76}" type="slidenum">
               <a:rPr lang="en-US" smtClean="0"/>
               <a:t>‹#›</a:t>
             </a:fld>
@@ -14317,7 +14317,7 @@
           <p:cNvPr id="6" name="item_1_title">
             <a:extLst>
               <a:ext uri="{FF2B5EF4-FFF2-40B4-BE49-F238E27FC236}">
-                <a16:creationId xmlns:a16="http://schemas.microsoft.com/office/drawing/2014/main" id="{2FF5B047-53C2-BB63-A355-75259AF88110}"/>
+                <a16:creationId xmlns:a16="http://schemas.microsoft.com/office/drawing/2014/main" id="{76F5D8B7-C75E-49AF-892D-480B12913601}"/>
               </a:ext>
             </a:extLst>
           </p:cNvPr>
@@ -14330,8 +14330,8 @@
         </p:nvSpPr>
         <p:spPr>
           <a:xfrm>
-            <a:off x="1223514" y="2498834"/>
-            <a:ext cx="2708328" cy="931145"/>
+            <a:off x="1198591" y="2472230"/>
+            <a:ext cx="2758175" cy="946795"/>
           </a:xfrm>
         </p:spPr>
         <p:txBody>
@@ -14345,7 +14345,7 @@
               </a:spcBef>
               <a:buFontTx/>
               <a:buNone/>
-              <a:defRPr sz="2200" b="1">
+              <a:defRPr sz="2000" b="1">
                 <a:solidFill>
                   <a:schemeClr val="accent1"/>
                 </a:solidFill>
@@ -14367,7 +14367,7 @@
           <p:cNvPr id="7" name="item_1">
             <a:extLst>
               <a:ext uri="{FF2B5EF4-FFF2-40B4-BE49-F238E27FC236}">
-                <a16:creationId xmlns:a16="http://schemas.microsoft.com/office/drawing/2014/main" id="{0E7FE1F3-444B-19DC-93C8-68F678101B69}"/>
+                <a16:creationId xmlns:a16="http://schemas.microsoft.com/office/drawing/2014/main" id="{488DAB5F-4162-0F1F-3C5A-CEF56F2748CD}"/>
               </a:ext>
             </a:extLst>
           </p:cNvPr>
@@ -14380,8 +14380,8 @@
         </p:nvSpPr>
         <p:spPr>
           <a:xfrm>
-            <a:off x="1223514" y="3429978"/>
-            <a:ext cx="2708328" cy="2234748"/>
+            <a:off x="1198592" y="3419025"/>
+            <a:ext cx="2758175" cy="2272307"/>
           </a:xfrm>
           <a:prstGeom prst="rect">
             <a:avLst/>
@@ -14415,7 +14415,7 @@
           <p:cNvPr id="8" name="item_2_title">
             <a:extLst>
               <a:ext uri="{FF2B5EF4-FFF2-40B4-BE49-F238E27FC236}">
-                <a16:creationId xmlns:a16="http://schemas.microsoft.com/office/drawing/2014/main" id="{161BCA2E-95D8-BB90-6841-66AA21935B9C}"/>
+                <a16:creationId xmlns:a16="http://schemas.microsoft.com/office/drawing/2014/main" id="{88374A53-BAD0-5DB8-4562-894FB2303495}"/>
               </a:ext>
             </a:extLst>
           </p:cNvPr>
@@ -14428,8 +14428,8 @@
         </p:nvSpPr>
         <p:spPr>
           <a:xfrm>
-            <a:off x="4530001" y="2498834"/>
-            <a:ext cx="2708328" cy="931145"/>
+            <a:off x="4505078" y="2472230"/>
+            <a:ext cx="2758175" cy="946795"/>
           </a:xfrm>
           <a:prstGeom prst="rect">
             <a:avLst/>
@@ -14446,7 +14446,7 @@
               </a:spcBef>
               <a:buFontTx/>
               <a:buNone/>
-              <a:defRPr sz="2200" b="1">
+              <a:defRPr sz="2000" b="1">
                 <a:solidFill>
                   <a:schemeClr val="accent1"/>
                 </a:solidFill>
@@ -14468,7 +14468,7 @@
           <p:cNvPr id="9" name="item_2">
             <a:extLst>
               <a:ext uri="{FF2B5EF4-FFF2-40B4-BE49-F238E27FC236}">
-                <a16:creationId xmlns:a16="http://schemas.microsoft.com/office/drawing/2014/main" id="{9EF3A0F4-D1B4-603A-8831-9679AF527A1B}"/>
+                <a16:creationId xmlns:a16="http://schemas.microsoft.com/office/drawing/2014/main" id="{BCD43441-AA63-7ACB-7021-F109A2B8F7BB}"/>
               </a:ext>
             </a:extLst>
           </p:cNvPr>
@@ -14481,8 +14481,8 @@
         </p:nvSpPr>
         <p:spPr>
           <a:xfrm>
-            <a:off x="4530001" y="3429978"/>
-            <a:ext cx="2708328" cy="2234748"/>
+            <a:off x="4505078" y="3419025"/>
+            <a:ext cx="2758175" cy="2272307"/>
           </a:xfrm>
           <a:prstGeom prst="rect">
             <a:avLst/>
@@ -14516,7 +14516,7 @@
           <p:cNvPr id="10" name="item_3_title">
             <a:extLst>
               <a:ext uri="{FF2B5EF4-FFF2-40B4-BE49-F238E27FC236}">
-                <a16:creationId xmlns:a16="http://schemas.microsoft.com/office/drawing/2014/main" id="{FD7AF893-2AE4-4AE3-F659-3A4BBEC71D4F}"/>
+                <a16:creationId xmlns:a16="http://schemas.microsoft.com/office/drawing/2014/main" id="{92223ADA-8273-4E0C-7DA9-B7EF7458B72A}"/>
               </a:ext>
             </a:extLst>
           </p:cNvPr>
@@ -14529,8 +14529,8 @@
         </p:nvSpPr>
         <p:spPr>
           <a:xfrm>
-            <a:off x="7836487" y="2498834"/>
-            <a:ext cx="2708328" cy="931145"/>
+            <a:off x="7811565" y="2472230"/>
+            <a:ext cx="2758175" cy="946795"/>
           </a:xfrm>
           <a:prstGeom prst="rect">
             <a:avLst/>
@@ -14547,7 +14547,7 @@
               </a:spcBef>
               <a:buFontTx/>
               <a:buNone/>
-              <a:defRPr sz="2200" b="1">
+              <a:defRPr sz="2000" b="1">
                 <a:solidFill>
                   <a:schemeClr val="accent1"/>
                 </a:solidFill>
@@ -14569,7 +14569,7 @@
           <p:cNvPr id="11" name="item_3">
             <a:extLst>
               <a:ext uri="{FF2B5EF4-FFF2-40B4-BE49-F238E27FC236}">
-                <a16:creationId xmlns:a16="http://schemas.microsoft.com/office/drawing/2014/main" id="{DCEEBFD0-1FEB-15FD-D013-B53E4FE6C2DD}"/>
+                <a16:creationId xmlns:a16="http://schemas.microsoft.com/office/drawing/2014/main" id="{16DE0DAC-7F75-A80E-F9B7-D25D209764B6}"/>
               </a:ext>
             </a:extLst>
           </p:cNvPr>
@@ -14582,8 +14582,8 @@
         </p:nvSpPr>
         <p:spPr>
           <a:xfrm>
-            <a:off x="7836487" y="3429978"/>
-            <a:ext cx="2708328" cy="2234748"/>
+            <a:off x="7811565" y="3419025"/>
+            <a:ext cx="2758175" cy="2272307"/>
           </a:xfrm>
           <a:prstGeom prst="rect">
             <a:avLst/>
@@ -14617,7 +14617,7 @@
           <p:cNvPr id="12" name="source">
             <a:extLst>
               <a:ext uri="{FF2B5EF4-FFF2-40B4-BE49-F238E27FC236}">
-                <a16:creationId xmlns:a16="http://schemas.microsoft.com/office/drawing/2014/main" id="{30DAF465-EE18-C408-ABE9-163107A94722}"/>
+                <a16:creationId xmlns:a16="http://schemas.microsoft.com/office/drawing/2014/main" id="{51F0EF38-354D-12CA-8CF7-E5CB9A1C8B47}"/>
               </a:ext>
             </a:extLst>
           </p:cNvPr>
@@ -14672,7 +14672,7 @@
     </p:spTree>
     <p:extLst>
       <p:ext uri="{BB962C8B-B14F-4D97-AF65-F5344CB8AC3E}">
-        <p14:creationId xmlns:p14="http://schemas.microsoft.com/office/powerpoint/2010/main" val="261500114"/>
+        <p14:creationId xmlns:p14="http://schemas.microsoft.com/office/powerpoint/2010/main" val="3944688207"/>
       </p:ext>
     </p:extLst>
   </p:cSld>
@@ -14741,7 +14741,7 @@
           <a:bodyPr/>
           <a:lstStyle/>
           <a:p>
-            <a:fld id="{DAA401AF-96B9-4795-80AC-645028D14909}" type="datetimeFigureOut">
+            <a:fld id="{C108DDE1-F741-4F4F-A7D2-FBD0359B97CD}" type="datetimeFigureOut">
               <a:rPr lang="en-US" smtClean="0"/>
               <a:t>10/3/2026</a:t>
             </a:fld>
@@ -14783,7 +14783,7 @@
           <a:bodyPr/>
           <a:lstStyle/>
           <a:p>
-            <a:fld id="{EB0BFBF9-3444-4A23-A691-88293893E3E4}" type="slidenum">
+            <a:fld id="{D07356AB-B086-4690-8078-803F810DAE76}" type="slidenum">
               <a:rPr lang="en-US" smtClean="0"/>
               <a:t>‹#›</a:t>
             </a:fld>
@@ -14796,7 +14796,7 @@
           <p:cNvPr id="6" name="marker_1">
             <a:extLst>
               <a:ext uri="{FF2B5EF4-FFF2-40B4-BE49-F238E27FC236}">
-                <a16:creationId xmlns:a16="http://schemas.microsoft.com/office/drawing/2014/main" id="{29A90BE6-DA00-E85D-B889-8DFB52B85E52}"/>
+                <a16:creationId xmlns:a16="http://schemas.microsoft.com/office/drawing/2014/main" id="{786414C2-5A00-6E7B-22D8-D15A2A0DEF94}"/>
               </a:ext>
             </a:extLst>
           </p:cNvPr>
@@ -14809,7 +14809,7 @@
         </p:nvSpPr>
         <p:spPr>
           <a:xfrm>
-            <a:off x="1223514" y="2498834"/>
+            <a:off x="1198591" y="2472230"/>
             <a:ext cx="548312" cy="585291"/>
           </a:xfrm>
           <a:prstGeom prst="ellipse">
@@ -14830,7 +14830,7 @@
               </a:spcBef>
               <a:buFontTx/>
               <a:buNone/>
-              <a:defRPr sz="2400" b="1">
+              <a:defRPr sz="2000" b="1">
                 <a:solidFill>
                   <a:schemeClr val="bg1"/>
                 </a:solidFill>
@@ -14852,7 +14852,7 @@
           <p:cNvPr id="7" name="item_1_title">
             <a:extLst>
               <a:ext uri="{FF2B5EF4-FFF2-40B4-BE49-F238E27FC236}">
-                <a16:creationId xmlns:a16="http://schemas.microsoft.com/office/drawing/2014/main" id="{F831D5CE-6E26-4158-6041-F89F24973B32}"/>
+                <a16:creationId xmlns:a16="http://schemas.microsoft.com/office/drawing/2014/main" id="{AF49B86D-6CD1-727D-2AE8-51D1856E2AFF}"/>
               </a:ext>
             </a:extLst>
           </p:cNvPr>
@@ -14865,8 +14865,8 @@
         </p:nvSpPr>
         <p:spPr>
           <a:xfrm>
-            <a:off x="1871519" y="2498833"/>
-            <a:ext cx="8673296" cy="371676"/>
+            <a:off x="1846597" y="2472230"/>
+            <a:ext cx="8723143" cy="387325"/>
           </a:xfrm>
           <a:prstGeom prst="rect">
             <a:avLst/>
@@ -14883,7 +14883,7 @@
               </a:spcBef>
               <a:buFontTx/>
               <a:buNone/>
-              <a:defRPr sz="2200" b="1">
+              <a:defRPr sz="2000" b="1">
                 <a:solidFill>
                   <a:schemeClr val="accent1"/>
                 </a:solidFill>
@@ -14905,7 +14905,7 @@
           <p:cNvPr id="8" name="item_1">
             <a:extLst>
               <a:ext uri="{FF2B5EF4-FFF2-40B4-BE49-F238E27FC236}">
-                <a16:creationId xmlns:a16="http://schemas.microsoft.com/office/drawing/2014/main" id="{8CD71FEB-6156-5BEB-5783-D30E0AB01D6A}"/>
+                <a16:creationId xmlns:a16="http://schemas.microsoft.com/office/drawing/2014/main" id="{E5B23F18-9911-DCFF-94B6-4CF48D144874}"/>
               </a:ext>
             </a:extLst>
           </p:cNvPr>
@@ -14918,8 +14918,8 @@
         </p:nvSpPr>
         <p:spPr>
           <a:xfrm>
-            <a:off x="1871519" y="2870510"/>
-            <a:ext cx="8673296" cy="892021"/>
+            <a:off x="1846597" y="2859554"/>
+            <a:ext cx="8723143" cy="929580"/>
           </a:xfrm>
           <a:prstGeom prst="rect">
             <a:avLst/>
@@ -14953,7 +14953,7 @@
           <p:cNvPr id="9" name="marker_2">
             <a:extLst>
               <a:ext uri="{FF2B5EF4-FFF2-40B4-BE49-F238E27FC236}">
-                <a16:creationId xmlns:a16="http://schemas.microsoft.com/office/drawing/2014/main" id="{0466A885-8444-F749-25A2-C4F48F7A992E}"/>
+                <a16:creationId xmlns:a16="http://schemas.microsoft.com/office/drawing/2014/main" id="{CED61679-CA01-26F2-4343-D5F7428FBA45}"/>
               </a:ext>
             </a:extLst>
           </p:cNvPr>
@@ -14966,7 +14966,7 @@
         </p:nvSpPr>
         <p:spPr>
           <a:xfrm>
-            <a:off x="1223514" y="4401031"/>
+            <a:off x="1198591" y="4374427"/>
             <a:ext cx="548312" cy="585291"/>
           </a:xfrm>
           <a:prstGeom prst="ellipse">
@@ -14987,7 +14987,7 @@
               </a:spcBef>
               <a:buFontTx/>
               <a:buNone/>
-              <a:defRPr sz="2400" b="1">
+              <a:defRPr sz="2000" b="1">
                 <a:solidFill>
                   <a:schemeClr val="bg1"/>
                 </a:solidFill>
@@ -15009,7 +15009,7 @@
           <p:cNvPr id="10" name="item_2_title">
             <a:extLst>
               <a:ext uri="{FF2B5EF4-FFF2-40B4-BE49-F238E27FC236}">
-                <a16:creationId xmlns:a16="http://schemas.microsoft.com/office/drawing/2014/main" id="{BA091385-8656-7EFD-A619-C64401A3E0C0}"/>
+                <a16:creationId xmlns:a16="http://schemas.microsoft.com/office/drawing/2014/main" id="{F971AD07-6628-F2D6-605B-39888282D792}"/>
               </a:ext>
             </a:extLst>
           </p:cNvPr>
@@ -15022,8 +15022,8 @@
         </p:nvSpPr>
         <p:spPr>
           <a:xfrm>
-            <a:off x="1871519" y="4401030"/>
-            <a:ext cx="8673296" cy="371676"/>
+            <a:off x="1846597" y="4374427"/>
+            <a:ext cx="8723143" cy="387325"/>
           </a:xfrm>
           <a:prstGeom prst="rect">
             <a:avLst/>
@@ -15040,7 +15040,7 @@
               </a:spcBef>
               <a:buFontTx/>
               <a:buNone/>
-              <a:defRPr sz="2200" b="1">
+              <a:defRPr sz="2000" b="1">
                 <a:solidFill>
                   <a:schemeClr val="accent1"/>
                 </a:solidFill>
@@ -15062,7 +15062,7 @@
           <p:cNvPr id="11" name="item_2">
             <a:extLst>
               <a:ext uri="{FF2B5EF4-FFF2-40B4-BE49-F238E27FC236}">
-                <a16:creationId xmlns:a16="http://schemas.microsoft.com/office/drawing/2014/main" id="{FCBF1ADC-6654-A6C7-1AE4-028398F2902C}"/>
+                <a16:creationId xmlns:a16="http://schemas.microsoft.com/office/drawing/2014/main" id="{F33B362F-B73D-C5BD-0015-A46E1DDD1A64}"/>
               </a:ext>
             </a:extLst>
           </p:cNvPr>
@@ -15075,8 +15075,8 @@
         </p:nvSpPr>
         <p:spPr>
           <a:xfrm>
-            <a:off x="1871519" y="4772706"/>
-            <a:ext cx="8673296" cy="892021"/>
+            <a:off x="1846597" y="4761750"/>
+            <a:ext cx="8723143" cy="929580"/>
           </a:xfrm>
           <a:prstGeom prst="rect">
             <a:avLst/>
@@ -15110,7 +15110,7 @@
           <p:cNvPr id="12" name="source">
             <a:extLst>
               <a:ext uri="{FF2B5EF4-FFF2-40B4-BE49-F238E27FC236}">
-                <a16:creationId xmlns:a16="http://schemas.microsoft.com/office/drawing/2014/main" id="{13F9E830-1996-FF7C-B560-BEECF7B4CEC5}"/>
+                <a16:creationId xmlns:a16="http://schemas.microsoft.com/office/drawing/2014/main" id="{68272A5E-C983-C060-7887-96C53D325E78}"/>
               </a:ext>
             </a:extLst>
           </p:cNvPr>
@@ -15165,7 +15165,7 @@
     </p:spTree>
     <p:extLst>
       <p:ext uri="{BB962C8B-B14F-4D97-AF65-F5344CB8AC3E}">
-        <p14:creationId xmlns:p14="http://schemas.microsoft.com/office/powerpoint/2010/main" val="1303741591"/>
+        <p14:creationId xmlns:p14="http://schemas.microsoft.com/office/powerpoint/2010/main" val="1223842637"/>
       </p:ext>
     </p:extLst>
   </p:cSld>
@@ -15234,7 +15234,7 @@
           <a:bodyPr/>
           <a:lstStyle/>
           <a:p>
-            <a:fld id="{DAA401AF-96B9-4795-80AC-645028D14909}" type="datetimeFigureOut">
+            <a:fld id="{C108DDE1-F741-4F4F-A7D2-FBD0359B97CD}" type="datetimeFigureOut">
               <a:rPr lang="en-US" smtClean="0"/>
               <a:t>10/3/2026</a:t>
             </a:fld>
@@ -15276,7 +15276,7 @@
           <a:bodyPr/>
           <a:lstStyle/>
           <a:p>
-            <a:fld id="{EB0BFBF9-3444-4A23-A691-88293893E3E4}" type="slidenum">
+            <a:fld id="{D07356AB-B086-4690-8078-803F810DAE76}" type="slidenum">
               <a:rPr lang="en-US" smtClean="0"/>
               <a:t>‹#›</a:t>
             </a:fld>
@@ -15289,7 +15289,7 @@
           <p:cNvPr id="6" name="kpi_value_1">
             <a:extLst>
               <a:ext uri="{FF2B5EF4-FFF2-40B4-BE49-F238E27FC236}">
-                <a16:creationId xmlns:a16="http://schemas.microsoft.com/office/drawing/2014/main" id="{2834DB78-49AB-FE63-B2EC-D1E97A68BF48}"/>
+                <a16:creationId xmlns:a16="http://schemas.microsoft.com/office/drawing/2014/main" id="{5A1674CF-B957-1E7B-8382-09E4BF28BAA5}"/>
               </a:ext>
             </a:extLst>
           </p:cNvPr>
@@ -15302,8 +15302,8 @@
         </p:nvSpPr>
         <p:spPr>
           <a:xfrm>
-            <a:off x="1223514" y="2498833"/>
-            <a:ext cx="4655666" cy="1962854"/>
+            <a:off x="1198591" y="2472230"/>
+            <a:ext cx="4705512" cy="1995843"/>
           </a:xfrm>
         </p:spPr>
         <p:txBody>
@@ -15339,7 +15339,7 @@
           <p:cNvPr id="7" name="kpi_label_1">
             <a:extLst>
               <a:ext uri="{FF2B5EF4-FFF2-40B4-BE49-F238E27FC236}">
-                <a16:creationId xmlns:a16="http://schemas.microsoft.com/office/drawing/2014/main" id="{CCE10386-0A58-E7B5-6C97-E296F203C4DB}"/>
+                <a16:creationId xmlns:a16="http://schemas.microsoft.com/office/drawing/2014/main" id="{EE8E30E7-1073-5F7B-7519-3EF8718798EB}"/>
               </a:ext>
             </a:extLst>
           </p:cNvPr>
@@ -15352,207 +15352,8 @@
         </p:nvSpPr>
         <p:spPr>
           <a:xfrm>
-            <a:off x="1223514" y="4525005"/>
-            <a:ext cx="4655666" cy="1139722"/>
-          </a:xfrm>
-          <a:prstGeom prst="rect">
-            <a:avLst/>
-          </a:prstGeom>
-        </p:spPr>
-        <p:txBody>
-          <a:bodyPr wrap="square" anchor="t">
-            <a:noAutofit/>
-          </a:bodyPr>
-          <a:lstStyle>
-            <a:lvl1pPr marL="0" indent="0">
-              <a:spcBef>
-                <a:spcPts val="0"/>
-              </a:spcBef>
-              <a:buFontTx/>
-              <a:buNone/>
-              <a:defRPr sz="1800"/>
-            </a:lvl1pPr>
-          </a:lstStyle>
-          <a:p>
-            <a:pPr lvl="0"/>
-            <a:r>
-              <a:rPr lang="en-US"/>
-              <a:t>kpi_label_1</a:t>
-            </a:r>
-          </a:p>
-        </p:txBody>
-      </p:sp>
-      <p:sp>
-        <p:nvSpPr>
-          <p:cNvPr id="8" name="quote">
-            <a:extLst>
-              <a:ext uri="{FF2B5EF4-FFF2-40B4-BE49-F238E27FC236}">
-                <a16:creationId xmlns:a16="http://schemas.microsoft.com/office/drawing/2014/main" id="{5FE502C1-F9E5-F22E-F297-A4D41442C3E5}"/>
-              </a:ext>
-            </a:extLst>
-          </p:cNvPr>
-          <p:cNvSpPr>
-            <a:spLocks noGrp="1"/>
-          </p:cNvSpPr>
-          <p:nvPr>
-            <p:ph type="body" sz="quarter" idx="15" hasCustomPrompt="1"/>
-          </p:nvPr>
-        </p:nvSpPr>
-        <p:spPr>
-          <a:xfrm>
-            <a:off x="1223514" y="2498834"/>
-            <a:ext cx="4655666" cy="2469397"/>
-          </a:xfrm>
-          <a:prstGeom prst="rect">
-            <a:avLst/>
-          </a:prstGeom>
-        </p:spPr>
-        <p:txBody>
-          <a:bodyPr wrap="square" anchor="t">
-            <a:noAutofit/>
-          </a:bodyPr>
-          <a:lstStyle>
-            <a:lvl1pPr marL="0" indent="0">
-              <a:spcBef>
-                <a:spcPts val="0"/>
-              </a:spcBef>
-              <a:buFontTx/>
-              <a:buNone/>
-              <a:defRPr sz="2400" i="1">
-                <a:latin typeface="+mj-lt"/>
-              </a:defRPr>
-            </a:lvl1pPr>
-          </a:lstStyle>
-          <a:p>
-            <a:pPr lvl="0"/>
-            <a:r>
-              <a:rPr lang="en-US"/>
-              <a:t>quote</a:t>
-            </a:r>
-          </a:p>
-        </p:txBody>
-      </p:sp>
-      <p:sp>
-        <p:nvSpPr>
-          <p:cNvPr id="9" name="attribution">
-            <a:extLst>
-              <a:ext uri="{FF2B5EF4-FFF2-40B4-BE49-F238E27FC236}">
-                <a16:creationId xmlns:a16="http://schemas.microsoft.com/office/drawing/2014/main" id="{1AB4A05E-1B61-9A03-B380-189A339E0CE6}"/>
-              </a:ext>
-            </a:extLst>
-          </p:cNvPr>
-          <p:cNvSpPr>
-            <a:spLocks noGrp="1"/>
-          </p:cNvSpPr>
-          <p:nvPr>
-            <p:ph type="body" sz="quarter" idx="16" hasCustomPrompt="1"/>
-          </p:nvPr>
-        </p:nvSpPr>
-        <p:spPr>
-          <a:xfrm>
-            <a:off x="1223514" y="5031549"/>
-            <a:ext cx="4655666" cy="633179"/>
-          </a:xfrm>
-          <a:prstGeom prst="rect">
-            <a:avLst/>
-          </a:prstGeom>
-        </p:spPr>
-        <p:txBody>
-          <a:bodyPr wrap="square" anchor="t">
-            <a:noAutofit/>
-          </a:bodyPr>
-          <a:lstStyle>
-            <a:lvl1pPr marL="0" indent="0">
-              <a:spcBef>
-                <a:spcPts val="0"/>
-              </a:spcBef>
-              <a:buFontTx/>
-              <a:buNone/>
-              <a:defRPr sz="1400"/>
-            </a:lvl1pPr>
-          </a:lstStyle>
-          <a:p>
-            <a:pPr lvl="0"/>
-            <a:r>
-              <a:rPr lang="en-US"/>
-              <a:t>attribution</a:t>
-            </a:r>
-          </a:p>
-        </p:txBody>
-      </p:sp>
-      <p:sp>
-        <p:nvSpPr>
-          <p:cNvPr id="10" name="item_1_title">
-            <a:extLst>
-              <a:ext uri="{FF2B5EF4-FFF2-40B4-BE49-F238E27FC236}">
-                <a16:creationId xmlns:a16="http://schemas.microsoft.com/office/drawing/2014/main" id="{48FC4FC5-C187-376A-69F0-17A396266E0F}"/>
-              </a:ext>
-            </a:extLst>
-          </p:cNvPr>
-          <p:cNvSpPr>
-            <a:spLocks noGrp="1"/>
-          </p:cNvSpPr>
-          <p:nvPr>
-            <p:ph type="body" sz="quarter" idx="17" hasCustomPrompt="1"/>
-          </p:nvPr>
-        </p:nvSpPr>
-        <p:spPr>
-          <a:xfrm>
-            <a:off x="6467369" y="2286001"/>
-            <a:ext cx="4276832" cy="1056341"/>
-          </a:xfrm>
-          <a:prstGeom prst="rect">
-            <a:avLst/>
-          </a:prstGeom>
-        </p:spPr>
-        <p:txBody>
-          <a:bodyPr wrap="square" anchor="t">
-            <a:noAutofit/>
-          </a:bodyPr>
-          <a:lstStyle>
-            <a:lvl1pPr marL="0" indent="0">
-              <a:spcBef>
-                <a:spcPts val="0"/>
-              </a:spcBef>
-              <a:buFontTx/>
-              <a:buNone/>
-              <a:defRPr sz="2200" b="1">
-                <a:solidFill>
-                  <a:schemeClr val="accent1"/>
-                </a:solidFill>
-                <a:latin typeface="+mj-lt"/>
-              </a:defRPr>
-            </a:lvl1pPr>
-          </a:lstStyle>
-          <a:p>
-            <a:pPr lvl="0"/>
-            <a:r>
-              <a:rPr lang="en-US"/>
-              <a:t>item_1_title</a:t>
-            </a:r>
-          </a:p>
-        </p:txBody>
-      </p:sp>
-      <p:sp>
-        <p:nvSpPr>
-          <p:cNvPr id="11" name="item_1">
-            <a:extLst>
-              <a:ext uri="{FF2B5EF4-FFF2-40B4-BE49-F238E27FC236}">
-                <a16:creationId xmlns:a16="http://schemas.microsoft.com/office/drawing/2014/main" id="{05645A17-A014-086F-7324-EA600B8CB71F}"/>
-              </a:ext>
-            </a:extLst>
-          </p:cNvPr>
-          <p:cNvSpPr>
-            <a:spLocks noGrp="1"/>
-          </p:cNvSpPr>
-          <p:nvPr>
-            <p:ph type="body" sz="quarter" idx="18" hasCustomPrompt="1"/>
-          </p:nvPr>
-        </p:nvSpPr>
-        <p:spPr>
-          <a:xfrm>
-            <a:off x="6467369" y="3342342"/>
-            <a:ext cx="4276832" cy="2535219"/>
+            <a:off x="1198591" y="4532455"/>
+            <a:ext cx="4705512" cy="1158877"/>
           </a:xfrm>
           <a:prstGeom prst="rect">
             <a:avLst/>
@@ -15576,6 +15377,205 @@
             <a:pPr lvl="0"/>
             <a:r>
               <a:rPr lang="en-US"/>
+              <a:t>kpi_label_1</a:t>
+            </a:r>
+          </a:p>
+        </p:txBody>
+      </p:sp>
+      <p:sp>
+        <p:nvSpPr>
+          <p:cNvPr id="8" name="quote">
+            <a:extLst>
+              <a:ext uri="{FF2B5EF4-FFF2-40B4-BE49-F238E27FC236}">
+                <a16:creationId xmlns:a16="http://schemas.microsoft.com/office/drawing/2014/main" id="{9AE7BD65-5AFB-6AE1-CCFE-832F8E3A8FDC}"/>
+              </a:ext>
+            </a:extLst>
+          </p:cNvPr>
+          <p:cNvSpPr>
+            <a:spLocks noGrp="1"/>
+          </p:cNvSpPr>
+          <p:nvPr>
+            <p:ph type="body" sz="quarter" idx="15" hasCustomPrompt="1"/>
+          </p:nvPr>
+        </p:nvSpPr>
+        <p:spPr>
+          <a:xfrm>
+            <a:off x="1198591" y="2472230"/>
+            <a:ext cx="4705512" cy="2510899"/>
+          </a:xfrm>
+          <a:prstGeom prst="rect">
+            <a:avLst/>
+          </a:prstGeom>
+        </p:spPr>
+        <p:txBody>
+          <a:bodyPr wrap="square" anchor="t">
+            <a:noAutofit/>
+          </a:bodyPr>
+          <a:lstStyle>
+            <a:lvl1pPr marL="0" indent="0">
+              <a:spcBef>
+                <a:spcPts val="0"/>
+              </a:spcBef>
+              <a:buFontTx/>
+              <a:buNone/>
+              <a:defRPr sz="2000" i="1">
+                <a:latin typeface="+mj-lt"/>
+              </a:defRPr>
+            </a:lvl1pPr>
+          </a:lstStyle>
+          <a:p>
+            <a:pPr lvl="0"/>
+            <a:r>
+              <a:rPr lang="en-US"/>
+              <a:t>quote</a:t>
+            </a:r>
+          </a:p>
+        </p:txBody>
+      </p:sp>
+      <p:sp>
+        <p:nvSpPr>
+          <p:cNvPr id="9" name="attribution">
+            <a:extLst>
+              <a:ext uri="{FF2B5EF4-FFF2-40B4-BE49-F238E27FC236}">
+                <a16:creationId xmlns:a16="http://schemas.microsoft.com/office/drawing/2014/main" id="{1E4A8D5B-5C44-C671-C2C5-501B50041C6C}"/>
+              </a:ext>
+            </a:extLst>
+          </p:cNvPr>
+          <p:cNvSpPr>
+            <a:spLocks noGrp="1"/>
+          </p:cNvSpPr>
+          <p:nvPr>
+            <p:ph type="body" sz="quarter" idx="16" hasCustomPrompt="1"/>
+          </p:nvPr>
+        </p:nvSpPr>
+        <p:spPr>
+          <a:xfrm>
+            <a:off x="1198591" y="5047511"/>
+            <a:ext cx="4705512" cy="643820"/>
+          </a:xfrm>
+          <a:prstGeom prst="rect">
+            <a:avLst/>
+          </a:prstGeom>
+        </p:spPr>
+        <p:txBody>
+          <a:bodyPr wrap="square" anchor="t">
+            <a:noAutofit/>
+          </a:bodyPr>
+          <a:lstStyle>
+            <a:lvl1pPr marL="0" indent="0">
+              <a:spcBef>
+                <a:spcPts val="0"/>
+              </a:spcBef>
+              <a:buFontTx/>
+              <a:buNone/>
+              <a:defRPr sz="2000"/>
+            </a:lvl1pPr>
+          </a:lstStyle>
+          <a:p>
+            <a:pPr lvl="0"/>
+            <a:r>
+              <a:rPr lang="en-US"/>
+              <a:t>attribution</a:t>
+            </a:r>
+          </a:p>
+        </p:txBody>
+      </p:sp>
+      <p:sp>
+        <p:nvSpPr>
+          <p:cNvPr id="10" name="item_1_title">
+            <a:extLst>
+              <a:ext uri="{FF2B5EF4-FFF2-40B4-BE49-F238E27FC236}">
+                <a16:creationId xmlns:a16="http://schemas.microsoft.com/office/drawing/2014/main" id="{650F991D-7CEB-7A27-E2E6-679FE964D00D}"/>
+              </a:ext>
+            </a:extLst>
+          </p:cNvPr>
+          <p:cNvSpPr>
+            <a:spLocks noGrp="1"/>
+          </p:cNvSpPr>
+          <p:nvPr>
+            <p:ph type="body" sz="quarter" idx="17" hasCustomPrompt="1"/>
+          </p:nvPr>
+        </p:nvSpPr>
+        <p:spPr>
+          <a:xfrm>
+            <a:off x="6467369" y="2286001"/>
+            <a:ext cx="4276832" cy="1056341"/>
+          </a:xfrm>
+          <a:prstGeom prst="rect">
+            <a:avLst/>
+          </a:prstGeom>
+        </p:spPr>
+        <p:txBody>
+          <a:bodyPr wrap="square" anchor="t">
+            <a:noAutofit/>
+          </a:bodyPr>
+          <a:lstStyle>
+            <a:lvl1pPr marL="0" indent="0">
+              <a:spcBef>
+                <a:spcPts val="0"/>
+              </a:spcBef>
+              <a:buFontTx/>
+              <a:buNone/>
+              <a:defRPr sz="2000" b="1">
+                <a:solidFill>
+                  <a:schemeClr val="accent1"/>
+                </a:solidFill>
+                <a:latin typeface="+mj-lt"/>
+              </a:defRPr>
+            </a:lvl1pPr>
+          </a:lstStyle>
+          <a:p>
+            <a:pPr lvl="0"/>
+            <a:r>
+              <a:rPr lang="en-US"/>
+              <a:t>item_1_title</a:t>
+            </a:r>
+          </a:p>
+        </p:txBody>
+      </p:sp>
+      <p:sp>
+        <p:nvSpPr>
+          <p:cNvPr id="11" name="item_1">
+            <a:extLst>
+              <a:ext uri="{FF2B5EF4-FFF2-40B4-BE49-F238E27FC236}">
+                <a16:creationId xmlns:a16="http://schemas.microsoft.com/office/drawing/2014/main" id="{62FAA7CA-DD98-2C6F-11B3-6D77DDB42262}"/>
+              </a:ext>
+            </a:extLst>
+          </p:cNvPr>
+          <p:cNvSpPr>
+            <a:spLocks noGrp="1"/>
+          </p:cNvSpPr>
+          <p:nvPr>
+            <p:ph type="body" sz="quarter" idx="18" hasCustomPrompt="1"/>
+          </p:nvPr>
+        </p:nvSpPr>
+        <p:spPr>
+          <a:xfrm>
+            <a:off x="6467369" y="3342342"/>
+            <a:ext cx="4276832" cy="2535219"/>
+          </a:xfrm>
+          <a:prstGeom prst="rect">
+            <a:avLst/>
+          </a:prstGeom>
+        </p:spPr>
+        <p:txBody>
+          <a:bodyPr wrap="square" anchor="t">
+            <a:noAutofit/>
+          </a:bodyPr>
+          <a:lstStyle>
+            <a:lvl1pPr marL="0" indent="0">
+              <a:spcBef>
+                <a:spcPts val="0"/>
+              </a:spcBef>
+              <a:buFontTx/>
+              <a:buNone/>
+              <a:defRPr sz="2000"/>
+            </a:lvl1pPr>
+          </a:lstStyle>
+          <a:p>
+            <a:pPr lvl="0"/>
+            <a:r>
+              <a:rPr lang="en-US"/>
               <a:t>item_1</a:t>
             </a:r>
           </a:p>
@@ -15586,7 +15586,7 @@
           <p:cNvPr id="12" name="source">
             <a:extLst>
               <a:ext uri="{FF2B5EF4-FFF2-40B4-BE49-F238E27FC236}">
-                <a16:creationId xmlns:a16="http://schemas.microsoft.com/office/drawing/2014/main" id="{DEAB3EC7-307D-392E-EC5C-9934F74A3E80}"/>
+                <a16:creationId xmlns:a16="http://schemas.microsoft.com/office/drawing/2014/main" id="{CA9D6890-4359-E148-F182-483D3A7A9778}"/>
               </a:ext>
             </a:extLst>
           </p:cNvPr>
@@ -15641,7 +15641,7 @@
     </p:spTree>
     <p:extLst>
       <p:ext uri="{BB962C8B-B14F-4D97-AF65-F5344CB8AC3E}">
-        <p14:creationId xmlns:p14="http://schemas.microsoft.com/office/powerpoint/2010/main" val="3520817408"/>
+        <p14:creationId xmlns:p14="http://schemas.microsoft.com/office/powerpoint/2010/main" val="91691636"/>
       </p:ext>
     </p:extLst>
   </p:cSld>
@@ -15710,7 +15710,7 @@
           <a:bodyPr/>
           <a:lstStyle/>
           <a:p>
-            <a:fld id="{DAA401AF-96B9-4795-80AC-645028D14909}" type="datetimeFigureOut">
+            <a:fld id="{C108DDE1-F741-4F4F-A7D2-FBD0359B97CD}" type="datetimeFigureOut">
               <a:rPr lang="en-US" smtClean="0"/>
               <a:t>10/3/2026</a:t>
             </a:fld>
@@ -15752,7 +15752,7 @@
           <a:bodyPr/>
           <a:lstStyle/>
           <a:p>
-            <a:fld id="{EB0BFBF9-3444-4A23-A691-88293893E3E4}" type="slidenum">
+            <a:fld id="{D07356AB-B086-4690-8078-803F810DAE76}" type="slidenum">
               <a:rPr lang="en-US" smtClean="0"/>
               <a:t>‹#›</a:t>
             </a:fld>
@@ -15765,7 +15765,7 @@
           <p:cNvPr id="6" name="marker_1">
             <a:extLst>
               <a:ext uri="{FF2B5EF4-FFF2-40B4-BE49-F238E27FC236}">
-                <a16:creationId xmlns:a16="http://schemas.microsoft.com/office/drawing/2014/main" id="{5BFB0CC7-3088-6914-F2DF-BCD64B78A012}"/>
+                <a16:creationId xmlns:a16="http://schemas.microsoft.com/office/drawing/2014/main" id="{C8388644-79AF-5354-2D1C-E3E9DC59E578}"/>
               </a:ext>
             </a:extLst>
           </p:cNvPr>
@@ -15799,7 +15799,7 @@
               </a:spcBef>
               <a:buFontTx/>
               <a:buNone/>
-              <a:defRPr sz="2400" b="1">
+              <a:defRPr sz="2000" b="1">
                 <a:solidFill>
                   <a:schemeClr val="bg1"/>
                 </a:solidFill>
@@ -15821,7 +15821,7 @@
           <p:cNvPr id="7" name="item_1">
             <a:extLst>
               <a:ext uri="{FF2B5EF4-FFF2-40B4-BE49-F238E27FC236}">
-                <a16:creationId xmlns:a16="http://schemas.microsoft.com/office/drawing/2014/main" id="{C9C8BF9B-2875-9819-0C62-101BC4855F75}"/>
+                <a16:creationId xmlns:a16="http://schemas.microsoft.com/office/drawing/2014/main" id="{9BF024FB-3F51-9F22-F7BD-4C3B6DBD2FA6}"/>
               </a:ext>
             </a:extLst>
           </p:cNvPr>
@@ -15869,7 +15869,7 @@
           <p:cNvPr id="8" name="marker_2">
             <a:extLst>
               <a:ext uri="{FF2B5EF4-FFF2-40B4-BE49-F238E27FC236}">
-                <a16:creationId xmlns:a16="http://schemas.microsoft.com/office/drawing/2014/main" id="{DC6DC340-B864-EBA0-B8DC-EE02A3CBE8C7}"/>
+                <a16:creationId xmlns:a16="http://schemas.microsoft.com/office/drawing/2014/main" id="{FBFF6CA3-E47F-1757-1F59-2CC63ADFB927}"/>
               </a:ext>
             </a:extLst>
           </p:cNvPr>
@@ -15903,7 +15903,7 @@
               </a:spcBef>
               <a:buFontTx/>
               <a:buNone/>
-              <a:defRPr sz="2400" b="1">
+              <a:defRPr sz="2000" b="1">
                 <a:solidFill>
                   <a:schemeClr val="bg1"/>
                 </a:solidFill>
@@ -15925,7 +15925,7 @@
           <p:cNvPr id="9" name="item_2">
             <a:extLst>
               <a:ext uri="{FF2B5EF4-FFF2-40B4-BE49-F238E27FC236}">
-                <a16:creationId xmlns:a16="http://schemas.microsoft.com/office/drawing/2014/main" id="{52637F37-364C-1FFF-4F65-ED326D4A3A41}"/>
+                <a16:creationId xmlns:a16="http://schemas.microsoft.com/office/drawing/2014/main" id="{A487B5E2-885E-6438-D3AE-4A421147210D}"/>
               </a:ext>
             </a:extLst>
           </p:cNvPr>
@@ -15973,7 +15973,7 @@
           <p:cNvPr id="10" name="marker_3">
             <a:extLst>
               <a:ext uri="{FF2B5EF4-FFF2-40B4-BE49-F238E27FC236}">
-                <a16:creationId xmlns:a16="http://schemas.microsoft.com/office/drawing/2014/main" id="{3906C4D6-203D-0F61-B9DE-591AFDDF7D27}"/>
+                <a16:creationId xmlns:a16="http://schemas.microsoft.com/office/drawing/2014/main" id="{EA0A5F27-706C-3F25-1552-34A86DB5F382}"/>
               </a:ext>
             </a:extLst>
           </p:cNvPr>
@@ -16007,7 +16007,7 @@
               </a:spcBef>
               <a:buFontTx/>
               <a:buNone/>
-              <a:defRPr sz="2400" b="1">
+              <a:defRPr sz="2000" b="1">
                 <a:solidFill>
                   <a:schemeClr val="bg1"/>
                 </a:solidFill>
@@ -16029,7 +16029,7 @@
           <p:cNvPr id="11" name="item_3">
             <a:extLst>
               <a:ext uri="{FF2B5EF4-FFF2-40B4-BE49-F238E27FC236}">
-                <a16:creationId xmlns:a16="http://schemas.microsoft.com/office/drawing/2014/main" id="{3D8163CB-CC69-EF51-584D-F1C51F233227}"/>
+                <a16:creationId xmlns:a16="http://schemas.microsoft.com/office/drawing/2014/main" id="{F5D6ADF7-DBBA-30D5-C10E-256690E753D8}"/>
               </a:ext>
             </a:extLst>
           </p:cNvPr>
@@ -16077,7 +16077,7 @@
           <p:cNvPr id="12" name="marker_4">
             <a:extLst>
               <a:ext uri="{FF2B5EF4-FFF2-40B4-BE49-F238E27FC236}">
-                <a16:creationId xmlns:a16="http://schemas.microsoft.com/office/drawing/2014/main" id="{5353E147-2697-0B91-CDA9-885367A0ECB3}"/>
+                <a16:creationId xmlns:a16="http://schemas.microsoft.com/office/drawing/2014/main" id="{E5D10C1A-0732-3437-419A-9B2EBAD82976}"/>
               </a:ext>
             </a:extLst>
           </p:cNvPr>
@@ -16111,7 +16111,7 @@
               </a:spcBef>
               <a:buFontTx/>
               <a:buNone/>
-              <a:defRPr sz="2400" b="1">
+              <a:defRPr sz="2000" b="1">
                 <a:solidFill>
                   <a:schemeClr val="bg1"/>
                 </a:solidFill>
@@ -16133,7 +16133,7 @@
           <p:cNvPr id="13" name="item_4">
             <a:extLst>
               <a:ext uri="{FF2B5EF4-FFF2-40B4-BE49-F238E27FC236}">
-                <a16:creationId xmlns:a16="http://schemas.microsoft.com/office/drawing/2014/main" id="{62DDBC64-5146-4937-44F5-3399F916A1E7}"/>
+                <a16:creationId xmlns:a16="http://schemas.microsoft.com/office/drawing/2014/main" id="{9433E883-F3EE-88C7-7A51-4957F976A9C7}"/>
               </a:ext>
             </a:extLst>
           </p:cNvPr>
@@ -16181,7 +16181,7 @@
           <p:cNvPr id="14" name="source">
             <a:extLst>
               <a:ext uri="{FF2B5EF4-FFF2-40B4-BE49-F238E27FC236}">
-                <a16:creationId xmlns:a16="http://schemas.microsoft.com/office/drawing/2014/main" id="{73259261-8099-894E-4838-46DD2B602B18}"/>
+                <a16:creationId xmlns:a16="http://schemas.microsoft.com/office/drawing/2014/main" id="{8EEACCF6-AAC4-3B5A-BE74-789DC77FC9C9}"/>
               </a:ext>
             </a:extLst>
           </p:cNvPr>
@@ -16236,7 +16236,7 @@
     </p:spTree>
     <p:extLst>
       <p:ext uri="{BB962C8B-B14F-4D97-AF65-F5344CB8AC3E}">
-        <p14:creationId xmlns:p14="http://schemas.microsoft.com/office/powerpoint/2010/main" val="3853020237"/>
+        <p14:creationId xmlns:p14="http://schemas.microsoft.com/office/powerpoint/2010/main" val="1844060647"/>
       </p:ext>
     </p:extLst>
   </p:cSld>
@@ -16305,7 +16305,7 @@
           <a:bodyPr/>
           <a:lstStyle/>
           <a:p>
-            <a:fld id="{DAA401AF-96B9-4795-80AC-645028D14909}" type="datetimeFigureOut">
+            <a:fld id="{C108DDE1-F741-4F4F-A7D2-FBD0359B97CD}" type="datetimeFigureOut">
               <a:rPr lang="en-US" smtClean="0"/>
               <a:t>10/3/2026</a:t>
             </a:fld>
@@ -16347,7 +16347,7 @@
           <a:bodyPr/>
           <a:lstStyle/>
           <a:p>
-            <a:fld id="{EB0BFBF9-3444-4A23-A691-88293893E3E4}" type="slidenum">
+            <a:fld id="{D07356AB-B086-4690-8078-803F810DAE76}" type="slidenum">
               <a:rPr lang="en-US" smtClean="0"/>
               <a:t>‹#›</a:t>
             </a:fld>
@@ -16360,7 +16360,7 @@
           <p:cNvPr id="6" name="decisions_title">
             <a:extLst>
               <a:ext uri="{FF2B5EF4-FFF2-40B4-BE49-F238E27FC236}">
-                <a16:creationId xmlns:a16="http://schemas.microsoft.com/office/drawing/2014/main" id="{120FF6D2-0353-7D1F-67BA-15C98C9FA2E9}"/>
+                <a16:creationId xmlns:a16="http://schemas.microsoft.com/office/drawing/2014/main" id="{28A642F6-8C1A-04D1-189B-808A8F03C7B6}"/>
               </a:ext>
             </a:extLst>
           </p:cNvPr>
@@ -16373,8 +16373,8 @@
         </p:nvSpPr>
         <p:spPr>
           <a:xfrm>
-            <a:off x="1223514" y="4869263"/>
-            <a:ext cx="2128447" cy="795464"/>
+            <a:off x="1198591" y="4842659"/>
+            <a:ext cx="2352756" cy="848672"/>
           </a:xfrm>
         </p:spPr>
         <p:txBody>
@@ -16410,7 +16410,7 @@
           <p:cNvPr id="7" name="decisions">
             <a:extLst>
               <a:ext uri="{FF2B5EF4-FFF2-40B4-BE49-F238E27FC236}">
-                <a16:creationId xmlns:a16="http://schemas.microsoft.com/office/drawing/2014/main" id="{8C0C8D7D-3973-4B62-955D-4FCD95B3A2EC}"/>
+                <a16:creationId xmlns:a16="http://schemas.microsoft.com/office/drawing/2014/main" id="{ED00446F-9E43-791C-65BA-49976F0F1700}"/>
               </a:ext>
             </a:extLst>
           </p:cNvPr>
@@ -16423,8 +16423,8 @@
         </p:nvSpPr>
         <p:spPr>
           <a:xfrm>
-            <a:off x="3847935" y="4869263"/>
-            <a:ext cx="6696881" cy="795464"/>
+            <a:off x="3648549" y="4842659"/>
+            <a:ext cx="6921191" cy="848672"/>
           </a:xfrm>
           <a:prstGeom prst="rect">
             <a:avLst/>
@@ -16436,7 +16436,7 @@
           </a:bodyPr>
           <a:lstStyle>
             <a:lvl1pPr>
-              <a:defRPr sz="1800"/>
+              <a:defRPr sz="2000"/>
             </a:lvl1pPr>
           </a:lstStyle>
           <a:p>
@@ -16453,7 +16453,7 @@
           <p:cNvPr id="8" name="item_1_title">
             <a:extLst>
               <a:ext uri="{FF2B5EF4-FFF2-40B4-BE49-F238E27FC236}">
-                <a16:creationId xmlns:a16="http://schemas.microsoft.com/office/drawing/2014/main" id="{D1915385-600F-E6BC-D467-8E82A86CBDBA}"/>
+                <a16:creationId xmlns:a16="http://schemas.microsoft.com/office/drawing/2014/main" id="{FA51C4D1-A083-F600-344F-902926E51D6D}"/>
               </a:ext>
             </a:extLst>
           </p:cNvPr>
@@ -16466,8 +16466,8 @@
         </p:nvSpPr>
         <p:spPr>
           <a:xfrm>
-            <a:off x="1223514" y="2498834"/>
-            <a:ext cx="2708328" cy="508609"/>
+            <a:off x="1198592" y="2472229"/>
+            <a:ext cx="2758175" cy="524258"/>
           </a:xfrm>
           <a:prstGeom prst="rect">
             <a:avLst/>
@@ -16484,7 +16484,7 @@
               </a:spcBef>
               <a:buFontTx/>
               <a:buNone/>
-              <a:defRPr sz="2200" b="1">
+              <a:defRPr sz="2000" b="1">
                 <a:solidFill>
                   <a:schemeClr val="accent1"/>
                 </a:solidFill>
@@ -16506,7 +16506,7 @@
           <p:cNvPr id="9" name="item_1">
             <a:extLst>
               <a:ext uri="{FF2B5EF4-FFF2-40B4-BE49-F238E27FC236}">
-                <a16:creationId xmlns:a16="http://schemas.microsoft.com/office/drawing/2014/main" id="{834ED53F-3E32-2894-B604-8C9CA593C523}"/>
+                <a16:creationId xmlns:a16="http://schemas.microsoft.com/office/drawing/2014/main" id="{893E638C-1F12-A70A-9C98-745721106ED3}"/>
               </a:ext>
             </a:extLst>
           </p:cNvPr>
@@ -16519,8 +16519,8 @@
         </p:nvSpPr>
         <p:spPr>
           <a:xfrm>
-            <a:off x="1223514" y="3007443"/>
-            <a:ext cx="2708328" cy="1220661"/>
+            <a:off x="1198592" y="2996487"/>
+            <a:ext cx="2758175" cy="1258220"/>
           </a:xfrm>
           <a:prstGeom prst="rect">
             <a:avLst/>
@@ -16554,7 +16554,7 @@
           <p:cNvPr id="10" name="item_2_title">
             <a:extLst>
               <a:ext uri="{FF2B5EF4-FFF2-40B4-BE49-F238E27FC236}">
-                <a16:creationId xmlns:a16="http://schemas.microsoft.com/office/drawing/2014/main" id="{B7504EEE-7836-ABA4-4ACA-0B3B88C93585}"/>
+                <a16:creationId xmlns:a16="http://schemas.microsoft.com/office/drawing/2014/main" id="{6636F4F3-B5AE-2E2D-4AE0-DF8EB4E4F993}"/>
               </a:ext>
             </a:extLst>
           </p:cNvPr>
@@ -16567,8 +16567,8 @@
         </p:nvSpPr>
         <p:spPr>
           <a:xfrm>
-            <a:off x="4530001" y="2498834"/>
-            <a:ext cx="2708328" cy="508609"/>
+            <a:off x="4505078" y="2472229"/>
+            <a:ext cx="2758175" cy="524258"/>
           </a:xfrm>
           <a:prstGeom prst="rect">
             <a:avLst/>
@@ -16585,7 +16585,7 @@
               </a:spcBef>
               <a:buFontTx/>
               <a:buNone/>
-              <a:defRPr sz="2200" b="1">
+              <a:defRPr sz="2000" b="1">
                 <a:solidFill>
                   <a:schemeClr val="accent1"/>
                 </a:solidFill>
@@ -16607,7 +16607,7 @@
           <p:cNvPr id="11" name="item_2">
             <a:extLst>
               <a:ext uri="{FF2B5EF4-FFF2-40B4-BE49-F238E27FC236}">
-                <a16:creationId xmlns:a16="http://schemas.microsoft.com/office/drawing/2014/main" id="{C33D4015-7BDB-5BD7-A7C6-4D94C0C2F75F}"/>
+                <a16:creationId xmlns:a16="http://schemas.microsoft.com/office/drawing/2014/main" id="{3A184CDD-E879-B34D-36C2-7D6BDD12D989}"/>
               </a:ext>
             </a:extLst>
           </p:cNvPr>
@@ -16620,8 +16620,8 @@
         </p:nvSpPr>
         <p:spPr>
           <a:xfrm>
-            <a:off x="4530001" y="3007443"/>
-            <a:ext cx="2708328" cy="1220661"/>
+            <a:off x="4505078" y="2996487"/>
+            <a:ext cx="2758175" cy="1258220"/>
           </a:xfrm>
           <a:prstGeom prst="rect">
             <a:avLst/>
@@ -16655,7 +16655,7 @@
           <p:cNvPr id="12" name="item_3_title">
             <a:extLst>
               <a:ext uri="{FF2B5EF4-FFF2-40B4-BE49-F238E27FC236}">
-                <a16:creationId xmlns:a16="http://schemas.microsoft.com/office/drawing/2014/main" id="{216818D1-54D8-8B06-523B-84E63A4BCD60}"/>
+                <a16:creationId xmlns:a16="http://schemas.microsoft.com/office/drawing/2014/main" id="{7E75D11F-4C8B-AD73-10A9-8A3D03626FDE}"/>
               </a:ext>
             </a:extLst>
           </p:cNvPr>
@@ -16668,8 +16668,8 @@
         </p:nvSpPr>
         <p:spPr>
           <a:xfrm>
-            <a:off x="7836487" y="2498834"/>
-            <a:ext cx="2708328" cy="508609"/>
+            <a:off x="7811565" y="2472229"/>
+            <a:ext cx="2758175" cy="524258"/>
           </a:xfrm>
           <a:prstGeom prst="rect">
             <a:avLst/>
@@ -16686,7 +16686,7 @@
               </a:spcBef>
               <a:buFontTx/>
               <a:buNone/>
-              <a:defRPr sz="2200" b="1">
+              <a:defRPr sz="2000" b="1">
                 <a:solidFill>
                   <a:schemeClr val="accent1"/>
                 </a:solidFill>
@@ -16708,7 +16708,7 @@
           <p:cNvPr id="13" name="item_3">
             <a:extLst>
               <a:ext uri="{FF2B5EF4-FFF2-40B4-BE49-F238E27FC236}">
-                <a16:creationId xmlns:a16="http://schemas.microsoft.com/office/drawing/2014/main" id="{B5B3CC8A-4CDF-7DBC-E2DC-B88751F13917}"/>
+                <a16:creationId xmlns:a16="http://schemas.microsoft.com/office/drawing/2014/main" id="{B89336D3-DC0A-4CD6-A87B-9558D4A56538}"/>
               </a:ext>
             </a:extLst>
           </p:cNvPr>
@@ -16721,8 +16721,8 @@
         </p:nvSpPr>
         <p:spPr>
           <a:xfrm>
-            <a:off x="7836487" y="3007443"/>
-            <a:ext cx="2708328" cy="1220661"/>
+            <a:off x="7811565" y="2996487"/>
+            <a:ext cx="2758175" cy="1258220"/>
           </a:xfrm>
           <a:prstGeom prst="rect">
             <a:avLst/>
@@ -16756,7 +16756,7 @@
           <p:cNvPr id="14" name="source">
             <a:extLst>
               <a:ext uri="{FF2B5EF4-FFF2-40B4-BE49-F238E27FC236}">
-                <a16:creationId xmlns:a16="http://schemas.microsoft.com/office/drawing/2014/main" id="{0DD8D4E0-D828-62CC-14DA-96BAA04952E1}"/>
+                <a16:creationId xmlns:a16="http://schemas.microsoft.com/office/drawing/2014/main" id="{6D85F065-F632-2676-E3DC-CD7AAD7CDDDF}"/>
               </a:ext>
             </a:extLst>
           </p:cNvPr>
@@ -16811,7 +16811,7 @@
     </p:spTree>
     <p:extLst>
       <p:ext uri="{BB962C8B-B14F-4D97-AF65-F5344CB8AC3E}">
-        <p14:creationId xmlns:p14="http://schemas.microsoft.com/office/powerpoint/2010/main" val="1909271936"/>
+        <p14:creationId xmlns:p14="http://schemas.microsoft.com/office/powerpoint/2010/main" val="3750355319"/>
       </p:ext>
     </p:extLst>
   </p:cSld>
@@ -16880,7 +16880,7 @@
           <a:bodyPr/>
           <a:lstStyle/>
           <a:p>
-            <a:fld id="{DAA401AF-96B9-4795-80AC-645028D14909}" type="datetimeFigureOut">
+            <a:fld id="{C108DDE1-F741-4F4F-A7D2-FBD0359B97CD}" type="datetimeFigureOut">
               <a:rPr lang="en-US" smtClean="0"/>
               <a:t>10/3/2026</a:t>
             </a:fld>
@@ -16922,7 +16922,7 @@
           <a:bodyPr/>
           <a:lstStyle/>
           <a:p>
-            <a:fld id="{EB0BFBF9-3444-4A23-A691-88293893E3E4}" type="slidenum">
+            <a:fld id="{D07356AB-B086-4690-8078-803F810DAE76}" type="slidenum">
               <a:rPr lang="en-US" smtClean="0"/>
               <a:t>‹#›</a:t>
             </a:fld>
@@ -16935,7 +16935,7 @@
           <p:cNvPr id="6" name="body">
             <a:extLst>
               <a:ext uri="{FF2B5EF4-FFF2-40B4-BE49-F238E27FC236}">
-                <a16:creationId xmlns:a16="http://schemas.microsoft.com/office/drawing/2014/main" id="{00CB4B77-8FD1-D1A7-A725-769A9DA0F5A5}"/>
+                <a16:creationId xmlns:a16="http://schemas.microsoft.com/office/drawing/2014/main" id="{3A14E7E3-D48B-ACAA-5E57-C3E1DDC6E76C}"/>
               </a:ext>
             </a:extLst>
           </p:cNvPr>
@@ -16975,7 +16975,7 @@
           <p:cNvPr id="7" name="kpi_value_1">
             <a:extLst>
               <a:ext uri="{FF2B5EF4-FFF2-40B4-BE49-F238E27FC236}">
-                <a16:creationId xmlns:a16="http://schemas.microsoft.com/office/drawing/2014/main" id="{71D05AB3-FB13-A4F9-245C-CEDF87670279}"/>
+                <a16:creationId xmlns:a16="http://schemas.microsoft.com/office/drawing/2014/main" id="{5141429D-9C2A-B87B-CBF1-CC41CCA17437}"/>
               </a:ext>
             </a:extLst>
           </p:cNvPr>
@@ -16988,8 +16988,8 @@
         </p:nvSpPr>
         <p:spPr>
           <a:xfrm>
-            <a:off x="1223515" y="2498834"/>
-            <a:ext cx="4361571" cy="1481091"/>
+            <a:off x="1198591" y="2472229"/>
+            <a:ext cx="4411418" cy="1515296"/>
           </a:xfrm>
           <a:prstGeom prst="rect">
             <a:avLst/>
@@ -17006,7 +17006,7 @@
               </a:spcBef>
               <a:buFontTx/>
               <a:buNone/>
-              <a:defRPr sz="8400" b="1">
+              <a:defRPr sz="6000" b="1">
                 <a:solidFill>
                   <a:schemeClr val="accent1"/>
                 </a:solidFill>
@@ -17028,7 +17028,7 @@
           <p:cNvPr id="8" name="kpi_label_1">
             <a:extLst>
               <a:ext uri="{FF2B5EF4-FFF2-40B4-BE49-F238E27FC236}">
-                <a16:creationId xmlns:a16="http://schemas.microsoft.com/office/drawing/2014/main" id="{1A857F53-8560-78F8-77D8-BB3CFC966178}"/>
+                <a16:creationId xmlns:a16="http://schemas.microsoft.com/office/drawing/2014/main" id="{925A0292-40B3-9356-5A2F-5676356EAE66}"/>
               </a:ext>
             </a:extLst>
           </p:cNvPr>
@@ -17041,8 +17041,8 @@
         </p:nvSpPr>
         <p:spPr>
           <a:xfrm>
-            <a:off x="1223515" y="3979924"/>
-            <a:ext cx="4361571" cy="822828"/>
+            <a:off x="1198591" y="3987526"/>
+            <a:ext cx="4411418" cy="841831"/>
           </a:xfrm>
           <a:prstGeom prst="rect">
             <a:avLst/>
@@ -17059,7 +17059,7 @@
               </a:spcBef>
               <a:buFontTx/>
               <a:buNone/>
-              <a:defRPr sz="1800"/>
+              <a:defRPr sz="2000"/>
             </a:lvl1pPr>
           </a:lstStyle>
           <a:p>
@@ -17076,7 +17076,7 @@
           <p:cNvPr id="9" name="kpi_value_2">
             <a:extLst>
               <a:ext uri="{FF2B5EF4-FFF2-40B4-BE49-F238E27FC236}">
-                <a16:creationId xmlns:a16="http://schemas.microsoft.com/office/drawing/2014/main" id="{036388A7-CFD4-9203-5AF6-BF831F4ACEE4}"/>
+                <a16:creationId xmlns:a16="http://schemas.microsoft.com/office/drawing/2014/main" id="{0696E9C4-D295-681B-F757-F7D96B1E88A4}"/>
               </a:ext>
             </a:extLst>
           </p:cNvPr>
@@ -17089,8 +17089,8 @@
         </p:nvSpPr>
         <p:spPr>
           <a:xfrm>
-            <a:off x="6183245" y="2498834"/>
-            <a:ext cx="4361571" cy="1481091"/>
+            <a:off x="6158321" y="2472229"/>
+            <a:ext cx="4411418" cy="1515296"/>
           </a:xfrm>
           <a:prstGeom prst="rect">
             <a:avLst/>
@@ -17107,7 +17107,7 @@
               </a:spcBef>
               <a:buFontTx/>
               <a:buNone/>
-              <a:defRPr sz="8400" b="1">
+              <a:defRPr sz="6000" b="1">
                 <a:solidFill>
                   <a:schemeClr val="accent1"/>
                 </a:solidFill>
@@ -17129,7 +17129,7 @@
           <p:cNvPr id="10" name="kpi_label_2">
             <a:extLst>
               <a:ext uri="{FF2B5EF4-FFF2-40B4-BE49-F238E27FC236}">
-                <a16:creationId xmlns:a16="http://schemas.microsoft.com/office/drawing/2014/main" id="{0E5A0EA0-CF35-D152-28E9-135B0D08AEED}"/>
+                <a16:creationId xmlns:a16="http://schemas.microsoft.com/office/drawing/2014/main" id="{74329194-B5A0-8E1E-3ACD-7626BCEED364}"/>
               </a:ext>
             </a:extLst>
           </p:cNvPr>
@@ -17142,8 +17142,8 @@
         </p:nvSpPr>
         <p:spPr>
           <a:xfrm>
-            <a:off x="6183245" y="3979924"/>
-            <a:ext cx="4361571" cy="822828"/>
+            <a:off x="6158321" y="3987526"/>
+            <a:ext cx="4411418" cy="841831"/>
           </a:xfrm>
           <a:prstGeom prst="rect">
             <a:avLst/>
@@ -17160,7 +17160,7 @@
               </a:spcBef>
               <a:buFontTx/>
               <a:buNone/>
-              <a:defRPr sz="1800"/>
+              <a:defRPr sz="2000"/>
             </a:lvl1pPr>
           </a:lstStyle>
           <a:p>
@@ -17177,7 +17177,7 @@
           <p:cNvPr id="11" name="source">
             <a:extLst>
               <a:ext uri="{FF2B5EF4-FFF2-40B4-BE49-F238E27FC236}">
-                <a16:creationId xmlns:a16="http://schemas.microsoft.com/office/drawing/2014/main" id="{D032045A-228B-4ED7-D060-D375CE7204DD}"/>
+                <a16:creationId xmlns:a16="http://schemas.microsoft.com/office/drawing/2014/main" id="{0CB29895-44B1-49A3-6C2A-EDD8070694FE}"/>
               </a:ext>
             </a:extLst>
           </p:cNvPr>
@@ -17232,7 +17232,7 @@
     </p:spTree>
     <p:extLst>
       <p:ext uri="{BB962C8B-B14F-4D97-AF65-F5344CB8AC3E}">
-        <p14:creationId xmlns:p14="http://schemas.microsoft.com/office/powerpoint/2010/main" val="2838564912"/>
+        <p14:creationId xmlns:p14="http://schemas.microsoft.com/office/powerpoint/2010/main" val="1066342634"/>
       </p:ext>
     </p:extLst>
   </p:cSld>
@@ -17301,7 +17301,7 @@
           <a:bodyPr/>
           <a:lstStyle/>
           <a:p>
-            <a:fld id="{DAA401AF-96B9-4795-80AC-645028D14909}" type="datetimeFigureOut">
+            <a:fld id="{C108DDE1-F741-4F4F-A7D2-FBD0359B97CD}" type="datetimeFigureOut">
               <a:rPr lang="en-US" smtClean="0"/>
               <a:t>10/3/2026</a:t>
             </a:fld>
@@ -17343,7 +17343,7 @@
           <a:bodyPr/>
           <a:lstStyle/>
           <a:p>
-            <a:fld id="{EB0BFBF9-3444-4A23-A691-88293893E3E4}" type="slidenum">
+            <a:fld id="{D07356AB-B086-4690-8078-803F810DAE76}" type="slidenum">
               <a:rPr lang="en-US" smtClean="0"/>
               <a:t>‹#›</a:t>
             </a:fld>
@@ -17356,7 +17356,7 @@
           <p:cNvPr id="6" name="body">
             <a:extLst>
               <a:ext uri="{FF2B5EF4-FFF2-40B4-BE49-F238E27FC236}">
-                <a16:creationId xmlns:a16="http://schemas.microsoft.com/office/drawing/2014/main" id="{2CC70BA0-9F8E-719F-DEA5-12F4ABC6D427}"/>
+                <a16:creationId xmlns:a16="http://schemas.microsoft.com/office/drawing/2014/main" id="{5612B845-D650-933B-D803-79E70FF73614}"/>
               </a:ext>
             </a:extLst>
           </p:cNvPr>
@@ -17396,7 +17396,7 @@
           <p:cNvPr id="7" name="kpi_value_1">
             <a:extLst>
               <a:ext uri="{FF2B5EF4-FFF2-40B4-BE49-F238E27FC236}">
-                <a16:creationId xmlns:a16="http://schemas.microsoft.com/office/drawing/2014/main" id="{910B7256-49CE-1BEB-0F46-FC3FC57E744A}"/>
+                <a16:creationId xmlns:a16="http://schemas.microsoft.com/office/drawing/2014/main" id="{AEA0702A-1437-A2B9-1029-C28E318D9B55}"/>
               </a:ext>
             </a:extLst>
           </p:cNvPr>
@@ -17409,8 +17409,8 @@
         </p:nvSpPr>
         <p:spPr>
           <a:xfrm>
-            <a:off x="1223514" y="2498834"/>
-            <a:ext cx="1881706" cy="1481091"/>
+            <a:off x="1198592" y="2472229"/>
+            <a:ext cx="1931553" cy="1515296"/>
           </a:xfrm>
           <a:prstGeom prst="rect">
             <a:avLst/>
@@ -17449,7 +17449,7 @@
           <p:cNvPr id="8" name="kpi_label_1">
             <a:extLst>
               <a:ext uri="{FF2B5EF4-FFF2-40B4-BE49-F238E27FC236}">
-                <a16:creationId xmlns:a16="http://schemas.microsoft.com/office/drawing/2014/main" id="{9940CEDB-B1A7-B9B9-F140-3C973F004F0E}"/>
+                <a16:creationId xmlns:a16="http://schemas.microsoft.com/office/drawing/2014/main" id="{46EC897C-0E98-D404-2B65-1DA99A00AAB7}"/>
               </a:ext>
             </a:extLst>
           </p:cNvPr>
@@ -17462,8 +17462,8 @@
         </p:nvSpPr>
         <p:spPr>
           <a:xfrm>
-            <a:off x="1223514" y="3979924"/>
-            <a:ext cx="1881706" cy="822828"/>
+            <a:off x="1198592" y="3987526"/>
+            <a:ext cx="1931553" cy="841831"/>
           </a:xfrm>
           <a:prstGeom prst="rect">
             <a:avLst/>
@@ -17480,7 +17480,7 @@
               </a:spcBef>
               <a:buFontTx/>
               <a:buNone/>
-              <a:defRPr sz="1800"/>
+              <a:defRPr sz="2000"/>
             </a:lvl1pPr>
           </a:lstStyle>
           <a:p>
@@ -17497,7 +17497,7 @@
           <p:cNvPr id="9" name="kpi_value_2">
             <a:extLst>
               <a:ext uri="{FF2B5EF4-FFF2-40B4-BE49-F238E27FC236}">
-                <a16:creationId xmlns:a16="http://schemas.microsoft.com/office/drawing/2014/main" id="{AF09B31C-394B-B595-DDD6-43C317A51AE2}"/>
+                <a16:creationId xmlns:a16="http://schemas.microsoft.com/office/drawing/2014/main" id="{427825BE-038A-5933-3D9B-173BA5B786B4}"/>
               </a:ext>
             </a:extLst>
           </p:cNvPr>
@@ -17510,8 +17510,8 @@
         </p:nvSpPr>
         <p:spPr>
           <a:xfrm>
-            <a:off x="3703379" y="2498834"/>
-            <a:ext cx="1881706" cy="1481091"/>
+            <a:off x="3678457" y="2472229"/>
+            <a:ext cx="1931553" cy="1515296"/>
           </a:xfrm>
           <a:prstGeom prst="rect">
             <a:avLst/>
@@ -17550,7 +17550,7 @@
           <p:cNvPr id="10" name="kpi_label_2">
             <a:extLst>
               <a:ext uri="{FF2B5EF4-FFF2-40B4-BE49-F238E27FC236}">
-                <a16:creationId xmlns:a16="http://schemas.microsoft.com/office/drawing/2014/main" id="{0C8FD58E-3BF8-987C-083E-65474B09F480}"/>
+                <a16:creationId xmlns:a16="http://schemas.microsoft.com/office/drawing/2014/main" id="{08EF1121-1A28-B5A3-C497-299355B2CAD2}"/>
               </a:ext>
             </a:extLst>
           </p:cNvPr>
@@ -17563,8 +17563,8 @@
         </p:nvSpPr>
         <p:spPr>
           <a:xfrm>
-            <a:off x="3703379" y="3979924"/>
-            <a:ext cx="1881706" cy="822828"/>
+            <a:off x="3678457" y="3987526"/>
+            <a:ext cx="1931553" cy="841831"/>
           </a:xfrm>
           <a:prstGeom prst="rect">
             <a:avLst/>
@@ -17581,7 +17581,7 @@
               </a:spcBef>
               <a:buFontTx/>
               <a:buNone/>
-              <a:defRPr sz="1800"/>
+              <a:defRPr sz="2000"/>
             </a:lvl1pPr>
           </a:lstStyle>
           <a:p>
@@ -17598,7 +17598,7 @@
           <p:cNvPr id="11" name="kpi_value_3">
             <a:extLst>
               <a:ext uri="{FF2B5EF4-FFF2-40B4-BE49-F238E27FC236}">
-                <a16:creationId xmlns:a16="http://schemas.microsoft.com/office/drawing/2014/main" id="{1BE93555-E2CA-01C1-0559-DE69BB3FB88A}"/>
+                <a16:creationId xmlns:a16="http://schemas.microsoft.com/office/drawing/2014/main" id="{69FB2CF4-5D70-B081-3B7B-64D05F1EDBF0}"/>
               </a:ext>
             </a:extLst>
           </p:cNvPr>
@@ -17611,8 +17611,8 @@
         </p:nvSpPr>
         <p:spPr>
           <a:xfrm>
-            <a:off x="6183244" y="2498834"/>
-            <a:ext cx="1881706" cy="1481091"/>
+            <a:off x="6158322" y="2472229"/>
+            <a:ext cx="1931553" cy="1515296"/>
           </a:xfrm>
           <a:prstGeom prst="rect">
             <a:avLst/>
@@ -17651,7 +17651,7 @@
           <p:cNvPr id="12" name="kpi_label_3">
             <a:extLst>
               <a:ext uri="{FF2B5EF4-FFF2-40B4-BE49-F238E27FC236}">
-                <a16:creationId xmlns:a16="http://schemas.microsoft.com/office/drawing/2014/main" id="{4D1BBA15-D887-A92F-FAF7-BB89D9667F8B}"/>
+                <a16:creationId xmlns:a16="http://schemas.microsoft.com/office/drawing/2014/main" id="{20A0713C-D361-5620-3E35-727784BF43CF}"/>
               </a:ext>
             </a:extLst>
           </p:cNvPr>
@@ -17664,8 +17664,8 @@
         </p:nvSpPr>
         <p:spPr>
           <a:xfrm>
-            <a:off x="6183244" y="3979924"/>
-            <a:ext cx="1881706" cy="822828"/>
+            <a:off x="6158322" y="3987526"/>
+            <a:ext cx="1931553" cy="841831"/>
           </a:xfrm>
           <a:prstGeom prst="rect">
             <a:avLst/>
@@ -17682,7 +17682,7 @@
               </a:spcBef>
               <a:buFontTx/>
               <a:buNone/>
-              <a:defRPr sz="1800"/>
+              <a:defRPr sz="2000"/>
             </a:lvl1pPr>
           </a:lstStyle>
           <a:p>
@@ -17699,7 +17699,7 @@
           <p:cNvPr id="13" name="kpi_value_4">
             <a:extLst>
               <a:ext uri="{FF2B5EF4-FFF2-40B4-BE49-F238E27FC236}">
-                <a16:creationId xmlns:a16="http://schemas.microsoft.com/office/drawing/2014/main" id="{1F1F989A-46B5-69B5-79CC-88BF6CA86159}"/>
+                <a16:creationId xmlns:a16="http://schemas.microsoft.com/office/drawing/2014/main" id="{9EAE4FB2-9DB1-3CC0-440B-A2B74499C9A6}"/>
               </a:ext>
             </a:extLst>
           </p:cNvPr>
@@ -17712,8 +17712,8 @@
         </p:nvSpPr>
         <p:spPr>
           <a:xfrm>
-            <a:off x="8663108" y="2498834"/>
-            <a:ext cx="1881706" cy="1481091"/>
+            <a:off x="8638186" y="2472229"/>
+            <a:ext cx="1931553" cy="1515296"/>
           </a:xfrm>
           <a:prstGeom prst="rect">
             <a:avLst/>
@@ -17752,7 +17752,7 @@
           <p:cNvPr id="14" name="kpi_label_4">
             <a:extLst>
               <a:ext uri="{FF2B5EF4-FFF2-40B4-BE49-F238E27FC236}">
-                <a16:creationId xmlns:a16="http://schemas.microsoft.com/office/drawing/2014/main" id="{9DC9BE02-962F-2656-543C-BB14220FBA5A}"/>
+                <a16:creationId xmlns:a16="http://schemas.microsoft.com/office/drawing/2014/main" id="{21357B86-2A3B-8C3B-8090-FE3DC4FF1113}"/>
               </a:ext>
             </a:extLst>
           </p:cNvPr>
@@ -17765,8 +17765,8 @@
         </p:nvSpPr>
         <p:spPr>
           <a:xfrm>
-            <a:off x="8663108" y="3979924"/>
-            <a:ext cx="1881706" cy="822828"/>
+            <a:off x="8638186" y="3987526"/>
+            <a:ext cx="1931553" cy="841831"/>
           </a:xfrm>
           <a:prstGeom prst="rect">
             <a:avLst/>
@@ -17783,7 +17783,7 @@
               </a:spcBef>
               <a:buFontTx/>
               <a:buNone/>
-              <a:defRPr sz="1800"/>
+              <a:defRPr sz="2000"/>
             </a:lvl1pPr>
           </a:lstStyle>
           <a:p>
@@ -17800,7 +17800,7 @@
           <p:cNvPr id="15" name="source">
             <a:extLst>
               <a:ext uri="{FF2B5EF4-FFF2-40B4-BE49-F238E27FC236}">
-                <a16:creationId xmlns:a16="http://schemas.microsoft.com/office/drawing/2014/main" id="{769AE8E1-A3D6-1015-4C29-EF3761D131E6}"/>
+                <a16:creationId xmlns:a16="http://schemas.microsoft.com/office/drawing/2014/main" id="{54875F2D-CBE9-6FA9-89E9-61D884863D7D}"/>
               </a:ext>
             </a:extLst>
           </p:cNvPr>
@@ -17855,7 +17855,7 @@
     </p:spTree>
     <p:extLst>
       <p:ext uri="{BB962C8B-B14F-4D97-AF65-F5344CB8AC3E}">
-        <p14:creationId xmlns:p14="http://schemas.microsoft.com/office/powerpoint/2010/main" val="2911337956"/>
+        <p14:creationId xmlns:p14="http://schemas.microsoft.com/office/powerpoint/2010/main" val="4260533740"/>
       </p:ext>
     </p:extLst>
   </p:cSld>
@@ -17924,7 +17924,7 @@
           <a:bodyPr/>
           <a:lstStyle/>
           <a:p>
-            <a:fld id="{DAA401AF-96B9-4795-80AC-645028D14909}" type="datetimeFigureOut">
+            <a:fld id="{C108DDE1-F741-4F4F-A7D2-FBD0359B97CD}" type="datetimeFigureOut">
               <a:rPr lang="en-US" smtClean="0"/>
               <a:t>10/3/2026</a:t>
             </a:fld>
@@ -17966,7 +17966,7 @@
           <a:bodyPr/>
           <a:lstStyle/>
           <a:p>
-            <a:fld id="{EB0BFBF9-3444-4A23-A691-88293893E3E4}" type="slidenum">
+            <a:fld id="{D07356AB-B086-4690-8078-803F810DAE76}" type="slidenum">
               <a:rPr lang="en-US" smtClean="0"/>
               <a:t>‹#›</a:t>
             </a:fld>
@@ -17979,7 +17979,7 @@
           <p:cNvPr id="6" name="body">
             <a:extLst>
               <a:ext uri="{FF2B5EF4-FFF2-40B4-BE49-F238E27FC236}">
-                <a16:creationId xmlns:a16="http://schemas.microsoft.com/office/drawing/2014/main" id="{E23BDFF9-DC60-3BB7-DDCE-21003365EA8C}"/>
+                <a16:creationId xmlns:a16="http://schemas.microsoft.com/office/drawing/2014/main" id="{E65B3A69-19AA-F448-4F56-9B41CFC1E606}"/>
               </a:ext>
             </a:extLst>
           </p:cNvPr>
@@ -18019,7 +18019,7 @@
           <p:cNvPr id="7" name="quote">
             <a:extLst>
               <a:ext uri="{FF2B5EF4-FFF2-40B4-BE49-F238E27FC236}">
-                <a16:creationId xmlns:a16="http://schemas.microsoft.com/office/drawing/2014/main" id="{293A4BA6-F3A3-5D01-46D8-6E346DE1D951}"/>
+                <a16:creationId xmlns:a16="http://schemas.microsoft.com/office/drawing/2014/main" id="{ED21F431-E6CB-1E39-378C-D2C88BD3C553}"/>
               </a:ext>
             </a:extLst>
           </p:cNvPr>
@@ -18032,8 +18032,8 @@
         </p:nvSpPr>
         <p:spPr>
           <a:xfrm>
-            <a:off x="7055559" y="2498833"/>
-            <a:ext cx="3489257" cy="2447582"/>
+            <a:off x="7030635" y="2472230"/>
+            <a:ext cx="3539104" cy="2687019"/>
           </a:xfrm>
           <a:prstGeom prst="rect">
             <a:avLst/>
@@ -18050,7 +18050,7 @@
               </a:spcBef>
               <a:buFontTx/>
               <a:buNone/>
-              <a:defRPr sz="2400" i="1">
+              <a:defRPr sz="2000" i="1">
                 <a:latin typeface="+mj-lt"/>
               </a:defRPr>
             </a:lvl1pPr>
@@ -18069,7 +18069,7 @@
           <p:cNvPr id="8" name="attribution">
             <a:extLst>
               <a:ext uri="{FF2B5EF4-FFF2-40B4-BE49-F238E27FC236}">
-                <a16:creationId xmlns:a16="http://schemas.microsoft.com/office/drawing/2014/main" id="{77AD9C98-82C6-357B-B56A-9261B22E6C7B}"/>
+                <a16:creationId xmlns:a16="http://schemas.microsoft.com/office/drawing/2014/main" id="{029522E9-DD8C-AA2B-BCB8-49632145E0C4}"/>
               </a:ext>
             </a:extLst>
           </p:cNvPr>
@@ -18082,8 +18082,8 @@
         </p:nvSpPr>
         <p:spPr>
           <a:xfrm>
-            <a:off x="7055559" y="5372081"/>
-            <a:ext cx="3489257" cy="292646"/>
+            <a:off x="7030635" y="5159249"/>
+            <a:ext cx="3539104" cy="532083"/>
           </a:xfrm>
           <a:prstGeom prst="rect">
             <a:avLst/>
@@ -18100,7 +18100,7 @@
               </a:spcBef>
               <a:buFontTx/>
               <a:buNone/>
-              <a:defRPr sz="1400"/>
+              <a:defRPr sz="2000"/>
             </a:lvl1pPr>
           </a:lstStyle>
           <a:p>
@@ -18117,7 +18117,7 @@
           <p:cNvPr id="9" name="source">
             <a:extLst>
               <a:ext uri="{FF2B5EF4-FFF2-40B4-BE49-F238E27FC236}">
-                <a16:creationId xmlns:a16="http://schemas.microsoft.com/office/drawing/2014/main" id="{2992B3F9-9F87-3B4F-4899-96742641C5E4}"/>
+                <a16:creationId xmlns:a16="http://schemas.microsoft.com/office/drawing/2014/main" id="{71985FE9-279F-BA74-D4D1-85DE2DAA74BD}"/>
               </a:ext>
             </a:extLst>
           </p:cNvPr>
@@ -18172,7 +18172,7 @@
     </p:spTree>
     <p:extLst>
       <p:ext uri="{BB962C8B-B14F-4D97-AF65-F5344CB8AC3E}">
-        <p14:creationId xmlns:p14="http://schemas.microsoft.com/office/powerpoint/2010/main" val="1793370806"/>
+        <p14:creationId xmlns:p14="http://schemas.microsoft.com/office/powerpoint/2010/main" val="3486925266"/>
       </p:ext>
     </p:extLst>
   </p:cSld>
@@ -18241,7 +18241,7 @@
           <a:bodyPr/>
           <a:lstStyle/>
           <a:p>
-            <a:fld id="{DAA401AF-96B9-4795-80AC-645028D14909}" type="datetimeFigureOut">
+            <a:fld id="{C108DDE1-F741-4F4F-A7D2-FBD0359B97CD}" type="datetimeFigureOut">
               <a:rPr lang="en-US" smtClean="0"/>
               <a:t>10/3/2026</a:t>
             </a:fld>
@@ -18283,7 +18283,7 @@
           <a:bodyPr/>
           <a:lstStyle/>
           <a:p>
-            <a:fld id="{EB0BFBF9-3444-4A23-A691-88293893E3E4}" type="slidenum">
+            <a:fld id="{D07356AB-B086-4690-8078-803F810DAE76}" type="slidenum">
               <a:rPr lang="en-US" smtClean="0"/>
               <a:t>‹#›</a:t>
             </a:fld>
@@ -18296,7 +18296,7 @@
           <p:cNvPr id="6" name="item_1_title">
             <a:extLst>
               <a:ext uri="{FF2B5EF4-FFF2-40B4-BE49-F238E27FC236}">
-                <a16:creationId xmlns:a16="http://schemas.microsoft.com/office/drawing/2014/main" id="{01ED40F2-750F-CF75-61E9-22E0A8890F36}"/>
+                <a16:creationId xmlns:a16="http://schemas.microsoft.com/office/drawing/2014/main" id="{18B8728E-B21B-301B-9DD2-75876A43669B}"/>
               </a:ext>
             </a:extLst>
           </p:cNvPr>
@@ -18309,8 +18309,8 @@
         </p:nvSpPr>
         <p:spPr>
           <a:xfrm>
-            <a:off x="1223514" y="2498834"/>
-            <a:ext cx="2708328" cy="931145"/>
+            <a:off x="1198591" y="2472230"/>
+            <a:ext cx="2758175" cy="946795"/>
           </a:xfrm>
         </p:spPr>
         <p:txBody>
@@ -18324,7 +18324,7 @@
               </a:spcBef>
               <a:buFontTx/>
               <a:buNone/>
-              <a:defRPr sz="2200" b="1">
+              <a:defRPr sz="2000" b="1">
                 <a:solidFill>
                   <a:schemeClr val="accent1"/>
                 </a:solidFill>
@@ -18346,7 +18346,7 @@
           <p:cNvPr id="7" name="item_1">
             <a:extLst>
               <a:ext uri="{FF2B5EF4-FFF2-40B4-BE49-F238E27FC236}">
-                <a16:creationId xmlns:a16="http://schemas.microsoft.com/office/drawing/2014/main" id="{AB12E1A2-7DAD-A4AA-2D13-C04ADC4034E3}"/>
+                <a16:creationId xmlns:a16="http://schemas.microsoft.com/office/drawing/2014/main" id="{DB81DA4F-E0BE-48C8-BCEF-6DEF9FAFCADC}"/>
               </a:ext>
             </a:extLst>
           </p:cNvPr>
@@ -18359,8 +18359,8 @@
         </p:nvSpPr>
         <p:spPr>
           <a:xfrm>
-            <a:off x="1223514" y="3429978"/>
-            <a:ext cx="2708328" cy="2234748"/>
+            <a:off x="1198592" y="3419025"/>
+            <a:ext cx="2758175" cy="2272307"/>
           </a:xfrm>
           <a:prstGeom prst="rect">
             <a:avLst/>
@@ -18394,7 +18394,7 @@
           <p:cNvPr id="8" name="item_2_title">
             <a:extLst>
               <a:ext uri="{FF2B5EF4-FFF2-40B4-BE49-F238E27FC236}">
-                <a16:creationId xmlns:a16="http://schemas.microsoft.com/office/drawing/2014/main" id="{882B01BF-29F2-94EC-7A57-AFDB68B9B6C9}"/>
+                <a16:creationId xmlns:a16="http://schemas.microsoft.com/office/drawing/2014/main" id="{3655D40B-8ED9-BFDA-11F0-6BB441D2AC84}"/>
               </a:ext>
             </a:extLst>
           </p:cNvPr>
@@ -18407,8 +18407,8 @@
         </p:nvSpPr>
         <p:spPr>
           <a:xfrm>
-            <a:off x="4530001" y="2498834"/>
-            <a:ext cx="2708328" cy="931145"/>
+            <a:off x="4505078" y="2472230"/>
+            <a:ext cx="2758175" cy="946795"/>
           </a:xfrm>
           <a:prstGeom prst="rect">
             <a:avLst/>
@@ -18425,7 +18425,7 @@
               </a:spcBef>
               <a:buFontTx/>
               <a:buNone/>
-              <a:defRPr sz="2200" b="1">
+              <a:defRPr sz="2000" b="1">
                 <a:solidFill>
                   <a:schemeClr val="accent1"/>
                 </a:solidFill>
@@ -18447,7 +18447,7 @@
           <p:cNvPr id="9" name="item_2">
             <a:extLst>
               <a:ext uri="{FF2B5EF4-FFF2-40B4-BE49-F238E27FC236}">
-                <a16:creationId xmlns:a16="http://schemas.microsoft.com/office/drawing/2014/main" id="{7B4FF9D0-F13F-1D9A-41D9-36460D6F3623}"/>
+                <a16:creationId xmlns:a16="http://schemas.microsoft.com/office/drawing/2014/main" id="{9C1DAED1-C65D-AC9B-CC1A-9C4ED8015992}"/>
               </a:ext>
             </a:extLst>
           </p:cNvPr>
@@ -18460,8 +18460,8 @@
         </p:nvSpPr>
         <p:spPr>
           <a:xfrm>
-            <a:off x="4530001" y="3429978"/>
-            <a:ext cx="2708328" cy="2234748"/>
+            <a:off x="4505078" y="3419025"/>
+            <a:ext cx="2758175" cy="2272307"/>
           </a:xfrm>
           <a:prstGeom prst="rect">
             <a:avLst/>
@@ -18495,7 +18495,7 @@
           <p:cNvPr id="10" name="item_3_title">
             <a:extLst>
               <a:ext uri="{FF2B5EF4-FFF2-40B4-BE49-F238E27FC236}">
-                <a16:creationId xmlns:a16="http://schemas.microsoft.com/office/drawing/2014/main" id="{AB76C416-2102-5C19-2FD9-6C4E7A31EC5E}"/>
+                <a16:creationId xmlns:a16="http://schemas.microsoft.com/office/drawing/2014/main" id="{6EE8EF4F-518C-F7DC-6814-F9259CE0299B}"/>
               </a:ext>
             </a:extLst>
           </p:cNvPr>
@@ -18508,8 +18508,8 @@
         </p:nvSpPr>
         <p:spPr>
           <a:xfrm>
-            <a:off x="7836487" y="2498834"/>
-            <a:ext cx="2708328" cy="931145"/>
+            <a:off x="7811565" y="2472230"/>
+            <a:ext cx="2758175" cy="946795"/>
           </a:xfrm>
           <a:prstGeom prst="rect">
             <a:avLst/>
@@ -18526,7 +18526,7 @@
               </a:spcBef>
               <a:buFontTx/>
               <a:buNone/>
-              <a:defRPr sz="2200" b="1">
+              <a:defRPr sz="2000" b="1">
                 <a:solidFill>
                   <a:schemeClr val="accent1"/>
                 </a:solidFill>
@@ -18548,7 +18548,7 @@
           <p:cNvPr id="11" name="item_3">
             <a:extLst>
               <a:ext uri="{FF2B5EF4-FFF2-40B4-BE49-F238E27FC236}">
-                <a16:creationId xmlns:a16="http://schemas.microsoft.com/office/drawing/2014/main" id="{7E910081-DF6F-AC45-43DD-57D396952491}"/>
+                <a16:creationId xmlns:a16="http://schemas.microsoft.com/office/drawing/2014/main" id="{1DD17FF8-CBDB-B48D-1541-78E303449C00}"/>
               </a:ext>
             </a:extLst>
           </p:cNvPr>
@@ -18561,8 +18561,8 @@
         </p:nvSpPr>
         <p:spPr>
           <a:xfrm>
-            <a:off x="7836487" y="3429978"/>
-            <a:ext cx="2708328" cy="2234748"/>
+            <a:off x="7811565" y="3419025"/>
+            <a:ext cx="2758175" cy="2272307"/>
           </a:xfrm>
           <a:prstGeom prst="rect">
             <a:avLst/>
@@ -18596,7 +18596,7 @@
           <p:cNvPr id="12" name="source">
             <a:extLst>
               <a:ext uri="{FF2B5EF4-FFF2-40B4-BE49-F238E27FC236}">
-                <a16:creationId xmlns:a16="http://schemas.microsoft.com/office/drawing/2014/main" id="{12E220CF-0E86-5860-34A4-8DCF81D5186E}"/>
+                <a16:creationId xmlns:a16="http://schemas.microsoft.com/office/drawing/2014/main" id="{06DF4BC8-6C7D-0E83-7D45-CFB4DC08C023}"/>
               </a:ext>
             </a:extLst>
           </p:cNvPr>
@@ -18651,7 +18651,7 @@
     </p:spTree>
     <p:extLst>
       <p:ext uri="{BB962C8B-B14F-4D97-AF65-F5344CB8AC3E}">
-        <p14:creationId xmlns:p14="http://schemas.microsoft.com/office/powerpoint/2010/main" val="3848858519"/>
+        <p14:creationId xmlns:p14="http://schemas.microsoft.com/office/powerpoint/2010/main" val="2939559255"/>
       </p:ext>
     </p:extLst>
   </p:cSld>
@@ -18720,7 +18720,7 @@
           <a:bodyPr/>
           <a:lstStyle/>
           <a:p>
-            <a:fld id="{DAA401AF-96B9-4795-80AC-645028D14909}" type="datetimeFigureOut">
+            <a:fld id="{C108DDE1-F741-4F4F-A7D2-FBD0359B97CD}" type="datetimeFigureOut">
               <a:rPr lang="en-US" smtClean="0"/>
               <a:t>10/3/2026</a:t>
             </a:fld>
@@ -18762,7 +18762,7 @@
           <a:bodyPr/>
           <a:lstStyle/>
           <a:p>
-            <a:fld id="{EB0BFBF9-3444-4A23-A691-88293893E3E4}" type="slidenum">
+            <a:fld id="{D07356AB-B086-4690-8078-803F810DAE76}" type="slidenum">
               <a:rPr lang="en-US" smtClean="0"/>
               <a:t>‹#›</a:t>
             </a:fld>
@@ -18775,7 +18775,7 @@
           <p:cNvPr id="6" name="item_1_title">
             <a:extLst>
               <a:ext uri="{FF2B5EF4-FFF2-40B4-BE49-F238E27FC236}">
-                <a16:creationId xmlns:a16="http://schemas.microsoft.com/office/drawing/2014/main" id="{CDE4D2C1-474B-BF68-D4DB-7DB594A364DD}"/>
+                <a16:creationId xmlns:a16="http://schemas.microsoft.com/office/drawing/2014/main" id="{31D8E221-E576-6A49-E0DD-C0F48C5EA6C6}"/>
               </a:ext>
             </a:extLst>
           </p:cNvPr>
@@ -18788,8 +18788,8 @@
         </p:nvSpPr>
         <p:spPr>
           <a:xfrm>
-            <a:off x="1223514" y="2498834"/>
-            <a:ext cx="4361571" cy="931145"/>
+            <a:off x="1198591" y="2472230"/>
+            <a:ext cx="4411418" cy="946795"/>
           </a:xfrm>
         </p:spPr>
         <p:txBody>
@@ -18803,7 +18803,7 @@
               </a:spcBef>
               <a:buFontTx/>
               <a:buNone/>
-              <a:defRPr sz="2200" b="1">
+              <a:defRPr sz="2000" b="1">
                 <a:solidFill>
                   <a:schemeClr val="accent1"/>
                 </a:solidFill>
@@ -18825,7 +18825,7 @@
           <p:cNvPr id="7" name="item_1">
             <a:extLst>
               <a:ext uri="{FF2B5EF4-FFF2-40B4-BE49-F238E27FC236}">
-                <a16:creationId xmlns:a16="http://schemas.microsoft.com/office/drawing/2014/main" id="{920EB529-94EF-6FC9-35C7-DFEC9D041139}"/>
+                <a16:creationId xmlns:a16="http://schemas.microsoft.com/office/drawing/2014/main" id="{FDB1773F-55DC-B081-BA56-488C81DA94EE}"/>
               </a:ext>
             </a:extLst>
           </p:cNvPr>
@@ -18838,8 +18838,8 @@
         </p:nvSpPr>
         <p:spPr>
           <a:xfrm>
-            <a:off x="1223515" y="3429978"/>
-            <a:ext cx="4361571" cy="2234748"/>
+            <a:off x="1198591" y="3419025"/>
+            <a:ext cx="4411418" cy="2272307"/>
           </a:xfrm>
           <a:prstGeom prst="rect">
             <a:avLst/>
@@ -18873,7 +18873,7 @@
           <p:cNvPr id="8" name="item_2_title">
             <a:extLst>
               <a:ext uri="{FF2B5EF4-FFF2-40B4-BE49-F238E27FC236}">
-                <a16:creationId xmlns:a16="http://schemas.microsoft.com/office/drawing/2014/main" id="{FF443D0A-B3A7-EEC0-DC31-688B9142037F}"/>
+                <a16:creationId xmlns:a16="http://schemas.microsoft.com/office/drawing/2014/main" id="{D7AD2E1D-F848-1478-8698-4AEFE5E5CE49}"/>
               </a:ext>
             </a:extLst>
           </p:cNvPr>
@@ -18886,8 +18886,8 @@
         </p:nvSpPr>
         <p:spPr>
           <a:xfrm>
-            <a:off x="6183245" y="2498834"/>
-            <a:ext cx="4361571" cy="931145"/>
+            <a:off x="6158321" y="2472230"/>
+            <a:ext cx="4411418" cy="946795"/>
           </a:xfrm>
           <a:prstGeom prst="rect">
             <a:avLst/>
@@ -18904,7 +18904,7 @@
               </a:spcBef>
               <a:buFontTx/>
               <a:buNone/>
-              <a:defRPr sz="2200" b="1">
+              <a:defRPr sz="2000" b="1">
                 <a:solidFill>
                   <a:schemeClr val="accent1"/>
                 </a:solidFill>
@@ -18926,7 +18926,7 @@
           <p:cNvPr id="9" name="item_2">
             <a:extLst>
               <a:ext uri="{FF2B5EF4-FFF2-40B4-BE49-F238E27FC236}">
-                <a16:creationId xmlns:a16="http://schemas.microsoft.com/office/drawing/2014/main" id="{5E4BFEE0-66D5-57C7-63E3-E2204464FA50}"/>
+                <a16:creationId xmlns:a16="http://schemas.microsoft.com/office/drawing/2014/main" id="{9FA0C3E0-7AC9-DC13-318E-8C2A35BA4B18}"/>
               </a:ext>
             </a:extLst>
           </p:cNvPr>
@@ -18939,8 +18939,8 @@
         </p:nvSpPr>
         <p:spPr>
           <a:xfrm>
-            <a:off x="6183245" y="3429978"/>
-            <a:ext cx="4361571" cy="2234748"/>
+            <a:off x="6158321" y="3419025"/>
+            <a:ext cx="4411418" cy="2272307"/>
           </a:xfrm>
           <a:prstGeom prst="rect">
             <a:avLst/>
@@ -18974,7 +18974,7 @@
           <p:cNvPr id="10" name="source">
             <a:extLst>
               <a:ext uri="{FF2B5EF4-FFF2-40B4-BE49-F238E27FC236}">
-                <a16:creationId xmlns:a16="http://schemas.microsoft.com/office/drawing/2014/main" id="{558B0EB2-8555-41BA-D882-8A07E88A4570}"/>
+                <a16:creationId xmlns:a16="http://schemas.microsoft.com/office/drawing/2014/main" id="{ECE9DAF0-164E-0083-2614-107026E81D4A}"/>
               </a:ext>
             </a:extLst>
           </p:cNvPr>
@@ -19029,7 +19029,7 @@
     </p:spTree>
     <p:extLst>
       <p:ext uri="{BB962C8B-B14F-4D97-AF65-F5344CB8AC3E}">
-        <p14:creationId xmlns:p14="http://schemas.microsoft.com/office/powerpoint/2010/main" val="1252567592"/>
+        <p14:creationId xmlns:p14="http://schemas.microsoft.com/office/powerpoint/2010/main" val="579289886"/>
       </p:ext>
     </p:extLst>
   </p:cSld>
@@ -19098,7 +19098,7 @@
           <a:bodyPr/>
           <a:lstStyle/>
           <a:p>
-            <a:fld id="{DAA401AF-96B9-4795-80AC-645028D14909}" type="datetimeFigureOut">
+            <a:fld id="{C108DDE1-F741-4F4F-A7D2-FBD0359B97CD}" type="datetimeFigureOut">
               <a:rPr lang="en-US" smtClean="0"/>
               <a:t>10/3/2026</a:t>
             </a:fld>
@@ -19140,7 +19140,7 @@
           <a:bodyPr/>
           <a:lstStyle/>
           <a:p>
-            <a:fld id="{EB0BFBF9-3444-4A23-A691-88293893E3E4}" type="slidenum">
+            <a:fld id="{D07356AB-B086-4690-8078-803F810DAE76}" type="slidenum">
               <a:rPr lang="en-US" smtClean="0"/>
               <a:t>‹#›</a:t>
             </a:fld>
@@ -19153,7 +19153,7 @@
           <p:cNvPr id="6" name="chart">
             <a:extLst>
               <a:ext uri="{FF2B5EF4-FFF2-40B4-BE49-F238E27FC236}">
-                <a16:creationId xmlns:a16="http://schemas.microsoft.com/office/drawing/2014/main" id="{77264015-D7C2-4168-DDF9-887475E26F8F}"/>
+                <a16:creationId xmlns:a16="http://schemas.microsoft.com/office/drawing/2014/main" id="{6EE07882-E873-BD26-3EF6-AEBB0BA7B0D3}"/>
               </a:ext>
             </a:extLst>
           </p:cNvPr>
@@ -19183,7 +19183,7 @@
           <p:cNvPr id="7" name="body">
             <a:extLst>
               <a:ext uri="{FF2B5EF4-FFF2-40B4-BE49-F238E27FC236}">
-                <a16:creationId xmlns:a16="http://schemas.microsoft.com/office/drawing/2014/main" id="{BF3FC5C6-E81B-AABE-A3FB-CEEF548FE17A}"/>
+                <a16:creationId xmlns:a16="http://schemas.microsoft.com/office/drawing/2014/main" id="{75D26B5C-5AB6-E2E4-5B25-13704E5997C4}"/>
               </a:ext>
             </a:extLst>
           </p:cNvPr>
@@ -19226,7 +19226,7 @@
           <p:cNvPr id="8" name="source">
             <a:extLst>
               <a:ext uri="{FF2B5EF4-FFF2-40B4-BE49-F238E27FC236}">
-                <a16:creationId xmlns:a16="http://schemas.microsoft.com/office/drawing/2014/main" id="{4053A3F7-09F7-88E0-B632-CA4ECFC54A45}"/>
+                <a16:creationId xmlns:a16="http://schemas.microsoft.com/office/drawing/2014/main" id="{B2E7C724-8C37-C627-6FD7-EDD581B86852}"/>
               </a:ext>
             </a:extLst>
           </p:cNvPr>
@@ -19281,7 +19281,7 @@
     </p:spTree>
     <p:extLst>
       <p:ext uri="{BB962C8B-B14F-4D97-AF65-F5344CB8AC3E}">
-        <p14:creationId xmlns:p14="http://schemas.microsoft.com/office/powerpoint/2010/main" val="710563090"/>
+        <p14:creationId xmlns:p14="http://schemas.microsoft.com/office/powerpoint/2010/main" val="3046418179"/>
       </p:ext>
     </p:extLst>
   </p:cSld>
@@ -19350,7 +19350,7 @@
           <a:bodyPr/>
           <a:lstStyle/>
           <a:p>
-            <a:fld id="{DAA401AF-96B9-4795-80AC-645028D14909}" type="datetimeFigureOut">
+            <a:fld id="{C108DDE1-F741-4F4F-A7D2-FBD0359B97CD}" type="datetimeFigureOut">
               <a:rPr lang="en-US" smtClean="0"/>
               <a:t>10/3/2026</a:t>
             </a:fld>
@@ -19392,7 +19392,7 @@
           <a:bodyPr/>
           <a:lstStyle/>
           <a:p>
-            <a:fld id="{EB0BFBF9-3444-4A23-A691-88293893E3E4}" type="slidenum">
+            <a:fld id="{D07356AB-B086-4690-8078-803F810DAE76}" type="slidenum">
               <a:rPr lang="en-US" smtClean="0"/>
               <a:t>‹#›</a:t>
             </a:fld>
@@ -19405,7 +19405,7 @@
           <p:cNvPr id="6" name="item_1_title">
             <a:extLst>
               <a:ext uri="{FF2B5EF4-FFF2-40B4-BE49-F238E27FC236}">
-                <a16:creationId xmlns:a16="http://schemas.microsoft.com/office/drawing/2014/main" id="{DC9FA991-3941-0C8C-6702-F20502861AD3}"/>
+                <a16:creationId xmlns:a16="http://schemas.microsoft.com/office/drawing/2014/main" id="{8FA956DE-FA73-49F9-FD36-4C191A8F9CEB}"/>
               </a:ext>
             </a:extLst>
           </p:cNvPr>
@@ -19418,8 +19418,8 @@
         </p:nvSpPr>
         <p:spPr>
           <a:xfrm>
-            <a:off x="1223514" y="2498833"/>
-            <a:ext cx="4361571" cy="371676"/>
+            <a:off x="1198591" y="2472230"/>
+            <a:ext cx="4411418" cy="387325"/>
           </a:xfrm>
         </p:spPr>
         <p:txBody>
@@ -19433,7 +19433,7 @@
               </a:spcBef>
               <a:buFontTx/>
               <a:buNone/>
-              <a:defRPr sz="2200" b="1">
+              <a:defRPr sz="2000" b="1">
                 <a:solidFill>
                   <a:schemeClr val="accent1"/>
                 </a:solidFill>
@@ -19455,7 +19455,7 @@
           <p:cNvPr id="7" name="item_1">
             <a:extLst>
               <a:ext uri="{FF2B5EF4-FFF2-40B4-BE49-F238E27FC236}">
-                <a16:creationId xmlns:a16="http://schemas.microsoft.com/office/drawing/2014/main" id="{0B834FA8-5874-A77D-7B50-41FDC8444235}"/>
+                <a16:creationId xmlns:a16="http://schemas.microsoft.com/office/drawing/2014/main" id="{D6C7D124-E76B-5CB7-B135-DE7B745E8322}"/>
               </a:ext>
             </a:extLst>
           </p:cNvPr>
@@ -19468,8 +19468,8 @@
         </p:nvSpPr>
         <p:spPr>
           <a:xfrm>
-            <a:off x="1223515" y="2870510"/>
-            <a:ext cx="4361571" cy="892021"/>
+            <a:off x="1198591" y="2859554"/>
+            <a:ext cx="4411418" cy="929580"/>
           </a:xfrm>
           <a:prstGeom prst="rect">
             <a:avLst/>
@@ -19503,7 +19503,7 @@
           <p:cNvPr id="8" name="item_2_title">
             <a:extLst>
               <a:ext uri="{FF2B5EF4-FFF2-40B4-BE49-F238E27FC236}">
-                <a16:creationId xmlns:a16="http://schemas.microsoft.com/office/drawing/2014/main" id="{E27B780D-D4C6-8A40-EA81-BD8E394465B4}"/>
+                <a16:creationId xmlns:a16="http://schemas.microsoft.com/office/drawing/2014/main" id="{E14EA6F2-C6ED-C25D-F65B-7891B356AE66}"/>
               </a:ext>
             </a:extLst>
           </p:cNvPr>
@@ -19516,8 +19516,8 @@
         </p:nvSpPr>
         <p:spPr>
           <a:xfrm>
-            <a:off x="6183245" y="2498833"/>
-            <a:ext cx="4361571" cy="371676"/>
+            <a:off x="6158321" y="2472230"/>
+            <a:ext cx="4411418" cy="387325"/>
           </a:xfrm>
           <a:prstGeom prst="rect">
             <a:avLst/>
@@ -19534,7 +19534,7 @@
               </a:spcBef>
               <a:buFontTx/>
               <a:buNone/>
-              <a:defRPr sz="2200" b="1">
+              <a:defRPr sz="2000" b="1">
                 <a:solidFill>
                   <a:schemeClr val="accent1"/>
                 </a:solidFill>
@@ -19556,7 +19556,7 @@
           <p:cNvPr id="9" name="item_2">
             <a:extLst>
               <a:ext uri="{FF2B5EF4-FFF2-40B4-BE49-F238E27FC236}">
-                <a16:creationId xmlns:a16="http://schemas.microsoft.com/office/drawing/2014/main" id="{9DF0CBB1-A748-57DD-0EDF-184AB8B3FB7A}"/>
+                <a16:creationId xmlns:a16="http://schemas.microsoft.com/office/drawing/2014/main" id="{6D46133A-EE1C-CFDB-CD57-F371219A766D}"/>
               </a:ext>
             </a:extLst>
           </p:cNvPr>
@@ -19569,8 +19569,8 @@
         </p:nvSpPr>
         <p:spPr>
           <a:xfrm>
-            <a:off x="6183245" y="2870510"/>
-            <a:ext cx="4361571" cy="892021"/>
+            <a:off x="6158321" y="2859554"/>
+            <a:ext cx="4411418" cy="929580"/>
           </a:xfrm>
           <a:prstGeom prst="rect">
             <a:avLst/>
@@ -19604,7 +19604,7 @@
           <p:cNvPr id="10" name="item_3_title">
             <a:extLst>
               <a:ext uri="{FF2B5EF4-FFF2-40B4-BE49-F238E27FC236}">
-                <a16:creationId xmlns:a16="http://schemas.microsoft.com/office/drawing/2014/main" id="{62655900-BA30-4489-15BA-02772F5F417B}"/>
+                <a16:creationId xmlns:a16="http://schemas.microsoft.com/office/drawing/2014/main" id="{B403539A-CAD4-0E4F-0E64-6121FF534AFA}"/>
               </a:ext>
             </a:extLst>
           </p:cNvPr>
@@ -19617,8 +19617,8 @@
         </p:nvSpPr>
         <p:spPr>
           <a:xfrm>
-            <a:off x="1223515" y="4401030"/>
-            <a:ext cx="4361571" cy="371676"/>
+            <a:off x="1198591" y="4374427"/>
+            <a:ext cx="4411418" cy="387325"/>
           </a:xfrm>
           <a:prstGeom prst="rect">
             <a:avLst/>
@@ -19635,7 +19635,7 @@
               </a:spcBef>
               <a:buFontTx/>
               <a:buNone/>
-              <a:defRPr sz="2200" b="1">
+              <a:defRPr sz="2000" b="1">
                 <a:solidFill>
                   <a:schemeClr val="accent1"/>
                 </a:solidFill>
@@ -19657,7 +19657,7 @@
           <p:cNvPr id="11" name="item_3">
             <a:extLst>
               <a:ext uri="{FF2B5EF4-FFF2-40B4-BE49-F238E27FC236}">
-                <a16:creationId xmlns:a16="http://schemas.microsoft.com/office/drawing/2014/main" id="{3B34B19B-0AD2-8764-5EED-BD8DF7E74BAD}"/>
+                <a16:creationId xmlns:a16="http://schemas.microsoft.com/office/drawing/2014/main" id="{F8B962A1-E761-CB19-605E-242A824D9F31}"/>
               </a:ext>
             </a:extLst>
           </p:cNvPr>
@@ -19670,8 +19670,8 @@
         </p:nvSpPr>
         <p:spPr>
           <a:xfrm>
-            <a:off x="1223515" y="4772706"/>
-            <a:ext cx="4361571" cy="892021"/>
+            <a:off x="1198591" y="4761750"/>
+            <a:ext cx="4411418" cy="929580"/>
           </a:xfrm>
           <a:prstGeom prst="rect">
             <a:avLst/>
@@ -19705,7 +19705,7 @@
           <p:cNvPr id="12" name="item_4_title">
             <a:extLst>
               <a:ext uri="{FF2B5EF4-FFF2-40B4-BE49-F238E27FC236}">
-                <a16:creationId xmlns:a16="http://schemas.microsoft.com/office/drawing/2014/main" id="{D02AB636-8252-377B-A755-9744730AE124}"/>
+                <a16:creationId xmlns:a16="http://schemas.microsoft.com/office/drawing/2014/main" id="{B95C9DEF-F503-54E1-8115-73D530CC0BEA}"/>
               </a:ext>
             </a:extLst>
           </p:cNvPr>
@@ -19718,8 +19718,8 @@
         </p:nvSpPr>
         <p:spPr>
           <a:xfrm>
-            <a:off x="6183245" y="4401030"/>
-            <a:ext cx="4361571" cy="371676"/>
+            <a:off x="6158321" y="4374427"/>
+            <a:ext cx="4411418" cy="387325"/>
           </a:xfrm>
           <a:prstGeom prst="rect">
             <a:avLst/>
@@ -19736,7 +19736,7 @@
               </a:spcBef>
               <a:buFontTx/>
               <a:buNone/>
-              <a:defRPr sz="2200" b="1">
+              <a:defRPr sz="2000" b="1">
                 <a:solidFill>
                   <a:schemeClr val="accent1"/>
                 </a:solidFill>
@@ -19758,7 +19758,7 @@
           <p:cNvPr id="13" name="item_4">
             <a:extLst>
               <a:ext uri="{FF2B5EF4-FFF2-40B4-BE49-F238E27FC236}">
-                <a16:creationId xmlns:a16="http://schemas.microsoft.com/office/drawing/2014/main" id="{79790BF8-4C77-7BB3-CBA4-17CDBE7FA215}"/>
+                <a16:creationId xmlns:a16="http://schemas.microsoft.com/office/drawing/2014/main" id="{7CDE13AD-2C76-1F42-3ED3-208E8304F58E}"/>
               </a:ext>
             </a:extLst>
           </p:cNvPr>
@@ -19771,8 +19771,8 @@
         </p:nvSpPr>
         <p:spPr>
           <a:xfrm>
-            <a:off x="6183245" y="4772706"/>
-            <a:ext cx="4361571" cy="892021"/>
+            <a:off x="6158321" y="4761750"/>
+            <a:ext cx="4411418" cy="929580"/>
           </a:xfrm>
           <a:prstGeom prst="rect">
             <a:avLst/>
@@ -19806,7 +19806,7 @@
           <p:cNvPr id="14" name="source">
             <a:extLst>
               <a:ext uri="{FF2B5EF4-FFF2-40B4-BE49-F238E27FC236}">
-                <a16:creationId xmlns:a16="http://schemas.microsoft.com/office/drawing/2014/main" id="{B59C051F-E92F-1421-CF23-B84E82981AA8}"/>
+                <a16:creationId xmlns:a16="http://schemas.microsoft.com/office/drawing/2014/main" id="{17663D33-18ED-21FB-68B3-751A6A3220D0}"/>
               </a:ext>
             </a:extLst>
           </p:cNvPr>
@@ -19861,7 +19861,7 @@
     </p:spTree>
     <p:extLst>
       <p:ext uri="{BB962C8B-B14F-4D97-AF65-F5344CB8AC3E}">
-        <p14:creationId xmlns:p14="http://schemas.microsoft.com/office/powerpoint/2010/main" val="206444234"/>
+        <p14:creationId xmlns:p14="http://schemas.microsoft.com/office/powerpoint/2010/main" val="2452371502"/>
       </p:ext>
     </p:extLst>
   </p:cSld>
@@ -20023,7 +20023,7 @@
             </a:lvl1pPr>
           </a:lstStyle>
           <a:p>
-            <a:fld id="{DAA401AF-96B9-4795-80AC-645028D14909}" type="datetimeFigureOut">
+            <a:fld id="{C108DDE1-F741-4F4F-A7D2-FBD0359B97CD}" type="datetimeFigureOut">
               <a:rPr lang="en-US" smtClean="0"/>
               <a:t>10/3/2026</a:t>
             </a:fld>
@@ -20105,7 +20105,7 @@
             </a:lvl1pPr>
           </a:lstStyle>
           <a:p>
-            <a:fld id="{EB0BFBF9-3444-4A23-A691-88293893E3E4}" type="slidenum">
+            <a:fld id="{D07356AB-B086-4690-8078-803F810DAE76}" type="slidenum">
               <a:rPr lang="en-US" smtClean="0"/>
               <a:t>‹#›</a:t>
             </a:fld>
@@ -20151,7 +20151,7 @@
     </p:spTree>
     <p:extLst>
       <p:ext uri="{BB962C8B-B14F-4D97-AF65-F5344CB8AC3E}">
-        <p14:creationId xmlns:p14="http://schemas.microsoft.com/office/powerpoint/2010/main" val="3035029429"/>
+        <p14:creationId xmlns:p14="http://schemas.microsoft.com/office/powerpoint/2010/main" val="957607581"/>
       </p:ext>
     </p:extLst>
   </p:cSld>

--- a/design/templates/integral-dark/template.pptx
+++ b/design/templates/integral-dark/template.pptx
@@ -254,9 +254,9 @@
             </a:lvl1pPr>
           </a:lstStyle>
           <a:p>
-            <a:fld id="{C108DDE1-F741-4F4F-A7D2-FBD0359B97CD}" type="datetimeFigureOut">
+            <a:fld id="{374EEE4F-B349-4B31-9811-90D259E0D621}" type="datetimeFigureOut">
               <a:rPr lang="en-US" smtClean="0"/>
-              <a:t>10/3/2026</a:t>
+              <a:t>10/4/2026</a:t>
             </a:fld>
             <a:endParaRPr lang="en-US"/>
           </a:p>
@@ -296,7 +296,7 @@
           <a:bodyPr/>
           <a:lstStyle/>
           <a:p>
-            <a:fld id="{D07356AB-B086-4690-8078-803F810DAE76}" type="slidenum">
+            <a:fld id="{6622063C-0B57-47EC-9E6E-D170EF750DAF}" type="slidenum">
               <a:rPr lang="en-US" smtClean="0"/>
               <a:t>‹#›</a:t>
             </a:fld>
@@ -380,7 +380,7 @@
     </p:spTree>
     <p:extLst>
       <p:ext uri="{BB962C8B-B14F-4D97-AF65-F5344CB8AC3E}">
-        <p14:creationId xmlns:p14="http://schemas.microsoft.com/office/powerpoint/2010/main" val="2125133260"/>
+        <p14:creationId xmlns:p14="http://schemas.microsoft.com/office/powerpoint/2010/main" val="452560487"/>
       </p:ext>
     </p:extLst>
   </p:cSld>
@@ -449,9 +449,9 @@
           <a:bodyPr/>
           <a:lstStyle/>
           <a:p>
-            <a:fld id="{C108DDE1-F741-4F4F-A7D2-FBD0359B97CD}" type="datetimeFigureOut">
+            <a:fld id="{374EEE4F-B349-4B31-9811-90D259E0D621}" type="datetimeFigureOut">
               <a:rPr lang="en-US" smtClean="0"/>
-              <a:t>10/3/2026</a:t>
+              <a:t>10/4/2026</a:t>
             </a:fld>
             <a:endParaRPr lang="en-US"/>
           </a:p>
@@ -491,7 +491,7 @@
           <a:bodyPr/>
           <a:lstStyle/>
           <a:p>
-            <a:fld id="{D07356AB-B086-4690-8078-803F810DAE76}" type="slidenum">
+            <a:fld id="{6622063C-0B57-47EC-9E6E-D170EF750DAF}" type="slidenum">
               <a:rPr lang="en-US" smtClean="0"/>
               <a:t>‹#›</a:t>
             </a:fld>
@@ -504,7 +504,7 @@
           <p:cNvPr id="6" name="body">
             <a:extLst>
               <a:ext uri="{FF2B5EF4-FFF2-40B4-BE49-F238E27FC236}">
-                <a16:creationId xmlns:a16="http://schemas.microsoft.com/office/drawing/2014/main" id="{236C50CD-FDD2-5F49-7501-A92B563C3F44}"/>
+                <a16:creationId xmlns:a16="http://schemas.microsoft.com/office/drawing/2014/main" id="{EB80BAFC-74CC-86EE-11B9-D32F29BB8556}"/>
               </a:ext>
             </a:extLst>
           </p:cNvPr>
@@ -544,7 +544,7 @@
           <p:cNvPr id="7" name="source">
             <a:extLst>
               <a:ext uri="{FF2B5EF4-FFF2-40B4-BE49-F238E27FC236}">
-                <a16:creationId xmlns:a16="http://schemas.microsoft.com/office/drawing/2014/main" id="{67E5DC49-8B07-F4ED-6805-D05A56C8D823}"/>
+                <a16:creationId xmlns:a16="http://schemas.microsoft.com/office/drawing/2014/main" id="{14A4528D-64E1-E1BF-F530-F5CA0C0B4A58}"/>
               </a:ext>
             </a:extLst>
           </p:cNvPr>
@@ -566,7 +566,10 @@
             </a:avLst>
           </a:prstGeom>
           <a:solidFill>
-            <a:schemeClr val="accent1"/>
+            <a:schemeClr val="accent1">
+              <a:lumMod val="70000"/>
+              <a:lumOff val="30000"/>
+            </a:schemeClr>
           </a:solidFill>
         </p:spPr>
         <p:txBody>
@@ -599,7 +602,7 @@
     </p:spTree>
     <p:extLst>
       <p:ext uri="{BB962C8B-B14F-4D97-AF65-F5344CB8AC3E}">
-        <p14:creationId xmlns:p14="http://schemas.microsoft.com/office/powerpoint/2010/main" val="3747923268"/>
+        <p14:creationId xmlns:p14="http://schemas.microsoft.com/office/powerpoint/2010/main" val="85702352"/>
       </p:ext>
     </p:extLst>
   </p:cSld>
@@ -668,9 +671,9 @@
           <a:bodyPr/>
           <a:lstStyle/>
           <a:p>
-            <a:fld id="{C108DDE1-F741-4F4F-A7D2-FBD0359B97CD}" type="datetimeFigureOut">
+            <a:fld id="{374EEE4F-B349-4B31-9811-90D259E0D621}" type="datetimeFigureOut">
               <a:rPr lang="en-US" smtClean="0"/>
-              <a:t>10/3/2026</a:t>
+              <a:t>10/4/2026</a:t>
             </a:fld>
             <a:endParaRPr lang="en-US"/>
           </a:p>
@@ -710,7 +713,7 @@
           <a:bodyPr/>
           <a:lstStyle/>
           <a:p>
-            <a:fld id="{D07356AB-B086-4690-8078-803F810DAE76}" type="slidenum">
+            <a:fld id="{6622063C-0B57-47EC-9E6E-D170EF750DAF}" type="slidenum">
               <a:rPr lang="en-US" smtClean="0"/>
               <a:t>‹#›</a:t>
             </a:fld>
@@ -723,7 +726,7 @@
           <p:cNvPr id="6" name="body">
             <a:extLst>
               <a:ext uri="{FF2B5EF4-FFF2-40B4-BE49-F238E27FC236}">
-                <a16:creationId xmlns:a16="http://schemas.microsoft.com/office/drawing/2014/main" id="{F244C694-AB8D-A635-4077-44EF943D1F66}"/>
+                <a16:creationId xmlns:a16="http://schemas.microsoft.com/office/drawing/2014/main" id="{26E8448D-8280-89C4-6AD0-C7D2AE264D4C}"/>
               </a:ext>
             </a:extLst>
           </p:cNvPr>
@@ -766,7 +769,7 @@
     </p:spTree>
     <p:extLst>
       <p:ext uri="{BB962C8B-B14F-4D97-AF65-F5344CB8AC3E}">
-        <p14:creationId xmlns:p14="http://schemas.microsoft.com/office/powerpoint/2010/main" val="2604019529"/>
+        <p14:creationId xmlns:p14="http://schemas.microsoft.com/office/powerpoint/2010/main" val="173957958"/>
       </p:ext>
     </p:extLst>
   </p:cSld>
@@ -842,7 +845,7 @@
           <p:cNvPr id="6" name="section_number">
             <a:extLst>
               <a:ext uri="{FF2B5EF4-FFF2-40B4-BE49-F238E27FC236}">
-                <a16:creationId xmlns:a16="http://schemas.microsoft.com/office/drawing/2014/main" id="{E812351D-71F6-53D8-D74C-4078D0C3B78B}"/>
+                <a16:creationId xmlns:a16="http://schemas.microsoft.com/office/drawing/2014/main" id="{711EE77F-DF8A-57FF-A4C4-5C5F9E25C1DF}"/>
               </a:ext>
             </a:extLst>
           </p:cNvPr>
@@ -895,7 +898,7 @@
           <p:cNvPr id="7" name="subtitle">
             <a:extLst>
               <a:ext uri="{FF2B5EF4-FFF2-40B4-BE49-F238E27FC236}">
-                <a16:creationId xmlns:a16="http://schemas.microsoft.com/office/drawing/2014/main" id="{E24ACF78-88F1-DFDF-0D08-209A36FB9D1B}"/>
+                <a16:creationId xmlns:a16="http://schemas.microsoft.com/office/drawing/2014/main" id="{0AB3E33E-67CE-AAD1-E123-4183E89DE06D}"/>
               </a:ext>
             </a:extLst>
           </p:cNvPr>
@@ -947,7 +950,7 @@
           <p:cNvPr id="8" name="pattern">
             <a:extLst>
               <a:ext uri="{FF2B5EF4-FFF2-40B4-BE49-F238E27FC236}">
-                <a16:creationId xmlns:a16="http://schemas.microsoft.com/office/drawing/2014/main" id="{E5BEAAA9-B4BE-C957-5014-9F015A796B65}"/>
+                <a16:creationId xmlns:a16="http://schemas.microsoft.com/office/drawing/2014/main" id="{F2965A84-F4C9-AC90-AF36-40F271BDB1C9}"/>
               </a:ext>
             </a:extLst>
           </p:cNvPr>
@@ -1003,7 +1006,7 @@
           <p:cNvPr id="9" name="pattern">
             <a:extLst>
               <a:ext uri="{FF2B5EF4-FFF2-40B4-BE49-F238E27FC236}">
-                <a16:creationId xmlns:a16="http://schemas.microsoft.com/office/drawing/2014/main" id="{4FC770B1-CD04-672D-A4D7-6DD61F832BD6}"/>
+                <a16:creationId xmlns:a16="http://schemas.microsoft.com/office/drawing/2014/main" id="{1B9CC802-C34E-1D48-29A8-6983561B8466}"/>
               </a:ext>
             </a:extLst>
           </p:cNvPr>
@@ -1059,7 +1062,7 @@
           <p:cNvPr id="10" name="pattern">
             <a:extLst>
               <a:ext uri="{FF2B5EF4-FFF2-40B4-BE49-F238E27FC236}">
-                <a16:creationId xmlns:a16="http://schemas.microsoft.com/office/drawing/2014/main" id="{B9BFE567-7C51-4550-1AE9-3F30E216FAA1}"/>
+                <a16:creationId xmlns:a16="http://schemas.microsoft.com/office/drawing/2014/main" id="{7A70C36E-4676-5A5D-1B4F-8F079FDC9D58}"/>
               </a:ext>
             </a:extLst>
           </p:cNvPr>
@@ -1115,7 +1118,7 @@
           <p:cNvPr id="11" name="pattern">
             <a:extLst>
               <a:ext uri="{FF2B5EF4-FFF2-40B4-BE49-F238E27FC236}">
-                <a16:creationId xmlns:a16="http://schemas.microsoft.com/office/drawing/2014/main" id="{C535706F-EBE4-7DD9-34FB-5A30B0BF56D8}"/>
+                <a16:creationId xmlns:a16="http://schemas.microsoft.com/office/drawing/2014/main" id="{D7B9E5C1-27C1-23ED-8D8D-7B11C681B3B2}"/>
               </a:ext>
             </a:extLst>
           </p:cNvPr>
@@ -1171,7 +1174,7 @@
           <p:cNvPr id="12" name="pattern">
             <a:extLst>
               <a:ext uri="{FF2B5EF4-FFF2-40B4-BE49-F238E27FC236}">
-                <a16:creationId xmlns:a16="http://schemas.microsoft.com/office/drawing/2014/main" id="{C795891C-FBFC-FA03-153B-9A27219F43CD}"/>
+                <a16:creationId xmlns:a16="http://schemas.microsoft.com/office/drawing/2014/main" id="{6334B325-B926-4D95-2047-E2FDCF8C9647}"/>
               </a:ext>
             </a:extLst>
           </p:cNvPr>
@@ -1227,7 +1230,7 @@
           <p:cNvPr id="13" name="pattern">
             <a:extLst>
               <a:ext uri="{FF2B5EF4-FFF2-40B4-BE49-F238E27FC236}">
-                <a16:creationId xmlns:a16="http://schemas.microsoft.com/office/drawing/2014/main" id="{A847760E-F507-FBF8-4929-79541E523090}"/>
+                <a16:creationId xmlns:a16="http://schemas.microsoft.com/office/drawing/2014/main" id="{6AA28F4F-3944-E6F6-FAE4-4B916BFC9A53}"/>
               </a:ext>
             </a:extLst>
           </p:cNvPr>
@@ -1283,7 +1286,7 @@
           <p:cNvPr id="14" name="pattern">
             <a:extLst>
               <a:ext uri="{FF2B5EF4-FFF2-40B4-BE49-F238E27FC236}">
-                <a16:creationId xmlns:a16="http://schemas.microsoft.com/office/drawing/2014/main" id="{82B4F0F6-95A1-5653-7276-ED21C977F49E}"/>
+                <a16:creationId xmlns:a16="http://schemas.microsoft.com/office/drawing/2014/main" id="{E7822D14-780E-BEFE-B203-585D84782526}"/>
               </a:ext>
             </a:extLst>
           </p:cNvPr>
@@ -1339,7 +1342,7 @@
           <p:cNvPr id="15" name="pattern">
             <a:extLst>
               <a:ext uri="{FF2B5EF4-FFF2-40B4-BE49-F238E27FC236}">
-                <a16:creationId xmlns:a16="http://schemas.microsoft.com/office/drawing/2014/main" id="{35FC1D7B-FCDB-1BEE-12BB-AA6377C15307}"/>
+                <a16:creationId xmlns:a16="http://schemas.microsoft.com/office/drawing/2014/main" id="{3EBF5A38-61B4-C8D7-6DA7-5EAEEC9632C4}"/>
               </a:ext>
             </a:extLst>
           </p:cNvPr>
@@ -1395,7 +1398,7 @@
           <p:cNvPr id="16" name="pattern">
             <a:extLst>
               <a:ext uri="{FF2B5EF4-FFF2-40B4-BE49-F238E27FC236}">
-                <a16:creationId xmlns:a16="http://schemas.microsoft.com/office/drawing/2014/main" id="{9E0942DA-58FF-D737-4B75-6321D62220DB}"/>
+                <a16:creationId xmlns:a16="http://schemas.microsoft.com/office/drawing/2014/main" id="{8BCD8AE6-C218-EC26-935F-0C8DC99A2EDD}"/>
               </a:ext>
             </a:extLst>
           </p:cNvPr>
@@ -1451,7 +1454,7 @@
           <p:cNvPr id="17" name="pattern">
             <a:extLst>
               <a:ext uri="{FF2B5EF4-FFF2-40B4-BE49-F238E27FC236}">
-                <a16:creationId xmlns:a16="http://schemas.microsoft.com/office/drawing/2014/main" id="{FBA91507-1C04-526E-4AC2-797D159D14C7}"/>
+                <a16:creationId xmlns:a16="http://schemas.microsoft.com/office/drawing/2014/main" id="{60D0F4D2-461C-10DB-8885-4B67F8E10377}"/>
               </a:ext>
             </a:extLst>
           </p:cNvPr>
@@ -1507,7 +1510,7 @@
           <p:cNvPr id="18" name="pattern">
             <a:extLst>
               <a:ext uri="{FF2B5EF4-FFF2-40B4-BE49-F238E27FC236}">
-                <a16:creationId xmlns:a16="http://schemas.microsoft.com/office/drawing/2014/main" id="{9A1C9AFA-C737-276D-4DD8-FAB3262FCCBF}"/>
+                <a16:creationId xmlns:a16="http://schemas.microsoft.com/office/drawing/2014/main" id="{C2F48850-A53A-1CFE-C22B-2F1FF70BC2CF}"/>
               </a:ext>
             </a:extLst>
           </p:cNvPr>
@@ -1563,7 +1566,7 @@
           <p:cNvPr id="19" name="pattern">
             <a:extLst>
               <a:ext uri="{FF2B5EF4-FFF2-40B4-BE49-F238E27FC236}">
-                <a16:creationId xmlns:a16="http://schemas.microsoft.com/office/drawing/2014/main" id="{6DA53B56-3094-11F1-EFE0-AF416CA02F2C}"/>
+                <a16:creationId xmlns:a16="http://schemas.microsoft.com/office/drawing/2014/main" id="{551FBAB5-CBE0-B281-CF0A-E80B566977B3}"/>
               </a:ext>
             </a:extLst>
           </p:cNvPr>
@@ -1619,7 +1622,7 @@
           <p:cNvPr id="20" name="pattern">
             <a:extLst>
               <a:ext uri="{FF2B5EF4-FFF2-40B4-BE49-F238E27FC236}">
-                <a16:creationId xmlns:a16="http://schemas.microsoft.com/office/drawing/2014/main" id="{9E416101-37C7-5134-6724-17B749FA0B75}"/>
+                <a16:creationId xmlns:a16="http://schemas.microsoft.com/office/drawing/2014/main" id="{51646548-941B-1A3A-72F7-A6EA10600362}"/>
               </a:ext>
             </a:extLst>
           </p:cNvPr>
@@ -1675,7 +1678,7 @@
           <p:cNvPr id="21" name="pattern">
             <a:extLst>
               <a:ext uri="{FF2B5EF4-FFF2-40B4-BE49-F238E27FC236}">
-                <a16:creationId xmlns:a16="http://schemas.microsoft.com/office/drawing/2014/main" id="{D1176870-2974-D19A-D11A-3262CE0220F7}"/>
+                <a16:creationId xmlns:a16="http://schemas.microsoft.com/office/drawing/2014/main" id="{84926EA8-5029-B932-033B-0BA3C6703B58}"/>
               </a:ext>
             </a:extLst>
           </p:cNvPr>
@@ -1731,7 +1734,7 @@
           <p:cNvPr id="22" name="pattern">
             <a:extLst>
               <a:ext uri="{FF2B5EF4-FFF2-40B4-BE49-F238E27FC236}">
-                <a16:creationId xmlns:a16="http://schemas.microsoft.com/office/drawing/2014/main" id="{FFBE3031-C3EC-5703-A1A1-F031F159B700}"/>
+                <a16:creationId xmlns:a16="http://schemas.microsoft.com/office/drawing/2014/main" id="{4A7B9819-95BB-A3FF-E7B6-90801B281959}"/>
               </a:ext>
             </a:extLst>
           </p:cNvPr>
@@ -1787,7 +1790,7 @@
           <p:cNvPr id="23" name="pattern">
             <a:extLst>
               <a:ext uri="{FF2B5EF4-FFF2-40B4-BE49-F238E27FC236}">
-                <a16:creationId xmlns:a16="http://schemas.microsoft.com/office/drawing/2014/main" id="{BFB3B72B-E2FB-7C71-9F9A-0EAD1DEAF0C3}"/>
+                <a16:creationId xmlns:a16="http://schemas.microsoft.com/office/drawing/2014/main" id="{542AC1B2-0F17-0AFB-CB0D-B6DDCC4AB124}"/>
               </a:ext>
             </a:extLst>
           </p:cNvPr>
@@ -1843,7 +1846,7 @@
           <p:cNvPr id="24" name="pattern">
             <a:extLst>
               <a:ext uri="{FF2B5EF4-FFF2-40B4-BE49-F238E27FC236}">
-                <a16:creationId xmlns:a16="http://schemas.microsoft.com/office/drawing/2014/main" id="{8EE912C9-0AA2-2200-21E1-D1832DB26F8A}"/>
+                <a16:creationId xmlns:a16="http://schemas.microsoft.com/office/drawing/2014/main" id="{19658215-AD3D-E384-8823-B95AE2098651}"/>
               </a:ext>
             </a:extLst>
           </p:cNvPr>
@@ -1899,7 +1902,7 @@
           <p:cNvPr id="25" name="pattern">
             <a:extLst>
               <a:ext uri="{FF2B5EF4-FFF2-40B4-BE49-F238E27FC236}">
-                <a16:creationId xmlns:a16="http://schemas.microsoft.com/office/drawing/2014/main" id="{DA1AD45D-6AF2-CC45-0FCD-115B372AD569}"/>
+                <a16:creationId xmlns:a16="http://schemas.microsoft.com/office/drawing/2014/main" id="{2A1F44D4-2225-05A0-3662-A0A5CD67ACB6}"/>
               </a:ext>
             </a:extLst>
           </p:cNvPr>
@@ -1955,7 +1958,7 @@
           <p:cNvPr id="26" name="pattern">
             <a:extLst>
               <a:ext uri="{FF2B5EF4-FFF2-40B4-BE49-F238E27FC236}">
-                <a16:creationId xmlns:a16="http://schemas.microsoft.com/office/drawing/2014/main" id="{53A28099-67A5-90DE-83E1-B8CC1B6B7099}"/>
+                <a16:creationId xmlns:a16="http://schemas.microsoft.com/office/drawing/2014/main" id="{20EBD279-AF59-6105-8590-FDBD67A749B6}"/>
               </a:ext>
             </a:extLst>
           </p:cNvPr>
@@ -2011,7 +2014,7 @@
           <p:cNvPr id="27" name="pattern">
             <a:extLst>
               <a:ext uri="{FF2B5EF4-FFF2-40B4-BE49-F238E27FC236}">
-                <a16:creationId xmlns:a16="http://schemas.microsoft.com/office/drawing/2014/main" id="{5AEFF656-32D5-0AA5-B53D-E8AF74A577BB}"/>
+                <a16:creationId xmlns:a16="http://schemas.microsoft.com/office/drawing/2014/main" id="{79A0AF33-3B92-C197-6BCA-6827188B44E3}"/>
               </a:ext>
             </a:extLst>
           </p:cNvPr>
@@ -2067,7 +2070,7 @@
           <p:cNvPr id="28" name="pattern">
             <a:extLst>
               <a:ext uri="{FF2B5EF4-FFF2-40B4-BE49-F238E27FC236}">
-                <a16:creationId xmlns:a16="http://schemas.microsoft.com/office/drawing/2014/main" id="{C906645C-640F-A5D8-61E7-528DD769E1E3}"/>
+                <a16:creationId xmlns:a16="http://schemas.microsoft.com/office/drawing/2014/main" id="{E0622395-3460-6DBD-2A3B-DA9350952018}"/>
               </a:ext>
             </a:extLst>
           </p:cNvPr>
@@ -2123,7 +2126,7 @@
           <p:cNvPr id="29" name="pattern">
             <a:extLst>
               <a:ext uri="{FF2B5EF4-FFF2-40B4-BE49-F238E27FC236}">
-                <a16:creationId xmlns:a16="http://schemas.microsoft.com/office/drawing/2014/main" id="{24744F7D-6038-FCE8-06A8-C5E0F0B46147}"/>
+                <a16:creationId xmlns:a16="http://schemas.microsoft.com/office/drawing/2014/main" id="{3C52C06B-6F93-3B66-51FC-7E35ADBB6F19}"/>
               </a:ext>
             </a:extLst>
           </p:cNvPr>
@@ -2179,7 +2182,7 @@
           <p:cNvPr id="30" name="pattern">
             <a:extLst>
               <a:ext uri="{FF2B5EF4-FFF2-40B4-BE49-F238E27FC236}">
-                <a16:creationId xmlns:a16="http://schemas.microsoft.com/office/drawing/2014/main" id="{58F7736D-C6AE-9CEF-E7DB-CAAEC3851385}"/>
+                <a16:creationId xmlns:a16="http://schemas.microsoft.com/office/drawing/2014/main" id="{1D84C591-BBC4-D790-0EB5-F0C92DB72EE8}"/>
               </a:ext>
             </a:extLst>
           </p:cNvPr>
@@ -2235,7 +2238,7 @@
           <p:cNvPr id="31" name="pattern">
             <a:extLst>
               <a:ext uri="{FF2B5EF4-FFF2-40B4-BE49-F238E27FC236}">
-                <a16:creationId xmlns:a16="http://schemas.microsoft.com/office/drawing/2014/main" id="{B85B1023-EB92-F57E-FA22-1D090ED9F891}"/>
+                <a16:creationId xmlns:a16="http://schemas.microsoft.com/office/drawing/2014/main" id="{1CCB8EB1-BF5F-ED88-DBBC-A3524A564E09}"/>
               </a:ext>
             </a:extLst>
           </p:cNvPr>
@@ -2291,7 +2294,7 @@
           <p:cNvPr id="32" name="pattern">
             <a:extLst>
               <a:ext uri="{FF2B5EF4-FFF2-40B4-BE49-F238E27FC236}">
-                <a16:creationId xmlns:a16="http://schemas.microsoft.com/office/drawing/2014/main" id="{9532040D-9966-1362-7B68-7E515EF9C9BF}"/>
+                <a16:creationId xmlns:a16="http://schemas.microsoft.com/office/drawing/2014/main" id="{E4554E1C-C59C-01BC-BB29-F31FFC56002A}"/>
               </a:ext>
             </a:extLst>
           </p:cNvPr>
@@ -2347,7 +2350,7 @@
           <p:cNvPr id="33" name="pattern">
             <a:extLst>
               <a:ext uri="{FF2B5EF4-FFF2-40B4-BE49-F238E27FC236}">
-                <a16:creationId xmlns:a16="http://schemas.microsoft.com/office/drawing/2014/main" id="{43D6355A-479F-EEBF-57D7-B8175B34FDFA}"/>
+                <a16:creationId xmlns:a16="http://schemas.microsoft.com/office/drawing/2014/main" id="{371AA9B0-19ED-0B70-059C-18BB9C183C53}"/>
               </a:ext>
             </a:extLst>
           </p:cNvPr>
@@ -2403,7 +2406,7 @@
           <p:cNvPr id="34" name="pattern">
             <a:extLst>
               <a:ext uri="{FF2B5EF4-FFF2-40B4-BE49-F238E27FC236}">
-                <a16:creationId xmlns:a16="http://schemas.microsoft.com/office/drawing/2014/main" id="{56E2426F-2C2B-6EA0-0D59-C40223317543}"/>
+                <a16:creationId xmlns:a16="http://schemas.microsoft.com/office/drawing/2014/main" id="{9AC722B1-D7C7-3157-1149-9D246949E07C}"/>
               </a:ext>
             </a:extLst>
           </p:cNvPr>
@@ -2459,7 +2462,7 @@
           <p:cNvPr id="35" name="pattern">
             <a:extLst>
               <a:ext uri="{FF2B5EF4-FFF2-40B4-BE49-F238E27FC236}">
-                <a16:creationId xmlns:a16="http://schemas.microsoft.com/office/drawing/2014/main" id="{080A51B5-3E14-5F6D-1F3D-1387212D9F57}"/>
+                <a16:creationId xmlns:a16="http://schemas.microsoft.com/office/drawing/2014/main" id="{A9DB77F4-584A-F07C-77C0-4991F7DC40C2}"/>
               </a:ext>
             </a:extLst>
           </p:cNvPr>
@@ -2515,7 +2518,7 @@
           <p:cNvPr id="36" name="pattern">
             <a:extLst>
               <a:ext uri="{FF2B5EF4-FFF2-40B4-BE49-F238E27FC236}">
-                <a16:creationId xmlns:a16="http://schemas.microsoft.com/office/drawing/2014/main" id="{DEC81A24-0AE1-E60F-984D-73990E72BBDF}"/>
+                <a16:creationId xmlns:a16="http://schemas.microsoft.com/office/drawing/2014/main" id="{A2F4492B-05C6-A425-7EF8-3AB251362C3A}"/>
               </a:ext>
             </a:extLst>
           </p:cNvPr>
@@ -2571,7 +2574,7 @@
           <p:cNvPr id="37" name="pattern">
             <a:extLst>
               <a:ext uri="{FF2B5EF4-FFF2-40B4-BE49-F238E27FC236}">
-                <a16:creationId xmlns:a16="http://schemas.microsoft.com/office/drawing/2014/main" id="{9CC02622-39F4-0419-D65D-66F956BEA77E}"/>
+                <a16:creationId xmlns:a16="http://schemas.microsoft.com/office/drawing/2014/main" id="{A68D4FAA-6FD6-16AF-44E6-FC918612B623}"/>
               </a:ext>
             </a:extLst>
           </p:cNvPr>
@@ -2627,7 +2630,7 @@
           <p:cNvPr id="38" name="pattern">
             <a:extLst>
               <a:ext uri="{FF2B5EF4-FFF2-40B4-BE49-F238E27FC236}">
-                <a16:creationId xmlns:a16="http://schemas.microsoft.com/office/drawing/2014/main" id="{657F0E46-819D-4BA9-8B15-FC46D6C6F388}"/>
+                <a16:creationId xmlns:a16="http://schemas.microsoft.com/office/drawing/2014/main" id="{2BD47DE0-2E7B-6B4A-A536-3051F7E60263}"/>
               </a:ext>
             </a:extLst>
           </p:cNvPr>
@@ -2683,7 +2686,7 @@
           <p:cNvPr id="39" name="pattern">
             <a:extLst>
               <a:ext uri="{FF2B5EF4-FFF2-40B4-BE49-F238E27FC236}">
-                <a16:creationId xmlns:a16="http://schemas.microsoft.com/office/drawing/2014/main" id="{CAE6CF45-1733-BCA2-0863-10FDFBFA09C0}"/>
+                <a16:creationId xmlns:a16="http://schemas.microsoft.com/office/drawing/2014/main" id="{DAEBDC73-284A-0590-0269-4437B98F0726}"/>
               </a:ext>
             </a:extLst>
           </p:cNvPr>
@@ -2739,7 +2742,7 @@
           <p:cNvPr id="40" name="pattern">
             <a:extLst>
               <a:ext uri="{FF2B5EF4-FFF2-40B4-BE49-F238E27FC236}">
-                <a16:creationId xmlns:a16="http://schemas.microsoft.com/office/drawing/2014/main" id="{BE853025-8ED6-9EA5-D31D-7CC771E6C6B3}"/>
+                <a16:creationId xmlns:a16="http://schemas.microsoft.com/office/drawing/2014/main" id="{96CD50AD-F73D-AE65-2416-9960748C2252}"/>
               </a:ext>
             </a:extLst>
           </p:cNvPr>
@@ -2795,7 +2798,7 @@
           <p:cNvPr id="41" name="pattern">
             <a:extLst>
               <a:ext uri="{FF2B5EF4-FFF2-40B4-BE49-F238E27FC236}">
-                <a16:creationId xmlns:a16="http://schemas.microsoft.com/office/drawing/2014/main" id="{D2832FBC-28B1-4CFD-D505-9ECCAA9FF9A5}"/>
+                <a16:creationId xmlns:a16="http://schemas.microsoft.com/office/drawing/2014/main" id="{970F15A4-CCB7-1B5D-3C04-B79B6145010F}"/>
               </a:ext>
             </a:extLst>
           </p:cNvPr>
@@ -2851,7 +2854,7 @@
           <p:cNvPr id="42" name="pattern">
             <a:extLst>
               <a:ext uri="{FF2B5EF4-FFF2-40B4-BE49-F238E27FC236}">
-                <a16:creationId xmlns:a16="http://schemas.microsoft.com/office/drawing/2014/main" id="{B2188872-35A9-5E0D-0F0F-E2E704DB787E}"/>
+                <a16:creationId xmlns:a16="http://schemas.microsoft.com/office/drawing/2014/main" id="{497C2EC2-DB3D-604A-81A4-88CE35983506}"/>
               </a:ext>
             </a:extLst>
           </p:cNvPr>
@@ -2907,7 +2910,7 @@
           <p:cNvPr id="43" name="pattern">
             <a:extLst>
               <a:ext uri="{FF2B5EF4-FFF2-40B4-BE49-F238E27FC236}">
-                <a16:creationId xmlns:a16="http://schemas.microsoft.com/office/drawing/2014/main" id="{34A13E8A-357D-47E5-0965-51EC915CDF51}"/>
+                <a16:creationId xmlns:a16="http://schemas.microsoft.com/office/drawing/2014/main" id="{7673280D-2D94-EA1E-797A-E3BC0159BA5A}"/>
               </a:ext>
             </a:extLst>
           </p:cNvPr>
@@ -2963,7 +2966,7 @@
           <p:cNvPr id="44" name="pattern">
             <a:extLst>
               <a:ext uri="{FF2B5EF4-FFF2-40B4-BE49-F238E27FC236}">
-                <a16:creationId xmlns:a16="http://schemas.microsoft.com/office/drawing/2014/main" id="{BF68FAA9-3ABC-7E63-CAA1-2DBD99C15DDB}"/>
+                <a16:creationId xmlns:a16="http://schemas.microsoft.com/office/drawing/2014/main" id="{61D7D84E-E0E5-6B89-A639-B85185F93D1B}"/>
               </a:ext>
             </a:extLst>
           </p:cNvPr>
@@ -3019,7 +3022,7 @@
           <p:cNvPr id="45" name="pattern">
             <a:extLst>
               <a:ext uri="{FF2B5EF4-FFF2-40B4-BE49-F238E27FC236}">
-                <a16:creationId xmlns:a16="http://schemas.microsoft.com/office/drawing/2014/main" id="{75DA0B24-6BA9-C25A-22A5-15701E80D7CF}"/>
+                <a16:creationId xmlns:a16="http://schemas.microsoft.com/office/drawing/2014/main" id="{1C50B185-471A-1F7C-E308-0F39FD98D638}"/>
               </a:ext>
             </a:extLst>
           </p:cNvPr>
@@ -3075,7 +3078,7 @@
           <p:cNvPr id="46" name="pattern">
             <a:extLst>
               <a:ext uri="{FF2B5EF4-FFF2-40B4-BE49-F238E27FC236}">
-                <a16:creationId xmlns:a16="http://schemas.microsoft.com/office/drawing/2014/main" id="{2732E469-C1C5-1B2A-BD8E-67E63D6CF31B}"/>
+                <a16:creationId xmlns:a16="http://schemas.microsoft.com/office/drawing/2014/main" id="{64B221C1-0EEB-C983-DFF3-B2F76B19D5B4}"/>
               </a:ext>
             </a:extLst>
           </p:cNvPr>
@@ -3131,7 +3134,7 @@
           <p:cNvPr id="47" name="pattern">
             <a:extLst>
               <a:ext uri="{FF2B5EF4-FFF2-40B4-BE49-F238E27FC236}">
-                <a16:creationId xmlns:a16="http://schemas.microsoft.com/office/drawing/2014/main" id="{2A08F928-B8E1-92E2-F721-A6F53A693B6F}"/>
+                <a16:creationId xmlns:a16="http://schemas.microsoft.com/office/drawing/2014/main" id="{4ED1ADB9-1678-B69D-12B3-B296E9ED371F}"/>
               </a:ext>
             </a:extLst>
           </p:cNvPr>
@@ -3187,7 +3190,7 @@
           <p:cNvPr id="48" name="pattern">
             <a:extLst>
               <a:ext uri="{FF2B5EF4-FFF2-40B4-BE49-F238E27FC236}">
-                <a16:creationId xmlns:a16="http://schemas.microsoft.com/office/drawing/2014/main" id="{481F1902-44AB-83F2-118F-E1890326CCC9}"/>
+                <a16:creationId xmlns:a16="http://schemas.microsoft.com/office/drawing/2014/main" id="{B5D22CFB-8B1E-7D4F-75F4-861A14CB0A17}"/>
               </a:ext>
             </a:extLst>
           </p:cNvPr>
@@ -3243,7 +3246,7 @@
           <p:cNvPr id="49" name="pattern">
             <a:extLst>
               <a:ext uri="{FF2B5EF4-FFF2-40B4-BE49-F238E27FC236}">
-                <a16:creationId xmlns:a16="http://schemas.microsoft.com/office/drawing/2014/main" id="{3252892D-1357-9A11-3A4C-FF12CC842713}"/>
+                <a16:creationId xmlns:a16="http://schemas.microsoft.com/office/drawing/2014/main" id="{FEBA6A00-8AE2-F881-6C09-92AD0B891679}"/>
               </a:ext>
             </a:extLst>
           </p:cNvPr>
@@ -3299,7 +3302,7 @@
           <p:cNvPr id="50" name="pattern">
             <a:extLst>
               <a:ext uri="{FF2B5EF4-FFF2-40B4-BE49-F238E27FC236}">
-                <a16:creationId xmlns:a16="http://schemas.microsoft.com/office/drawing/2014/main" id="{2A1CC637-1F77-6186-BBF8-8CC065CDFF87}"/>
+                <a16:creationId xmlns:a16="http://schemas.microsoft.com/office/drawing/2014/main" id="{2521ACB9-AE29-6B7F-37C4-A9011378B145}"/>
               </a:ext>
             </a:extLst>
           </p:cNvPr>
@@ -3355,7 +3358,7 @@
           <p:cNvPr id="51" name="pattern">
             <a:extLst>
               <a:ext uri="{FF2B5EF4-FFF2-40B4-BE49-F238E27FC236}">
-                <a16:creationId xmlns:a16="http://schemas.microsoft.com/office/drawing/2014/main" id="{2930C1E9-5561-3C11-74FA-EFEE02720F67}"/>
+                <a16:creationId xmlns:a16="http://schemas.microsoft.com/office/drawing/2014/main" id="{11EC8E17-2F0B-AC3F-E3CF-48D3AFB9C213}"/>
               </a:ext>
             </a:extLst>
           </p:cNvPr>
@@ -3411,7 +3414,7 @@
           <p:cNvPr id="52" name="pattern">
             <a:extLst>
               <a:ext uri="{FF2B5EF4-FFF2-40B4-BE49-F238E27FC236}">
-                <a16:creationId xmlns:a16="http://schemas.microsoft.com/office/drawing/2014/main" id="{3A998171-C381-6895-F4F4-ED7A56C9D507}"/>
+                <a16:creationId xmlns:a16="http://schemas.microsoft.com/office/drawing/2014/main" id="{10B0F076-A1D8-BBA8-B1F2-8C6ABED566C9}"/>
               </a:ext>
             </a:extLst>
           </p:cNvPr>
@@ -3467,7 +3470,7 @@
           <p:cNvPr id="53" name="pattern">
             <a:extLst>
               <a:ext uri="{FF2B5EF4-FFF2-40B4-BE49-F238E27FC236}">
-                <a16:creationId xmlns:a16="http://schemas.microsoft.com/office/drawing/2014/main" id="{1379548D-7205-E9C0-7F2D-67AD76C91EFA}"/>
+                <a16:creationId xmlns:a16="http://schemas.microsoft.com/office/drawing/2014/main" id="{A617416E-44AF-8906-2716-64F90721921D}"/>
               </a:ext>
             </a:extLst>
           </p:cNvPr>
@@ -3523,7 +3526,7 @@
           <p:cNvPr id="54" name="pattern">
             <a:extLst>
               <a:ext uri="{FF2B5EF4-FFF2-40B4-BE49-F238E27FC236}">
-                <a16:creationId xmlns:a16="http://schemas.microsoft.com/office/drawing/2014/main" id="{D712CB25-CFE8-901F-8764-387DE053B180}"/>
+                <a16:creationId xmlns:a16="http://schemas.microsoft.com/office/drawing/2014/main" id="{D4B49CD9-568B-0302-E656-E36F5E41B3B4}"/>
               </a:ext>
             </a:extLst>
           </p:cNvPr>
@@ -3579,7 +3582,7 @@
           <p:cNvPr id="55" name="pattern">
             <a:extLst>
               <a:ext uri="{FF2B5EF4-FFF2-40B4-BE49-F238E27FC236}">
-                <a16:creationId xmlns:a16="http://schemas.microsoft.com/office/drawing/2014/main" id="{79B41B6B-079C-0CB3-FE6D-1910EC9BE5D3}"/>
+                <a16:creationId xmlns:a16="http://schemas.microsoft.com/office/drawing/2014/main" id="{350EE8D7-BE8E-CAA1-DFEE-165CD8BAA6AB}"/>
               </a:ext>
             </a:extLst>
           </p:cNvPr>
@@ -3635,7 +3638,7 @@
           <p:cNvPr id="56" name="pattern">
             <a:extLst>
               <a:ext uri="{FF2B5EF4-FFF2-40B4-BE49-F238E27FC236}">
-                <a16:creationId xmlns:a16="http://schemas.microsoft.com/office/drawing/2014/main" id="{B9AA99F5-275D-643E-06C2-ABA958B5F44A}"/>
+                <a16:creationId xmlns:a16="http://schemas.microsoft.com/office/drawing/2014/main" id="{C541AAD2-8234-94E1-95B5-363B25640AFA}"/>
               </a:ext>
             </a:extLst>
           </p:cNvPr>
@@ -3691,7 +3694,7 @@
           <p:cNvPr id="57" name="pattern">
             <a:extLst>
               <a:ext uri="{FF2B5EF4-FFF2-40B4-BE49-F238E27FC236}">
-                <a16:creationId xmlns:a16="http://schemas.microsoft.com/office/drawing/2014/main" id="{F40A5D44-80A9-F8BC-5F96-7787FDC1DDD8}"/>
+                <a16:creationId xmlns:a16="http://schemas.microsoft.com/office/drawing/2014/main" id="{17E09E81-D212-A95F-B4A6-7E8819BB4E63}"/>
               </a:ext>
             </a:extLst>
           </p:cNvPr>
@@ -3747,7 +3750,7 @@
           <p:cNvPr id="58" name="pattern">
             <a:extLst>
               <a:ext uri="{FF2B5EF4-FFF2-40B4-BE49-F238E27FC236}">
-                <a16:creationId xmlns:a16="http://schemas.microsoft.com/office/drawing/2014/main" id="{5C8F9967-DE1D-AF8D-2217-488819DA8356}"/>
+                <a16:creationId xmlns:a16="http://schemas.microsoft.com/office/drawing/2014/main" id="{59C0FEFF-6A93-6613-699C-F5FDD9402C24}"/>
               </a:ext>
             </a:extLst>
           </p:cNvPr>
@@ -3803,7 +3806,7 @@
           <p:cNvPr id="59" name="pattern">
             <a:extLst>
               <a:ext uri="{FF2B5EF4-FFF2-40B4-BE49-F238E27FC236}">
-                <a16:creationId xmlns:a16="http://schemas.microsoft.com/office/drawing/2014/main" id="{D40AA1DE-1ED3-26EC-CB89-3BC4DFC8F471}"/>
+                <a16:creationId xmlns:a16="http://schemas.microsoft.com/office/drawing/2014/main" id="{B9AE42C8-77D4-A373-93C5-294986F959EF}"/>
               </a:ext>
             </a:extLst>
           </p:cNvPr>
@@ -3859,7 +3862,7 @@
           <p:cNvPr id="60" name="pattern">
             <a:extLst>
               <a:ext uri="{FF2B5EF4-FFF2-40B4-BE49-F238E27FC236}">
-                <a16:creationId xmlns:a16="http://schemas.microsoft.com/office/drawing/2014/main" id="{BE853CF1-4F3F-8470-E806-8ACB3AEE5042}"/>
+                <a16:creationId xmlns:a16="http://schemas.microsoft.com/office/drawing/2014/main" id="{2F181702-5A22-A718-0EAE-7807D8C2C00F}"/>
               </a:ext>
             </a:extLst>
           </p:cNvPr>
@@ -3915,7 +3918,7 @@
           <p:cNvPr id="61" name="pattern">
             <a:extLst>
               <a:ext uri="{FF2B5EF4-FFF2-40B4-BE49-F238E27FC236}">
-                <a16:creationId xmlns:a16="http://schemas.microsoft.com/office/drawing/2014/main" id="{AA0BADEE-D7F6-3C18-6EA1-716F73D6C82B}"/>
+                <a16:creationId xmlns:a16="http://schemas.microsoft.com/office/drawing/2014/main" id="{E2B6ED97-F60E-58BE-C744-28A4792B951A}"/>
               </a:ext>
             </a:extLst>
           </p:cNvPr>
@@ -3971,7 +3974,7 @@
           <p:cNvPr id="62" name="pattern">
             <a:extLst>
               <a:ext uri="{FF2B5EF4-FFF2-40B4-BE49-F238E27FC236}">
-                <a16:creationId xmlns:a16="http://schemas.microsoft.com/office/drawing/2014/main" id="{DFB81486-4059-E841-A50E-361238B75821}"/>
+                <a16:creationId xmlns:a16="http://schemas.microsoft.com/office/drawing/2014/main" id="{FFC8ACD8-A4C4-6280-5419-6E6029263E99}"/>
               </a:ext>
             </a:extLst>
           </p:cNvPr>
@@ -4027,7 +4030,7 @@
           <p:cNvPr id="63" name="pattern">
             <a:extLst>
               <a:ext uri="{FF2B5EF4-FFF2-40B4-BE49-F238E27FC236}">
-                <a16:creationId xmlns:a16="http://schemas.microsoft.com/office/drawing/2014/main" id="{75BE1F63-1F44-447F-BD4F-982D8A2D0D7C}"/>
+                <a16:creationId xmlns:a16="http://schemas.microsoft.com/office/drawing/2014/main" id="{07860084-C3F1-37E2-1331-FCC569492B98}"/>
               </a:ext>
             </a:extLst>
           </p:cNvPr>
@@ -4083,7 +4086,7 @@
           <p:cNvPr id="64" name="pattern">
             <a:extLst>
               <a:ext uri="{FF2B5EF4-FFF2-40B4-BE49-F238E27FC236}">
-                <a16:creationId xmlns:a16="http://schemas.microsoft.com/office/drawing/2014/main" id="{5CF25524-0B29-3862-993D-A4EAEC2EFDD2}"/>
+                <a16:creationId xmlns:a16="http://schemas.microsoft.com/office/drawing/2014/main" id="{9F5DA0A3-7434-FB6B-F420-7810438A2C4F}"/>
               </a:ext>
             </a:extLst>
           </p:cNvPr>
@@ -4139,7 +4142,7 @@
           <p:cNvPr id="65" name="pattern">
             <a:extLst>
               <a:ext uri="{FF2B5EF4-FFF2-40B4-BE49-F238E27FC236}">
-                <a16:creationId xmlns:a16="http://schemas.microsoft.com/office/drawing/2014/main" id="{CD5534CA-59A4-CD55-A921-0808E1367FDD}"/>
+                <a16:creationId xmlns:a16="http://schemas.microsoft.com/office/drawing/2014/main" id="{30E617F4-6767-6864-215F-7EB6A2C84953}"/>
               </a:ext>
             </a:extLst>
           </p:cNvPr>
@@ -4195,7 +4198,7 @@
           <p:cNvPr id="66" name="pattern">
             <a:extLst>
               <a:ext uri="{FF2B5EF4-FFF2-40B4-BE49-F238E27FC236}">
-                <a16:creationId xmlns:a16="http://schemas.microsoft.com/office/drawing/2014/main" id="{A6394896-933F-20E8-A757-C6D55AB0B072}"/>
+                <a16:creationId xmlns:a16="http://schemas.microsoft.com/office/drawing/2014/main" id="{77236222-6871-50F2-FF95-08212C92A5D8}"/>
               </a:ext>
             </a:extLst>
           </p:cNvPr>
@@ -4251,7 +4254,7 @@
           <p:cNvPr id="67" name="pattern">
             <a:extLst>
               <a:ext uri="{FF2B5EF4-FFF2-40B4-BE49-F238E27FC236}">
-                <a16:creationId xmlns:a16="http://schemas.microsoft.com/office/drawing/2014/main" id="{B17926E3-048F-6B50-E8F5-159940C9BFDF}"/>
+                <a16:creationId xmlns:a16="http://schemas.microsoft.com/office/drawing/2014/main" id="{DC7CA373-F69F-A44A-3BF0-51E6E17A0BC8}"/>
               </a:ext>
             </a:extLst>
           </p:cNvPr>
@@ -4307,7 +4310,7 @@
           <p:cNvPr id="68" name="pattern">
             <a:extLst>
               <a:ext uri="{FF2B5EF4-FFF2-40B4-BE49-F238E27FC236}">
-                <a16:creationId xmlns:a16="http://schemas.microsoft.com/office/drawing/2014/main" id="{7716C7EB-D722-574A-417E-3E3BF8331021}"/>
+                <a16:creationId xmlns:a16="http://schemas.microsoft.com/office/drawing/2014/main" id="{70CCEB2F-7751-BAF0-7291-6C787663D2C0}"/>
               </a:ext>
             </a:extLst>
           </p:cNvPr>
@@ -4363,7 +4366,7 @@
           <p:cNvPr id="69" name="pattern">
             <a:extLst>
               <a:ext uri="{FF2B5EF4-FFF2-40B4-BE49-F238E27FC236}">
-                <a16:creationId xmlns:a16="http://schemas.microsoft.com/office/drawing/2014/main" id="{7CB4134F-24C7-1ECE-B5B4-A404293FEF30}"/>
+                <a16:creationId xmlns:a16="http://schemas.microsoft.com/office/drawing/2014/main" id="{F692E088-55CF-71B7-42E9-8588A5A55878}"/>
               </a:ext>
             </a:extLst>
           </p:cNvPr>
@@ -4419,7 +4422,7 @@
           <p:cNvPr id="70" name="pattern">
             <a:extLst>
               <a:ext uri="{FF2B5EF4-FFF2-40B4-BE49-F238E27FC236}">
-                <a16:creationId xmlns:a16="http://schemas.microsoft.com/office/drawing/2014/main" id="{7594A24C-F31B-CB02-3153-26DA7FC25828}"/>
+                <a16:creationId xmlns:a16="http://schemas.microsoft.com/office/drawing/2014/main" id="{A02416BF-1DAF-B3FF-891D-66A0ACA215B1}"/>
               </a:ext>
             </a:extLst>
           </p:cNvPr>
@@ -4475,7 +4478,7 @@
           <p:cNvPr id="71" name="pattern">
             <a:extLst>
               <a:ext uri="{FF2B5EF4-FFF2-40B4-BE49-F238E27FC236}">
-                <a16:creationId xmlns:a16="http://schemas.microsoft.com/office/drawing/2014/main" id="{E09C5CF7-4535-F11A-6EEF-A8D94DA0E6B4}"/>
+                <a16:creationId xmlns:a16="http://schemas.microsoft.com/office/drawing/2014/main" id="{AFEA8C0A-EB35-6BBF-139B-67104DAA4261}"/>
               </a:ext>
             </a:extLst>
           </p:cNvPr>
@@ -4531,7 +4534,7 @@
           <p:cNvPr id="72" name="pattern">
             <a:extLst>
               <a:ext uri="{FF2B5EF4-FFF2-40B4-BE49-F238E27FC236}">
-                <a16:creationId xmlns:a16="http://schemas.microsoft.com/office/drawing/2014/main" id="{B57A1A42-9335-7B94-9B67-628011AC9298}"/>
+                <a16:creationId xmlns:a16="http://schemas.microsoft.com/office/drawing/2014/main" id="{D3450C68-4D81-5EE5-EBD1-659FF6763127}"/>
               </a:ext>
             </a:extLst>
           </p:cNvPr>
@@ -4587,7 +4590,7 @@
           <p:cNvPr id="73" name="pattern">
             <a:extLst>
               <a:ext uri="{FF2B5EF4-FFF2-40B4-BE49-F238E27FC236}">
-                <a16:creationId xmlns:a16="http://schemas.microsoft.com/office/drawing/2014/main" id="{D0455DF5-75CC-56A3-DF71-EB00B91907C9}"/>
+                <a16:creationId xmlns:a16="http://schemas.microsoft.com/office/drawing/2014/main" id="{F2430711-E219-D02F-C7A1-7A844B127FE4}"/>
               </a:ext>
             </a:extLst>
           </p:cNvPr>
@@ -4643,7 +4646,7 @@
           <p:cNvPr id="74" name="pattern">
             <a:extLst>
               <a:ext uri="{FF2B5EF4-FFF2-40B4-BE49-F238E27FC236}">
-                <a16:creationId xmlns:a16="http://schemas.microsoft.com/office/drawing/2014/main" id="{1728EE4B-8861-148C-792D-A80C8857267A}"/>
+                <a16:creationId xmlns:a16="http://schemas.microsoft.com/office/drawing/2014/main" id="{B8668B49-AAA8-80E6-C57C-203C81BCC689}"/>
               </a:ext>
             </a:extLst>
           </p:cNvPr>
@@ -4699,7 +4702,7 @@
           <p:cNvPr id="75" name="pattern">
             <a:extLst>
               <a:ext uri="{FF2B5EF4-FFF2-40B4-BE49-F238E27FC236}">
-                <a16:creationId xmlns:a16="http://schemas.microsoft.com/office/drawing/2014/main" id="{5B19B26A-FE20-CBB2-B291-B46667CBBC77}"/>
+                <a16:creationId xmlns:a16="http://schemas.microsoft.com/office/drawing/2014/main" id="{AB6B5871-3813-A59F-9287-8AD490B7B29D}"/>
               </a:ext>
             </a:extLst>
           </p:cNvPr>
@@ -4755,7 +4758,7 @@
           <p:cNvPr id="76" name="pattern">
             <a:extLst>
               <a:ext uri="{FF2B5EF4-FFF2-40B4-BE49-F238E27FC236}">
-                <a16:creationId xmlns:a16="http://schemas.microsoft.com/office/drawing/2014/main" id="{68B785E6-73F2-7A01-2969-865D9814AB73}"/>
+                <a16:creationId xmlns:a16="http://schemas.microsoft.com/office/drawing/2014/main" id="{573FE78C-4FE4-6788-408E-D9CDA09AB892}"/>
               </a:ext>
             </a:extLst>
           </p:cNvPr>
@@ -4811,7 +4814,7 @@
           <p:cNvPr id="77" name="pattern">
             <a:extLst>
               <a:ext uri="{FF2B5EF4-FFF2-40B4-BE49-F238E27FC236}">
-                <a16:creationId xmlns:a16="http://schemas.microsoft.com/office/drawing/2014/main" id="{B2C5932B-5E7D-CEC2-3C51-8AA577989895}"/>
+                <a16:creationId xmlns:a16="http://schemas.microsoft.com/office/drawing/2014/main" id="{EF36EA49-BFB9-72A5-58CC-8B9B4F90A33D}"/>
               </a:ext>
             </a:extLst>
           </p:cNvPr>
@@ -4867,7 +4870,7 @@
           <p:cNvPr id="78" name="pattern">
             <a:extLst>
               <a:ext uri="{FF2B5EF4-FFF2-40B4-BE49-F238E27FC236}">
-                <a16:creationId xmlns:a16="http://schemas.microsoft.com/office/drawing/2014/main" id="{61F1EF8E-D19F-7D13-72BF-04CF95F06FD3}"/>
+                <a16:creationId xmlns:a16="http://schemas.microsoft.com/office/drawing/2014/main" id="{6B4E0B00-D57A-893F-F36E-BC2933B18F8F}"/>
               </a:ext>
             </a:extLst>
           </p:cNvPr>
@@ -4923,7 +4926,7 @@
           <p:cNvPr id="79" name="pattern">
             <a:extLst>
               <a:ext uri="{FF2B5EF4-FFF2-40B4-BE49-F238E27FC236}">
-                <a16:creationId xmlns:a16="http://schemas.microsoft.com/office/drawing/2014/main" id="{1E215634-37A0-6E8A-CE75-CC3A2B558539}"/>
+                <a16:creationId xmlns:a16="http://schemas.microsoft.com/office/drawing/2014/main" id="{82A9753A-D93C-BA9D-800C-E96AD81A8FC4}"/>
               </a:ext>
             </a:extLst>
           </p:cNvPr>
@@ -4979,7 +4982,7 @@
           <p:cNvPr id="80" name="pattern">
             <a:extLst>
               <a:ext uri="{FF2B5EF4-FFF2-40B4-BE49-F238E27FC236}">
-                <a16:creationId xmlns:a16="http://schemas.microsoft.com/office/drawing/2014/main" id="{A9A8E704-D50B-E5EE-89E1-594D7162F4F7}"/>
+                <a16:creationId xmlns:a16="http://schemas.microsoft.com/office/drawing/2014/main" id="{F9D3063D-967A-12BB-2CD1-75BD9BEDB636}"/>
               </a:ext>
             </a:extLst>
           </p:cNvPr>
@@ -5035,7 +5038,7 @@
           <p:cNvPr id="81" name="pattern">
             <a:extLst>
               <a:ext uri="{FF2B5EF4-FFF2-40B4-BE49-F238E27FC236}">
-                <a16:creationId xmlns:a16="http://schemas.microsoft.com/office/drawing/2014/main" id="{038ED6F3-3BD7-0574-6E03-CEECA015C31F}"/>
+                <a16:creationId xmlns:a16="http://schemas.microsoft.com/office/drawing/2014/main" id="{7B891992-B829-2E83-84A9-683D67517B6F}"/>
               </a:ext>
             </a:extLst>
           </p:cNvPr>
@@ -5091,7 +5094,7 @@
           <p:cNvPr id="82" name="pattern">
             <a:extLst>
               <a:ext uri="{FF2B5EF4-FFF2-40B4-BE49-F238E27FC236}">
-                <a16:creationId xmlns:a16="http://schemas.microsoft.com/office/drawing/2014/main" id="{530F4A5B-48E8-6FCB-C2A2-0C935E8FFF5F}"/>
+                <a16:creationId xmlns:a16="http://schemas.microsoft.com/office/drawing/2014/main" id="{32DADF81-C29D-75CE-8EA1-DE26CBCE7BB1}"/>
               </a:ext>
             </a:extLst>
           </p:cNvPr>
@@ -5147,7 +5150,7 @@
           <p:cNvPr id="83" name="pattern">
             <a:extLst>
               <a:ext uri="{FF2B5EF4-FFF2-40B4-BE49-F238E27FC236}">
-                <a16:creationId xmlns:a16="http://schemas.microsoft.com/office/drawing/2014/main" id="{52E5AED6-589F-69C4-55CA-89536BC8670F}"/>
+                <a16:creationId xmlns:a16="http://schemas.microsoft.com/office/drawing/2014/main" id="{E97CCE42-81A5-16A3-8DC6-D27D9FAE0EED}"/>
               </a:ext>
             </a:extLst>
           </p:cNvPr>
@@ -5203,7 +5206,7 @@
           <p:cNvPr id="84" name="pattern">
             <a:extLst>
               <a:ext uri="{FF2B5EF4-FFF2-40B4-BE49-F238E27FC236}">
-                <a16:creationId xmlns:a16="http://schemas.microsoft.com/office/drawing/2014/main" id="{D51BBE2A-1522-3187-7DC7-E9FE49F1B248}"/>
+                <a16:creationId xmlns:a16="http://schemas.microsoft.com/office/drawing/2014/main" id="{7432D5D6-F130-87F7-3A39-5F3AF7B8E4FB}"/>
               </a:ext>
             </a:extLst>
           </p:cNvPr>
@@ -5259,7 +5262,7 @@
           <p:cNvPr id="85" name="pattern">
             <a:extLst>
               <a:ext uri="{FF2B5EF4-FFF2-40B4-BE49-F238E27FC236}">
-                <a16:creationId xmlns:a16="http://schemas.microsoft.com/office/drawing/2014/main" id="{8B343D5A-781C-BAA9-0EF9-B541D20E4658}"/>
+                <a16:creationId xmlns:a16="http://schemas.microsoft.com/office/drawing/2014/main" id="{414F9E6C-5857-1344-EA14-9F246A70D8CA}"/>
               </a:ext>
             </a:extLst>
           </p:cNvPr>
@@ -5315,7 +5318,7 @@
           <p:cNvPr id="86" name="pattern">
             <a:extLst>
               <a:ext uri="{FF2B5EF4-FFF2-40B4-BE49-F238E27FC236}">
-                <a16:creationId xmlns:a16="http://schemas.microsoft.com/office/drawing/2014/main" id="{75FA0B61-E40A-F75F-FC57-DD5499A6A296}"/>
+                <a16:creationId xmlns:a16="http://schemas.microsoft.com/office/drawing/2014/main" id="{B9A718F5-4F40-3EB0-A254-86F9B8A2CCCC}"/>
               </a:ext>
             </a:extLst>
           </p:cNvPr>
@@ -5371,7 +5374,7 @@
           <p:cNvPr id="87" name="pattern">
             <a:extLst>
               <a:ext uri="{FF2B5EF4-FFF2-40B4-BE49-F238E27FC236}">
-                <a16:creationId xmlns:a16="http://schemas.microsoft.com/office/drawing/2014/main" id="{1B6BFC54-4D5A-E550-5CF4-C95BE519BF96}"/>
+                <a16:creationId xmlns:a16="http://schemas.microsoft.com/office/drawing/2014/main" id="{D35B3C21-D9CE-EB69-CDB1-4150A56D009E}"/>
               </a:ext>
             </a:extLst>
           </p:cNvPr>
@@ -5427,7 +5430,7 @@
           <p:cNvPr id="88" name="pattern">
             <a:extLst>
               <a:ext uri="{FF2B5EF4-FFF2-40B4-BE49-F238E27FC236}">
-                <a16:creationId xmlns:a16="http://schemas.microsoft.com/office/drawing/2014/main" id="{12FB7757-40EE-3F8A-E75C-F5C2AA5A2988}"/>
+                <a16:creationId xmlns:a16="http://schemas.microsoft.com/office/drawing/2014/main" id="{48AD97B0-511D-891B-0BA5-5F1EE88A53ED}"/>
               </a:ext>
             </a:extLst>
           </p:cNvPr>
@@ -5483,7 +5486,7 @@
           <p:cNvPr id="89" name="pattern">
             <a:extLst>
               <a:ext uri="{FF2B5EF4-FFF2-40B4-BE49-F238E27FC236}">
-                <a16:creationId xmlns:a16="http://schemas.microsoft.com/office/drawing/2014/main" id="{4CA87FD4-14F4-958C-8C82-DFC7BD2C18A1}"/>
+                <a16:creationId xmlns:a16="http://schemas.microsoft.com/office/drawing/2014/main" id="{C9C4FEC0-6E1B-0736-F248-778B9D3F85E1}"/>
               </a:ext>
             </a:extLst>
           </p:cNvPr>
@@ -5539,7 +5542,7 @@
           <p:cNvPr id="90" name="pattern">
             <a:extLst>
               <a:ext uri="{FF2B5EF4-FFF2-40B4-BE49-F238E27FC236}">
-                <a16:creationId xmlns:a16="http://schemas.microsoft.com/office/drawing/2014/main" id="{FA853841-C7EA-A167-171C-61CB7DE0B397}"/>
+                <a16:creationId xmlns:a16="http://schemas.microsoft.com/office/drawing/2014/main" id="{B49167BC-9611-DB07-92AC-4E93C41C0FE3}"/>
               </a:ext>
             </a:extLst>
           </p:cNvPr>
@@ -5595,7 +5598,7 @@
           <p:cNvPr id="91" name="pattern">
             <a:extLst>
               <a:ext uri="{FF2B5EF4-FFF2-40B4-BE49-F238E27FC236}">
-                <a16:creationId xmlns:a16="http://schemas.microsoft.com/office/drawing/2014/main" id="{0A02AEBB-F77F-5508-A6A2-0B82E8D2C6C0}"/>
+                <a16:creationId xmlns:a16="http://schemas.microsoft.com/office/drawing/2014/main" id="{BF8FFE4E-A197-2EA8-721D-E02CCBBBF070}"/>
               </a:ext>
             </a:extLst>
           </p:cNvPr>
@@ -5651,7 +5654,7 @@
           <p:cNvPr id="92" name="pattern">
             <a:extLst>
               <a:ext uri="{FF2B5EF4-FFF2-40B4-BE49-F238E27FC236}">
-                <a16:creationId xmlns:a16="http://schemas.microsoft.com/office/drawing/2014/main" id="{857ED371-BC21-8059-FC43-42F45CCED697}"/>
+                <a16:creationId xmlns:a16="http://schemas.microsoft.com/office/drawing/2014/main" id="{5978D5D3-4413-1391-4143-3972293D8405}"/>
               </a:ext>
             </a:extLst>
           </p:cNvPr>
@@ -5707,7 +5710,7 @@
           <p:cNvPr id="93" name="pattern">
             <a:extLst>
               <a:ext uri="{FF2B5EF4-FFF2-40B4-BE49-F238E27FC236}">
-                <a16:creationId xmlns:a16="http://schemas.microsoft.com/office/drawing/2014/main" id="{4A023D98-205F-01F1-F9B4-E2CFB35A6026}"/>
+                <a16:creationId xmlns:a16="http://schemas.microsoft.com/office/drawing/2014/main" id="{078B6037-5750-C76F-A366-1CFFFE914218}"/>
               </a:ext>
             </a:extLst>
           </p:cNvPr>
@@ -5763,7 +5766,7 @@
           <p:cNvPr id="94" name="pattern">
             <a:extLst>
               <a:ext uri="{FF2B5EF4-FFF2-40B4-BE49-F238E27FC236}">
-                <a16:creationId xmlns:a16="http://schemas.microsoft.com/office/drawing/2014/main" id="{6EBF5745-A0DC-C814-ABAD-29934CBE5BA1}"/>
+                <a16:creationId xmlns:a16="http://schemas.microsoft.com/office/drawing/2014/main" id="{255EE6AA-75AA-3331-5B02-930FEB450439}"/>
               </a:ext>
             </a:extLst>
           </p:cNvPr>
@@ -5819,7 +5822,7 @@
           <p:cNvPr id="95" name="pattern">
             <a:extLst>
               <a:ext uri="{FF2B5EF4-FFF2-40B4-BE49-F238E27FC236}">
-                <a16:creationId xmlns:a16="http://schemas.microsoft.com/office/drawing/2014/main" id="{D6C7AD6A-D429-B18A-45ED-35777895041A}"/>
+                <a16:creationId xmlns:a16="http://schemas.microsoft.com/office/drawing/2014/main" id="{255DBD65-F601-4401-BE4C-6D475361A206}"/>
               </a:ext>
             </a:extLst>
           </p:cNvPr>
@@ -5875,7 +5878,7 @@
           <p:cNvPr id="96" name="pattern">
             <a:extLst>
               <a:ext uri="{FF2B5EF4-FFF2-40B4-BE49-F238E27FC236}">
-                <a16:creationId xmlns:a16="http://schemas.microsoft.com/office/drawing/2014/main" id="{D950BF47-D14E-DF40-5FBD-65D31E14A084}"/>
+                <a16:creationId xmlns:a16="http://schemas.microsoft.com/office/drawing/2014/main" id="{3B1C3199-6A08-44D5-4296-3DC8A15C480E}"/>
               </a:ext>
             </a:extLst>
           </p:cNvPr>
@@ -5931,7 +5934,7 @@
           <p:cNvPr id="97" name="pattern">
             <a:extLst>
               <a:ext uri="{FF2B5EF4-FFF2-40B4-BE49-F238E27FC236}">
-                <a16:creationId xmlns:a16="http://schemas.microsoft.com/office/drawing/2014/main" id="{2247C44D-F356-92D1-695B-7864D34EEA46}"/>
+                <a16:creationId xmlns:a16="http://schemas.microsoft.com/office/drawing/2014/main" id="{307BD11B-8A2D-7673-EA73-AEA1828EF4B5}"/>
               </a:ext>
             </a:extLst>
           </p:cNvPr>
@@ -5987,7 +5990,7 @@
           <p:cNvPr id="98" name="pattern">
             <a:extLst>
               <a:ext uri="{FF2B5EF4-FFF2-40B4-BE49-F238E27FC236}">
-                <a16:creationId xmlns:a16="http://schemas.microsoft.com/office/drawing/2014/main" id="{CB1013F1-D8DC-4BBD-0DBD-BCD86EB65B0C}"/>
+                <a16:creationId xmlns:a16="http://schemas.microsoft.com/office/drawing/2014/main" id="{CB16566D-5CF9-9D2E-E5DA-B658879D18E4}"/>
               </a:ext>
             </a:extLst>
           </p:cNvPr>
@@ -6043,7 +6046,7 @@
           <p:cNvPr id="99" name="pattern">
             <a:extLst>
               <a:ext uri="{FF2B5EF4-FFF2-40B4-BE49-F238E27FC236}">
-                <a16:creationId xmlns:a16="http://schemas.microsoft.com/office/drawing/2014/main" id="{FC6A9D96-6E06-B5C9-E7C9-3C353824FECC}"/>
+                <a16:creationId xmlns:a16="http://schemas.microsoft.com/office/drawing/2014/main" id="{21A5A9F7-F99B-E3DF-6E15-B842A1C3B46F}"/>
               </a:ext>
             </a:extLst>
           </p:cNvPr>
@@ -6099,7 +6102,7 @@
           <p:cNvPr id="100" name="pattern">
             <a:extLst>
               <a:ext uri="{FF2B5EF4-FFF2-40B4-BE49-F238E27FC236}">
-                <a16:creationId xmlns:a16="http://schemas.microsoft.com/office/drawing/2014/main" id="{DDCE6FD4-2475-C5E8-CFBB-0E6841927DCC}"/>
+                <a16:creationId xmlns:a16="http://schemas.microsoft.com/office/drawing/2014/main" id="{D1F9BECA-A659-4F48-8AA3-6E358425D8D3}"/>
               </a:ext>
             </a:extLst>
           </p:cNvPr>
@@ -6155,7 +6158,7 @@
           <p:cNvPr id="101" name="pattern">
             <a:extLst>
               <a:ext uri="{FF2B5EF4-FFF2-40B4-BE49-F238E27FC236}">
-                <a16:creationId xmlns:a16="http://schemas.microsoft.com/office/drawing/2014/main" id="{3BF927BB-BBCC-5CEF-0E49-E8DFD480FE9E}"/>
+                <a16:creationId xmlns:a16="http://schemas.microsoft.com/office/drawing/2014/main" id="{3888C74F-FCDA-9A65-3406-EE34BBE36606}"/>
               </a:ext>
             </a:extLst>
           </p:cNvPr>
@@ -6211,7 +6214,7 @@
           <p:cNvPr id="102" name="pattern">
             <a:extLst>
               <a:ext uri="{FF2B5EF4-FFF2-40B4-BE49-F238E27FC236}">
-                <a16:creationId xmlns:a16="http://schemas.microsoft.com/office/drawing/2014/main" id="{66588D37-0C13-7593-B7F5-E8FD18CCE7F9}"/>
+                <a16:creationId xmlns:a16="http://schemas.microsoft.com/office/drawing/2014/main" id="{A90D00F5-6709-9EC4-B0EA-2E6662B3D4B5}"/>
               </a:ext>
             </a:extLst>
           </p:cNvPr>
@@ -6267,7 +6270,7 @@
           <p:cNvPr id="103" name="pattern">
             <a:extLst>
               <a:ext uri="{FF2B5EF4-FFF2-40B4-BE49-F238E27FC236}">
-                <a16:creationId xmlns:a16="http://schemas.microsoft.com/office/drawing/2014/main" id="{49B186C9-7D7D-C759-368A-E55307C9DF54}"/>
+                <a16:creationId xmlns:a16="http://schemas.microsoft.com/office/drawing/2014/main" id="{7FEABA6C-FDC1-9729-B085-9D8D88C2E08B}"/>
               </a:ext>
             </a:extLst>
           </p:cNvPr>
@@ -6323,7 +6326,7 @@
           <p:cNvPr id="104" name="pattern">
             <a:extLst>
               <a:ext uri="{FF2B5EF4-FFF2-40B4-BE49-F238E27FC236}">
-                <a16:creationId xmlns:a16="http://schemas.microsoft.com/office/drawing/2014/main" id="{812B62BC-7886-9A11-5789-4A133FD87894}"/>
+                <a16:creationId xmlns:a16="http://schemas.microsoft.com/office/drawing/2014/main" id="{1CB82D4E-C103-CD80-70FB-F9577955BEBC}"/>
               </a:ext>
             </a:extLst>
           </p:cNvPr>
@@ -6379,7 +6382,7 @@
           <p:cNvPr id="105" name="pattern">
             <a:extLst>
               <a:ext uri="{FF2B5EF4-FFF2-40B4-BE49-F238E27FC236}">
-                <a16:creationId xmlns:a16="http://schemas.microsoft.com/office/drawing/2014/main" id="{50A21FFF-1260-2615-6544-C6237A65FE57}"/>
+                <a16:creationId xmlns:a16="http://schemas.microsoft.com/office/drawing/2014/main" id="{DF9DCBFE-6A63-0199-5D7F-7BECFDEB8FF4}"/>
               </a:ext>
             </a:extLst>
           </p:cNvPr>
@@ -6435,7 +6438,7 @@
           <p:cNvPr id="106" name="pattern">
             <a:extLst>
               <a:ext uri="{FF2B5EF4-FFF2-40B4-BE49-F238E27FC236}">
-                <a16:creationId xmlns:a16="http://schemas.microsoft.com/office/drawing/2014/main" id="{C6F41388-70DE-CCCC-F552-C83DE087C3EC}"/>
+                <a16:creationId xmlns:a16="http://schemas.microsoft.com/office/drawing/2014/main" id="{697B8981-A7E4-B8A9-0BD5-D99BB059092E}"/>
               </a:ext>
             </a:extLst>
           </p:cNvPr>
@@ -6491,7 +6494,7 @@
           <p:cNvPr id="107" name="pattern">
             <a:extLst>
               <a:ext uri="{FF2B5EF4-FFF2-40B4-BE49-F238E27FC236}">
-                <a16:creationId xmlns:a16="http://schemas.microsoft.com/office/drawing/2014/main" id="{19B54BF4-8FCA-F269-D234-A6BE3D532051}"/>
+                <a16:creationId xmlns:a16="http://schemas.microsoft.com/office/drawing/2014/main" id="{81D35747-02E3-7007-5053-8CA72747B318}"/>
               </a:ext>
             </a:extLst>
           </p:cNvPr>
@@ -6547,7 +6550,7 @@
           <p:cNvPr id="108" name="pattern">
             <a:extLst>
               <a:ext uri="{FF2B5EF4-FFF2-40B4-BE49-F238E27FC236}">
-                <a16:creationId xmlns:a16="http://schemas.microsoft.com/office/drawing/2014/main" id="{4B1D3F61-0F3A-E7EB-9BAB-A4A26281ABDB}"/>
+                <a16:creationId xmlns:a16="http://schemas.microsoft.com/office/drawing/2014/main" id="{1C6491E8-C85E-8194-E2E3-17E00D30AA50}"/>
               </a:ext>
             </a:extLst>
           </p:cNvPr>
@@ -6603,7 +6606,7 @@
           <p:cNvPr id="109" name="pattern">
             <a:extLst>
               <a:ext uri="{FF2B5EF4-FFF2-40B4-BE49-F238E27FC236}">
-                <a16:creationId xmlns:a16="http://schemas.microsoft.com/office/drawing/2014/main" id="{2007F4AD-A9E5-A0B9-8725-F29B93939DA5}"/>
+                <a16:creationId xmlns:a16="http://schemas.microsoft.com/office/drawing/2014/main" id="{5C86697E-99B0-1CA4-B944-81FA23DE6D7F}"/>
               </a:ext>
             </a:extLst>
           </p:cNvPr>
@@ -6659,7 +6662,7 @@
           <p:cNvPr id="110" name="pattern">
             <a:extLst>
               <a:ext uri="{FF2B5EF4-FFF2-40B4-BE49-F238E27FC236}">
-                <a16:creationId xmlns:a16="http://schemas.microsoft.com/office/drawing/2014/main" id="{5CEFE3F8-0D5C-6AA9-9CA8-9B91E13F8EE9}"/>
+                <a16:creationId xmlns:a16="http://schemas.microsoft.com/office/drawing/2014/main" id="{C57E9FD4-B4B8-A9B3-853D-F1581A6D894D}"/>
               </a:ext>
             </a:extLst>
           </p:cNvPr>
@@ -6715,7 +6718,7 @@
           <p:cNvPr id="111" name="pattern">
             <a:extLst>
               <a:ext uri="{FF2B5EF4-FFF2-40B4-BE49-F238E27FC236}">
-                <a16:creationId xmlns:a16="http://schemas.microsoft.com/office/drawing/2014/main" id="{55CBA628-B58D-B9E5-8C2E-6B7BA4D5FD58}"/>
+                <a16:creationId xmlns:a16="http://schemas.microsoft.com/office/drawing/2014/main" id="{7B183D9E-3A9B-43E9-F5E2-88CA0889AA35}"/>
               </a:ext>
             </a:extLst>
           </p:cNvPr>
@@ -6771,7 +6774,7 @@
           <p:cNvPr id="112" name="pattern">
             <a:extLst>
               <a:ext uri="{FF2B5EF4-FFF2-40B4-BE49-F238E27FC236}">
-                <a16:creationId xmlns:a16="http://schemas.microsoft.com/office/drawing/2014/main" id="{40F8FF98-4385-BF6C-85D9-837CEE514F4B}"/>
+                <a16:creationId xmlns:a16="http://schemas.microsoft.com/office/drawing/2014/main" id="{30DFDD34-C48C-4C35-9FA1-75F39ABD2C7D}"/>
               </a:ext>
             </a:extLst>
           </p:cNvPr>
@@ -6827,7 +6830,7 @@
           <p:cNvPr id="113" name="pattern">
             <a:extLst>
               <a:ext uri="{FF2B5EF4-FFF2-40B4-BE49-F238E27FC236}">
-                <a16:creationId xmlns:a16="http://schemas.microsoft.com/office/drawing/2014/main" id="{57E855FD-6563-A85D-1292-5CD919786E6B}"/>
+                <a16:creationId xmlns:a16="http://schemas.microsoft.com/office/drawing/2014/main" id="{38E78C28-8A60-959F-0D88-B5D20D43026B}"/>
               </a:ext>
             </a:extLst>
           </p:cNvPr>
@@ -6883,7 +6886,7 @@
           <p:cNvPr id="114" name="pattern">
             <a:extLst>
               <a:ext uri="{FF2B5EF4-FFF2-40B4-BE49-F238E27FC236}">
-                <a16:creationId xmlns:a16="http://schemas.microsoft.com/office/drawing/2014/main" id="{80C21E16-6660-B307-8354-2DEBE7C0DFDB}"/>
+                <a16:creationId xmlns:a16="http://schemas.microsoft.com/office/drawing/2014/main" id="{4BCD998C-5959-3DD6-13C6-B21741D8E731}"/>
               </a:ext>
             </a:extLst>
           </p:cNvPr>
@@ -6939,7 +6942,7 @@
           <p:cNvPr id="115" name="pattern">
             <a:extLst>
               <a:ext uri="{FF2B5EF4-FFF2-40B4-BE49-F238E27FC236}">
-                <a16:creationId xmlns:a16="http://schemas.microsoft.com/office/drawing/2014/main" id="{EBB6FE3D-5023-B1BE-D371-2AE45D1708B0}"/>
+                <a16:creationId xmlns:a16="http://schemas.microsoft.com/office/drawing/2014/main" id="{489BE8CD-89F1-9ECA-0231-1D202710F816}"/>
               </a:ext>
             </a:extLst>
           </p:cNvPr>
@@ -6995,7 +6998,7 @@
           <p:cNvPr id="116" name="pattern">
             <a:extLst>
               <a:ext uri="{FF2B5EF4-FFF2-40B4-BE49-F238E27FC236}">
-                <a16:creationId xmlns:a16="http://schemas.microsoft.com/office/drawing/2014/main" id="{348E9D5B-865D-3853-9126-DD89694AA049}"/>
+                <a16:creationId xmlns:a16="http://schemas.microsoft.com/office/drawing/2014/main" id="{9817D2A8-5353-6D48-0593-52D747315BBC}"/>
               </a:ext>
             </a:extLst>
           </p:cNvPr>
@@ -7051,7 +7054,7 @@
           <p:cNvPr id="117" name="pattern">
             <a:extLst>
               <a:ext uri="{FF2B5EF4-FFF2-40B4-BE49-F238E27FC236}">
-                <a16:creationId xmlns:a16="http://schemas.microsoft.com/office/drawing/2014/main" id="{7AFB9538-A7AE-9E35-9FE6-61F43375BC5D}"/>
+                <a16:creationId xmlns:a16="http://schemas.microsoft.com/office/drawing/2014/main" id="{539AE54E-D9E4-2593-5C09-B9C6B4B79232}"/>
               </a:ext>
             </a:extLst>
           </p:cNvPr>
@@ -7107,7 +7110,7 @@
           <p:cNvPr id="118" name="pattern">
             <a:extLst>
               <a:ext uri="{FF2B5EF4-FFF2-40B4-BE49-F238E27FC236}">
-                <a16:creationId xmlns:a16="http://schemas.microsoft.com/office/drawing/2014/main" id="{409149B6-1699-0F5C-3F21-3236F1A020B1}"/>
+                <a16:creationId xmlns:a16="http://schemas.microsoft.com/office/drawing/2014/main" id="{1ACDD3C8-D6A2-329F-FFBB-C14B9C287623}"/>
               </a:ext>
             </a:extLst>
           </p:cNvPr>
@@ -7163,7 +7166,7 @@
           <p:cNvPr id="119" name="pattern">
             <a:extLst>
               <a:ext uri="{FF2B5EF4-FFF2-40B4-BE49-F238E27FC236}">
-                <a16:creationId xmlns:a16="http://schemas.microsoft.com/office/drawing/2014/main" id="{BBB805BD-5ACE-169E-D902-E3631E771D6D}"/>
+                <a16:creationId xmlns:a16="http://schemas.microsoft.com/office/drawing/2014/main" id="{1F6E2881-7E0A-FE2E-9CA0-DD69862DF575}"/>
               </a:ext>
             </a:extLst>
           </p:cNvPr>
@@ -7219,7 +7222,7 @@
           <p:cNvPr id="120" name="pattern">
             <a:extLst>
               <a:ext uri="{FF2B5EF4-FFF2-40B4-BE49-F238E27FC236}">
-                <a16:creationId xmlns:a16="http://schemas.microsoft.com/office/drawing/2014/main" id="{0249D732-E2D9-BE82-C326-33FA4BFDF09A}"/>
+                <a16:creationId xmlns:a16="http://schemas.microsoft.com/office/drawing/2014/main" id="{6F2C62A5-3E9A-EE55-B9C5-37A28B96014D}"/>
               </a:ext>
             </a:extLst>
           </p:cNvPr>
@@ -7275,7 +7278,7 @@
           <p:cNvPr id="121" name="pattern">
             <a:extLst>
               <a:ext uri="{FF2B5EF4-FFF2-40B4-BE49-F238E27FC236}">
-                <a16:creationId xmlns:a16="http://schemas.microsoft.com/office/drawing/2014/main" id="{AC5C6A3A-C3E7-D473-30A2-DA07E6643ED8}"/>
+                <a16:creationId xmlns:a16="http://schemas.microsoft.com/office/drawing/2014/main" id="{A71BE667-B5AA-C8BA-39A9-9D2CB13D053F}"/>
               </a:ext>
             </a:extLst>
           </p:cNvPr>
@@ -7331,7 +7334,7 @@
           <p:cNvPr id="122" name="pattern">
             <a:extLst>
               <a:ext uri="{FF2B5EF4-FFF2-40B4-BE49-F238E27FC236}">
-                <a16:creationId xmlns:a16="http://schemas.microsoft.com/office/drawing/2014/main" id="{B50DE9A5-72CE-6C73-F744-FEE7FAF25B41}"/>
+                <a16:creationId xmlns:a16="http://schemas.microsoft.com/office/drawing/2014/main" id="{41D8E996-222A-0DBE-088F-0BF71A99B8D8}"/>
               </a:ext>
             </a:extLst>
           </p:cNvPr>
@@ -7387,7 +7390,7 @@
           <p:cNvPr id="123" name="pattern">
             <a:extLst>
               <a:ext uri="{FF2B5EF4-FFF2-40B4-BE49-F238E27FC236}">
-                <a16:creationId xmlns:a16="http://schemas.microsoft.com/office/drawing/2014/main" id="{55D3D598-6261-92B5-DBA3-7E958A1400C2}"/>
+                <a16:creationId xmlns:a16="http://schemas.microsoft.com/office/drawing/2014/main" id="{C5E523BC-312A-5400-43F9-7CA425E18710}"/>
               </a:ext>
             </a:extLst>
           </p:cNvPr>
@@ -7443,7 +7446,7 @@
           <p:cNvPr id="124" name="pattern">
             <a:extLst>
               <a:ext uri="{FF2B5EF4-FFF2-40B4-BE49-F238E27FC236}">
-                <a16:creationId xmlns:a16="http://schemas.microsoft.com/office/drawing/2014/main" id="{2812FF9F-CAC4-DF45-4C82-9DA1C1B46A37}"/>
+                <a16:creationId xmlns:a16="http://schemas.microsoft.com/office/drawing/2014/main" id="{BF800DBC-9431-A36A-1EF2-6C9557CE6BFA}"/>
               </a:ext>
             </a:extLst>
           </p:cNvPr>
@@ -7499,7 +7502,7 @@
           <p:cNvPr id="125" name="pattern">
             <a:extLst>
               <a:ext uri="{FF2B5EF4-FFF2-40B4-BE49-F238E27FC236}">
-                <a16:creationId xmlns:a16="http://schemas.microsoft.com/office/drawing/2014/main" id="{BA78407F-BECD-17CC-58EB-DCAC1ABCDB34}"/>
+                <a16:creationId xmlns:a16="http://schemas.microsoft.com/office/drawing/2014/main" id="{552FE99E-61AA-1FE8-B119-4E35B5FDB0C0}"/>
               </a:ext>
             </a:extLst>
           </p:cNvPr>
@@ -7555,7 +7558,7 @@
           <p:cNvPr id="126" name="pattern">
             <a:extLst>
               <a:ext uri="{FF2B5EF4-FFF2-40B4-BE49-F238E27FC236}">
-                <a16:creationId xmlns:a16="http://schemas.microsoft.com/office/drawing/2014/main" id="{2F42A7D9-E27C-CC6A-0A0B-7D1DEE003E7A}"/>
+                <a16:creationId xmlns:a16="http://schemas.microsoft.com/office/drawing/2014/main" id="{9423BA8A-B78F-150F-1436-02740B185C8C}"/>
               </a:ext>
             </a:extLst>
           </p:cNvPr>
@@ -7611,7 +7614,7 @@
           <p:cNvPr id="127" name="pattern">
             <a:extLst>
               <a:ext uri="{FF2B5EF4-FFF2-40B4-BE49-F238E27FC236}">
-                <a16:creationId xmlns:a16="http://schemas.microsoft.com/office/drawing/2014/main" id="{476FD1FD-EE2C-971C-BC0B-360329BE2544}"/>
+                <a16:creationId xmlns:a16="http://schemas.microsoft.com/office/drawing/2014/main" id="{BDBA4CB5-C23B-02C7-A449-27E7B27654C2}"/>
               </a:ext>
             </a:extLst>
           </p:cNvPr>
@@ -7667,7 +7670,7 @@
           <p:cNvPr id="128" name="pattern">
             <a:extLst>
               <a:ext uri="{FF2B5EF4-FFF2-40B4-BE49-F238E27FC236}">
-                <a16:creationId xmlns:a16="http://schemas.microsoft.com/office/drawing/2014/main" id="{52D2155C-53F3-A2E0-572B-9749A1AAB593}"/>
+                <a16:creationId xmlns:a16="http://schemas.microsoft.com/office/drawing/2014/main" id="{BFD347F5-5475-A328-F078-6DA3356A0431}"/>
               </a:ext>
             </a:extLst>
           </p:cNvPr>
@@ -7723,7 +7726,7 @@
           <p:cNvPr id="129" name="pattern">
             <a:extLst>
               <a:ext uri="{FF2B5EF4-FFF2-40B4-BE49-F238E27FC236}">
-                <a16:creationId xmlns:a16="http://schemas.microsoft.com/office/drawing/2014/main" id="{E734070C-A54D-9A4B-F4FA-DAB67E67147B}"/>
+                <a16:creationId xmlns:a16="http://schemas.microsoft.com/office/drawing/2014/main" id="{2E200BA8-4841-3FDC-D495-88A7C0E5CC70}"/>
               </a:ext>
             </a:extLst>
           </p:cNvPr>
@@ -7779,7 +7782,7 @@
           <p:cNvPr id="130" name="pattern">
             <a:extLst>
               <a:ext uri="{FF2B5EF4-FFF2-40B4-BE49-F238E27FC236}">
-                <a16:creationId xmlns:a16="http://schemas.microsoft.com/office/drawing/2014/main" id="{2A827C0F-E0B7-1861-946D-9F46BF489969}"/>
+                <a16:creationId xmlns:a16="http://schemas.microsoft.com/office/drawing/2014/main" id="{2A95E72D-CF26-7DB8-564D-FD2963622991}"/>
               </a:ext>
             </a:extLst>
           </p:cNvPr>
@@ -7835,7 +7838,7 @@
           <p:cNvPr id="131" name="pattern">
             <a:extLst>
               <a:ext uri="{FF2B5EF4-FFF2-40B4-BE49-F238E27FC236}">
-                <a16:creationId xmlns:a16="http://schemas.microsoft.com/office/drawing/2014/main" id="{B83A3A56-79CA-58EA-2A91-0070B1504ED4}"/>
+                <a16:creationId xmlns:a16="http://schemas.microsoft.com/office/drawing/2014/main" id="{30AC7FB6-C487-95D3-7419-234E28EE5A2E}"/>
               </a:ext>
             </a:extLst>
           </p:cNvPr>
@@ -7891,7 +7894,7 @@
           <p:cNvPr id="132" name="pattern">
             <a:extLst>
               <a:ext uri="{FF2B5EF4-FFF2-40B4-BE49-F238E27FC236}">
-                <a16:creationId xmlns:a16="http://schemas.microsoft.com/office/drawing/2014/main" id="{9BFC0019-EC13-EC38-5F6C-C0A47D239FB6}"/>
+                <a16:creationId xmlns:a16="http://schemas.microsoft.com/office/drawing/2014/main" id="{5D25715B-A7DF-F1A0-CA3B-C458FBD05F82}"/>
               </a:ext>
             </a:extLst>
           </p:cNvPr>
@@ -7947,7 +7950,7 @@
           <p:cNvPr id="133" name="pattern">
             <a:extLst>
               <a:ext uri="{FF2B5EF4-FFF2-40B4-BE49-F238E27FC236}">
-                <a16:creationId xmlns:a16="http://schemas.microsoft.com/office/drawing/2014/main" id="{556CFB9C-AA26-4F23-7183-95E18EAE6C7E}"/>
+                <a16:creationId xmlns:a16="http://schemas.microsoft.com/office/drawing/2014/main" id="{B546AF62-EA12-7D0A-99E6-AB81E1340929}"/>
               </a:ext>
             </a:extLst>
           </p:cNvPr>
@@ -8003,7 +8006,7 @@
           <p:cNvPr id="134" name="pattern">
             <a:extLst>
               <a:ext uri="{FF2B5EF4-FFF2-40B4-BE49-F238E27FC236}">
-                <a16:creationId xmlns:a16="http://schemas.microsoft.com/office/drawing/2014/main" id="{F3E4EDDD-24D4-08B7-D0D6-975DF8B10F22}"/>
+                <a16:creationId xmlns:a16="http://schemas.microsoft.com/office/drawing/2014/main" id="{CB0B85D9-9E93-5F09-3208-F429550C33EA}"/>
               </a:ext>
             </a:extLst>
           </p:cNvPr>
@@ -8059,7 +8062,7 @@
           <p:cNvPr id="135" name="pattern">
             <a:extLst>
               <a:ext uri="{FF2B5EF4-FFF2-40B4-BE49-F238E27FC236}">
-                <a16:creationId xmlns:a16="http://schemas.microsoft.com/office/drawing/2014/main" id="{60CACDC4-5F49-01B4-22C9-B239CC2E513A}"/>
+                <a16:creationId xmlns:a16="http://schemas.microsoft.com/office/drawing/2014/main" id="{4A7AB4F5-CA3F-2830-82D3-4EDA33EFD070}"/>
               </a:ext>
             </a:extLst>
           </p:cNvPr>
@@ -8113,7 +8116,7 @@
     </p:spTree>
     <p:extLst>
       <p:ext uri="{BB962C8B-B14F-4D97-AF65-F5344CB8AC3E}">
-        <p14:creationId xmlns:p14="http://schemas.microsoft.com/office/powerpoint/2010/main" val="3372789891"/>
+        <p14:creationId xmlns:p14="http://schemas.microsoft.com/office/powerpoint/2010/main" val="3471374111"/>
       </p:ext>
     </p:extLst>
   </p:cSld>
@@ -8182,9 +8185,9 @@
           <a:bodyPr/>
           <a:lstStyle/>
           <a:p>
-            <a:fld id="{C108DDE1-F741-4F4F-A7D2-FBD0359B97CD}" type="datetimeFigureOut">
+            <a:fld id="{374EEE4F-B349-4B31-9811-90D259E0D621}" type="datetimeFigureOut">
               <a:rPr lang="en-US" smtClean="0"/>
-              <a:t>10/3/2026</a:t>
+              <a:t>10/4/2026</a:t>
             </a:fld>
             <a:endParaRPr lang="en-US"/>
           </a:p>
@@ -8224,7 +8227,7 @@
           <a:bodyPr/>
           <a:lstStyle/>
           <a:p>
-            <a:fld id="{D07356AB-B086-4690-8078-803F810DAE76}" type="slidenum">
+            <a:fld id="{6622063C-0B57-47EC-9E6E-D170EF750DAF}" type="slidenum">
               <a:rPr lang="en-US" smtClean="0"/>
               <a:t>‹#›</a:t>
             </a:fld>
@@ -8237,7 +8240,7 @@
           <p:cNvPr id="6" name="item_1_title">
             <a:extLst>
               <a:ext uri="{FF2B5EF4-FFF2-40B4-BE49-F238E27FC236}">
-                <a16:creationId xmlns:a16="http://schemas.microsoft.com/office/drawing/2014/main" id="{7B728075-A05A-0908-4DAE-15676F9716B8}"/>
+                <a16:creationId xmlns:a16="http://schemas.microsoft.com/office/drawing/2014/main" id="{E9892156-E56D-CC25-5F5B-1F6186DEEE7B}"/>
               </a:ext>
             </a:extLst>
           </p:cNvPr>
@@ -8267,7 +8270,10 @@
               <a:buNone/>
               <a:defRPr sz="2000" b="1">
                 <a:solidFill>
-                  <a:schemeClr val="accent1"/>
+                  <a:schemeClr val="accent1">
+                    <a:lumMod val="70000"/>
+                    <a:lumOff val="30000"/>
+                  </a:schemeClr>
                 </a:solidFill>
                 <a:latin typeface="+mj-lt"/>
               </a:defRPr>
@@ -8287,7 +8293,7 @@
           <p:cNvPr id="7" name="item_1">
             <a:extLst>
               <a:ext uri="{FF2B5EF4-FFF2-40B4-BE49-F238E27FC236}">
-                <a16:creationId xmlns:a16="http://schemas.microsoft.com/office/drawing/2014/main" id="{5FADFB86-53C6-F716-F8A5-3A4EF5154BD6}"/>
+                <a16:creationId xmlns:a16="http://schemas.microsoft.com/office/drawing/2014/main" id="{2BB83C44-30A5-1AE9-AF1C-56448B5296C5}"/>
               </a:ext>
             </a:extLst>
           </p:cNvPr>
@@ -8335,7 +8341,7 @@
           <p:cNvPr id="8" name="item_2_title">
             <a:extLst>
               <a:ext uri="{FF2B5EF4-FFF2-40B4-BE49-F238E27FC236}">
-                <a16:creationId xmlns:a16="http://schemas.microsoft.com/office/drawing/2014/main" id="{3FCF97EF-3ACF-8BFF-C016-ABE92FDFE3DD}"/>
+                <a16:creationId xmlns:a16="http://schemas.microsoft.com/office/drawing/2014/main" id="{A8B748FC-0A4F-7AF0-8142-8AC191745109}"/>
               </a:ext>
             </a:extLst>
           </p:cNvPr>
@@ -8368,7 +8374,10 @@
               <a:buNone/>
               <a:defRPr sz="2000" b="1">
                 <a:solidFill>
-                  <a:schemeClr val="accent1"/>
+                  <a:schemeClr val="accent1">
+                    <a:lumMod val="70000"/>
+                    <a:lumOff val="30000"/>
+                  </a:schemeClr>
                 </a:solidFill>
                 <a:latin typeface="+mj-lt"/>
               </a:defRPr>
@@ -8388,7 +8397,7 @@
           <p:cNvPr id="9" name="item_2">
             <a:extLst>
               <a:ext uri="{FF2B5EF4-FFF2-40B4-BE49-F238E27FC236}">
-                <a16:creationId xmlns:a16="http://schemas.microsoft.com/office/drawing/2014/main" id="{35EC9EE8-38C1-8A99-C8CD-10C5D75B7BF6}"/>
+                <a16:creationId xmlns:a16="http://schemas.microsoft.com/office/drawing/2014/main" id="{1F03940C-1C57-F04C-E318-280F94469808}"/>
               </a:ext>
             </a:extLst>
           </p:cNvPr>
@@ -8436,7 +8445,7 @@
           <p:cNvPr id="10" name="item_3_title">
             <a:extLst>
               <a:ext uri="{FF2B5EF4-FFF2-40B4-BE49-F238E27FC236}">
-                <a16:creationId xmlns:a16="http://schemas.microsoft.com/office/drawing/2014/main" id="{3C769890-77C3-1EC1-75A6-417B5F874837}"/>
+                <a16:creationId xmlns:a16="http://schemas.microsoft.com/office/drawing/2014/main" id="{4D8A2CF9-D73D-0EE1-E24F-FA954D43FCF3}"/>
               </a:ext>
             </a:extLst>
           </p:cNvPr>
@@ -8469,7 +8478,10 @@
               <a:buNone/>
               <a:defRPr sz="2000" b="1">
                 <a:solidFill>
-                  <a:schemeClr val="accent1"/>
+                  <a:schemeClr val="accent1">
+                    <a:lumMod val="70000"/>
+                    <a:lumOff val="30000"/>
+                  </a:schemeClr>
                 </a:solidFill>
                 <a:latin typeface="+mj-lt"/>
               </a:defRPr>
@@ -8489,7 +8501,7 @@
           <p:cNvPr id="11" name="item_3">
             <a:extLst>
               <a:ext uri="{FF2B5EF4-FFF2-40B4-BE49-F238E27FC236}">
-                <a16:creationId xmlns:a16="http://schemas.microsoft.com/office/drawing/2014/main" id="{C592A8F2-0A54-5347-F4B2-7D865075BEAC}"/>
+                <a16:creationId xmlns:a16="http://schemas.microsoft.com/office/drawing/2014/main" id="{FB39633E-5A6C-9D3A-5B66-8DE634D00BE8}"/>
               </a:ext>
             </a:extLst>
           </p:cNvPr>
@@ -8537,7 +8549,7 @@
           <p:cNvPr id="12" name="item_4_title">
             <a:extLst>
               <a:ext uri="{FF2B5EF4-FFF2-40B4-BE49-F238E27FC236}">
-                <a16:creationId xmlns:a16="http://schemas.microsoft.com/office/drawing/2014/main" id="{B9CAD7C2-CEBF-AA35-5178-837A4222DF2A}"/>
+                <a16:creationId xmlns:a16="http://schemas.microsoft.com/office/drawing/2014/main" id="{347F2DEE-AE60-59DA-B301-5E39C8E8E2D2}"/>
               </a:ext>
             </a:extLst>
           </p:cNvPr>
@@ -8570,7 +8582,10 @@
               <a:buNone/>
               <a:defRPr sz="2000" b="1">
                 <a:solidFill>
-                  <a:schemeClr val="accent1"/>
+                  <a:schemeClr val="accent1">
+                    <a:lumMod val="70000"/>
+                    <a:lumOff val="30000"/>
+                  </a:schemeClr>
                 </a:solidFill>
                 <a:latin typeface="+mj-lt"/>
               </a:defRPr>
@@ -8590,7 +8605,7 @@
           <p:cNvPr id="13" name="item_4">
             <a:extLst>
               <a:ext uri="{FF2B5EF4-FFF2-40B4-BE49-F238E27FC236}">
-                <a16:creationId xmlns:a16="http://schemas.microsoft.com/office/drawing/2014/main" id="{1C67D4AE-11D5-215A-3A33-BCCB6A0D17BB}"/>
+                <a16:creationId xmlns:a16="http://schemas.microsoft.com/office/drawing/2014/main" id="{E6C13FCD-96B7-D0CE-4734-F737ABC20DA6}"/>
               </a:ext>
             </a:extLst>
           </p:cNvPr>
@@ -8638,7 +8653,7 @@
           <p:cNvPr id="14" name="source">
             <a:extLst>
               <a:ext uri="{FF2B5EF4-FFF2-40B4-BE49-F238E27FC236}">
-                <a16:creationId xmlns:a16="http://schemas.microsoft.com/office/drawing/2014/main" id="{E69262F6-612A-6FC6-D1C7-B07A747264BD}"/>
+                <a16:creationId xmlns:a16="http://schemas.microsoft.com/office/drawing/2014/main" id="{5025F201-2B03-93B0-64C8-277EEB9DBCC7}"/>
               </a:ext>
             </a:extLst>
           </p:cNvPr>
@@ -8660,7 +8675,10 @@
             </a:avLst>
           </a:prstGeom>
           <a:solidFill>
-            <a:schemeClr val="accent1"/>
+            <a:schemeClr val="accent1">
+              <a:lumMod val="70000"/>
+              <a:lumOff val="30000"/>
+            </a:schemeClr>
           </a:solidFill>
         </p:spPr>
         <p:txBody>
@@ -8693,7 +8711,7 @@
     </p:spTree>
     <p:extLst>
       <p:ext uri="{BB962C8B-B14F-4D97-AF65-F5344CB8AC3E}">
-        <p14:creationId xmlns:p14="http://schemas.microsoft.com/office/powerpoint/2010/main" val="1641658708"/>
+        <p14:creationId xmlns:p14="http://schemas.microsoft.com/office/powerpoint/2010/main" val="3612035618"/>
       </p:ext>
     </p:extLst>
   </p:cSld>
@@ -8762,9 +8780,9 @@
           <a:bodyPr/>
           <a:lstStyle/>
           <a:p>
-            <a:fld id="{C108DDE1-F741-4F4F-A7D2-FBD0359B97CD}" type="datetimeFigureOut">
+            <a:fld id="{374EEE4F-B349-4B31-9811-90D259E0D621}" type="datetimeFigureOut">
               <a:rPr lang="en-US" smtClean="0"/>
-              <a:t>10/3/2026</a:t>
+              <a:t>10/4/2026</a:t>
             </a:fld>
             <a:endParaRPr lang="en-US"/>
           </a:p>
@@ -8804,7 +8822,7 @@
           <a:bodyPr/>
           <a:lstStyle/>
           <a:p>
-            <a:fld id="{D07356AB-B086-4690-8078-803F810DAE76}" type="slidenum">
+            <a:fld id="{6622063C-0B57-47EC-9E6E-D170EF750DAF}" type="slidenum">
               <a:rPr lang="en-US" smtClean="0"/>
               <a:t>‹#›</a:t>
             </a:fld>
@@ -8817,7 +8835,7 @@
           <p:cNvPr id="6" name="body">
             <a:extLst>
               <a:ext uri="{FF2B5EF4-FFF2-40B4-BE49-F238E27FC236}">
-                <a16:creationId xmlns:a16="http://schemas.microsoft.com/office/drawing/2014/main" id="{0D47DDF1-66F4-1F8B-0635-8E5913439104}"/>
+                <a16:creationId xmlns:a16="http://schemas.microsoft.com/office/drawing/2014/main" id="{0E61BE6C-02D7-4259-FBCA-11A01CE0B65F}"/>
               </a:ext>
             </a:extLst>
           </p:cNvPr>
@@ -8862,7 +8880,7 @@
           <p:cNvPr id="7" name="source">
             <a:extLst>
               <a:ext uri="{FF2B5EF4-FFF2-40B4-BE49-F238E27FC236}">
-                <a16:creationId xmlns:a16="http://schemas.microsoft.com/office/drawing/2014/main" id="{A819CB76-8A0B-5C4E-BBDD-6D56E9C649F6}"/>
+                <a16:creationId xmlns:a16="http://schemas.microsoft.com/office/drawing/2014/main" id="{A43129C7-913F-1E4B-687E-CE8EC3B43FAB}"/>
               </a:ext>
             </a:extLst>
           </p:cNvPr>
@@ -8884,7 +8902,10 @@
             </a:avLst>
           </a:prstGeom>
           <a:solidFill>
-            <a:schemeClr val="accent1"/>
+            <a:schemeClr val="accent1">
+              <a:lumMod val="70000"/>
+              <a:lumOff val="30000"/>
+            </a:schemeClr>
           </a:solidFill>
         </p:spPr>
         <p:txBody>
@@ -8917,7 +8938,7 @@
     </p:spTree>
     <p:extLst>
       <p:ext uri="{BB962C8B-B14F-4D97-AF65-F5344CB8AC3E}">
-        <p14:creationId xmlns:p14="http://schemas.microsoft.com/office/powerpoint/2010/main" val="306713155"/>
+        <p14:creationId xmlns:p14="http://schemas.microsoft.com/office/powerpoint/2010/main" val="2519262405"/>
       </p:ext>
     </p:extLst>
   </p:cSld>
@@ -8986,9 +9007,9 @@
           <a:bodyPr/>
           <a:lstStyle/>
           <a:p>
-            <a:fld id="{C108DDE1-F741-4F4F-A7D2-FBD0359B97CD}" type="datetimeFigureOut">
+            <a:fld id="{374EEE4F-B349-4B31-9811-90D259E0D621}" type="datetimeFigureOut">
               <a:rPr lang="en-US" smtClean="0"/>
-              <a:t>10/3/2026</a:t>
+              <a:t>10/4/2026</a:t>
             </a:fld>
             <a:endParaRPr lang="en-US"/>
           </a:p>
@@ -9028,7 +9049,7 @@
           <a:bodyPr/>
           <a:lstStyle/>
           <a:p>
-            <a:fld id="{D07356AB-B086-4690-8078-803F810DAE76}" type="slidenum">
+            <a:fld id="{6622063C-0B57-47EC-9E6E-D170EF750DAF}" type="slidenum">
               <a:rPr lang="en-US" smtClean="0"/>
               <a:t>‹#›</a:t>
             </a:fld>
@@ -9041,7 +9062,7 @@
           <p:cNvPr id="6" name="item_1_title">
             <a:extLst>
               <a:ext uri="{FF2B5EF4-FFF2-40B4-BE49-F238E27FC236}">
-                <a16:creationId xmlns:a16="http://schemas.microsoft.com/office/drawing/2014/main" id="{3576AE53-4B45-0995-39E6-95C5747E93F3}"/>
+                <a16:creationId xmlns:a16="http://schemas.microsoft.com/office/drawing/2014/main" id="{C46C8A9C-C8D9-8611-4BDE-0AFE4AA8FB3E}"/>
               </a:ext>
             </a:extLst>
           </p:cNvPr>
@@ -9071,7 +9092,10 @@
               <a:buNone/>
               <a:defRPr sz="2000" b="1">
                 <a:solidFill>
-                  <a:schemeClr val="accent1"/>
+                  <a:schemeClr val="accent1">
+                    <a:lumMod val="70000"/>
+                    <a:lumOff val="30000"/>
+                  </a:schemeClr>
                 </a:solidFill>
                 <a:latin typeface="+mj-lt"/>
               </a:defRPr>
@@ -9091,7 +9115,7 @@
           <p:cNvPr id="7" name="item_1">
             <a:extLst>
               <a:ext uri="{FF2B5EF4-FFF2-40B4-BE49-F238E27FC236}">
-                <a16:creationId xmlns:a16="http://schemas.microsoft.com/office/drawing/2014/main" id="{552C669E-49BF-D11F-933C-2BEF9701DB1E}"/>
+                <a16:creationId xmlns:a16="http://schemas.microsoft.com/office/drawing/2014/main" id="{128B7ABA-3B3E-C1FE-256D-51616E884B19}"/>
               </a:ext>
             </a:extLst>
           </p:cNvPr>
@@ -9139,7 +9163,7 @@
           <p:cNvPr id="8" name="item_2_title">
             <a:extLst>
               <a:ext uri="{FF2B5EF4-FFF2-40B4-BE49-F238E27FC236}">
-                <a16:creationId xmlns:a16="http://schemas.microsoft.com/office/drawing/2014/main" id="{856A7375-8290-BA71-8A38-9EC350E1DD96}"/>
+                <a16:creationId xmlns:a16="http://schemas.microsoft.com/office/drawing/2014/main" id="{B8C653A9-BACC-2723-39A2-C338CA50456C}"/>
               </a:ext>
             </a:extLst>
           </p:cNvPr>
@@ -9172,7 +9196,10 @@
               <a:buNone/>
               <a:defRPr sz="2000" b="1">
                 <a:solidFill>
-                  <a:schemeClr val="accent1"/>
+                  <a:schemeClr val="accent1">
+                    <a:lumMod val="70000"/>
+                    <a:lumOff val="30000"/>
+                  </a:schemeClr>
                 </a:solidFill>
                 <a:latin typeface="+mj-lt"/>
               </a:defRPr>
@@ -9192,7 +9219,7 @@
           <p:cNvPr id="9" name="item_2">
             <a:extLst>
               <a:ext uri="{FF2B5EF4-FFF2-40B4-BE49-F238E27FC236}">
-                <a16:creationId xmlns:a16="http://schemas.microsoft.com/office/drawing/2014/main" id="{7AC0D024-2B6C-08EC-F3C2-D7BB7657553E}"/>
+                <a16:creationId xmlns:a16="http://schemas.microsoft.com/office/drawing/2014/main" id="{EA2AA26E-0F7B-C0C3-F211-C21BE01208E8}"/>
               </a:ext>
             </a:extLst>
           </p:cNvPr>
@@ -9240,7 +9267,7 @@
           <p:cNvPr id="10" name="item_3_title">
             <a:extLst>
               <a:ext uri="{FF2B5EF4-FFF2-40B4-BE49-F238E27FC236}">
-                <a16:creationId xmlns:a16="http://schemas.microsoft.com/office/drawing/2014/main" id="{9051F988-8B79-FEE4-F085-1921116AE2E4}"/>
+                <a16:creationId xmlns:a16="http://schemas.microsoft.com/office/drawing/2014/main" id="{AE2F328B-AD8F-BA64-64E1-627B03F19FC1}"/>
               </a:ext>
             </a:extLst>
           </p:cNvPr>
@@ -9273,7 +9300,10 @@
               <a:buNone/>
               <a:defRPr sz="2000" b="1">
                 <a:solidFill>
-                  <a:schemeClr val="accent1"/>
+                  <a:schemeClr val="accent1">
+                    <a:lumMod val="70000"/>
+                    <a:lumOff val="30000"/>
+                  </a:schemeClr>
                 </a:solidFill>
                 <a:latin typeface="+mj-lt"/>
               </a:defRPr>
@@ -9293,7 +9323,7 @@
           <p:cNvPr id="11" name="item_3">
             <a:extLst>
               <a:ext uri="{FF2B5EF4-FFF2-40B4-BE49-F238E27FC236}">
-                <a16:creationId xmlns:a16="http://schemas.microsoft.com/office/drawing/2014/main" id="{A79B037C-2A57-001C-3572-B8180F7EF82C}"/>
+                <a16:creationId xmlns:a16="http://schemas.microsoft.com/office/drawing/2014/main" id="{C927851C-4AA8-FEEE-9B8A-427C4EEA9A24}"/>
               </a:ext>
             </a:extLst>
           </p:cNvPr>
@@ -9341,7 +9371,7 @@
           <p:cNvPr id="12" name="item_4_title">
             <a:extLst>
               <a:ext uri="{FF2B5EF4-FFF2-40B4-BE49-F238E27FC236}">
-                <a16:creationId xmlns:a16="http://schemas.microsoft.com/office/drawing/2014/main" id="{1CFE5F6D-1089-40EE-A9A7-CCFEDDAADC79}"/>
+                <a16:creationId xmlns:a16="http://schemas.microsoft.com/office/drawing/2014/main" id="{5E8C4A55-BAB9-9637-54A0-760BC17263D1}"/>
               </a:ext>
             </a:extLst>
           </p:cNvPr>
@@ -9374,7 +9404,10 @@
               <a:buNone/>
               <a:defRPr sz="2000" b="1">
                 <a:solidFill>
-                  <a:schemeClr val="accent1"/>
+                  <a:schemeClr val="accent1">
+                    <a:lumMod val="70000"/>
+                    <a:lumOff val="30000"/>
+                  </a:schemeClr>
                 </a:solidFill>
                 <a:latin typeface="+mj-lt"/>
               </a:defRPr>
@@ -9394,7 +9427,7 @@
           <p:cNvPr id="13" name="item_4">
             <a:extLst>
               <a:ext uri="{FF2B5EF4-FFF2-40B4-BE49-F238E27FC236}">
-                <a16:creationId xmlns:a16="http://schemas.microsoft.com/office/drawing/2014/main" id="{47F08F29-EC1D-F0A1-D7FE-AD19CB071FD0}"/>
+                <a16:creationId xmlns:a16="http://schemas.microsoft.com/office/drawing/2014/main" id="{BC1EC8FC-7921-E9DD-3955-71437DEFE44F}"/>
               </a:ext>
             </a:extLst>
           </p:cNvPr>
@@ -9442,7 +9475,7 @@
           <p:cNvPr id="14" name="source">
             <a:extLst>
               <a:ext uri="{FF2B5EF4-FFF2-40B4-BE49-F238E27FC236}">
-                <a16:creationId xmlns:a16="http://schemas.microsoft.com/office/drawing/2014/main" id="{791347C7-3819-A660-89DC-A2B38B9DC9F6}"/>
+                <a16:creationId xmlns:a16="http://schemas.microsoft.com/office/drawing/2014/main" id="{BA5CC9BE-8595-AEC3-4941-15DB7013843C}"/>
               </a:ext>
             </a:extLst>
           </p:cNvPr>
@@ -9464,7 +9497,10 @@
             </a:avLst>
           </a:prstGeom>
           <a:solidFill>
-            <a:schemeClr val="accent1"/>
+            <a:schemeClr val="accent1">
+              <a:lumMod val="70000"/>
+              <a:lumOff val="30000"/>
+            </a:schemeClr>
           </a:solidFill>
         </p:spPr>
         <p:txBody>
@@ -9497,7 +9533,7 @@
     </p:spTree>
     <p:extLst>
       <p:ext uri="{BB962C8B-B14F-4D97-AF65-F5344CB8AC3E}">
-        <p14:creationId xmlns:p14="http://schemas.microsoft.com/office/powerpoint/2010/main" val="2707144094"/>
+        <p14:creationId xmlns:p14="http://schemas.microsoft.com/office/powerpoint/2010/main" val="1528178398"/>
       </p:ext>
     </p:extLst>
   </p:cSld>
@@ -9566,9 +9602,9 @@
           <a:bodyPr/>
           <a:lstStyle/>
           <a:p>
-            <a:fld id="{C108DDE1-F741-4F4F-A7D2-FBD0359B97CD}" type="datetimeFigureOut">
+            <a:fld id="{374EEE4F-B349-4B31-9811-90D259E0D621}" type="datetimeFigureOut">
               <a:rPr lang="en-US" smtClean="0"/>
-              <a:t>10/3/2026</a:t>
+              <a:t>10/4/2026</a:t>
             </a:fld>
             <a:endParaRPr lang="en-US"/>
           </a:p>
@@ -9608,7 +9644,7 @@
           <a:bodyPr/>
           <a:lstStyle/>
           <a:p>
-            <a:fld id="{D07356AB-B086-4690-8078-803F810DAE76}" type="slidenum">
+            <a:fld id="{6622063C-0B57-47EC-9E6E-D170EF750DAF}" type="slidenum">
               <a:rPr lang="en-US" smtClean="0"/>
               <a:t>‹#›</a:t>
             </a:fld>
@@ -9621,7 +9657,7 @@
           <p:cNvPr id="6" name="body">
             <a:extLst>
               <a:ext uri="{FF2B5EF4-FFF2-40B4-BE49-F238E27FC236}">
-                <a16:creationId xmlns:a16="http://schemas.microsoft.com/office/drawing/2014/main" id="{AA9F9B61-AE52-A053-8094-2C9563494F0F}"/>
+                <a16:creationId xmlns:a16="http://schemas.microsoft.com/office/drawing/2014/main" id="{2E2197B2-3CEA-2FE7-2A42-C191DE68A28D}"/>
               </a:ext>
             </a:extLst>
           </p:cNvPr>
@@ -9661,7 +9697,7 @@
           <p:cNvPr id="7" name="kpi_value_1">
             <a:extLst>
               <a:ext uri="{FF2B5EF4-FFF2-40B4-BE49-F238E27FC236}">
-                <a16:creationId xmlns:a16="http://schemas.microsoft.com/office/drawing/2014/main" id="{1BAB1ECF-740E-C059-211E-03670886DA84}"/>
+                <a16:creationId xmlns:a16="http://schemas.microsoft.com/office/drawing/2014/main" id="{C19DEA8A-ADE4-D25E-4845-408CC9B7F370}"/>
               </a:ext>
             </a:extLst>
           </p:cNvPr>
@@ -9694,7 +9730,10 @@
               <a:buNone/>
               <a:defRPr sz="10800" b="1">
                 <a:solidFill>
-                  <a:schemeClr val="accent1"/>
+                  <a:schemeClr val="accent1">
+                    <a:lumMod val="70000"/>
+                    <a:lumOff val="30000"/>
+                  </a:schemeClr>
                 </a:solidFill>
                 <a:latin typeface="+mj-lt"/>
               </a:defRPr>
@@ -9714,7 +9753,7 @@
           <p:cNvPr id="8" name="kpi_label_1">
             <a:extLst>
               <a:ext uri="{FF2B5EF4-FFF2-40B4-BE49-F238E27FC236}">
-                <a16:creationId xmlns:a16="http://schemas.microsoft.com/office/drawing/2014/main" id="{4C786D92-2A15-7F64-2A00-31E96DCDC08F}"/>
+                <a16:creationId xmlns:a16="http://schemas.microsoft.com/office/drawing/2014/main" id="{ECB30D89-93F6-F0E3-B35E-40523114CABC}"/>
               </a:ext>
             </a:extLst>
           </p:cNvPr>
@@ -9762,7 +9801,7 @@
           <p:cNvPr id="9" name="source">
             <a:extLst>
               <a:ext uri="{FF2B5EF4-FFF2-40B4-BE49-F238E27FC236}">
-                <a16:creationId xmlns:a16="http://schemas.microsoft.com/office/drawing/2014/main" id="{99E5B426-3820-CC2B-58FA-3573352E9B3D}"/>
+                <a16:creationId xmlns:a16="http://schemas.microsoft.com/office/drawing/2014/main" id="{6A651DFF-BA1A-BB8B-4008-C0D0EC39735F}"/>
               </a:ext>
             </a:extLst>
           </p:cNvPr>
@@ -9784,7 +9823,10 @@
             </a:avLst>
           </a:prstGeom>
           <a:solidFill>
-            <a:schemeClr val="accent1"/>
+            <a:schemeClr val="accent1">
+              <a:lumMod val="70000"/>
+              <a:lumOff val="30000"/>
+            </a:schemeClr>
           </a:solidFill>
         </p:spPr>
         <p:txBody>
@@ -9817,7 +9859,7 @@
     </p:spTree>
     <p:extLst>
       <p:ext uri="{BB962C8B-B14F-4D97-AF65-F5344CB8AC3E}">
-        <p14:creationId xmlns:p14="http://schemas.microsoft.com/office/powerpoint/2010/main" val="2105279642"/>
+        <p14:creationId xmlns:p14="http://schemas.microsoft.com/office/powerpoint/2010/main" val="4274577725"/>
       </p:ext>
     </p:extLst>
   </p:cSld>
@@ -9886,9 +9928,9 @@
           <a:bodyPr/>
           <a:lstStyle/>
           <a:p>
-            <a:fld id="{C108DDE1-F741-4F4F-A7D2-FBD0359B97CD}" type="datetimeFigureOut">
+            <a:fld id="{374EEE4F-B349-4B31-9811-90D259E0D621}" type="datetimeFigureOut">
               <a:rPr lang="en-US" smtClean="0"/>
-              <a:t>10/3/2026</a:t>
+              <a:t>10/4/2026</a:t>
             </a:fld>
             <a:endParaRPr lang="en-US"/>
           </a:p>
@@ -9928,7 +9970,7 @@
           <a:bodyPr/>
           <a:lstStyle/>
           <a:p>
-            <a:fld id="{D07356AB-B086-4690-8078-803F810DAE76}" type="slidenum">
+            <a:fld id="{6622063C-0B57-47EC-9E6E-D170EF750DAF}" type="slidenum">
               <a:rPr lang="en-US" smtClean="0"/>
               <a:t>‹#›</a:t>
             </a:fld>
@@ -9941,7 +9983,7 @@
           <p:cNvPr id="6" name="body">
             <a:extLst>
               <a:ext uri="{FF2B5EF4-FFF2-40B4-BE49-F238E27FC236}">
-                <a16:creationId xmlns:a16="http://schemas.microsoft.com/office/drawing/2014/main" id="{834E57AC-E0D6-DC19-1AA9-2BE72B1A3141}"/>
+                <a16:creationId xmlns:a16="http://schemas.microsoft.com/office/drawing/2014/main" id="{1D75C1CE-135D-A602-7357-4969780DE94B}"/>
               </a:ext>
             </a:extLst>
           </p:cNvPr>
@@ -9981,7 +10023,7 @@
           <p:cNvPr id="7" name="kpi_value_1">
             <a:extLst>
               <a:ext uri="{FF2B5EF4-FFF2-40B4-BE49-F238E27FC236}">
-                <a16:creationId xmlns:a16="http://schemas.microsoft.com/office/drawing/2014/main" id="{D98DB76E-DB97-41E3-E225-F9DDFB174EDC}"/>
+                <a16:creationId xmlns:a16="http://schemas.microsoft.com/office/drawing/2014/main" id="{98E535CB-1409-2D36-7051-66C892E01F89}"/>
               </a:ext>
             </a:extLst>
           </p:cNvPr>
@@ -10014,7 +10056,10 @@
               <a:buNone/>
               <a:defRPr sz="6000" b="1">
                 <a:solidFill>
-                  <a:schemeClr val="accent1"/>
+                  <a:schemeClr val="accent1">
+                    <a:lumMod val="70000"/>
+                    <a:lumOff val="30000"/>
+                  </a:schemeClr>
                 </a:solidFill>
                 <a:latin typeface="+mj-lt"/>
               </a:defRPr>
@@ -10034,7 +10079,7 @@
           <p:cNvPr id="8" name="kpi_label_1">
             <a:extLst>
               <a:ext uri="{FF2B5EF4-FFF2-40B4-BE49-F238E27FC236}">
-                <a16:creationId xmlns:a16="http://schemas.microsoft.com/office/drawing/2014/main" id="{5961E021-3080-CD8D-E529-35A5A329E49A}"/>
+                <a16:creationId xmlns:a16="http://schemas.microsoft.com/office/drawing/2014/main" id="{28D109CC-E530-DE6A-CFC0-B180FBAFD17B}"/>
               </a:ext>
             </a:extLst>
           </p:cNvPr>
@@ -10082,7 +10127,7 @@
           <p:cNvPr id="9" name="kpi_value_2">
             <a:extLst>
               <a:ext uri="{FF2B5EF4-FFF2-40B4-BE49-F238E27FC236}">
-                <a16:creationId xmlns:a16="http://schemas.microsoft.com/office/drawing/2014/main" id="{27482B2C-26D4-AAAD-961B-F59751D09FBB}"/>
+                <a16:creationId xmlns:a16="http://schemas.microsoft.com/office/drawing/2014/main" id="{B374F6ED-9ECD-84F6-6510-2B34C1FEEC3E}"/>
               </a:ext>
             </a:extLst>
           </p:cNvPr>
@@ -10115,7 +10160,10 @@
               <a:buNone/>
               <a:defRPr sz="6000" b="1">
                 <a:solidFill>
-                  <a:schemeClr val="accent1"/>
+                  <a:schemeClr val="accent1">
+                    <a:lumMod val="70000"/>
+                    <a:lumOff val="30000"/>
+                  </a:schemeClr>
                 </a:solidFill>
                 <a:latin typeface="+mj-lt"/>
               </a:defRPr>
@@ -10135,7 +10183,7 @@
           <p:cNvPr id="10" name="kpi_label_2">
             <a:extLst>
               <a:ext uri="{FF2B5EF4-FFF2-40B4-BE49-F238E27FC236}">
-                <a16:creationId xmlns:a16="http://schemas.microsoft.com/office/drawing/2014/main" id="{16EF5D78-35D2-2E57-6E0C-1D12D0737E00}"/>
+                <a16:creationId xmlns:a16="http://schemas.microsoft.com/office/drawing/2014/main" id="{A8B6E68E-5331-C14E-9FA0-A61BFAE364AA}"/>
               </a:ext>
             </a:extLst>
           </p:cNvPr>
@@ -10183,7 +10231,7 @@
           <p:cNvPr id="11" name="kpi_value_3">
             <a:extLst>
               <a:ext uri="{FF2B5EF4-FFF2-40B4-BE49-F238E27FC236}">
-                <a16:creationId xmlns:a16="http://schemas.microsoft.com/office/drawing/2014/main" id="{BE768B05-02F5-1994-0041-FF5A77BD5ADE}"/>
+                <a16:creationId xmlns:a16="http://schemas.microsoft.com/office/drawing/2014/main" id="{6C6D9062-0BA2-006F-B1FB-F28DAC09851E}"/>
               </a:ext>
             </a:extLst>
           </p:cNvPr>
@@ -10216,7 +10264,10 @@
               <a:buNone/>
               <a:defRPr sz="6000" b="1">
                 <a:solidFill>
-                  <a:schemeClr val="accent1"/>
+                  <a:schemeClr val="accent1">
+                    <a:lumMod val="70000"/>
+                    <a:lumOff val="30000"/>
+                  </a:schemeClr>
                 </a:solidFill>
                 <a:latin typeface="+mj-lt"/>
               </a:defRPr>
@@ -10236,7 +10287,7 @@
           <p:cNvPr id="12" name="kpi_label_3">
             <a:extLst>
               <a:ext uri="{FF2B5EF4-FFF2-40B4-BE49-F238E27FC236}">
-                <a16:creationId xmlns:a16="http://schemas.microsoft.com/office/drawing/2014/main" id="{39836E08-18C2-4D21-4AD0-1941AA82C33A}"/>
+                <a16:creationId xmlns:a16="http://schemas.microsoft.com/office/drawing/2014/main" id="{58D90604-8DDF-79DB-A560-23A6A221F0A2}"/>
               </a:ext>
             </a:extLst>
           </p:cNvPr>
@@ -10284,7 +10335,7 @@
           <p:cNvPr id="13" name="kpi_value_4">
             <a:extLst>
               <a:ext uri="{FF2B5EF4-FFF2-40B4-BE49-F238E27FC236}">
-                <a16:creationId xmlns:a16="http://schemas.microsoft.com/office/drawing/2014/main" id="{6E851467-8602-30C5-184C-B23003DA3004}"/>
+                <a16:creationId xmlns:a16="http://schemas.microsoft.com/office/drawing/2014/main" id="{43C482C0-E4C0-E8FE-66DA-233D3C5FB7E6}"/>
               </a:ext>
             </a:extLst>
           </p:cNvPr>
@@ -10317,7 +10368,10 @@
               <a:buNone/>
               <a:defRPr sz="6000" b="1">
                 <a:solidFill>
-                  <a:schemeClr val="accent1"/>
+                  <a:schemeClr val="accent1">
+                    <a:lumMod val="70000"/>
+                    <a:lumOff val="30000"/>
+                  </a:schemeClr>
                 </a:solidFill>
                 <a:latin typeface="+mj-lt"/>
               </a:defRPr>
@@ -10337,7 +10391,7 @@
           <p:cNvPr id="14" name="kpi_label_4">
             <a:extLst>
               <a:ext uri="{FF2B5EF4-FFF2-40B4-BE49-F238E27FC236}">
-                <a16:creationId xmlns:a16="http://schemas.microsoft.com/office/drawing/2014/main" id="{5AC52E4E-D402-DC47-9949-4F4C41E2EE4A}"/>
+                <a16:creationId xmlns:a16="http://schemas.microsoft.com/office/drawing/2014/main" id="{5CC35BAD-99FA-38AA-7BDD-421696EF9FE6}"/>
               </a:ext>
             </a:extLst>
           </p:cNvPr>
@@ -10385,7 +10439,7 @@
           <p:cNvPr id="15" name="source">
             <a:extLst>
               <a:ext uri="{FF2B5EF4-FFF2-40B4-BE49-F238E27FC236}">
-                <a16:creationId xmlns:a16="http://schemas.microsoft.com/office/drawing/2014/main" id="{76976E6C-21F3-73B0-F252-E9363CEECF94}"/>
+                <a16:creationId xmlns:a16="http://schemas.microsoft.com/office/drawing/2014/main" id="{91CAA85D-93C5-63AD-3B1C-E103E1CC7B10}"/>
               </a:ext>
             </a:extLst>
           </p:cNvPr>
@@ -10407,7 +10461,10 @@
             </a:avLst>
           </a:prstGeom>
           <a:solidFill>
-            <a:schemeClr val="accent1"/>
+            <a:schemeClr val="accent1">
+              <a:lumMod val="70000"/>
+              <a:lumOff val="30000"/>
+            </a:schemeClr>
           </a:solidFill>
         </p:spPr>
         <p:txBody>
@@ -10440,7 +10497,7 @@
     </p:spTree>
     <p:extLst>
       <p:ext uri="{BB962C8B-B14F-4D97-AF65-F5344CB8AC3E}">
-        <p14:creationId xmlns:p14="http://schemas.microsoft.com/office/powerpoint/2010/main" val="821710896"/>
+        <p14:creationId xmlns:p14="http://schemas.microsoft.com/office/powerpoint/2010/main" val="2572235732"/>
       </p:ext>
     </p:extLst>
   </p:cSld>
@@ -10509,9 +10566,9 @@
           <a:bodyPr/>
           <a:lstStyle/>
           <a:p>
-            <a:fld id="{C108DDE1-F741-4F4F-A7D2-FBD0359B97CD}" type="datetimeFigureOut">
+            <a:fld id="{374EEE4F-B349-4B31-9811-90D259E0D621}" type="datetimeFigureOut">
               <a:rPr lang="en-US" smtClean="0"/>
-              <a:t>10/3/2026</a:t>
+              <a:t>10/4/2026</a:t>
             </a:fld>
             <a:endParaRPr lang="en-US"/>
           </a:p>
@@ -10551,7 +10608,7 @@
           <a:bodyPr/>
           <a:lstStyle/>
           <a:p>
-            <a:fld id="{D07356AB-B086-4690-8078-803F810DAE76}" type="slidenum">
+            <a:fld id="{6622063C-0B57-47EC-9E6E-D170EF750DAF}" type="slidenum">
               <a:rPr lang="en-US" smtClean="0"/>
               <a:t>‹#›</a:t>
             </a:fld>
@@ -10564,7 +10621,7 @@
           <p:cNvPr id="6" name="body">
             <a:extLst>
               <a:ext uri="{FF2B5EF4-FFF2-40B4-BE49-F238E27FC236}">
-                <a16:creationId xmlns:a16="http://schemas.microsoft.com/office/drawing/2014/main" id="{F898E71E-3751-1FEB-FAB6-3F432A6F238F}"/>
+                <a16:creationId xmlns:a16="http://schemas.microsoft.com/office/drawing/2014/main" id="{03F4255C-9360-B5B6-2494-52B864A2AEA3}"/>
               </a:ext>
             </a:extLst>
           </p:cNvPr>
@@ -10604,7 +10661,7 @@
           <p:cNvPr id="7" name="kpi_value_1">
             <a:extLst>
               <a:ext uri="{FF2B5EF4-FFF2-40B4-BE49-F238E27FC236}">
-                <a16:creationId xmlns:a16="http://schemas.microsoft.com/office/drawing/2014/main" id="{75DEDC43-74DC-048A-2EAB-81F1E0088844}"/>
+                <a16:creationId xmlns:a16="http://schemas.microsoft.com/office/drawing/2014/main" id="{645DC094-BAA8-4886-E679-34F867EB56EE}"/>
               </a:ext>
             </a:extLst>
           </p:cNvPr>
@@ -10637,7 +10694,10 @@
               <a:buNone/>
               <a:defRPr sz="6000" b="1">
                 <a:solidFill>
-                  <a:schemeClr val="accent1"/>
+                  <a:schemeClr val="accent1">
+                    <a:lumMod val="70000"/>
+                    <a:lumOff val="30000"/>
+                  </a:schemeClr>
                 </a:solidFill>
                 <a:latin typeface="+mj-lt"/>
               </a:defRPr>
@@ -10657,7 +10717,7 @@
           <p:cNvPr id="8" name="kpi_label_1">
             <a:extLst>
               <a:ext uri="{FF2B5EF4-FFF2-40B4-BE49-F238E27FC236}">
-                <a16:creationId xmlns:a16="http://schemas.microsoft.com/office/drawing/2014/main" id="{5801CE97-23DD-4AB2-C5A8-457715C53080}"/>
+                <a16:creationId xmlns:a16="http://schemas.microsoft.com/office/drawing/2014/main" id="{E5434290-4356-8F48-1BD6-52F95812652E}"/>
               </a:ext>
             </a:extLst>
           </p:cNvPr>
@@ -10705,7 +10765,7 @@
           <p:cNvPr id="9" name="kpi_value_2">
             <a:extLst>
               <a:ext uri="{FF2B5EF4-FFF2-40B4-BE49-F238E27FC236}">
-                <a16:creationId xmlns:a16="http://schemas.microsoft.com/office/drawing/2014/main" id="{E677F2B5-265C-22EE-DC5E-3C93012845A1}"/>
+                <a16:creationId xmlns:a16="http://schemas.microsoft.com/office/drawing/2014/main" id="{415B3DE8-B52C-F70B-EF2B-E7B1CDFBED54}"/>
               </a:ext>
             </a:extLst>
           </p:cNvPr>
@@ -10738,7 +10798,10 @@
               <a:buNone/>
               <a:defRPr sz="6000" b="1">
                 <a:solidFill>
-                  <a:schemeClr val="accent1"/>
+                  <a:schemeClr val="accent1">
+                    <a:lumMod val="70000"/>
+                    <a:lumOff val="30000"/>
+                  </a:schemeClr>
                 </a:solidFill>
                 <a:latin typeface="+mj-lt"/>
               </a:defRPr>
@@ -10758,7 +10821,7 @@
           <p:cNvPr id="10" name="kpi_label_2">
             <a:extLst>
               <a:ext uri="{FF2B5EF4-FFF2-40B4-BE49-F238E27FC236}">
-                <a16:creationId xmlns:a16="http://schemas.microsoft.com/office/drawing/2014/main" id="{244B2537-7EFA-6BB9-8248-8DE7D3B7ECEA}"/>
+                <a16:creationId xmlns:a16="http://schemas.microsoft.com/office/drawing/2014/main" id="{A912C446-98F4-14B1-D6E8-C0B737AC5220}"/>
               </a:ext>
             </a:extLst>
           </p:cNvPr>
@@ -10806,7 +10869,7 @@
           <p:cNvPr id="11" name="source">
             <a:extLst>
               <a:ext uri="{FF2B5EF4-FFF2-40B4-BE49-F238E27FC236}">
-                <a16:creationId xmlns:a16="http://schemas.microsoft.com/office/drawing/2014/main" id="{04D353A9-1ACC-598F-7EE6-936303CAFCD9}"/>
+                <a16:creationId xmlns:a16="http://schemas.microsoft.com/office/drawing/2014/main" id="{0384EAE7-27B7-A379-968D-7E0C1E2E9D83}"/>
               </a:ext>
             </a:extLst>
           </p:cNvPr>
@@ -10828,7 +10891,10 @@
             </a:avLst>
           </a:prstGeom>
           <a:solidFill>
-            <a:schemeClr val="accent1"/>
+            <a:schemeClr val="accent1">
+              <a:lumMod val="70000"/>
+              <a:lumOff val="30000"/>
+            </a:schemeClr>
           </a:solidFill>
         </p:spPr>
         <p:txBody>
@@ -10861,7 +10927,7 @@
     </p:spTree>
     <p:extLst>
       <p:ext uri="{BB962C8B-B14F-4D97-AF65-F5344CB8AC3E}">
-        <p14:creationId xmlns:p14="http://schemas.microsoft.com/office/powerpoint/2010/main" val="3170605574"/>
+        <p14:creationId xmlns:p14="http://schemas.microsoft.com/office/powerpoint/2010/main" val="2294226805"/>
       </p:ext>
     </p:extLst>
   </p:cSld>
@@ -10930,9 +10996,9 @@
           <a:bodyPr/>
           <a:lstStyle/>
           <a:p>
-            <a:fld id="{C108DDE1-F741-4F4F-A7D2-FBD0359B97CD}" type="datetimeFigureOut">
+            <a:fld id="{374EEE4F-B349-4B31-9811-90D259E0D621}" type="datetimeFigureOut">
               <a:rPr lang="en-US" smtClean="0"/>
-              <a:t>10/3/2026</a:t>
+              <a:t>10/4/2026</a:t>
             </a:fld>
             <a:endParaRPr lang="en-US"/>
           </a:p>
@@ -10972,7 +11038,7 @@
           <a:bodyPr/>
           <a:lstStyle/>
           <a:p>
-            <a:fld id="{D07356AB-B086-4690-8078-803F810DAE76}" type="slidenum">
+            <a:fld id="{6622063C-0B57-47EC-9E6E-D170EF750DAF}" type="slidenum">
               <a:rPr lang="en-US" smtClean="0"/>
               <a:t>‹#›</a:t>
             </a:fld>
@@ -10985,7 +11051,7 @@
           <p:cNvPr id="6" name="body">
             <a:extLst>
               <a:ext uri="{FF2B5EF4-FFF2-40B4-BE49-F238E27FC236}">
-                <a16:creationId xmlns:a16="http://schemas.microsoft.com/office/drawing/2014/main" id="{3F1B8759-0486-0014-AFF3-379E9AB07EB1}"/>
+                <a16:creationId xmlns:a16="http://schemas.microsoft.com/office/drawing/2014/main" id="{BE37ED9F-D491-B155-DCAB-20CF2158DBEB}"/>
               </a:ext>
             </a:extLst>
           </p:cNvPr>
@@ -11025,7 +11091,7 @@
           <p:cNvPr id="7" name="kpi_value_1">
             <a:extLst>
               <a:ext uri="{FF2B5EF4-FFF2-40B4-BE49-F238E27FC236}">
-                <a16:creationId xmlns:a16="http://schemas.microsoft.com/office/drawing/2014/main" id="{0D29E90A-86C4-8FA6-2DEC-0C85D5999F72}"/>
+                <a16:creationId xmlns:a16="http://schemas.microsoft.com/office/drawing/2014/main" id="{BBB60703-741E-22D3-4843-B9037E5BC3B3}"/>
               </a:ext>
             </a:extLst>
           </p:cNvPr>
@@ -11058,7 +11124,10 @@
               <a:buNone/>
               <a:defRPr sz="6000" b="1">
                 <a:solidFill>
-                  <a:schemeClr val="accent1"/>
+                  <a:schemeClr val="accent1">
+                    <a:lumMod val="70000"/>
+                    <a:lumOff val="30000"/>
+                  </a:schemeClr>
                 </a:solidFill>
                 <a:latin typeface="+mj-lt"/>
               </a:defRPr>
@@ -11078,7 +11147,7 @@
           <p:cNvPr id="8" name="kpi_label_1">
             <a:extLst>
               <a:ext uri="{FF2B5EF4-FFF2-40B4-BE49-F238E27FC236}">
-                <a16:creationId xmlns:a16="http://schemas.microsoft.com/office/drawing/2014/main" id="{6EC6DFB3-F40E-A027-0051-E89BB7D35158}"/>
+                <a16:creationId xmlns:a16="http://schemas.microsoft.com/office/drawing/2014/main" id="{32B9F2C3-2DBC-91C7-0C6D-AB92088C7D63}"/>
               </a:ext>
             </a:extLst>
           </p:cNvPr>
@@ -11126,7 +11195,7 @@
           <p:cNvPr id="9" name="kpi_value_2">
             <a:extLst>
               <a:ext uri="{FF2B5EF4-FFF2-40B4-BE49-F238E27FC236}">
-                <a16:creationId xmlns:a16="http://schemas.microsoft.com/office/drawing/2014/main" id="{24395A4D-6699-568B-8920-C3666A74562F}"/>
+                <a16:creationId xmlns:a16="http://schemas.microsoft.com/office/drawing/2014/main" id="{DC2954CD-A644-E90C-D7D4-D5A8C330408E}"/>
               </a:ext>
             </a:extLst>
           </p:cNvPr>
@@ -11159,7 +11228,10 @@
               <a:buNone/>
               <a:defRPr sz="6000" b="1">
                 <a:solidFill>
-                  <a:schemeClr val="accent1"/>
+                  <a:schemeClr val="accent1">
+                    <a:lumMod val="70000"/>
+                    <a:lumOff val="30000"/>
+                  </a:schemeClr>
                 </a:solidFill>
                 <a:latin typeface="+mj-lt"/>
               </a:defRPr>
@@ -11179,7 +11251,7 @@
           <p:cNvPr id="10" name="kpi_label_2">
             <a:extLst>
               <a:ext uri="{FF2B5EF4-FFF2-40B4-BE49-F238E27FC236}">
-                <a16:creationId xmlns:a16="http://schemas.microsoft.com/office/drawing/2014/main" id="{29B6E245-03B0-8E16-61BC-1A7691BC56F6}"/>
+                <a16:creationId xmlns:a16="http://schemas.microsoft.com/office/drawing/2014/main" id="{596E7189-3E9B-A0B6-F4C2-B76AB6951D7B}"/>
               </a:ext>
             </a:extLst>
           </p:cNvPr>
@@ -11227,7 +11299,7 @@
           <p:cNvPr id="11" name="kpi_value_3">
             <a:extLst>
               <a:ext uri="{FF2B5EF4-FFF2-40B4-BE49-F238E27FC236}">
-                <a16:creationId xmlns:a16="http://schemas.microsoft.com/office/drawing/2014/main" id="{93D47B9B-7E39-F27E-426D-81C750F76155}"/>
+                <a16:creationId xmlns:a16="http://schemas.microsoft.com/office/drawing/2014/main" id="{92657B7A-5567-3AC9-7AFA-BDA25254303B}"/>
               </a:ext>
             </a:extLst>
           </p:cNvPr>
@@ -11260,7 +11332,10 @@
               <a:buNone/>
               <a:defRPr sz="6000" b="1">
                 <a:solidFill>
-                  <a:schemeClr val="accent1"/>
+                  <a:schemeClr val="accent1">
+                    <a:lumMod val="70000"/>
+                    <a:lumOff val="30000"/>
+                  </a:schemeClr>
                 </a:solidFill>
                 <a:latin typeface="+mj-lt"/>
               </a:defRPr>
@@ -11280,7 +11355,7 @@
           <p:cNvPr id="12" name="kpi_label_3">
             <a:extLst>
               <a:ext uri="{FF2B5EF4-FFF2-40B4-BE49-F238E27FC236}">
-                <a16:creationId xmlns:a16="http://schemas.microsoft.com/office/drawing/2014/main" id="{E90E6EDF-265E-C2A2-99D5-2BAE69B11D9F}"/>
+                <a16:creationId xmlns:a16="http://schemas.microsoft.com/office/drawing/2014/main" id="{FC3A8E59-6965-89EE-1462-9F2AD942EAE1}"/>
               </a:ext>
             </a:extLst>
           </p:cNvPr>
@@ -11328,7 +11403,7 @@
           <p:cNvPr id="13" name="kpi_value_4">
             <a:extLst>
               <a:ext uri="{FF2B5EF4-FFF2-40B4-BE49-F238E27FC236}">
-                <a16:creationId xmlns:a16="http://schemas.microsoft.com/office/drawing/2014/main" id="{AFE603CA-B4CE-C708-9944-1CFD39982579}"/>
+                <a16:creationId xmlns:a16="http://schemas.microsoft.com/office/drawing/2014/main" id="{9A9946CE-869C-4295-72CF-9A1FC755E5BB}"/>
               </a:ext>
             </a:extLst>
           </p:cNvPr>
@@ -11361,7 +11436,10 @@
               <a:buNone/>
               <a:defRPr sz="6000" b="1">
                 <a:solidFill>
-                  <a:schemeClr val="accent1"/>
+                  <a:schemeClr val="accent1">
+                    <a:lumMod val="70000"/>
+                    <a:lumOff val="30000"/>
+                  </a:schemeClr>
                 </a:solidFill>
                 <a:latin typeface="+mj-lt"/>
               </a:defRPr>
@@ -11381,7 +11459,7 @@
           <p:cNvPr id="14" name="kpi_label_4">
             <a:extLst>
               <a:ext uri="{FF2B5EF4-FFF2-40B4-BE49-F238E27FC236}">
-                <a16:creationId xmlns:a16="http://schemas.microsoft.com/office/drawing/2014/main" id="{FAF90D06-9101-6988-AAB7-B2DA757B111E}"/>
+                <a16:creationId xmlns:a16="http://schemas.microsoft.com/office/drawing/2014/main" id="{CC2EF97F-6AEA-B6E0-02B4-595B24432C2E}"/>
               </a:ext>
             </a:extLst>
           </p:cNvPr>
@@ -11429,7 +11507,7 @@
           <p:cNvPr id="15" name="source">
             <a:extLst>
               <a:ext uri="{FF2B5EF4-FFF2-40B4-BE49-F238E27FC236}">
-                <a16:creationId xmlns:a16="http://schemas.microsoft.com/office/drawing/2014/main" id="{01EF0D34-5296-BFD0-242B-2610CF27FE92}"/>
+                <a16:creationId xmlns:a16="http://schemas.microsoft.com/office/drawing/2014/main" id="{EC85FDA5-BC44-5FDA-4D2B-C666425610CA}"/>
               </a:ext>
             </a:extLst>
           </p:cNvPr>
@@ -11451,7 +11529,10 @@
             </a:avLst>
           </a:prstGeom>
           <a:solidFill>
-            <a:schemeClr val="accent1"/>
+            <a:schemeClr val="accent1">
+              <a:lumMod val="70000"/>
+              <a:lumOff val="30000"/>
+            </a:schemeClr>
           </a:solidFill>
         </p:spPr>
         <p:txBody>
@@ -11484,7 +11565,7 @@
     </p:spTree>
     <p:extLst>
       <p:ext uri="{BB962C8B-B14F-4D97-AF65-F5344CB8AC3E}">
-        <p14:creationId xmlns:p14="http://schemas.microsoft.com/office/powerpoint/2010/main" val="4122462959"/>
+        <p14:creationId xmlns:p14="http://schemas.microsoft.com/office/powerpoint/2010/main" val="3194869433"/>
       </p:ext>
     </p:extLst>
   </p:cSld>
@@ -11553,9 +11634,9 @@
           <a:bodyPr/>
           <a:lstStyle/>
           <a:p>
-            <a:fld id="{C108DDE1-F741-4F4F-A7D2-FBD0359B97CD}" type="datetimeFigureOut">
+            <a:fld id="{374EEE4F-B349-4B31-9811-90D259E0D621}" type="datetimeFigureOut">
               <a:rPr lang="en-US" smtClean="0"/>
-              <a:t>10/3/2026</a:t>
+              <a:t>10/4/2026</a:t>
             </a:fld>
             <a:endParaRPr lang="en-US"/>
           </a:p>
@@ -11595,7 +11676,7 @@
           <a:bodyPr/>
           <a:lstStyle/>
           <a:p>
-            <a:fld id="{D07356AB-B086-4690-8078-803F810DAE76}" type="slidenum">
+            <a:fld id="{6622063C-0B57-47EC-9E6E-D170EF750DAF}" type="slidenum">
               <a:rPr lang="en-US" smtClean="0"/>
               <a:t>‹#›</a:t>
             </a:fld>
@@ -11608,7 +11689,7 @@
           <p:cNvPr id="6" name="item_1_title">
             <a:extLst>
               <a:ext uri="{FF2B5EF4-FFF2-40B4-BE49-F238E27FC236}">
-                <a16:creationId xmlns:a16="http://schemas.microsoft.com/office/drawing/2014/main" id="{2899F7A0-FFBA-0B87-BABD-F1B886778F24}"/>
+                <a16:creationId xmlns:a16="http://schemas.microsoft.com/office/drawing/2014/main" id="{5348EB53-28FB-37BF-22DE-BCA5D99AB1FD}"/>
               </a:ext>
             </a:extLst>
           </p:cNvPr>
@@ -11638,7 +11719,10 @@
               <a:buNone/>
               <a:defRPr sz="2000" b="1">
                 <a:solidFill>
-                  <a:schemeClr val="accent1"/>
+                  <a:schemeClr val="accent1">
+                    <a:lumMod val="70000"/>
+                    <a:lumOff val="30000"/>
+                  </a:schemeClr>
                 </a:solidFill>
                 <a:latin typeface="+mj-lt"/>
               </a:defRPr>
@@ -11658,7 +11742,7 @@
           <p:cNvPr id="7" name="item_1">
             <a:extLst>
               <a:ext uri="{FF2B5EF4-FFF2-40B4-BE49-F238E27FC236}">
-                <a16:creationId xmlns:a16="http://schemas.microsoft.com/office/drawing/2014/main" id="{C32C9439-EFD8-E54B-8715-46027C3C4246}"/>
+                <a16:creationId xmlns:a16="http://schemas.microsoft.com/office/drawing/2014/main" id="{942F1CC7-A6D1-362F-B580-2BED16BBE75C}"/>
               </a:ext>
             </a:extLst>
           </p:cNvPr>
@@ -11706,7 +11790,7 @@
           <p:cNvPr id="8" name="item_2_title">
             <a:extLst>
               <a:ext uri="{FF2B5EF4-FFF2-40B4-BE49-F238E27FC236}">
-                <a16:creationId xmlns:a16="http://schemas.microsoft.com/office/drawing/2014/main" id="{E6EF1ABA-C2A3-8885-FB64-18D6E6A34C18}"/>
+                <a16:creationId xmlns:a16="http://schemas.microsoft.com/office/drawing/2014/main" id="{795B62AD-02EF-6746-D31F-933E36BB23BA}"/>
               </a:ext>
             </a:extLst>
           </p:cNvPr>
@@ -11739,7 +11823,10 @@
               <a:buNone/>
               <a:defRPr sz="2000" b="1">
                 <a:solidFill>
-                  <a:schemeClr val="accent1"/>
+                  <a:schemeClr val="accent1">
+                    <a:lumMod val="70000"/>
+                    <a:lumOff val="30000"/>
+                  </a:schemeClr>
                 </a:solidFill>
                 <a:latin typeface="+mj-lt"/>
               </a:defRPr>
@@ -11759,7 +11846,7 @@
           <p:cNvPr id="9" name="item_2">
             <a:extLst>
               <a:ext uri="{FF2B5EF4-FFF2-40B4-BE49-F238E27FC236}">
-                <a16:creationId xmlns:a16="http://schemas.microsoft.com/office/drawing/2014/main" id="{E75D14FB-EB9B-F8DC-D117-87F64E1B550B}"/>
+                <a16:creationId xmlns:a16="http://schemas.microsoft.com/office/drawing/2014/main" id="{246F5FA3-777B-8CFF-C714-3F8F3C8327E0}"/>
               </a:ext>
             </a:extLst>
           </p:cNvPr>
@@ -11807,7 +11894,7 @@
           <p:cNvPr id="10" name="item_3_title">
             <a:extLst>
               <a:ext uri="{FF2B5EF4-FFF2-40B4-BE49-F238E27FC236}">
-                <a16:creationId xmlns:a16="http://schemas.microsoft.com/office/drawing/2014/main" id="{2E1D670C-CF57-E9E7-66F9-473348291B69}"/>
+                <a16:creationId xmlns:a16="http://schemas.microsoft.com/office/drawing/2014/main" id="{BB316F3F-291C-DD28-BA3D-F00F2714FC64}"/>
               </a:ext>
             </a:extLst>
           </p:cNvPr>
@@ -11840,7 +11927,10 @@
               <a:buNone/>
               <a:defRPr sz="2000" b="1">
                 <a:solidFill>
-                  <a:schemeClr val="accent1"/>
+                  <a:schemeClr val="accent1">
+                    <a:lumMod val="70000"/>
+                    <a:lumOff val="30000"/>
+                  </a:schemeClr>
                 </a:solidFill>
                 <a:latin typeface="+mj-lt"/>
               </a:defRPr>
@@ -11860,7 +11950,7 @@
           <p:cNvPr id="11" name="item_3">
             <a:extLst>
               <a:ext uri="{FF2B5EF4-FFF2-40B4-BE49-F238E27FC236}">
-                <a16:creationId xmlns:a16="http://schemas.microsoft.com/office/drawing/2014/main" id="{09CBE295-7FDC-412C-818F-148C999DCD84}"/>
+                <a16:creationId xmlns:a16="http://schemas.microsoft.com/office/drawing/2014/main" id="{2304C197-C37A-D7BB-BFDE-E25850534C58}"/>
               </a:ext>
             </a:extLst>
           </p:cNvPr>
@@ -11908,7 +11998,7 @@
           <p:cNvPr id="12" name="item_4_title">
             <a:extLst>
               <a:ext uri="{FF2B5EF4-FFF2-40B4-BE49-F238E27FC236}">
-                <a16:creationId xmlns:a16="http://schemas.microsoft.com/office/drawing/2014/main" id="{54A34F54-C78A-0F35-4BD1-E93354345A4B}"/>
+                <a16:creationId xmlns:a16="http://schemas.microsoft.com/office/drawing/2014/main" id="{88F9B211-429A-2533-2276-FBBEE56B2DEC}"/>
               </a:ext>
             </a:extLst>
           </p:cNvPr>
@@ -11941,7 +12031,10 @@
               <a:buNone/>
               <a:defRPr sz="2000" b="1">
                 <a:solidFill>
-                  <a:schemeClr val="accent1"/>
+                  <a:schemeClr val="accent1">
+                    <a:lumMod val="70000"/>
+                    <a:lumOff val="30000"/>
+                  </a:schemeClr>
                 </a:solidFill>
                 <a:latin typeface="+mj-lt"/>
               </a:defRPr>
@@ -11961,7 +12054,7 @@
           <p:cNvPr id="13" name="item_4">
             <a:extLst>
               <a:ext uri="{FF2B5EF4-FFF2-40B4-BE49-F238E27FC236}">
-                <a16:creationId xmlns:a16="http://schemas.microsoft.com/office/drawing/2014/main" id="{B931CDAC-86AF-E576-04B3-F1157D5529CB}"/>
+                <a16:creationId xmlns:a16="http://schemas.microsoft.com/office/drawing/2014/main" id="{0619BA40-89EF-F900-D38A-BB1D007375BC}"/>
               </a:ext>
             </a:extLst>
           </p:cNvPr>
@@ -12009,7 +12102,7 @@
           <p:cNvPr id="14" name="source">
             <a:extLst>
               <a:ext uri="{FF2B5EF4-FFF2-40B4-BE49-F238E27FC236}">
-                <a16:creationId xmlns:a16="http://schemas.microsoft.com/office/drawing/2014/main" id="{8C8B4D43-4692-0555-B25A-99805622549C}"/>
+                <a16:creationId xmlns:a16="http://schemas.microsoft.com/office/drawing/2014/main" id="{187C6C07-081F-A713-4AEA-A4ABBECC19E7}"/>
               </a:ext>
             </a:extLst>
           </p:cNvPr>
@@ -12031,7 +12124,10 @@
             </a:avLst>
           </a:prstGeom>
           <a:solidFill>
-            <a:schemeClr val="accent1"/>
+            <a:schemeClr val="accent1">
+              <a:lumMod val="70000"/>
+              <a:lumOff val="30000"/>
+            </a:schemeClr>
           </a:solidFill>
         </p:spPr>
         <p:txBody>
@@ -12064,7 +12160,7 @@
     </p:spTree>
     <p:extLst>
       <p:ext uri="{BB962C8B-B14F-4D97-AF65-F5344CB8AC3E}">
-        <p14:creationId xmlns:p14="http://schemas.microsoft.com/office/powerpoint/2010/main" val="3418667386"/>
+        <p14:creationId xmlns:p14="http://schemas.microsoft.com/office/powerpoint/2010/main" val="23964564"/>
       </p:ext>
     </p:extLst>
   </p:cSld>
@@ -12133,9 +12229,9 @@
           <a:bodyPr/>
           <a:lstStyle/>
           <a:p>
-            <a:fld id="{C108DDE1-F741-4F4F-A7D2-FBD0359B97CD}" type="datetimeFigureOut">
+            <a:fld id="{374EEE4F-B349-4B31-9811-90D259E0D621}" type="datetimeFigureOut">
               <a:rPr lang="en-US" smtClean="0"/>
-              <a:t>10/3/2026</a:t>
+              <a:t>10/4/2026</a:t>
             </a:fld>
             <a:endParaRPr lang="en-US"/>
           </a:p>
@@ -12175,7 +12271,7 @@
           <a:bodyPr/>
           <a:lstStyle/>
           <a:p>
-            <a:fld id="{D07356AB-B086-4690-8078-803F810DAE76}" type="slidenum">
+            <a:fld id="{6622063C-0B57-47EC-9E6E-D170EF750DAF}" type="slidenum">
               <a:rPr lang="en-US" smtClean="0"/>
               <a:t>‹#›</a:t>
             </a:fld>
@@ -12188,7 +12284,7 @@
           <p:cNvPr id="6" name="marker_1">
             <a:extLst>
               <a:ext uri="{FF2B5EF4-FFF2-40B4-BE49-F238E27FC236}">
-                <a16:creationId xmlns:a16="http://schemas.microsoft.com/office/drawing/2014/main" id="{DDFB4738-FA72-5138-0E36-3C52956441C2}"/>
+                <a16:creationId xmlns:a16="http://schemas.microsoft.com/office/drawing/2014/main" id="{6795392D-3F09-C8E8-0A4D-6F9B870C84DB}"/>
               </a:ext>
             </a:extLst>
           </p:cNvPr>
@@ -12208,7 +12304,10 @@
             <a:avLst/>
           </a:prstGeom>
           <a:solidFill>
-            <a:schemeClr val="accent1"/>
+            <a:schemeClr val="accent1">
+              <a:lumMod val="70000"/>
+              <a:lumOff val="30000"/>
+            </a:schemeClr>
           </a:solidFill>
         </p:spPr>
         <p:txBody>
@@ -12244,7 +12343,7 @@
           <p:cNvPr id="7" name="item_1_title">
             <a:extLst>
               <a:ext uri="{FF2B5EF4-FFF2-40B4-BE49-F238E27FC236}">
-                <a16:creationId xmlns:a16="http://schemas.microsoft.com/office/drawing/2014/main" id="{49F0D445-C405-C32F-E85C-9BA98C83E339}"/>
+                <a16:creationId xmlns:a16="http://schemas.microsoft.com/office/drawing/2014/main" id="{C30F894A-BFF2-7085-72A3-BB978E3E6558}"/>
               </a:ext>
             </a:extLst>
           </p:cNvPr>
@@ -12277,7 +12376,10 @@
               <a:buNone/>
               <a:defRPr sz="2000" b="1">
                 <a:solidFill>
-                  <a:schemeClr val="accent1"/>
+                  <a:schemeClr val="accent1">
+                    <a:lumMod val="70000"/>
+                    <a:lumOff val="30000"/>
+                  </a:schemeClr>
                 </a:solidFill>
                 <a:latin typeface="+mj-lt"/>
               </a:defRPr>
@@ -12297,7 +12399,7 @@
           <p:cNvPr id="8" name="item_1">
             <a:extLst>
               <a:ext uri="{FF2B5EF4-FFF2-40B4-BE49-F238E27FC236}">
-                <a16:creationId xmlns:a16="http://schemas.microsoft.com/office/drawing/2014/main" id="{3DAA7F01-B56A-4E86-D0BB-F33423AA3F6E}"/>
+                <a16:creationId xmlns:a16="http://schemas.microsoft.com/office/drawing/2014/main" id="{658E55B2-B39A-1F7D-6F0C-FD008BECF363}"/>
               </a:ext>
             </a:extLst>
           </p:cNvPr>
@@ -12345,7 +12447,7 @@
           <p:cNvPr id="9" name="marker_2">
             <a:extLst>
               <a:ext uri="{FF2B5EF4-FFF2-40B4-BE49-F238E27FC236}">
-                <a16:creationId xmlns:a16="http://schemas.microsoft.com/office/drawing/2014/main" id="{4EAEB330-5701-BF9D-4399-6219B36DB004}"/>
+                <a16:creationId xmlns:a16="http://schemas.microsoft.com/office/drawing/2014/main" id="{CEA72C64-A07E-BDE5-AB9A-48572E719CE8}"/>
               </a:ext>
             </a:extLst>
           </p:cNvPr>
@@ -12365,7 +12467,10 @@
             <a:avLst/>
           </a:prstGeom>
           <a:solidFill>
-            <a:schemeClr val="accent1"/>
+            <a:schemeClr val="accent1">
+              <a:lumMod val="70000"/>
+              <a:lumOff val="30000"/>
+            </a:schemeClr>
           </a:solidFill>
         </p:spPr>
         <p:txBody>
@@ -12401,7 +12506,7 @@
           <p:cNvPr id="10" name="item_2_title">
             <a:extLst>
               <a:ext uri="{FF2B5EF4-FFF2-40B4-BE49-F238E27FC236}">
-                <a16:creationId xmlns:a16="http://schemas.microsoft.com/office/drawing/2014/main" id="{00E7E801-C513-2096-5395-97E177168B1A}"/>
+                <a16:creationId xmlns:a16="http://schemas.microsoft.com/office/drawing/2014/main" id="{CFC91CD8-1276-C3A6-C338-EE5BF5284905}"/>
               </a:ext>
             </a:extLst>
           </p:cNvPr>
@@ -12434,7 +12539,10 @@
               <a:buNone/>
               <a:defRPr sz="2000" b="1">
                 <a:solidFill>
-                  <a:schemeClr val="accent1"/>
+                  <a:schemeClr val="accent1">
+                    <a:lumMod val="70000"/>
+                    <a:lumOff val="30000"/>
+                  </a:schemeClr>
                 </a:solidFill>
                 <a:latin typeface="+mj-lt"/>
               </a:defRPr>
@@ -12454,7 +12562,7 @@
           <p:cNvPr id="11" name="item_2">
             <a:extLst>
               <a:ext uri="{FF2B5EF4-FFF2-40B4-BE49-F238E27FC236}">
-                <a16:creationId xmlns:a16="http://schemas.microsoft.com/office/drawing/2014/main" id="{A061DC3E-7101-425D-5EAD-669420F2BE20}"/>
+                <a16:creationId xmlns:a16="http://schemas.microsoft.com/office/drawing/2014/main" id="{A3547CC2-0BC3-90B8-B800-711385F24A47}"/>
               </a:ext>
             </a:extLst>
           </p:cNvPr>
@@ -12502,7 +12610,7 @@
           <p:cNvPr id="12" name="source">
             <a:extLst>
               <a:ext uri="{FF2B5EF4-FFF2-40B4-BE49-F238E27FC236}">
-                <a16:creationId xmlns:a16="http://schemas.microsoft.com/office/drawing/2014/main" id="{8239092F-B2A4-2EA4-5D29-D2D88F07A8EE}"/>
+                <a16:creationId xmlns:a16="http://schemas.microsoft.com/office/drawing/2014/main" id="{23225780-2609-497E-9645-3D1C5B8EB346}"/>
               </a:ext>
             </a:extLst>
           </p:cNvPr>
@@ -12524,7 +12632,10 @@
             </a:avLst>
           </a:prstGeom>
           <a:solidFill>
-            <a:schemeClr val="accent1"/>
+            <a:schemeClr val="accent1">
+              <a:lumMod val="70000"/>
+              <a:lumOff val="30000"/>
+            </a:schemeClr>
           </a:solidFill>
         </p:spPr>
         <p:txBody>
@@ -12557,7 +12668,7 @@
     </p:spTree>
     <p:extLst>
       <p:ext uri="{BB962C8B-B14F-4D97-AF65-F5344CB8AC3E}">
-        <p14:creationId xmlns:p14="http://schemas.microsoft.com/office/powerpoint/2010/main" val="206712502"/>
+        <p14:creationId xmlns:p14="http://schemas.microsoft.com/office/powerpoint/2010/main" val="2454859058"/>
       </p:ext>
     </p:extLst>
   </p:cSld>
@@ -12626,9 +12737,9 @@
           <a:bodyPr/>
           <a:lstStyle/>
           <a:p>
-            <a:fld id="{C108DDE1-F741-4F4F-A7D2-FBD0359B97CD}" type="datetimeFigureOut">
+            <a:fld id="{374EEE4F-B349-4B31-9811-90D259E0D621}" type="datetimeFigureOut">
               <a:rPr lang="en-US" smtClean="0"/>
-              <a:t>10/3/2026</a:t>
+              <a:t>10/4/2026</a:t>
             </a:fld>
             <a:endParaRPr lang="en-US"/>
           </a:p>
@@ -12668,7 +12779,7 @@
           <a:bodyPr/>
           <a:lstStyle/>
           <a:p>
-            <a:fld id="{D07356AB-B086-4690-8078-803F810DAE76}" type="slidenum">
+            <a:fld id="{6622063C-0B57-47EC-9E6E-D170EF750DAF}" type="slidenum">
               <a:rPr lang="en-US" smtClean="0"/>
               <a:t>‹#›</a:t>
             </a:fld>
@@ -12681,7 +12792,7 @@
           <p:cNvPr id="6" name="item_1_title">
             <a:extLst>
               <a:ext uri="{FF2B5EF4-FFF2-40B4-BE49-F238E27FC236}">
-                <a16:creationId xmlns:a16="http://schemas.microsoft.com/office/drawing/2014/main" id="{B2FF1E36-8BCA-FCC4-47AD-CA06DEEB4ECC}"/>
+                <a16:creationId xmlns:a16="http://schemas.microsoft.com/office/drawing/2014/main" id="{59727B56-D5DE-CA6A-67D1-09010BE64AFE}"/>
               </a:ext>
             </a:extLst>
           </p:cNvPr>
@@ -12711,7 +12822,10 @@
               <a:buNone/>
               <a:defRPr sz="2000" b="1">
                 <a:solidFill>
-                  <a:schemeClr val="accent1"/>
+                  <a:schemeClr val="accent1">
+                    <a:lumMod val="70000"/>
+                    <a:lumOff val="30000"/>
+                  </a:schemeClr>
                 </a:solidFill>
                 <a:latin typeface="+mj-lt"/>
               </a:defRPr>
@@ -12731,7 +12845,7 @@
           <p:cNvPr id="7" name="item_1">
             <a:extLst>
               <a:ext uri="{FF2B5EF4-FFF2-40B4-BE49-F238E27FC236}">
-                <a16:creationId xmlns:a16="http://schemas.microsoft.com/office/drawing/2014/main" id="{C1298EF6-7B55-84CB-AE12-950FD40DCAEC}"/>
+                <a16:creationId xmlns:a16="http://schemas.microsoft.com/office/drawing/2014/main" id="{464FF2D9-2BAA-9866-C398-E682AC1082A3}"/>
               </a:ext>
             </a:extLst>
           </p:cNvPr>
@@ -12779,7 +12893,7 @@
           <p:cNvPr id="8" name="item_2_title">
             <a:extLst>
               <a:ext uri="{FF2B5EF4-FFF2-40B4-BE49-F238E27FC236}">
-                <a16:creationId xmlns:a16="http://schemas.microsoft.com/office/drawing/2014/main" id="{2196C3B6-CFA8-564F-16FF-26EFBD63BE11}"/>
+                <a16:creationId xmlns:a16="http://schemas.microsoft.com/office/drawing/2014/main" id="{5A158266-AEF2-CFCF-DC00-CAB94236D944}"/>
               </a:ext>
             </a:extLst>
           </p:cNvPr>
@@ -12812,7 +12926,10 @@
               <a:buNone/>
               <a:defRPr sz="2000" b="1">
                 <a:solidFill>
-                  <a:schemeClr val="accent1"/>
+                  <a:schemeClr val="accent1">
+                    <a:lumMod val="70000"/>
+                    <a:lumOff val="30000"/>
+                  </a:schemeClr>
                 </a:solidFill>
                 <a:latin typeface="+mj-lt"/>
               </a:defRPr>
@@ -12832,7 +12949,7 @@
           <p:cNvPr id="9" name="item_2">
             <a:extLst>
               <a:ext uri="{FF2B5EF4-FFF2-40B4-BE49-F238E27FC236}">
-                <a16:creationId xmlns:a16="http://schemas.microsoft.com/office/drawing/2014/main" id="{53E8CB61-3B3D-876F-5873-158B4E87E4D9}"/>
+                <a16:creationId xmlns:a16="http://schemas.microsoft.com/office/drawing/2014/main" id="{2626AC1A-3A51-408F-A1CC-1FF52898D081}"/>
               </a:ext>
             </a:extLst>
           </p:cNvPr>
@@ -12880,7 +12997,7 @@
           <p:cNvPr id="10" name="item_3_title">
             <a:extLst>
               <a:ext uri="{FF2B5EF4-FFF2-40B4-BE49-F238E27FC236}">
-                <a16:creationId xmlns:a16="http://schemas.microsoft.com/office/drawing/2014/main" id="{2455C002-CFF3-5FB7-3F35-B910B12D4F41}"/>
+                <a16:creationId xmlns:a16="http://schemas.microsoft.com/office/drawing/2014/main" id="{557AB4B0-D5B5-CCAF-4397-111A50AF7D2A}"/>
               </a:ext>
             </a:extLst>
           </p:cNvPr>
@@ -12913,7 +13030,10 @@
               <a:buNone/>
               <a:defRPr sz="2000" b="1">
                 <a:solidFill>
-                  <a:schemeClr val="accent1"/>
+                  <a:schemeClr val="accent1">
+                    <a:lumMod val="70000"/>
+                    <a:lumOff val="30000"/>
+                  </a:schemeClr>
                 </a:solidFill>
                 <a:latin typeface="+mj-lt"/>
               </a:defRPr>
@@ -12933,7 +13053,7 @@
           <p:cNvPr id="11" name="item_3">
             <a:extLst>
               <a:ext uri="{FF2B5EF4-FFF2-40B4-BE49-F238E27FC236}">
-                <a16:creationId xmlns:a16="http://schemas.microsoft.com/office/drawing/2014/main" id="{3B96DEF9-6D67-E8BB-E417-1D4031990A82}"/>
+                <a16:creationId xmlns:a16="http://schemas.microsoft.com/office/drawing/2014/main" id="{036D30A6-777B-DBC0-DFC9-3CB3B9478A64}"/>
               </a:ext>
             </a:extLst>
           </p:cNvPr>
@@ -12981,7 +13101,7 @@
           <p:cNvPr id="12" name="item_4_title">
             <a:extLst>
               <a:ext uri="{FF2B5EF4-FFF2-40B4-BE49-F238E27FC236}">
-                <a16:creationId xmlns:a16="http://schemas.microsoft.com/office/drawing/2014/main" id="{F87FC2EC-1787-40D1-79C8-29AF1E6DDC71}"/>
+                <a16:creationId xmlns:a16="http://schemas.microsoft.com/office/drawing/2014/main" id="{CFD02D52-C628-C114-4B56-635180EC4D22}"/>
               </a:ext>
             </a:extLst>
           </p:cNvPr>
@@ -13014,7 +13134,10 @@
               <a:buNone/>
               <a:defRPr sz="2000" b="1">
                 <a:solidFill>
-                  <a:schemeClr val="accent1"/>
+                  <a:schemeClr val="accent1">
+                    <a:lumMod val="70000"/>
+                    <a:lumOff val="30000"/>
+                  </a:schemeClr>
                 </a:solidFill>
                 <a:latin typeface="+mj-lt"/>
               </a:defRPr>
@@ -13034,7 +13157,7 @@
           <p:cNvPr id="13" name="item_4">
             <a:extLst>
               <a:ext uri="{FF2B5EF4-FFF2-40B4-BE49-F238E27FC236}">
-                <a16:creationId xmlns:a16="http://schemas.microsoft.com/office/drawing/2014/main" id="{57F73BC3-387D-3A2C-7126-8FAA31FEE357}"/>
+                <a16:creationId xmlns:a16="http://schemas.microsoft.com/office/drawing/2014/main" id="{05702C84-7A73-C3CC-9DAB-77618DF3A84C}"/>
               </a:ext>
             </a:extLst>
           </p:cNvPr>
@@ -13082,7 +13205,7 @@
           <p:cNvPr id="14" name="source">
             <a:extLst>
               <a:ext uri="{FF2B5EF4-FFF2-40B4-BE49-F238E27FC236}">
-                <a16:creationId xmlns:a16="http://schemas.microsoft.com/office/drawing/2014/main" id="{A6B224C9-A27C-5084-4137-D352E136CBE9}"/>
+                <a16:creationId xmlns:a16="http://schemas.microsoft.com/office/drawing/2014/main" id="{B3F60505-BEFF-49A1-78C1-6977C78716C5}"/>
               </a:ext>
             </a:extLst>
           </p:cNvPr>
@@ -13104,7 +13227,10 @@
             </a:avLst>
           </a:prstGeom>
           <a:solidFill>
-            <a:schemeClr val="accent1"/>
+            <a:schemeClr val="accent1">
+              <a:lumMod val="70000"/>
+              <a:lumOff val="30000"/>
+            </a:schemeClr>
           </a:solidFill>
         </p:spPr>
         <p:txBody>
@@ -13137,7 +13263,7 @@
     </p:spTree>
     <p:extLst>
       <p:ext uri="{BB962C8B-B14F-4D97-AF65-F5344CB8AC3E}">
-        <p14:creationId xmlns:p14="http://schemas.microsoft.com/office/powerpoint/2010/main" val="2775869166"/>
+        <p14:creationId xmlns:p14="http://schemas.microsoft.com/office/powerpoint/2010/main" val="2089079903"/>
       </p:ext>
     </p:extLst>
   </p:cSld>
@@ -13206,9 +13332,9 @@
           <a:bodyPr/>
           <a:lstStyle/>
           <a:p>
-            <a:fld id="{C108DDE1-F741-4F4F-A7D2-FBD0359B97CD}" type="datetimeFigureOut">
+            <a:fld id="{374EEE4F-B349-4B31-9811-90D259E0D621}" type="datetimeFigureOut">
               <a:rPr lang="en-US" smtClean="0"/>
-              <a:t>10/3/2026</a:t>
+              <a:t>10/4/2026</a:t>
             </a:fld>
             <a:endParaRPr lang="en-US"/>
           </a:p>
@@ -13248,7 +13374,7 @@
           <a:bodyPr/>
           <a:lstStyle/>
           <a:p>
-            <a:fld id="{D07356AB-B086-4690-8078-803F810DAE76}" type="slidenum">
+            <a:fld id="{6622063C-0B57-47EC-9E6E-D170EF750DAF}" type="slidenum">
               <a:rPr lang="en-US" smtClean="0"/>
               <a:t>‹#›</a:t>
             </a:fld>
@@ -13261,7 +13387,7 @@
           <p:cNvPr id="6" name="item_1_title">
             <a:extLst>
               <a:ext uri="{FF2B5EF4-FFF2-40B4-BE49-F238E27FC236}">
-                <a16:creationId xmlns:a16="http://schemas.microsoft.com/office/drawing/2014/main" id="{FDE54297-A514-1EB9-B786-75B7488F9DBA}"/>
+                <a16:creationId xmlns:a16="http://schemas.microsoft.com/office/drawing/2014/main" id="{C45BBAAE-0117-D621-423E-BA4A3417ED04}"/>
               </a:ext>
             </a:extLst>
           </p:cNvPr>
@@ -13291,7 +13417,10 @@
               <a:buNone/>
               <a:defRPr sz="2000" b="1">
                 <a:solidFill>
-                  <a:schemeClr val="accent1"/>
+                  <a:schemeClr val="accent1">
+                    <a:lumMod val="70000"/>
+                    <a:lumOff val="30000"/>
+                  </a:schemeClr>
                 </a:solidFill>
                 <a:latin typeface="+mj-lt"/>
               </a:defRPr>
@@ -13311,7 +13440,7 @@
           <p:cNvPr id="7" name="item_1">
             <a:extLst>
               <a:ext uri="{FF2B5EF4-FFF2-40B4-BE49-F238E27FC236}">
-                <a16:creationId xmlns:a16="http://schemas.microsoft.com/office/drawing/2014/main" id="{360B6F34-9785-2B13-FC34-8883F681910C}"/>
+                <a16:creationId xmlns:a16="http://schemas.microsoft.com/office/drawing/2014/main" id="{DBAD300C-1B9D-5CDC-B273-0006A60AB202}"/>
               </a:ext>
             </a:extLst>
           </p:cNvPr>
@@ -13359,7 +13488,7 @@
           <p:cNvPr id="8" name="item_2_title">
             <a:extLst>
               <a:ext uri="{FF2B5EF4-FFF2-40B4-BE49-F238E27FC236}">
-                <a16:creationId xmlns:a16="http://schemas.microsoft.com/office/drawing/2014/main" id="{03218E49-4157-63F3-9E80-A58161ECF103}"/>
+                <a16:creationId xmlns:a16="http://schemas.microsoft.com/office/drawing/2014/main" id="{71EF0DDE-59AC-8AEB-E666-28572A2E4F77}"/>
               </a:ext>
             </a:extLst>
           </p:cNvPr>
@@ -13392,7 +13521,10 @@
               <a:buNone/>
               <a:defRPr sz="2000" b="1">
                 <a:solidFill>
-                  <a:schemeClr val="accent1"/>
+                  <a:schemeClr val="accent1">
+                    <a:lumMod val="70000"/>
+                    <a:lumOff val="30000"/>
+                  </a:schemeClr>
                 </a:solidFill>
                 <a:latin typeface="+mj-lt"/>
               </a:defRPr>
@@ -13412,7 +13544,7 @@
           <p:cNvPr id="9" name="item_2">
             <a:extLst>
               <a:ext uri="{FF2B5EF4-FFF2-40B4-BE49-F238E27FC236}">
-                <a16:creationId xmlns:a16="http://schemas.microsoft.com/office/drawing/2014/main" id="{72AF853C-7AC9-807D-BE98-4EC16E49D8CE}"/>
+                <a16:creationId xmlns:a16="http://schemas.microsoft.com/office/drawing/2014/main" id="{FB652846-68F5-0281-4F9A-EE8865018E8F}"/>
               </a:ext>
             </a:extLst>
           </p:cNvPr>
@@ -13460,7 +13592,7 @@
           <p:cNvPr id="10" name="item_3_title">
             <a:extLst>
               <a:ext uri="{FF2B5EF4-FFF2-40B4-BE49-F238E27FC236}">
-                <a16:creationId xmlns:a16="http://schemas.microsoft.com/office/drawing/2014/main" id="{5EA3589F-52F4-129B-6325-0F23AF0F2A53}"/>
+                <a16:creationId xmlns:a16="http://schemas.microsoft.com/office/drawing/2014/main" id="{4818A4CD-3AF2-AB38-3068-AE8041C63BFD}"/>
               </a:ext>
             </a:extLst>
           </p:cNvPr>
@@ -13493,7 +13625,10 @@
               <a:buNone/>
               <a:defRPr sz="2000" b="1">
                 <a:solidFill>
-                  <a:schemeClr val="accent1"/>
+                  <a:schemeClr val="accent1">
+                    <a:lumMod val="70000"/>
+                    <a:lumOff val="30000"/>
+                  </a:schemeClr>
                 </a:solidFill>
                 <a:latin typeface="+mj-lt"/>
               </a:defRPr>
@@ -13513,7 +13648,7 @@
           <p:cNvPr id="11" name="item_3">
             <a:extLst>
               <a:ext uri="{FF2B5EF4-FFF2-40B4-BE49-F238E27FC236}">
-                <a16:creationId xmlns:a16="http://schemas.microsoft.com/office/drawing/2014/main" id="{7BCA203F-622C-9345-8FC0-BD89AE72E3DD}"/>
+                <a16:creationId xmlns:a16="http://schemas.microsoft.com/office/drawing/2014/main" id="{A5ED1F12-1CF0-B34B-BF4C-5ED2FC56A65A}"/>
               </a:ext>
             </a:extLst>
           </p:cNvPr>
@@ -13561,7 +13696,7 @@
           <p:cNvPr id="12" name="item_4_title">
             <a:extLst>
               <a:ext uri="{FF2B5EF4-FFF2-40B4-BE49-F238E27FC236}">
-                <a16:creationId xmlns:a16="http://schemas.microsoft.com/office/drawing/2014/main" id="{0C988952-A30E-36D0-6EC3-DF4B740809F9}"/>
+                <a16:creationId xmlns:a16="http://schemas.microsoft.com/office/drawing/2014/main" id="{643BC214-066F-4470-2267-D191560B367B}"/>
               </a:ext>
             </a:extLst>
           </p:cNvPr>
@@ -13594,7 +13729,10 @@
               <a:buNone/>
               <a:defRPr sz="2000" b="1">
                 <a:solidFill>
-                  <a:schemeClr val="accent1"/>
+                  <a:schemeClr val="accent1">
+                    <a:lumMod val="70000"/>
+                    <a:lumOff val="30000"/>
+                  </a:schemeClr>
                 </a:solidFill>
                 <a:latin typeface="+mj-lt"/>
               </a:defRPr>
@@ -13614,7 +13752,7 @@
           <p:cNvPr id="13" name="item_4">
             <a:extLst>
               <a:ext uri="{FF2B5EF4-FFF2-40B4-BE49-F238E27FC236}">
-                <a16:creationId xmlns:a16="http://schemas.microsoft.com/office/drawing/2014/main" id="{3A9CBFFC-48AE-C009-715E-55A9D55D6886}"/>
+                <a16:creationId xmlns:a16="http://schemas.microsoft.com/office/drawing/2014/main" id="{0F268940-4DED-73BA-6309-F5D6ED58C021}"/>
               </a:ext>
             </a:extLst>
           </p:cNvPr>
@@ -13662,7 +13800,7 @@
           <p:cNvPr id="14" name="source">
             <a:extLst>
               <a:ext uri="{FF2B5EF4-FFF2-40B4-BE49-F238E27FC236}">
-                <a16:creationId xmlns:a16="http://schemas.microsoft.com/office/drawing/2014/main" id="{507FDD59-37B6-CF74-2991-4C41C2098191}"/>
+                <a16:creationId xmlns:a16="http://schemas.microsoft.com/office/drawing/2014/main" id="{2258A911-0F84-DB0F-78B1-51EC5869ED74}"/>
               </a:ext>
             </a:extLst>
           </p:cNvPr>
@@ -13684,7 +13822,10 @@
             </a:avLst>
           </a:prstGeom>
           <a:solidFill>
-            <a:schemeClr val="accent1"/>
+            <a:schemeClr val="accent1">
+              <a:lumMod val="70000"/>
+              <a:lumOff val="30000"/>
+            </a:schemeClr>
           </a:solidFill>
         </p:spPr>
         <p:txBody>
@@ -13717,7 +13858,7 @@
     </p:spTree>
     <p:extLst>
       <p:ext uri="{BB962C8B-B14F-4D97-AF65-F5344CB8AC3E}">
-        <p14:creationId xmlns:p14="http://schemas.microsoft.com/office/powerpoint/2010/main" val="16847027"/>
+        <p14:creationId xmlns:p14="http://schemas.microsoft.com/office/powerpoint/2010/main" val="2535849333"/>
       </p:ext>
     </p:extLst>
   </p:cSld>
@@ -13786,9 +13927,9 @@
           <a:bodyPr/>
           <a:lstStyle/>
           <a:p>
-            <a:fld id="{C108DDE1-F741-4F4F-A7D2-FBD0359B97CD}" type="datetimeFigureOut">
+            <a:fld id="{374EEE4F-B349-4B31-9811-90D259E0D621}" type="datetimeFigureOut">
               <a:rPr lang="en-US" smtClean="0"/>
-              <a:t>10/3/2026</a:t>
+              <a:t>10/4/2026</a:t>
             </a:fld>
             <a:endParaRPr lang="en-US"/>
           </a:p>
@@ -13828,7 +13969,7 @@
           <a:bodyPr/>
           <a:lstStyle/>
           <a:p>
-            <a:fld id="{D07356AB-B086-4690-8078-803F810DAE76}" type="slidenum">
+            <a:fld id="{6622063C-0B57-47EC-9E6E-D170EF750DAF}" type="slidenum">
               <a:rPr lang="en-US" smtClean="0"/>
               <a:t>‹#›</a:t>
             </a:fld>
@@ -13841,7 +13982,7 @@
           <p:cNvPr id="6" name="kpi_value_1">
             <a:extLst>
               <a:ext uri="{FF2B5EF4-FFF2-40B4-BE49-F238E27FC236}">
-                <a16:creationId xmlns:a16="http://schemas.microsoft.com/office/drawing/2014/main" id="{4CFE0C09-D304-CE8B-5BE3-B62774A033DD}"/>
+                <a16:creationId xmlns:a16="http://schemas.microsoft.com/office/drawing/2014/main" id="{645E37A5-FD5C-98DA-4B0E-E87CECCA85C9}"/>
               </a:ext>
             </a:extLst>
           </p:cNvPr>
@@ -13871,7 +14012,10 @@
               <a:buNone/>
               <a:defRPr sz="10800" b="1">
                 <a:solidFill>
-                  <a:schemeClr val="accent1"/>
+                  <a:schemeClr val="accent1">
+                    <a:lumMod val="70000"/>
+                    <a:lumOff val="30000"/>
+                  </a:schemeClr>
                 </a:solidFill>
                 <a:latin typeface="+mj-lt"/>
               </a:defRPr>
@@ -13891,7 +14035,7 @@
           <p:cNvPr id="7" name="kpi_label_1">
             <a:extLst>
               <a:ext uri="{FF2B5EF4-FFF2-40B4-BE49-F238E27FC236}">
-                <a16:creationId xmlns:a16="http://schemas.microsoft.com/office/drawing/2014/main" id="{B87FF5FB-9859-63BF-FA54-9DFB0529F248}"/>
+                <a16:creationId xmlns:a16="http://schemas.microsoft.com/office/drawing/2014/main" id="{AA6CC78E-3B31-BDA7-853A-73A06F2FB3C9}"/>
               </a:ext>
             </a:extLst>
           </p:cNvPr>
@@ -13939,7 +14083,7 @@
           <p:cNvPr id="8" name="quote">
             <a:extLst>
               <a:ext uri="{FF2B5EF4-FFF2-40B4-BE49-F238E27FC236}">
-                <a16:creationId xmlns:a16="http://schemas.microsoft.com/office/drawing/2014/main" id="{3C1663C2-2D02-0A76-856F-B1C21F2AA99D}"/>
+                <a16:creationId xmlns:a16="http://schemas.microsoft.com/office/drawing/2014/main" id="{77E5C667-C052-FB59-8943-385B0D5C5BE4}"/>
               </a:ext>
             </a:extLst>
           </p:cNvPr>
@@ -13989,7 +14133,7 @@
           <p:cNvPr id="9" name="attribution">
             <a:extLst>
               <a:ext uri="{FF2B5EF4-FFF2-40B4-BE49-F238E27FC236}">
-                <a16:creationId xmlns:a16="http://schemas.microsoft.com/office/drawing/2014/main" id="{FFE397E9-368C-1833-B8E8-2056F4BD2768}"/>
+                <a16:creationId xmlns:a16="http://schemas.microsoft.com/office/drawing/2014/main" id="{403A8AC7-A9D0-B157-D859-A0614ACA5A0F}"/>
               </a:ext>
             </a:extLst>
           </p:cNvPr>
@@ -14037,7 +14181,7 @@
           <p:cNvPr id="10" name="item_1_title">
             <a:extLst>
               <a:ext uri="{FF2B5EF4-FFF2-40B4-BE49-F238E27FC236}">
-                <a16:creationId xmlns:a16="http://schemas.microsoft.com/office/drawing/2014/main" id="{868585D9-6D64-3724-FE35-994A446F7BC7}"/>
+                <a16:creationId xmlns:a16="http://schemas.microsoft.com/office/drawing/2014/main" id="{8BDB5444-EBA8-4694-1A3D-86F779043279}"/>
               </a:ext>
             </a:extLst>
           </p:cNvPr>
@@ -14070,7 +14214,10 @@
               <a:buNone/>
               <a:defRPr sz="2000" b="1">
                 <a:solidFill>
-                  <a:schemeClr val="accent1"/>
+                  <a:schemeClr val="accent1">
+                    <a:lumMod val="70000"/>
+                    <a:lumOff val="30000"/>
+                  </a:schemeClr>
                 </a:solidFill>
                 <a:latin typeface="+mj-lt"/>
               </a:defRPr>
@@ -14090,7 +14237,7 @@
           <p:cNvPr id="11" name="item_1">
             <a:extLst>
               <a:ext uri="{FF2B5EF4-FFF2-40B4-BE49-F238E27FC236}">
-                <a16:creationId xmlns:a16="http://schemas.microsoft.com/office/drawing/2014/main" id="{D5B806FC-BEDE-F50D-DE96-E3F8508948ED}"/>
+                <a16:creationId xmlns:a16="http://schemas.microsoft.com/office/drawing/2014/main" id="{7C3D1EBD-0914-8B07-9EA3-25D719CE8D3A}"/>
               </a:ext>
             </a:extLst>
           </p:cNvPr>
@@ -14138,7 +14285,7 @@
           <p:cNvPr id="12" name="source">
             <a:extLst>
               <a:ext uri="{FF2B5EF4-FFF2-40B4-BE49-F238E27FC236}">
-                <a16:creationId xmlns:a16="http://schemas.microsoft.com/office/drawing/2014/main" id="{36A587C6-929D-F558-9852-AEF65E1A0EE9}"/>
+                <a16:creationId xmlns:a16="http://schemas.microsoft.com/office/drawing/2014/main" id="{462DFE49-A03B-D762-9B0B-06D1F2B98FED}"/>
               </a:ext>
             </a:extLst>
           </p:cNvPr>
@@ -14160,7 +14307,10 @@
             </a:avLst>
           </a:prstGeom>
           <a:solidFill>
-            <a:schemeClr val="accent1"/>
+            <a:schemeClr val="accent1">
+              <a:lumMod val="70000"/>
+              <a:lumOff val="30000"/>
+            </a:schemeClr>
           </a:solidFill>
         </p:spPr>
         <p:txBody>
@@ -14193,7 +14343,7 @@
     </p:spTree>
     <p:extLst>
       <p:ext uri="{BB962C8B-B14F-4D97-AF65-F5344CB8AC3E}">
-        <p14:creationId xmlns:p14="http://schemas.microsoft.com/office/powerpoint/2010/main" val="2716927620"/>
+        <p14:creationId xmlns:p14="http://schemas.microsoft.com/office/powerpoint/2010/main" val="418811564"/>
       </p:ext>
     </p:extLst>
   </p:cSld>
@@ -14262,9 +14412,9 @@
           <a:bodyPr/>
           <a:lstStyle/>
           <a:p>
-            <a:fld id="{C108DDE1-F741-4F4F-A7D2-FBD0359B97CD}" type="datetimeFigureOut">
+            <a:fld id="{374EEE4F-B349-4B31-9811-90D259E0D621}" type="datetimeFigureOut">
               <a:rPr lang="en-US" smtClean="0"/>
-              <a:t>10/3/2026</a:t>
+              <a:t>10/4/2026</a:t>
             </a:fld>
             <a:endParaRPr lang="en-US"/>
           </a:p>
@@ -14304,7 +14454,7 @@
           <a:bodyPr/>
           <a:lstStyle/>
           <a:p>
-            <a:fld id="{D07356AB-B086-4690-8078-803F810DAE76}" type="slidenum">
+            <a:fld id="{6622063C-0B57-47EC-9E6E-D170EF750DAF}" type="slidenum">
               <a:rPr lang="en-US" smtClean="0"/>
               <a:t>‹#›</a:t>
             </a:fld>
@@ -14317,7 +14467,7 @@
           <p:cNvPr id="6" name="item_1_title">
             <a:extLst>
               <a:ext uri="{FF2B5EF4-FFF2-40B4-BE49-F238E27FC236}">
-                <a16:creationId xmlns:a16="http://schemas.microsoft.com/office/drawing/2014/main" id="{76F5D8B7-C75E-49AF-892D-480B12913601}"/>
+                <a16:creationId xmlns:a16="http://schemas.microsoft.com/office/drawing/2014/main" id="{C536AB73-8919-FDA5-7A94-8B0B65934A50}"/>
               </a:ext>
             </a:extLst>
           </p:cNvPr>
@@ -14347,7 +14497,10 @@
               <a:buNone/>
               <a:defRPr sz="2000" b="1">
                 <a:solidFill>
-                  <a:schemeClr val="accent1"/>
+                  <a:schemeClr val="accent1">
+                    <a:lumMod val="70000"/>
+                    <a:lumOff val="30000"/>
+                  </a:schemeClr>
                 </a:solidFill>
                 <a:latin typeface="+mj-lt"/>
               </a:defRPr>
@@ -14367,7 +14520,7 @@
           <p:cNvPr id="7" name="item_1">
             <a:extLst>
               <a:ext uri="{FF2B5EF4-FFF2-40B4-BE49-F238E27FC236}">
-                <a16:creationId xmlns:a16="http://schemas.microsoft.com/office/drawing/2014/main" id="{488DAB5F-4162-0F1F-3C5A-CEF56F2748CD}"/>
+                <a16:creationId xmlns:a16="http://schemas.microsoft.com/office/drawing/2014/main" id="{72DBEAAA-DF0E-CBFF-9BCC-9B047C500D11}"/>
               </a:ext>
             </a:extLst>
           </p:cNvPr>
@@ -14415,7 +14568,7 @@
           <p:cNvPr id="8" name="item_2_title">
             <a:extLst>
               <a:ext uri="{FF2B5EF4-FFF2-40B4-BE49-F238E27FC236}">
-                <a16:creationId xmlns:a16="http://schemas.microsoft.com/office/drawing/2014/main" id="{88374A53-BAD0-5DB8-4562-894FB2303495}"/>
+                <a16:creationId xmlns:a16="http://schemas.microsoft.com/office/drawing/2014/main" id="{32FFC729-8ADC-4D09-24FC-E5E55BE82F87}"/>
               </a:ext>
             </a:extLst>
           </p:cNvPr>
@@ -14448,7 +14601,10 @@
               <a:buNone/>
               <a:defRPr sz="2000" b="1">
                 <a:solidFill>
-                  <a:schemeClr val="accent1"/>
+                  <a:schemeClr val="accent1">
+                    <a:lumMod val="70000"/>
+                    <a:lumOff val="30000"/>
+                  </a:schemeClr>
                 </a:solidFill>
                 <a:latin typeface="+mj-lt"/>
               </a:defRPr>
@@ -14468,7 +14624,7 @@
           <p:cNvPr id="9" name="item_2">
             <a:extLst>
               <a:ext uri="{FF2B5EF4-FFF2-40B4-BE49-F238E27FC236}">
-                <a16:creationId xmlns:a16="http://schemas.microsoft.com/office/drawing/2014/main" id="{BCD43441-AA63-7ACB-7021-F109A2B8F7BB}"/>
+                <a16:creationId xmlns:a16="http://schemas.microsoft.com/office/drawing/2014/main" id="{C6834FB6-E385-673B-2EE6-88D342461DF8}"/>
               </a:ext>
             </a:extLst>
           </p:cNvPr>
@@ -14516,7 +14672,7 @@
           <p:cNvPr id="10" name="item_3_title">
             <a:extLst>
               <a:ext uri="{FF2B5EF4-FFF2-40B4-BE49-F238E27FC236}">
-                <a16:creationId xmlns:a16="http://schemas.microsoft.com/office/drawing/2014/main" id="{92223ADA-8273-4E0C-7DA9-B7EF7458B72A}"/>
+                <a16:creationId xmlns:a16="http://schemas.microsoft.com/office/drawing/2014/main" id="{EBD79ECB-BD97-F576-A4E1-781AFB07104E}"/>
               </a:ext>
             </a:extLst>
           </p:cNvPr>
@@ -14549,7 +14705,10 @@
               <a:buNone/>
               <a:defRPr sz="2000" b="1">
                 <a:solidFill>
-                  <a:schemeClr val="accent1"/>
+                  <a:schemeClr val="accent1">
+                    <a:lumMod val="70000"/>
+                    <a:lumOff val="30000"/>
+                  </a:schemeClr>
                 </a:solidFill>
                 <a:latin typeface="+mj-lt"/>
               </a:defRPr>
@@ -14569,7 +14728,7 @@
           <p:cNvPr id="11" name="item_3">
             <a:extLst>
               <a:ext uri="{FF2B5EF4-FFF2-40B4-BE49-F238E27FC236}">
-                <a16:creationId xmlns:a16="http://schemas.microsoft.com/office/drawing/2014/main" id="{16DE0DAC-7F75-A80E-F9B7-D25D209764B6}"/>
+                <a16:creationId xmlns:a16="http://schemas.microsoft.com/office/drawing/2014/main" id="{A59AAE5D-357A-2AAE-5B18-D74F89CF5249}"/>
               </a:ext>
             </a:extLst>
           </p:cNvPr>
@@ -14617,7 +14776,7 @@
           <p:cNvPr id="12" name="source">
             <a:extLst>
               <a:ext uri="{FF2B5EF4-FFF2-40B4-BE49-F238E27FC236}">
-                <a16:creationId xmlns:a16="http://schemas.microsoft.com/office/drawing/2014/main" id="{51F0EF38-354D-12CA-8CF7-E5CB9A1C8B47}"/>
+                <a16:creationId xmlns:a16="http://schemas.microsoft.com/office/drawing/2014/main" id="{4E73E375-1A16-A7B4-45B1-BE3D61DAF77C}"/>
               </a:ext>
             </a:extLst>
           </p:cNvPr>
@@ -14639,7 +14798,10 @@
             </a:avLst>
           </a:prstGeom>
           <a:solidFill>
-            <a:schemeClr val="accent1"/>
+            <a:schemeClr val="accent1">
+              <a:lumMod val="70000"/>
+              <a:lumOff val="30000"/>
+            </a:schemeClr>
           </a:solidFill>
         </p:spPr>
         <p:txBody>
@@ -14672,7 +14834,7 @@
     </p:spTree>
     <p:extLst>
       <p:ext uri="{BB962C8B-B14F-4D97-AF65-F5344CB8AC3E}">
-        <p14:creationId xmlns:p14="http://schemas.microsoft.com/office/powerpoint/2010/main" val="3944688207"/>
+        <p14:creationId xmlns:p14="http://schemas.microsoft.com/office/powerpoint/2010/main" val="626269208"/>
       </p:ext>
     </p:extLst>
   </p:cSld>
@@ -14741,9 +14903,9 @@
           <a:bodyPr/>
           <a:lstStyle/>
           <a:p>
-            <a:fld id="{C108DDE1-F741-4F4F-A7D2-FBD0359B97CD}" type="datetimeFigureOut">
+            <a:fld id="{374EEE4F-B349-4B31-9811-90D259E0D621}" type="datetimeFigureOut">
               <a:rPr lang="en-US" smtClean="0"/>
-              <a:t>10/3/2026</a:t>
+              <a:t>10/4/2026</a:t>
             </a:fld>
             <a:endParaRPr lang="en-US"/>
           </a:p>
@@ -14783,7 +14945,7 @@
           <a:bodyPr/>
           <a:lstStyle/>
           <a:p>
-            <a:fld id="{D07356AB-B086-4690-8078-803F810DAE76}" type="slidenum">
+            <a:fld id="{6622063C-0B57-47EC-9E6E-D170EF750DAF}" type="slidenum">
               <a:rPr lang="en-US" smtClean="0"/>
               <a:t>‹#›</a:t>
             </a:fld>
@@ -14796,7 +14958,7 @@
           <p:cNvPr id="6" name="marker_1">
             <a:extLst>
               <a:ext uri="{FF2B5EF4-FFF2-40B4-BE49-F238E27FC236}">
-                <a16:creationId xmlns:a16="http://schemas.microsoft.com/office/drawing/2014/main" id="{786414C2-5A00-6E7B-22D8-D15A2A0DEF94}"/>
+                <a16:creationId xmlns:a16="http://schemas.microsoft.com/office/drawing/2014/main" id="{2423350E-7110-E8E9-543B-FBA3A70241D4}"/>
               </a:ext>
             </a:extLst>
           </p:cNvPr>
@@ -14816,7 +14978,10 @@
             <a:avLst/>
           </a:prstGeom>
           <a:solidFill>
-            <a:schemeClr val="accent1"/>
+            <a:schemeClr val="accent1">
+              <a:lumMod val="70000"/>
+              <a:lumOff val="30000"/>
+            </a:schemeClr>
           </a:solidFill>
         </p:spPr>
         <p:txBody>
@@ -14852,7 +15017,7 @@
           <p:cNvPr id="7" name="item_1_title">
             <a:extLst>
               <a:ext uri="{FF2B5EF4-FFF2-40B4-BE49-F238E27FC236}">
-                <a16:creationId xmlns:a16="http://schemas.microsoft.com/office/drawing/2014/main" id="{AF49B86D-6CD1-727D-2AE8-51D1856E2AFF}"/>
+                <a16:creationId xmlns:a16="http://schemas.microsoft.com/office/drawing/2014/main" id="{4E2F924F-52ED-1653-10F7-AB2F0BC86688}"/>
               </a:ext>
             </a:extLst>
           </p:cNvPr>
@@ -14885,7 +15050,10 @@
               <a:buNone/>
               <a:defRPr sz="2000" b="1">
                 <a:solidFill>
-                  <a:schemeClr val="accent1"/>
+                  <a:schemeClr val="accent1">
+                    <a:lumMod val="70000"/>
+                    <a:lumOff val="30000"/>
+                  </a:schemeClr>
                 </a:solidFill>
                 <a:latin typeface="+mj-lt"/>
               </a:defRPr>
@@ -14905,7 +15073,7 @@
           <p:cNvPr id="8" name="item_1">
             <a:extLst>
               <a:ext uri="{FF2B5EF4-FFF2-40B4-BE49-F238E27FC236}">
-                <a16:creationId xmlns:a16="http://schemas.microsoft.com/office/drawing/2014/main" id="{E5B23F18-9911-DCFF-94B6-4CF48D144874}"/>
+                <a16:creationId xmlns:a16="http://schemas.microsoft.com/office/drawing/2014/main" id="{0188C4CB-4BE1-C36E-8812-C5633D2185E6}"/>
               </a:ext>
             </a:extLst>
           </p:cNvPr>
@@ -14953,7 +15121,7 @@
           <p:cNvPr id="9" name="marker_2">
             <a:extLst>
               <a:ext uri="{FF2B5EF4-FFF2-40B4-BE49-F238E27FC236}">
-                <a16:creationId xmlns:a16="http://schemas.microsoft.com/office/drawing/2014/main" id="{CED61679-CA01-26F2-4343-D5F7428FBA45}"/>
+                <a16:creationId xmlns:a16="http://schemas.microsoft.com/office/drawing/2014/main" id="{AA6A4202-C978-5380-ABCF-8C3AAC1030F3}"/>
               </a:ext>
             </a:extLst>
           </p:cNvPr>
@@ -14973,7 +15141,10 @@
             <a:avLst/>
           </a:prstGeom>
           <a:solidFill>
-            <a:schemeClr val="accent1"/>
+            <a:schemeClr val="accent1">
+              <a:lumMod val="70000"/>
+              <a:lumOff val="30000"/>
+            </a:schemeClr>
           </a:solidFill>
         </p:spPr>
         <p:txBody>
@@ -15009,7 +15180,7 @@
           <p:cNvPr id="10" name="item_2_title">
             <a:extLst>
               <a:ext uri="{FF2B5EF4-FFF2-40B4-BE49-F238E27FC236}">
-                <a16:creationId xmlns:a16="http://schemas.microsoft.com/office/drawing/2014/main" id="{F971AD07-6628-F2D6-605B-39888282D792}"/>
+                <a16:creationId xmlns:a16="http://schemas.microsoft.com/office/drawing/2014/main" id="{E1187519-B133-DCE7-320C-0ADA59FB1978}"/>
               </a:ext>
             </a:extLst>
           </p:cNvPr>
@@ -15042,7 +15213,10 @@
               <a:buNone/>
               <a:defRPr sz="2000" b="1">
                 <a:solidFill>
-                  <a:schemeClr val="accent1"/>
+                  <a:schemeClr val="accent1">
+                    <a:lumMod val="70000"/>
+                    <a:lumOff val="30000"/>
+                  </a:schemeClr>
                 </a:solidFill>
                 <a:latin typeface="+mj-lt"/>
               </a:defRPr>
@@ -15062,7 +15236,7 @@
           <p:cNvPr id="11" name="item_2">
             <a:extLst>
               <a:ext uri="{FF2B5EF4-FFF2-40B4-BE49-F238E27FC236}">
-                <a16:creationId xmlns:a16="http://schemas.microsoft.com/office/drawing/2014/main" id="{F33B362F-B73D-C5BD-0015-A46E1DDD1A64}"/>
+                <a16:creationId xmlns:a16="http://schemas.microsoft.com/office/drawing/2014/main" id="{180BE27D-0FA2-178C-D932-55DF13EDE860}"/>
               </a:ext>
             </a:extLst>
           </p:cNvPr>
@@ -15110,7 +15284,7 @@
           <p:cNvPr id="12" name="source">
             <a:extLst>
               <a:ext uri="{FF2B5EF4-FFF2-40B4-BE49-F238E27FC236}">
-                <a16:creationId xmlns:a16="http://schemas.microsoft.com/office/drawing/2014/main" id="{68272A5E-C983-C060-7887-96C53D325E78}"/>
+                <a16:creationId xmlns:a16="http://schemas.microsoft.com/office/drawing/2014/main" id="{11851C92-828C-5EC8-66FE-35725B176FF5}"/>
               </a:ext>
             </a:extLst>
           </p:cNvPr>
@@ -15132,7 +15306,10 @@
             </a:avLst>
           </a:prstGeom>
           <a:solidFill>
-            <a:schemeClr val="accent1"/>
+            <a:schemeClr val="accent1">
+              <a:lumMod val="70000"/>
+              <a:lumOff val="30000"/>
+            </a:schemeClr>
           </a:solidFill>
         </p:spPr>
         <p:txBody>
@@ -15165,7 +15342,7 @@
     </p:spTree>
     <p:extLst>
       <p:ext uri="{BB962C8B-B14F-4D97-AF65-F5344CB8AC3E}">
-        <p14:creationId xmlns:p14="http://schemas.microsoft.com/office/powerpoint/2010/main" val="1223842637"/>
+        <p14:creationId xmlns:p14="http://schemas.microsoft.com/office/powerpoint/2010/main" val="370885281"/>
       </p:ext>
     </p:extLst>
   </p:cSld>
@@ -15234,9 +15411,9 @@
           <a:bodyPr/>
           <a:lstStyle/>
           <a:p>
-            <a:fld id="{C108DDE1-F741-4F4F-A7D2-FBD0359B97CD}" type="datetimeFigureOut">
+            <a:fld id="{374EEE4F-B349-4B31-9811-90D259E0D621}" type="datetimeFigureOut">
               <a:rPr lang="en-US" smtClean="0"/>
-              <a:t>10/3/2026</a:t>
+              <a:t>10/4/2026</a:t>
             </a:fld>
             <a:endParaRPr lang="en-US"/>
           </a:p>
@@ -15276,7 +15453,7 @@
           <a:bodyPr/>
           <a:lstStyle/>
           <a:p>
-            <a:fld id="{D07356AB-B086-4690-8078-803F810DAE76}" type="slidenum">
+            <a:fld id="{6622063C-0B57-47EC-9E6E-D170EF750DAF}" type="slidenum">
               <a:rPr lang="en-US" smtClean="0"/>
               <a:t>‹#›</a:t>
             </a:fld>
@@ -15289,7 +15466,7 @@
           <p:cNvPr id="6" name="kpi_value_1">
             <a:extLst>
               <a:ext uri="{FF2B5EF4-FFF2-40B4-BE49-F238E27FC236}">
-                <a16:creationId xmlns:a16="http://schemas.microsoft.com/office/drawing/2014/main" id="{5A1674CF-B957-1E7B-8382-09E4BF28BAA5}"/>
+                <a16:creationId xmlns:a16="http://schemas.microsoft.com/office/drawing/2014/main" id="{AC3642F4-15B4-1618-81D1-8147E4D84E9F}"/>
               </a:ext>
             </a:extLst>
           </p:cNvPr>
@@ -15319,7 +15496,10 @@
               <a:buNone/>
               <a:defRPr sz="10800" b="1">
                 <a:solidFill>
-                  <a:schemeClr val="accent1"/>
+                  <a:schemeClr val="accent1">
+                    <a:lumMod val="70000"/>
+                    <a:lumOff val="30000"/>
+                  </a:schemeClr>
                 </a:solidFill>
                 <a:latin typeface="+mj-lt"/>
               </a:defRPr>
@@ -15339,7 +15519,7 @@
           <p:cNvPr id="7" name="kpi_label_1">
             <a:extLst>
               <a:ext uri="{FF2B5EF4-FFF2-40B4-BE49-F238E27FC236}">
-                <a16:creationId xmlns:a16="http://schemas.microsoft.com/office/drawing/2014/main" id="{EE8E30E7-1073-5F7B-7519-3EF8718798EB}"/>
+                <a16:creationId xmlns:a16="http://schemas.microsoft.com/office/drawing/2014/main" id="{589B28B3-189D-D986-EFBC-7359661C7672}"/>
               </a:ext>
             </a:extLst>
           </p:cNvPr>
@@ -15387,7 +15567,7 @@
           <p:cNvPr id="8" name="quote">
             <a:extLst>
               <a:ext uri="{FF2B5EF4-FFF2-40B4-BE49-F238E27FC236}">
-                <a16:creationId xmlns:a16="http://schemas.microsoft.com/office/drawing/2014/main" id="{9AE7BD65-5AFB-6AE1-CCFE-832F8E3A8FDC}"/>
+                <a16:creationId xmlns:a16="http://schemas.microsoft.com/office/drawing/2014/main" id="{C5935D22-2F33-4CFF-B97A-42C8D1B8E73A}"/>
               </a:ext>
             </a:extLst>
           </p:cNvPr>
@@ -15437,7 +15617,7 @@
           <p:cNvPr id="9" name="attribution">
             <a:extLst>
               <a:ext uri="{FF2B5EF4-FFF2-40B4-BE49-F238E27FC236}">
-                <a16:creationId xmlns:a16="http://schemas.microsoft.com/office/drawing/2014/main" id="{1E4A8D5B-5C44-C671-C2C5-501B50041C6C}"/>
+                <a16:creationId xmlns:a16="http://schemas.microsoft.com/office/drawing/2014/main" id="{A36B3145-5042-182D-2301-4E0CD28FC704}"/>
               </a:ext>
             </a:extLst>
           </p:cNvPr>
@@ -15485,7 +15665,7 @@
           <p:cNvPr id="10" name="item_1_title">
             <a:extLst>
               <a:ext uri="{FF2B5EF4-FFF2-40B4-BE49-F238E27FC236}">
-                <a16:creationId xmlns:a16="http://schemas.microsoft.com/office/drawing/2014/main" id="{650F991D-7CEB-7A27-E2E6-679FE964D00D}"/>
+                <a16:creationId xmlns:a16="http://schemas.microsoft.com/office/drawing/2014/main" id="{9CD960E9-9F7A-9333-7A23-2060B94468D8}"/>
               </a:ext>
             </a:extLst>
           </p:cNvPr>
@@ -15518,7 +15698,10 @@
               <a:buNone/>
               <a:defRPr sz="2000" b="1">
                 <a:solidFill>
-                  <a:schemeClr val="accent1"/>
+                  <a:schemeClr val="accent1">
+                    <a:lumMod val="70000"/>
+                    <a:lumOff val="30000"/>
+                  </a:schemeClr>
                 </a:solidFill>
                 <a:latin typeface="+mj-lt"/>
               </a:defRPr>
@@ -15538,7 +15721,7 @@
           <p:cNvPr id="11" name="item_1">
             <a:extLst>
               <a:ext uri="{FF2B5EF4-FFF2-40B4-BE49-F238E27FC236}">
-                <a16:creationId xmlns:a16="http://schemas.microsoft.com/office/drawing/2014/main" id="{62FAA7CA-DD98-2C6F-11B3-6D77DDB42262}"/>
+                <a16:creationId xmlns:a16="http://schemas.microsoft.com/office/drawing/2014/main" id="{71D700E8-33CE-E4E5-EFA5-34802D2573B2}"/>
               </a:ext>
             </a:extLst>
           </p:cNvPr>
@@ -15586,7 +15769,7 @@
           <p:cNvPr id="12" name="source">
             <a:extLst>
               <a:ext uri="{FF2B5EF4-FFF2-40B4-BE49-F238E27FC236}">
-                <a16:creationId xmlns:a16="http://schemas.microsoft.com/office/drawing/2014/main" id="{CA9D6890-4359-E148-F182-483D3A7A9778}"/>
+                <a16:creationId xmlns:a16="http://schemas.microsoft.com/office/drawing/2014/main" id="{D511CA09-57D6-3B7A-F941-C9C5297E85A7}"/>
               </a:ext>
             </a:extLst>
           </p:cNvPr>
@@ -15608,7 +15791,10 @@
             </a:avLst>
           </a:prstGeom>
           <a:solidFill>
-            <a:schemeClr val="accent1"/>
+            <a:schemeClr val="accent1">
+              <a:lumMod val="70000"/>
+              <a:lumOff val="30000"/>
+            </a:schemeClr>
           </a:solidFill>
         </p:spPr>
         <p:txBody>
@@ -15641,7 +15827,7 @@
     </p:spTree>
     <p:extLst>
       <p:ext uri="{BB962C8B-B14F-4D97-AF65-F5344CB8AC3E}">
-        <p14:creationId xmlns:p14="http://schemas.microsoft.com/office/powerpoint/2010/main" val="91691636"/>
+        <p14:creationId xmlns:p14="http://schemas.microsoft.com/office/powerpoint/2010/main" val="3613970465"/>
       </p:ext>
     </p:extLst>
   </p:cSld>
@@ -15710,9 +15896,9 @@
           <a:bodyPr/>
           <a:lstStyle/>
           <a:p>
-            <a:fld id="{C108DDE1-F741-4F4F-A7D2-FBD0359B97CD}" type="datetimeFigureOut">
+            <a:fld id="{374EEE4F-B349-4B31-9811-90D259E0D621}" type="datetimeFigureOut">
               <a:rPr lang="en-US" smtClean="0"/>
-              <a:t>10/3/2026</a:t>
+              <a:t>10/4/2026</a:t>
             </a:fld>
             <a:endParaRPr lang="en-US"/>
           </a:p>
@@ -15752,7 +15938,7 @@
           <a:bodyPr/>
           <a:lstStyle/>
           <a:p>
-            <a:fld id="{D07356AB-B086-4690-8078-803F810DAE76}" type="slidenum">
+            <a:fld id="{6622063C-0B57-47EC-9E6E-D170EF750DAF}" type="slidenum">
               <a:rPr lang="en-US" smtClean="0"/>
               <a:t>‹#›</a:t>
             </a:fld>
@@ -15765,7 +15951,7 @@
           <p:cNvPr id="6" name="marker_1">
             <a:extLst>
               <a:ext uri="{FF2B5EF4-FFF2-40B4-BE49-F238E27FC236}">
-                <a16:creationId xmlns:a16="http://schemas.microsoft.com/office/drawing/2014/main" id="{C8388644-79AF-5354-2D1C-E3E9DC59E578}"/>
+                <a16:creationId xmlns:a16="http://schemas.microsoft.com/office/drawing/2014/main" id="{301E58F6-FAA3-8668-D0AE-D5C1A0A24950}"/>
               </a:ext>
             </a:extLst>
           </p:cNvPr>
@@ -15785,7 +15971,10 @@
             <a:avLst/>
           </a:prstGeom>
           <a:solidFill>
-            <a:schemeClr val="accent1"/>
+            <a:schemeClr val="accent1">
+              <a:lumMod val="70000"/>
+              <a:lumOff val="30000"/>
+            </a:schemeClr>
           </a:solidFill>
         </p:spPr>
         <p:txBody>
@@ -15821,7 +16010,7 @@
           <p:cNvPr id="7" name="item_1">
             <a:extLst>
               <a:ext uri="{FF2B5EF4-FFF2-40B4-BE49-F238E27FC236}">
-                <a16:creationId xmlns:a16="http://schemas.microsoft.com/office/drawing/2014/main" id="{9BF024FB-3F51-9F22-F7BD-4C3B6DBD2FA6}"/>
+                <a16:creationId xmlns:a16="http://schemas.microsoft.com/office/drawing/2014/main" id="{B3F1708E-2968-2107-3425-991E7C4B74FC}"/>
               </a:ext>
             </a:extLst>
           </p:cNvPr>
@@ -15869,7 +16058,7 @@
           <p:cNvPr id="8" name="marker_2">
             <a:extLst>
               <a:ext uri="{FF2B5EF4-FFF2-40B4-BE49-F238E27FC236}">
-                <a16:creationId xmlns:a16="http://schemas.microsoft.com/office/drawing/2014/main" id="{FBFF6CA3-E47F-1757-1F59-2CC63ADFB927}"/>
+                <a16:creationId xmlns:a16="http://schemas.microsoft.com/office/drawing/2014/main" id="{B972FB27-A85A-7854-C75C-9B7E591A7BDB}"/>
               </a:ext>
             </a:extLst>
           </p:cNvPr>
@@ -15889,7 +16078,10 @@
             <a:avLst/>
           </a:prstGeom>
           <a:solidFill>
-            <a:schemeClr val="accent1"/>
+            <a:schemeClr val="accent1">
+              <a:lumMod val="70000"/>
+              <a:lumOff val="30000"/>
+            </a:schemeClr>
           </a:solidFill>
         </p:spPr>
         <p:txBody>
@@ -15925,7 +16117,7 @@
           <p:cNvPr id="9" name="item_2">
             <a:extLst>
               <a:ext uri="{FF2B5EF4-FFF2-40B4-BE49-F238E27FC236}">
-                <a16:creationId xmlns:a16="http://schemas.microsoft.com/office/drawing/2014/main" id="{A487B5E2-885E-6438-D3AE-4A421147210D}"/>
+                <a16:creationId xmlns:a16="http://schemas.microsoft.com/office/drawing/2014/main" id="{7DDD3C7D-41B4-1BDA-F4F2-2FB15CC5615B}"/>
               </a:ext>
             </a:extLst>
           </p:cNvPr>
@@ -15973,7 +16165,7 @@
           <p:cNvPr id="10" name="marker_3">
             <a:extLst>
               <a:ext uri="{FF2B5EF4-FFF2-40B4-BE49-F238E27FC236}">
-                <a16:creationId xmlns:a16="http://schemas.microsoft.com/office/drawing/2014/main" id="{EA0A5F27-706C-3F25-1552-34A86DB5F382}"/>
+                <a16:creationId xmlns:a16="http://schemas.microsoft.com/office/drawing/2014/main" id="{EF47EF58-4AE6-6CC4-94DE-7C769CBA3CB9}"/>
               </a:ext>
             </a:extLst>
           </p:cNvPr>
@@ -15993,7 +16185,10 @@
             <a:avLst/>
           </a:prstGeom>
           <a:solidFill>
-            <a:schemeClr val="accent1"/>
+            <a:schemeClr val="accent1">
+              <a:lumMod val="70000"/>
+              <a:lumOff val="30000"/>
+            </a:schemeClr>
           </a:solidFill>
         </p:spPr>
         <p:txBody>
@@ -16029,7 +16224,7 @@
           <p:cNvPr id="11" name="item_3">
             <a:extLst>
               <a:ext uri="{FF2B5EF4-FFF2-40B4-BE49-F238E27FC236}">
-                <a16:creationId xmlns:a16="http://schemas.microsoft.com/office/drawing/2014/main" id="{F5D6ADF7-DBBA-30D5-C10E-256690E753D8}"/>
+                <a16:creationId xmlns:a16="http://schemas.microsoft.com/office/drawing/2014/main" id="{21ECBA9D-60E5-F652-2C99-9A0F36C4C9F6}"/>
               </a:ext>
             </a:extLst>
           </p:cNvPr>
@@ -16077,7 +16272,7 @@
           <p:cNvPr id="12" name="marker_4">
             <a:extLst>
               <a:ext uri="{FF2B5EF4-FFF2-40B4-BE49-F238E27FC236}">
-                <a16:creationId xmlns:a16="http://schemas.microsoft.com/office/drawing/2014/main" id="{E5D10C1A-0732-3437-419A-9B2EBAD82976}"/>
+                <a16:creationId xmlns:a16="http://schemas.microsoft.com/office/drawing/2014/main" id="{F0D5C1A6-7E5A-CF0F-D3D1-499181DA91A8}"/>
               </a:ext>
             </a:extLst>
           </p:cNvPr>
@@ -16097,7 +16292,10 @@
             <a:avLst/>
           </a:prstGeom>
           <a:solidFill>
-            <a:schemeClr val="accent1"/>
+            <a:schemeClr val="accent1">
+              <a:lumMod val="70000"/>
+              <a:lumOff val="30000"/>
+            </a:schemeClr>
           </a:solidFill>
         </p:spPr>
         <p:txBody>
@@ -16133,7 +16331,7 @@
           <p:cNvPr id="13" name="item_4">
             <a:extLst>
               <a:ext uri="{FF2B5EF4-FFF2-40B4-BE49-F238E27FC236}">
-                <a16:creationId xmlns:a16="http://schemas.microsoft.com/office/drawing/2014/main" id="{9433E883-F3EE-88C7-7A51-4957F976A9C7}"/>
+                <a16:creationId xmlns:a16="http://schemas.microsoft.com/office/drawing/2014/main" id="{A84F5E37-F0F5-2C23-0FED-D0304FD6A09B}"/>
               </a:ext>
             </a:extLst>
           </p:cNvPr>
@@ -16181,7 +16379,7 @@
           <p:cNvPr id="14" name="source">
             <a:extLst>
               <a:ext uri="{FF2B5EF4-FFF2-40B4-BE49-F238E27FC236}">
-                <a16:creationId xmlns:a16="http://schemas.microsoft.com/office/drawing/2014/main" id="{8EEACCF6-AAC4-3B5A-BE74-789DC77FC9C9}"/>
+                <a16:creationId xmlns:a16="http://schemas.microsoft.com/office/drawing/2014/main" id="{C88662FE-A8EE-1A60-7EE4-0B697E0F5BC0}"/>
               </a:ext>
             </a:extLst>
           </p:cNvPr>
@@ -16203,7 +16401,10 @@
             </a:avLst>
           </a:prstGeom>
           <a:solidFill>
-            <a:schemeClr val="accent1"/>
+            <a:schemeClr val="accent1">
+              <a:lumMod val="70000"/>
+              <a:lumOff val="30000"/>
+            </a:schemeClr>
           </a:solidFill>
         </p:spPr>
         <p:txBody>
@@ -16236,7 +16437,7 @@
     </p:spTree>
     <p:extLst>
       <p:ext uri="{BB962C8B-B14F-4D97-AF65-F5344CB8AC3E}">
-        <p14:creationId xmlns:p14="http://schemas.microsoft.com/office/powerpoint/2010/main" val="1844060647"/>
+        <p14:creationId xmlns:p14="http://schemas.microsoft.com/office/powerpoint/2010/main" val="2185301651"/>
       </p:ext>
     </p:extLst>
   </p:cSld>
@@ -16305,9 +16506,9 @@
           <a:bodyPr/>
           <a:lstStyle/>
           <a:p>
-            <a:fld id="{C108DDE1-F741-4F4F-A7D2-FBD0359B97CD}" type="datetimeFigureOut">
+            <a:fld id="{374EEE4F-B349-4B31-9811-90D259E0D621}" type="datetimeFigureOut">
               <a:rPr lang="en-US" smtClean="0"/>
-              <a:t>10/3/2026</a:t>
+              <a:t>10/4/2026</a:t>
             </a:fld>
             <a:endParaRPr lang="en-US"/>
           </a:p>
@@ -16347,7 +16548,7 @@
           <a:bodyPr/>
           <a:lstStyle/>
           <a:p>
-            <a:fld id="{D07356AB-B086-4690-8078-803F810DAE76}" type="slidenum">
+            <a:fld id="{6622063C-0B57-47EC-9E6E-D170EF750DAF}" type="slidenum">
               <a:rPr lang="en-US" smtClean="0"/>
               <a:t>‹#›</a:t>
             </a:fld>
@@ -16360,7 +16561,7 @@
           <p:cNvPr id="6" name="decisions_title">
             <a:extLst>
               <a:ext uri="{FF2B5EF4-FFF2-40B4-BE49-F238E27FC236}">
-                <a16:creationId xmlns:a16="http://schemas.microsoft.com/office/drawing/2014/main" id="{28A642F6-8C1A-04D1-189B-808A8F03C7B6}"/>
+                <a16:creationId xmlns:a16="http://schemas.microsoft.com/office/drawing/2014/main" id="{7492612D-7D8A-C9C1-570E-031240A263DD}"/>
               </a:ext>
             </a:extLst>
           </p:cNvPr>
@@ -16390,7 +16591,10 @@
               <a:buNone/>
               <a:defRPr sz="2000" b="1">
                 <a:solidFill>
-                  <a:schemeClr val="accent1"/>
+                  <a:schemeClr val="accent1">
+                    <a:lumMod val="70000"/>
+                    <a:lumOff val="30000"/>
+                  </a:schemeClr>
                 </a:solidFill>
                 <a:latin typeface="+mj-lt"/>
               </a:defRPr>
@@ -16410,7 +16614,7 @@
           <p:cNvPr id="7" name="decisions">
             <a:extLst>
               <a:ext uri="{FF2B5EF4-FFF2-40B4-BE49-F238E27FC236}">
-                <a16:creationId xmlns:a16="http://schemas.microsoft.com/office/drawing/2014/main" id="{ED00446F-9E43-791C-65BA-49976F0F1700}"/>
+                <a16:creationId xmlns:a16="http://schemas.microsoft.com/office/drawing/2014/main" id="{DF086732-A8C0-0FD6-F48E-F58B0CCEF8F5}"/>
               </a:ext>
             </a:extLst>
           </p:cNvPr>
@@ -16453,7 +16657,7 @@
           <p:cNvPr id="8" name="item_1_title">
             <a:extLst>
               <a:ext uri="{FF2B5EF4-FFF2-40B4-BE49-F238E27FC236}">
-                <a16:creationId xmlns:a16="http://schemas.microsoft.com/office/drawing/2014/main" id="{FA51C4D1-A083-F600-344F-902926E51D6D}"/>
+                <a16:creationId xmlns:a16="http://schemas.microsoft.com/office/drawing/2014/main" id="{B5B8AB32-9FBD-85E6-E3E5-DE08B5F67EFE}"/>
               </a:ext>
             </a:extLst>
           </p:cNvPr>
@@ -16486,7 +16690,10 @@
               <a:buNone/>
               <a:defRPr sz="2000" b="1">
                 <a:solidFill>
-                  <a:schemeClr val="accent1"/>
+                  <a:schemeClr val="accent1">
+                    <a:lumMod val="70000"/>
+                    <a:lumOff val="30000"/>
+                  </a:schemeClr>
                 </a:solidFill>
                 <a:latin typeface="+mj-lt"/>
               </a:defRPr>
@@ -16506,7 +16713,7 @@
           <p:cNvPr id="9" name="item_1">
             <a:extLst>
               <a:ext uri="{FF2B5EF4-FFF2-40B4-BE49-F238E27FC236}">
-                <a16:creationId xmlns:a16="http://schemas.microsoft.com/office/drawing/2014/main" id="{893E638C-1F12-A70A-9C98-745721106ED3}"/>
+                <a16:creationId xmlns:a16="http://schemas.microsoft.com/office/drawing/2014/main" id="{F53CD6C7-06A1-2CF0-3619-22B59E53116B}"/>
               </a:ext>
             </a:extLst>
           </p:cNvPr>
@@ -16554,7 +16761,7 @@
           <p:cNvPr id="10" name="item_2_title">
             <a:extLst>
               <a:ext uri="{FF2B5EF4-FFF2-40B4-BE49-F238E27FC236}">
-                <a16:creationId xmlns:a16="http://schemas.microsoft.com/office/drawing/2014/main" id="{6636F4F3-B5AE-2E2D-4AE0-DF8EB4E4F993}"/>
+                <a16:creationId xmlns:a16="http://schemas.microsoft.com/office/drawing/2014/main" id="{96DFE81B-4B96-B776-71CE-FC02CADCD7B8}"/>
               </a:ext>
             </a:extLst>
           </p:cNvPr>
@@ -16587,7 +16794,10 @@
               <a:buNone/>
               <a:defRPr sz="2000" b="1">
                 <a:solidFill>
-                  <a:schemeClr val="accent1"/>
+                  <a:schemeClr val="accent1">
+                    <a:lumMod val="70000"/>
+                    <a:lumOff val="30000"/>
+                  </a:schemeClr>
                 </a:solidFill>
                 <a:latin typeface="+mj-lt"/>
               </a:defRPr>
@@ -16607,7 +16817,7 @@
           <p:cNvPr id="11" name="item_2">
             <a:extLst>
               <a:ext uri="{FF2B5EF4-FFF2-40B4-BE49-F238E27FC236}">
-                <a16:creationId xmlns:a16="http://schemas.microsoft.com/office/drawing/2014/main" id="{3A184CDD-E879-B34D-36C2-7D6BDD12D989}"/>
+                <a16:creationId xmlns:a16="http://schemas.microsoft.com/office/drawing/2014/main" id="{68DCB7B5-DB54-8FEE-A954-D28E9A45971C}"/>
               </a:ext>
             </a:extLst>
           </p:cNvPr>
@@ -16655,7 +16865,7 @@
           <p:cNvPr id="12" name="item_3_title">
             <a:extLst>
               <a:ext uri="{FF2B5EF4-FFF2-40B4-BE49-F238E27FC236}">
-                <a16:creationId xmlns:a16="http://schemas.microsoft.com/office/drawing/2014/main" id="{7E75D11F-4C8B-AD73-10A9-8A3D03626FDE}"/>
+                <a16:creationId xmlns:a16="http://schemas.microsoft.com/office/drawing/2014/main" id="{783CDA89-0895-C7F4-6606-8FF614D35748}"/>
               </a:ext>
             </a:extLst>
           </p:cNvPr>
@@ -16688,7 +16898,10 @@
               <a:buNone/>
               <a:defRPr sz="2000" b="1">
                 <a:solidFill>
-                  <a:schemeClr val="accent1"/>
+                  <a:schemeClr val="accent1">
+                    <a:lumMod val="70000"/>
+                    <a:lumOff val="30000"/>
+                  </a:schemeClr>
                 </a:solidFill>
                 <a:latin typeface="+mj-lt"/>
               </a:defRPr>
@@ -16708,7 +16921,7 @@
           <p:cNvPr id="13" name="item_3">
             <a:extLst>
               <a:ext uri="{FF2B5EF4-FFF2-40B4-BE49-F238E27FC236}">
-                <a16:creationId xmlns:a16="http://schemas.microsoft.com/office/drawing/2014/main" id="{B89336D3-DC0A-4CD6-A87B-9558D4A56538}"/>
+                <a16:creationId xmlns:a16="http://schemas.microsoft.com/office/drawing/2014/main" id="{C2A42BC8-151D-3DCF-D507-FAAEB29BE8F5}"/>
               </a:ext>
             </a:extLst>
           </p:cNvPr>
@@ -16756,7 +16969,7 @@
           <p:cNvPr id="14" name="source">
             <a:extLst>
               <a:ext uri="{FF2B5EF4-FFF2-40B4-BE49-F238E27FC236}">
-                <a16:creationId xmlns:a16="http://schemas.microsoft.com/office/drawing/2014/main" id="{6D85F065-F632-2676-E3DC-CD7AAD7CDDDF}"/>
+                <a16:creationId xmlns:a16="http://schemas.microsoft.com/office/drawing/2014/main" id="{9801558B-AB0D-6585-3E51-B75BB2625F6C}"/>
               </a:ext>
             </a:extLst>
           </p:cNvPr>
@@ -16778,7 +16991,10 @@
             </a:avLst>
           </a:prstGeom>
           <a:solidFill>
-            <a:schemeClr val="accent1"/>
+            <a:schemeClr val="accent1">
+              <a:lumMod val="70000"/>
+              <a:lumOff val="30000"/>
+            </a:schemeClr>
           </a:solidFill>
         </p:spPr>
         <p:txBody>
@@ -16811,7 +17027,7 @@
     </p:spTree>
     <p:extLst>
       <p:ext uri="{BB962C8B-B14F-4D97-AF65-F5344CB8AC3E}">
-        <p14:creationId xmlns:p14="http://schemas.microsoft.com/office/powerpoint/2010/main" val="3750355319"/>
+        <p14:creationId xmlns:p14="http://schemas.microsoft.com/office/powerpoint/2010/main" val="1568111427"/>
       </p:ext>
     </p:extLst>
   </p:cSld>
@@ -16880,9 +17096,9 @@
           <a:bodyPr/>
           <a:lstStyle/>
           <a:p>
-            <a:fld id="{C108DDE1-F741-4F4F-A7D2-FBD0359B97CD}" type="datetimeFigureOut">
+            <a:fld id="{374EEE4F-B349-4B31-9811-90D259E0D621}" type="datetimeFigureOut">
               <a:rPr lang="en-US" smtClean="0"/>
-              <a:t>10/3/2026</a:t>
+              <a:t>10/4/2026</a:t>
             </a:fld>
             <a:endParaRPr lang="en-US"/>
           </a:p>
@@ -16922,7 +17138,7 @@
           <a:bodyPr/>
           <a:lstStyle/>
           <a:p>
-            <a:fld id="{D07356AB-B086-4690-8078-803F810DAE76}" type="slidenum">
+            <a:fld id="{6622063C-0B57-47EC-9E6E-D170EF750DAF}" type="slidenum">
               <a:rPr lang="en-US" smtClean="0"/>
               <a:t>‹#›</a:t>
             </a:fld>
@@ -16935,7 +17151,7 @@
           <p:cNvPr id="6" name="body">
             <a:extLst>
               <a:ext uri="{FF2B5EF4-FFF2-40B4-BE49-F238E27FC236}">
-                <a16:creationId xmlns:a16="http://schemas.microsoft.com/office/drawing/2014/main" id="{3A14E7E3-D48B-ACAA-5E57-C3E1DDC6E76C}"/>
+                <a16:creationId xmlns:a16="http://schemas.microsoft.com/office/drawing/2014/main" id="{CD4AF079-ABBB-897D-BC63-80BF0BF2AC4B}"/>
               </a:ext>
             </a:extLst>
           </p:cNvPr>
@@ -16975,7 +17191,7 @@
           <p:cNvPr id="7" name="kpi_value_1">
             <a:extLst>
               <a:ext uri="{FF2B5EF4-FFF2-40B4-BE49-F238E27FC236}">
-                <a16:creationId xmlns:a16="http://schemas.microsoft.com/office/drawing/2014/main" id="{5141429D-9C2A-B87B-CBF1-CC41CCA17437}"/>
+                <a16:creationId xmlns:a16="http://schemas.microsoft.com/office/drawing/2014/main" id="{226808EF-B0C1-F8E4-D778-1C8C7C1BCA8B}"/>
               </a:ext>
             </a:extLst>
           </p:cNvPr>
@@ -17008,7 +17224,10 @@
               <a:buNone/>
               <a:defRPr sz="6000" b="1">
                 <a:solidFill>
-                  <a:schemeClr val="accent1"/>
+                  <a:schemeClr val="accent1">
+                    <a:lumMod val="70000"/>
+                    <a:lumOff val="30000"/>
+                  </a:schemeClr>
                 </a:solidFill>
                 <a:latin typeface="+mj-lt"/>
               </a:defRPr>
@@ -17028,7 +17247,7 @@
           <p:cNvPr id="8" name="kpi_label_1">
             <a:extLst>
               <a:ext uri="{FF2B5EF4-FFF2-40B4-BE49-F238E27FC236}">
-                <a16:creationId xmlns:a16="http://schemas.microsoft.com/office/drawing/2014/main" id="{925A0292-40B3-9356-5A2F-5676356EAE66}"/>
+                <a16:creationId xmlns:a16="http://schemas.microsoft.com/office/drawing/2014/main" id="{E49CAC1D-A066-2DFA-D411-C9E876884DCA}"/>
               </a:ext>
             </a:extLst>
           </p:cNvPr>
@@ -17076,7 +17295,7 @@
           <p:cNvPr id="9" name="kpi_value_2">
             <a:extLst>
               <a:ext uri="{FF2B5EF4-FFF2-40B4-BE49-F238E27FC236}">
-                <a16:creationId xmlns:a16="http://schemas.microsoft.com/office/drawing/2014/main" id="{0696E9C4-D295-681B-F757-F7D96B1E88A4}"/>
+                <a16:creationId xmlns:a16="http://schemas.microsoft.com/office/drawing/2014/main" id="{1C7EAFAC-C688-57A4-95BC-4A49A131CD06}"/>
               </a:ext>
             </a:extLst>
           </p:cNvPr>
@@ -17109,7 +17328,10 @@
               <a:buNone/>
               <a:defRPr sz="6000" b="1">
                 <a:solidFill>
-                  <a:schemeClr val="accent1"/>
+                  <a:schemeClr val="accent1">
+                    <a:lumMod val="70000"/>
+                    <a:lumOff val="30000"/>
+                  </a:schemeClr>
                 </a:solidFill>
                 <a:latin typeface="+mj-lt"/>
               </a:defRPr>
@@ -17129,7 +17351,7 @@
           <p:cNvPr id="10" name="kpi_label_2">
             <a:extLst>
               <a:ext uri="{FF2B5EF4-FFF2-40B4-BE49-F238E27FC236}">
-                <a16:creationId xmlns:a16="http://schemas.microsoft.com/office/drawing/2014/main" id="{74329194-B5A0-8E1E-3ACD-7626BCEED364}"/>
+                <a16:creationId xmlns:a16="http://schemas.microsoft.com/office/drawing/2014/main" id="{B31596AC-4E4E-39B0-678F-37081AE39F4F}"/>
               </a:ext>
             </a:extLst>
           </p:cNvPr>
@@ -17177,7 +17399,7 @@
           <p:cNvPr id="11" name="source">
             <a:extLst>
               <a:ext uri="{FF2B5EF4-FFF2-40B4-BE49-F238E27FC236}">
-                <a16:creationId xmlns:a16="http://schemas.microsoft.com/office/drawing/2014/main" id="{0CB29895-44B1-49A3-6C2A-EDD8070694FE}"/>
+                <a16:creationId xmlns:a16="http://schemas.microsoft.com/office/drawing/2014/main" id="{491C464A-2D85-79DF-0EDD-1284818D5342}"/>
               </a:ext>
             </a:extLst>
           </p:cNvPr>
@@ -17199,7 +17421,10 @@
             </a:avLst>
           </a:prstGeom>
           <a:solidFill>
-            <a:schemeClr val="accent1"/>
+            <a:schemeClr val="accent1">
+              <a:lumMod val="70000"/>
+              <a:lumOff val="30000"/>
+            </a:schemeClr>
           </a:solidFill>
         </p:spPr>
         <p:txBody>
@@ -17232,7 +17457,7 @@
     </p:spTree>
     <p:extLst>
       <p:ext uri="{BB962C8B-B14F-4D97-AF65-F5344CB8AC3E}">
-        <p14:creationId xmlns:p14="http://schemas.microsoft.com/office/powerpoint/2010/main" val="1066342634"/>
+        <p14:creationId xmlns:p14="http://schemas.microsoft.com/office/powerpoint/2010/main" val="2051730589"/>
       </p:ext>
     </p:extLst>
   </p:cSld>
@@ -17301,9 +17526,9 @@
           <a:bodyPr/>
           <a:lstStyle/>
           <a:p>
-            <a:fld id="{C108DDE1-F741-4F4F-A7D2-FBD0359B97CD}" type="datetimeFigureOut">
+            <a:fld id="{374EEE4F-B349-4B31-9811-90D259E0D621}" type="datetimeFigureOut">
               <a:rPr lang="en-US" smtClean="0"/>
-              <a:t>10/3/2026</a:t>
+              <a:t>10/4/2026</a:t>
             </a:fld>
             <a:endParaRPr lang="en-US"/>
           </a:p>
@@ -17343,7 +17568,7 @@
           <a:bodyPr/>
           <a:lstStyle/>
           <a:p>
-            <a:fld id="{D07356AB-B086-4690-8078-803F810DAE76}" type="slidenum">
+            <a:fld id="{6622063C-0B57-47EC-9E6E-D170EF750DAF}" type="slidenum">
               <a:rPr lang="en-US" smtClean="0"/>
               <a:t>‹#›</a:t>
             </a:fld>
@@ -17356,7 +17581,7 @@
           <p:cNvPr id="6" name="body">
             <a:extLst>
               <a:ext uri="{FF2B5EF4-FFF2-40B4-BE49-F238E27FC236}">
-                <a16:creationId xmlns:a16="http://schemas.microsoft.com/office/drawing/2014/main" id="{5612B845-D650-933B-D803-79E70FF73614}"/>
+                <a16:creationId xmlns:a16="http://schemas.microsoft.com/office/drawing/2014/main" id="{CB378CD2-16D4-F89E-4AB6-0B215CF56686}"/>
               </a:ext>
             </a:extLst>
           </p:cNvPr>
@@ -17396,7 +17621,7 @@
           <p:cNvPr id="7" name="kpi_value_1">
             <a:extLst>
               <a:ext uri="{FF2B5EF4-FFF2-40B4-BE49-F238E27FC236}">
-                <a16:creationId xmlns:a16="http://schemas.microsoft.com/office/drawing/2014/main" id="{AEA0702A-1437-A2B9-1029-C28E318D9B55}"/>
+                <a16:creationId xmlns:a16="http://schemas.microsoft.com/office/drawing/2014/main" id="{B607BCB4-672F-4B36-B593-616246F38B87}"/>
               </a:ext>
             </a:extLst>
           </p:cNvPr>
@@ -17429,7 +17654,10 @@
               <a:buNone/>
               <a:defRPr sz="6000" b="1">
                 <a:solidFill>
-                  <a:schemeClr val="accent1"/>
+                  <a:schemeClr val="accent1">
+                    <a:lumMod val="70000"/>
+                    <a:lumOff val="30000"/>
+                  </a:schemeClr>
                 </a:solidFill>
                 <a:latin typeface="+mj-lt"/>
               </a:defRPr>
@@ -17449,7 +17677,7 @@
           <p:cNvPr id="8" name="kpi_label_1">
             <a:extLst>
               <a:ext uri="{FF2B5EF4-FFF2-40B4-BE49-F238E27FC236}">
-                <a16:creationId xmlns:a16="http://schemas.microsoft.com/office/drawing/2014/main" id="{46EC897C-0E98-D404-2B65-1DA99A00AAB7}"/>
+                <a16:creationId xmlns:a16="http://schemas.microsoft.com/office/drawing/2014/main" id="{7B5F80D3-9DEF-1569-3A50-522FF056ECF7}"/>
               </a:ext>
             </a:extLst>
           </p:cNvPr>
@@ -17497,7 +17725,7 @@
           <p:cNvPr id="9" name="kpi_value_2">
             <a:extLst>
               <a:ext uri="{FF2B5EF4-FFF2-40B4-BE49-F238E27FC236}">
-                <a16:creationId xmlns:a16="http://schemas.microsoft.com/office/drawing/2014/main" id="{427825BE-038A-5933-3D9B-173BA5B786B4}"/>
+                <a16:creationId xmlns:a16="http://schemas.microsoft.com/office/drawing/2014/main" id="{FB5EBDA0-6C3E-1A7A-D558-9FEBD130CB53}"/>
               </a:ext>
             </a:extLst>
           </p:cNvPr>
@@ -17530,7 +17758,10 @@
               <a:buNone/>
               <a:defRPr sz="6000" b="1">
                 <a:solidFill>
-                  <a:schemeClr val="accent1"/>
+                  <a:schemeClr val="accent1">
+                    <a:lumMod val="70000"/>
+                    <a:lumOff val="30000"/>
+                  </a:schemeClr>
                 </a:solidFill>
                 <a:latin typeface="+mj-lt"/>
               </a:defRPr>
@@ -17550,7 +17781,7 @@
           <p:cNvPr id="10" name="kpi_label_2">
             <a:extLst>
               <a:ext uri="{FF2B5EF4-FFF2-40B4-BE49-F238E27FC236}">
-                <a16:creationId xmlns:a16="http://schemas.microsoft.com/office/drawing/2014/main" id="{08EF1121-1A28-B5A3-C497-299355B2CAD2}"/>
+                <a16:creationId xmlns:a16="http://schemas.microsoft.com/office/drawing/2014/main" id="{F7985B0E-0FCA-25DF-30A6-F22D83D03895}"/>
               </a:ext>
             </a:extLst>
           </p:cNvPr>
@@ -17598,7 +17829,7 @@
           <p:cNvPr id="11" name="kpi_value_3">
             <a:extLst>
               <a:ext uri="{FF2B5EF4-FFF2-40B4-BE49-F238E27FC236}">
-                <a16:creationId xmlns:a16="http://schemas.microsoft.com/office/drawing/2014/main" id="{69FB2CF4-5D70-B081-3B7B-64D05F1EDBF0}"/>
+                <a16:creationId xmlns:a16="http://schemas.microsoft.com/office/drawing/2014/main" id="{E900B20F-5B67-9ACA-1DA5-E9DF8F4FFAFD}"/>
               </a:ext>
             </a:extLst>
           </p:cNvPr>
@@ -17631,7 +17862,10 @@
               <a:buNone/>
               <a:defRPr sz="6000" b="1">
                 <a:solidFill>
-                  <a:schemeClr val="accent1"/>
+                  <a:schemeClr val="accent1">
+                    <a:lumMod val="70000"/>
+                    <a:lumOff val="30000"/>
+                  </a:schemeClr>
                 </a:solidFill>
                 <a:latin typeface="+mj-lt"/>
               </a:defRPr>
@@ -17651,7 +17885,7 @@
           <p:cNvPr id="12" name="kpi_label_3">
             <a:extLst>
               <a:ext uri="{FF2B5EF4-FFF2-40B4-BE49-F238E27FC236}">
-                <a16:creationId xmlns:a16="http://schemas.microsoft.com/office/drawing/2014/main" id="{20A0713C-D361-5620-3E35-727784BF43CF}"/>
+                <a16:creationId xmlns:a16="http://schemas.microsoft.com/office/drawing/2014/main" id="{0ACEB492-5B19-9761-556E-7F995B877D4C}"/>
               </a:ext>
             </a:extLst>
           </p:cNvPr>
@@ -17699,7 +17933,7 @@
           <p:cNvPr id="13" name="kpi_value_4">
             <a:extLst>
               <a:ext uri="{FF2B5EF4-FFF2-40B4-BE49-F238E27FC236}">
-                <a16:creationId xmlns:a16="http://schemas.microsoft.com/office/drawing/2014/main" id="{9EAE4FB2-9DB1-3CC0-440B-A2B74499C9A6}"/>
+                <a16:creationId xmlns:a16="http://schemas.microsoft.com/office/drawing/2014/main" id="{7C0546EF-6331-7714-B3AB-E87DBBD6A3B3}"/>
               </a:ext>
             </a:extLst>
           </p:cNvPr>
@@ -17732,7 +17966,10 @@
               <a:buNone/>
               <a:defRPr sz="6000" b="1">
                 <a:solidFill>
-                  <a:schemeClr val="accent1"/>
+                  <a:schemeClr val="accent1">
+                    <a:lumMod val="70000"/>
+                    <a:lumOff val="30000"/>
+                  </a:schemeClr>
                 </a:solidFill>
                 <a:latin typeface="+mj-lt"/>
               </a:defRPr>
@@ -17752,7 +17989,7 @@
           <p:cNvPr id="14" name="kpi_label_4">
             <a:extLst>
               <a:ext uri="{FF2B5EF4-FFF2-40B4-BE49-F238E27FC236}">
-                <a16:creationId xmlns:a16="http://schemas.microsoft.com/office/drawing/2014/main" id="{21357B86-2A3B-8C3B-8090-FE3DC4FF1113}"/>
+                <a16:creationId xmlns:a16="http://schemas.microsoft.com/office/drawing/2014/main" id="{AB5DD3E9-55C3-B431-80D8-FD69B74A8F01}"/>
               </a:ext>
             </a:extLst>
           </p:cNvPr>
@@ -17800,7 +18037,7 @@
           <p:cNvPr id="15" name="source">
             <a:extLst>
               <a:ext uri="{FF2B5EF4-FFF2-40B4-BE49-F238E27FC236}">
-                <a16:creationId xmlns:a16="http://schemas.microsoft.com/office/drawing/2014/main" id="{54875F2D-CBE9-6FA9-89E9-61D884863D7D}"/>
+                <a16:creationId xmlns:a16="http://schemas.microsoft.com/office/drawing/2014/main" id="{C8B6660D-C551-FC3E-72B7-9790DE8FADE9}"/>
               </a:ext>
             </a:extLst>
           </p:cNvPr>
@@ -17822,7 +18059,10 @@
             </a:avLst>
           </a:prstGeom>
           <a:solidFill>
-            <a:schemeClr val="accent1"/>
+            <a:schemeClr val="accent1">
+              <a:lumMod val="70000"/>
+              <a:lumOff val="30000"/>
+            </a:schemeClr>
           </a:solidFill>
         </p:spPr>
         <p:txBody>
@@ -17855,7 +18095,7 @@
     </p:spTree>
     <p:extLst>
       <p:ext uri="{BB962C8B-B14F-4D97-AF65-F5344CB8AC3E}">
-        <p14:creationId xmlns:p14="http://schemas.microsoft.com/office/powerpoint/2010/main" val="4260533740"/>
+        <p14:creationId xmlns:p14="http://schemas.microsoft.com/office/powerpoint/2010/main" val="1370423265"/>
       </p:ext>
     </p:extLst>
   </p:cSld>
@@ -17924,9 +18164,9 @@
           <a:bodyPr/>
           <a:lstStyle/>
           <a:p>
-            <a:fld id="{C108DDE1-F741-4F4F-A7D2-FBD0359B97CD}" type="datetimeFigureOut">
+            <a:fld id="{374EEE4F-B349-4B31-9811-90D259E0D621}" type="datetimeFigureOut">
               <a:rPr lang="en-US" smtClean="0"/>
-              <a:t>10/3/2026</a:t>
+              <a:t>10/4/2026</a:t>
             </a:fld>
             <a:endParaRPr lang="en-US"/>
           </a:p>
@@ -17966,7 +18206,7 @@
           <a:bodyPr/>
           <a:lstStyle/>
           <a:p>
-            <a:fld id="{D07356AB-B086-4690-8078-803F810DAE76}" type="slidenum">
+            <a:fld id="{6622063C-0B57-47EC-9E6E-D170EF750DAF}" type="slidenum">
               <a:rPr lang="en-US" smtClean="0"/>
               <a:t>‹#›</a:t>
             </a:fld>
@@ -17979,7 +18219,7 @@
           <p:cNvPr id="6" name="body">
             <a:extLst>
               <a:ext uri="{FF2B5EF4-FFF2-40B4-BE49-F238E27FC236}">
-                <a16:creationId xmlns:a16="http://schemas.microsoft.com/office/drawing/2014/main" id="{E65B3A69-19AA-F448-4F56-9B41CFC1E606}"/>
+                <a16:creationId xmlns:a16="http://schemas.microsoft.com/office/drawing/2014/main" id="{D9E0B21D-5B0C-90F2-4225-9D65D9A7BD8C}"/>
               </a:ext>
             </a:extLst>
           </p:cNvPr>
@@ -18019,7 +18259,7 @@
           <p:cNvPr id="7" name="quote">
             <a:extLst>
               <a:ext uri="{FF2B5EF4-FFF2-40B4-BE49-F238E27FC236}">
-                <a16:creationId xmlns:a16="http://schemas.microsoft.com/office/drawing/2014/main" id="{ED21F431-E6CB-1E39-378C-D2C88BD3C553}"/>
+                <a16:creationId xmlns:a16="http://schemas.microsoft.com/office/drawing/2014/main" id="{67B57B22-4FFB-B9BD-58CC-159F721CF8C9}"/>
               </a:ext>
             </a:extLst>
           </p:cNvPr>
@@ -18069,7 +18309,7 @@
           <p:cNvPr id="8" name="attribution">
             <a:extLst>
               <a:ext uri="{FF2B5EF4-FFF2-40B4-BE49-F238E27FC236}">
-                <a16:creationId xmlns:a16="http://schemas.microsoft.com/office/drawing/2014/main" id="{029522E9-DD8C-AA2B-BCB8-49632145E0C4}"/>
+                <a16:creationId xmlns:a16="http://schemas.microsoft.com/office/drawing/2014/main" id="{848AB7BB-374A-A26B-D874-F3399C377D62}"/>
               </a:ext>
             </a:extLst>
           </p:cNvPr>
@@ -18117,7 +18357,7 @@
           <p:cNvPr id="9" name="source">
             <a:extLst>
               <a:ext uri="{FF2B5EF4-FFF2-40B4-BE49-F238E27FC236}">
-                <a16:creationId xmlns:a16="http://schemas.microsoft.com/office/drawing/2014/main" id="{71985FE9-279F-BA74-D4D1-85DE2DAA74BD}"/>
+                <a16:creationId xmlns:a16="http://schemas.microsoft.com/office/drawing/2014/main" id="{ED9F48EE-AADE-CC46-6036-E7BDCF6ADB59}"/>
               </a:ext>
             </a:extLst>
           </p:cNvPr>
@@ -18139,7 +18379,10 @@
             </a:avLst>
           </a:prstGeom>
           <a:solidFill>
-            <a:schemeClr val="accent1"/>
+            <a:schemeClr val="accent1">
+              <a:lumMod val="70000"/>
+              <a:lumOff val="30000"/>
+            </a:schemeClr>
           </a:solidFill>
         </p:spPr>
         <p:txBody>
@@ -18172,7 +18415,7 @@
     </p:spTree>
     <p:extLst>
       <p:ext uri="{BB962C8B-B14F-4D97-AF65-F5344CB8AC3E}">
-        <p14:creationId xmlns:p14="http://schemas.microsoft.com/office/powerpoint/2010/main" val="3486925266"/>
+        <p14:creationId xmlns:p14="http://schemas.microsoft.com/office/powerpoint/2010/main" val="2813768120"/>
       </p:ext>
     </p:extLst>
   </p:cSld>
@@ -18241,9 +18484,9 @@
           <a:bodyPr/>
           <a:lstStyle/>
           <a:p>
-            <a:fld id="{C108DDE1-F741-4F4F-A7D2-FBD0359B97CD}" type="datetimeFigureOut">
+            <a:fld id="{374EEE4F-B349-4B31-9811-90D259E0D621}" type="datetimeFigureOut">
               <a:rPr lang="en-US" smtClean="0"/>
-              <a:t>10/3/2026</a:t>
+              <a:t>10/4/2026</a:t>
             </a:fld>
             <a:endParaRPr lang="en-US"/>
           </a:p>
@@ -18283,7 +18526,7 @@
           <a:bodyPr/>
           <a:lstStyle/>
           <a:p>
-            <a:fld id="{D07356AB-B086-4690-8078-803F810DAE76}" type="slidenum">
+            <a:fld id="{6622063C-0B57-47EC-9E6E-D170EF750DAF}" type="slidenum">
               <a:rPr lang="en-US" smtClean="0"/>
               <a:t>‹#›</a:t>
             </a:fld>
@@ -18296,7 +18539,7 @@
           <p:cNvPr id="6" name="item_1_title">
             <a:extLst>
               <a:ext uri="{FF2B5EF4-FFF2-40B4-BE49-F238E27FC236}">
-                <a16:creationId xmlns:a16="http://schemas.microsoft.com/office/drawing/2014/main" id="{18B8728E-B21B-301B-9DD2-75876A43669B}"/>
+                <a16:creationId xmlns:a16="http://schemas.microsoft.com/office/drawing/2014/main" id="{2D25BCAD-6EDB-13DA-99FA-D2610B5AA4FF}"/>
               </a:ext>
             </a:extLst>
           </p:cNvPr>
@@ -18326,7 +18569,10 @@
               <a:buNone/>
               <a:defRPr sz="2000" b="1">
                 <a:solidFill>
-                  <a:schemeClr val="accent1"/>
+                  <a:schemeClr val="accent1">
+                    <a:lumMod val="70000"/>
+                    <a:lumOff val="30000"/>
+                  </a:schemeClr>
                 </a:solidFill>
                 <a:latin typeface="+mj-lt"/>
               </a:defRPr>
@@ -18346,7 +18592,7 @@
           <p:cNvPr id="7" name="item_1">
             <a:extLst>
               <a:ext uri="{FF2B5EF4-FFF2-40B4-BE49-F238E27FC236}">
-                <a16:creationId xmlns:a16="http://schemas.microsoft.com/office/drawing/2014/main" id="{DB81DA4F-E0BE-48C8-BCEF-6DEF9FAFCADC}"/>
+                <a16:creationId xmlns:a16="http://schemas.microsoft.com/office/drawing/2014/main" id="{925E3B28-A3AF-4FD1-759B-07ADFFAFC6F6}"/>
               </a:ext>
             </a:extLst>
           </p:cNvPr>
@@ -18394,7 +18640,7 @@
           <p:cNvPr id="8" name="item_2_title">
             <a:extLst>
               <a:ext uri="{FF2B5EF4-FFF2-40B4-BE49-F238E27FC236}">
-                <a16:creationId xmlns:a16="http://schemas.microsoft.com/office/drawing/2014/main" id="{3655D40B-8ED9-BFDA-11F0-6BB441D2AC84}"/>
+                <a16:creationId xmlns:a16="http://schemas.microsoft.com/office/drawing/2014/main" id="{12A20243-265F-98FA-9BD4-346E744D8DB1}"/>
               </a:ext>
             </a:extLst>
           </p:cNvPr>
@@ -18427,7 +18673,10 @@
               <a:buNone/>
               <a:defRPr sz="2000" b="1">
                 <a:solidFill>
-                  <a:schemeClr val="accent1"/>
+                  <a:schemeClr val="accent1">
+                    <a:lumMod val="70000"/>
+                    <a:lumOff val="30000"/>
+                  </a:schemeClr>
                 </a:solidFill>
                 <a:latin typeface="+mj-lt"/>
               </a:defRPr>
@@ -18447,7 +18696,7 @@
           <p:cNvPr id="9" name="item_2">
             <a:extLst>
               <a:ext uri="{FF2B5EF4-FFF2-40B4-BE49-F238E27FC236}">
-                <a16:creationId xmlns:a16="http://schemas.microsoft.com/office/drawing/2014/main" id="{9C1DAED1-C65D-AC9B-CC1A-9C4ED8015992}"/>
+                <a16:creationId xmlns:a16="http://schemas.microsoft.com/office/drawing/2014/main" id="{C3B349A0-F7A9-0BA3-04AD-31ED12023046}"/>
               </a:ext>
             </a:extLst>
           </p:cNvPr>
@@ -18495,7 +18744,7 @@
           <p:cNvPr id="10" name="item_3_title">
             <a:extLst>
               <a:ext uri="{FF2B5EF4-FFF2-40B4-BE49-F238E27FC236}">
-                <a16:creationId xmlns:a16="http://schemas.microsoft.com/office/drawing/2014/main" id="{6EE8EF4F-518C-F7DC-6814-F9259CE0299B}"/>
+                <a16:creationId xmlns:a16="http://schemas.microsoft.com/office/drawing/2014/main" id="{8B0F6946-25EA-0B8C-A10B-2CA8ABD6D4D2}"/>
               </a:ext>
             </a:extLst>
           </p:cNvPr>
@@ -18528,7 +18777,10 @@
               <a:buNone/>
               <a:defRPr sz="2000" b="1">
                 <a:solidFill>
-                  <a:schemeClr val="accent1"/>
+                  <a:schemeClr val="accent1">
+                    <a:lumMod val="70000"/>
+                    <a:lumOff val="30000"/>
+                  </a:schemeClr>
                 </a:solidFill>
                 <a:latin typeface="+mj-lt"/>
               </a:defRPr>
@@ -18548,7 +18800,7 @@
           <p:cNvPr id="11" name="item_3">
             <a:extLst>
               <a:ext uri="{FF2B5EF4-FFF2-40B4-BE49-F238E27FC236}">
-                <a16:creationId xmlns:a16="http://schemas.microsoft.com/office/drawing/2014/main" id="{1DD17FF8-CBDB-B48D-1541-78E303449C00}"/>
+                <a16:creationId xmlns:a16="http://schemas.microsoft.com/office/drawing/2014/main" id="{1797B1C2-700A-EED0-08EC-56AD8875A173}"/>
               </a:ext>
             </a:extLst>
           </p:cNvPr>
@@ -18596,7 +18848,7 @@
           <p:cNvPr id="12" name="source">
             <a:extLst>
               <a:ext uri="{FF2B5EF4-FFF2-40B4-BE49-F238E27FC236}">
-                <a16:creationId xmlns:a16="http://schemas.microsoft.com/office/drawing/2014/main" id="{06DF4BC8-6C7D-0E83-7D45-CFB4DC08C023}"/>
+                <a16:creationId xmlns:a16="http://schemas.microsoft.com/office/drawing/2014/main" id="{A9420A16-EE19-378D-E908-AC5B33CD2178}"/>
               </a:ext>
             </a:extLst>
           </p:cNvPr>
@@ -18618,7 +18870,10 @@
             </a:avLst>
           </a:prstGeom>
           <a:solidFill>
-            <a:schemeClr val="accent1"/>
+            <a:schemeClr val="accent1">
+              <a:lumMod val="70000"/>
+              <a:lumOff val="30000"/>
+            </a:schemeClr>
           </a:solidFill>
         </p:spPr>
         <p:txBody>
@@ -18651,7 +18906,7 @@
     </p:spTree>
     <p:extLst>
       <p:ext uri="{BB962C8B-B14F-4D97-AF65-F5344CB8AC3E}">
-        <p14:creationId xmlns:p14="http://schemas.microsoft.com/office/powerpoint/2010/main" val="2939559255"/>
+        <p14:creationId xmlns:p14="http://schemas.microsoft.com/office/powerpoint/2010/main" val="4045649095"/>
       </p:ext>
     </p:extLst>
   </p:cSld>
@@ -18720,9 +18975,9 @@
           <a:bodyPr/>
           <a:lstStyle/>
           <a:p>
-            <a:fld id="{C108DDE1-F741-4F4F-A7D2-FBD0359B97CD}" type="datetimeFigureOut">
+            <a:fld id="{374EEE4F-B349-4B31-9811-90D259E0D621}" type="datetimeFigureOut">
               <a:rPr lang="en-US" smtClean="0"/>
-              <a:t>10/3/2026</a:t>
+              <a:t>10/4/2026</a:t>
             </a:fld>
             <a:endParaRPr lang="en-US"/>
           </a:p>
@@ -18762,7 +19017,7 @@
           <a:bodyPr/>
           <a:lstStyle/>
           <a:p>
-            <a:fld id="{D07356AB-B086-4690-8078-803F810DAE76}" type="slidenum">
+            <a:fld id="{6622063C-0B57-47EC-9E6E-D170EF750DAF}" type="slidenum">
               <a:rPr lang="en-US" smtClean="0"/>
               <a:t>‹#›</a:t>
             </a:fld>
@@ -18775,7 +19030,7 @@
           <p:cNvPr id="6" name="item_1_title">
             <a:extLst>
               <a:ext uri="{FF2B5EF4-FFF2-40B4-BE49-F238E27FC236}">
-                <a16:creationId xmlns:a16="http://schemas.microsoft.com/office/drawing/2014/main" id="{31D8E221-E576-6A49-E0DD-C0F48C5EA6C6}"/>
+                <a16:creationId xmlns:a16="http://schemas.microsoft.com/office/drawing/2014/main" id="{3A8AB4EA-E471-3DE0-E9FD-526D31B1682A}"/>
               </a:ext>
             </a:extLst>
           </p:cNvPr>
@@ -18805,7 +19060,10 @@
               <a:buNone/>
               <a:defRPr sz="2000" b="1">
                 <a:solidFill>
-                  <a:schemeClr val="accent1"/>
+                  <a:schemeClr val="accent1">
+                    <a:lumMod val="70000"/>
+                    <a:lumOff val="30000"/>
+                  </a:schemeClr>
                 </a:solidFill>
                 <a:latin typeface="+mj-lt"/>
               </a:defRPr>
@@ -18825,7 +19083,7 @@
           <p:cNvPr id="7" name="item_1">
             <a:extLst>
               <a:ext uri="{FF2B5EF4-FFF2-40B4-BE49-F238E27FC236}">
-                <a16:creationId xmlns:a16="http://schemas.microsoft.com/office/drawing/2014/main" id="{FDB1773F-55DC-B081-BA56-488C81DA94EE}"/>
+                <a16:creationId xmlns:a16="http://schemas.microsoft.com/office/drawing/2014/main" id="{986B939E-9A36-0346-5DEC-8B4B68FB9409}"/>
               </a:ext>
             </a:extLst>
           </p:cNvPr>
@@ -18873,7 +19131,7 @@
           <p:cNvPr id="8" name="item_2_title">
             <a:extLst>
               <a:ext uri="{FF2B5EF4-FFF2-40B4-BE49-F238E27FC236}">
-                <a16:creationId xmlns:a16="http://schemas.microsoft.com/office/drawing/2014/main" id="{D7AD2E1D-F848-1478-8698-4AEFE5E5CE49}"/>
+                <a16:creationId xmlns:a16="http://schemas.microsoft.com/office/drawing/2014/main" id="{865137E5-E498-C142-5E9F-0CC23F57A10E}"/>
               </a:ext>
             </a:extLst>
           </p:cNvPr>
@@ -18906,7 +19164,10 @@
               <a:buNone/>
               <a:defRPr sz="2000" b="1">
                 <a:solidFill>
-                  <a:schemeClr val="accent1"/>
+                  <a:schemeClr val="accent1">
+                    <a:lumMod val="70000"/>
+                    <a:lumOff val="30000"/>
+                  </a:schemeClr>
                 </a:solidFill>
                 <a:latin typeface="+mj-lt"/>
               </a:defRPr>
@@ -18926,7 +19187,7 @@
           <p:cNvPr id="9" name="item_2">
             <a:extLst>
               <a:ext uri="{FF2B5EF4-FFF2-40B4-BE49-F238E27FC236}">
-                <a16:creationId xmlns:a16="http://schemas.microsoft.com/office/drawing/2014/main" id="{9FA0C3E0-7AC9-DC13-318E-8C2A35BA4B18}"/>
+                <a16:creationId xmlns:a16="http://schemas.microsoft.com/office/drawing/2014/main" id="{DD876920-3405-2F59-E969-F7AA3925E352}"/>
               </a:ext>
             </a:extLst>
           </p:cNvPr>
@@ -18974,7 +19235,7 @@
           <p:cNvPr id="10" name="source">
             <a:extLst>
               <a:ext uri="{FF2B5EF4-FFF2-40B4-BE49-F238E27FC236}">
-                <a16:creationId xmlns:a16="http://schemas.microsoft.com/office/drawing/2014/main" id="{ECE9DAF0-164E-0083-2614-107026E81D4A}"/>
+                <a16:creationId xmlns:a16="http://schemas.microsoft.com/office/drawing/2014/main" id="{1D97A42A-4F9B-0930-8587-FEA62CCB7966}"/>
               </a:ext>
             </a:extLst>
           </p:cNvPr>
@@ -18996,7 +19257,10 @@
             </a:avLst>
           </a:prstGeom>
           <a:solidFill>
-            <a:schemeClr val="accent1"/>
+            <a:schemeClr val="accent1">
+              <a:lumMod val="70000"/>
+              <a:lumOff val="30000"/>
+            </a:schemeClr>
           </a:solidFill>
         </p:spPr>
         <p:txBody>
@@ -19029,7 +19293,7 @@
     </p:spTree>
     <p:extLst>
       <p:ext uri="{BB962C8B-B14F-4D97-AF65-F5344CB8AC3E}">
-        <p14:creationId xmlns:p14="http://schemas.microsoft.com/office/powerpoint/2010/main" val="579289886"/>
+        <p14:creationId xmlns:p14="http://schemas.microsoft.com/office/powerpoint/2010/main" val="960911382"/>
       </p:ext>
     </p:extLst>
   </p:cSld>
@@ -19098,9 +19362,9 @@
           <a:bodyPr/>
           <a:lstStyle/>
           <a:p>
-            <a:fld id="{C108DDE1-F741-4F4F-A7D2-FBD0359B97CD}" type="datetimeFigureOut">
+            <a:fld id="{374EEE4F-B349-4B31-9811-90D259E0D621}" type="datetimeFigureOut">
               <a:rPr lang="en-US" smtClean="0"/>
-              <a:t>10/3/2026</a:t>
+              <a:t>10/4/2026</a:t>
             </a:fld>
             <a:endParaRPr lang="en-US"/>
           </a:p>
@@ -19140,7 +19404,7 @@
           <a:bodyPr/>
           <a:lstStyle/>
           <a:p>
-            <a:fld id="{D07356AB-B086-4690-8078-803F810DAE76}" type="slidenum">
+            <a:fld id="{6622063C-0B57-47EC-9E6E-D170EF750DAF}" type="slidenum">
               <a:rPr lang="en-US" smtClean="0"/>
               <a:t>‹#›</a:t>
             </a:fld>
@@ -19153,7 +19417,7 @@
           <p:cNvPr id="6" name="chart">
             <a:extLst>
               <a:ext uri="{FF2B5EF4-FFF2-40B4-BE49-F238E27FC236}">
-                <a16:creationId xmlns:a16="http://schemas.microsoft.com/office/drawing/2014/main" id="{6EE07882-E873-BD26-3EF6-AEBB0BA7B0D3}"/>
+                <a16:creationId xmlns:a16="http://schemas.microsoft.com/office/drawing/2014/main" id="{1B156A41-01F9-31BA-DE41-D1917701D4D9}"/>
               </a:ext>
             </a:extLst>
           </p:cNvPr>
@@ -19183,7 +19447,7 @@
           <p:cNvPr id="7" name="body">
             <a:extLst>
               <a:ext uri="{FF2B5EF4-FFF2-40B4-BE49-F238E27FC236}">
-                <a16:creationId xmlns:a16="http://schemas.microsoft.com/office/drawing/2014/main" id="{75D26B5C-5AB6-E2E4-5B25-13704E5997C4}"/>
+                <a16:creationId xmlns:a16="http://schemas.microsoft.com/office/drawing/2014/main" id="{6591FA73-097C-608B-7CCB-4D4F81CEE50D}"/>
               </a:ext>
             </a:extLst>
           </p:cNvPr>
@@ -19226,7 +19490,7 @@
           <p:cNvPr id="8" name="source">
             <a:extLst>
               <a:ext uri="{FF2B5EF4-FFF2-40B4-BE49-F238E27FC236}">
-                <a16:creationId xmlns:a16="http://schemas.microsoft.com/office/drawing/2014/main" id="{B2E7C724-8C37-C627-6FD7-EDD581B86852}"/>
+                <a16:creationId xmlns:a16="http://schemas.microsoft.com/office/drawing/2014/main" id="{7AAA9AB3-3D36-2AEA-51C1-4222AE1C7E6B}"/>
               </a:ext>
             </a:extLst>
           </p:cNvPr>
@@ -19248,7 +19512,10 @@
             </a:avLst>
           </a:prstGeom>
           <a:solidFill>
-            <a:schemeClr val="accent1"/>
+            <a:schemeClr val="accent1">
+              <a:lumMod val="70000"/>
+              <a:lumOff val="30000"/>
+            </a:schemeClr>
           </a:solidFill>
         </p:spPr>
         <p:txBody>
@@ -19281,7 +19548,7 @@
     </p:spTree>
     <p:extLst>
       <p:ext uri="{BB962C8B-B14F-4D97-AF65-F5344CB8AC3E}">
-        <p14:creationId xmlns:p14="http://schemas.microsoft.com/office/powerpoint/2010/main" val="3046418179"/>
+        <p14:creationId xmlns:p14="http://schemas.microsoft.com/office/powerpoint/2010/main" val="2922865777"/>
       </p:ext>
     </p:extLst>
   </p:cSld>
@@ -19350,9 +19617,9 @@
           <a:bodyPr/>
           <a:lstStyle/>
           <a:p>
-            <a:fld id="{C108DDE1-F741-4F4F-A7D2-FBD0359B97CD}" type="datetimeFigureOut">
+            <a:fld id="{374EEE4F-B349-4B31-9811-90D259E0D621}" type="datetimeFigureOut">
               <a:rPr lang="en-US" smtClean="0"/>
-              <a:t>10/3/2026</a:t>
+              <a:t>10/4/2026</a:t>
             </a:fld>
             <a:endParaRPr lang="en-US"/>
           </a:p>
@@ -19392,7 +19659,7 @@
           <a:bodyPr/>
           <a:lstStyle/>
           <a:p>
-            <a:fld id="{D07356AB-B086-4690-8078-803F810DAE76}" type="slidenum">
+            <a:fld id="{6622063C-0B57-47EC-9E6E-D170EF750DAF}" type="slidenum">
               <a:rPr lang="en-US" smtClean="0"/>
               <a:t>‹#›</a:t>
             </a:fld>
@@ -19405,7 +19672,7 @@
           <p:cNvPr id="6" name="item_1_title">
             <a:extLst>
               <a:ext uri="{FF2B5EF4-FFF2-40B4-BE49-F238E27FC236}">
-                <a16:creationId xmlns:a16="http://schemas.microsoft.com/office/drawing/2014/main" id="{8FA956DE-FA73-49F9-FD36-4C191A8F9CEB}"/>
+                <a16:creationId xmlns:a16="http://schemas.microsoft.com/office/drawing/2014/main" id="{C7B7386D-85DF-832A-F6F8-CDFB48376F33}"/>
               </a:ext>
             </a:extLst>
           </p:cNvPr>
@@ -19435,7 +19702,10 @@
               <a:buNone/>
               <a:defRPr sz="2000" b="1">
                 <a:solidFill>
-                  <a:schemeClr val="accent1"/>
+                  <a:schemeClr val="accent1">
+                    <a:lumMod val="70000"/>
+                    <a:lumOff val="30000"/>
+                  </a:schemeClr>
                 </a:solidFill>
                 <a:latin typeface="+mj-lt"/>
               </a:defRPr>
@@ -19455,7 +19725,7 @@
           <p:cNvPr id="7" name="item_1">
             <a:extLst>
               <a:ext uri="{FF2B5EF4-FFF2-40B4-BE49-F238E27FC236}">
-                <a16:creationId xmlns:a16="http://schemas.microsoft.com/office/drawing/2014/main" id="{D6C7D124-E76B-5CB7-B135-DE7B745E8322}"/>
+                <a16:creationId xmlns:a16="http://schemas.microsoft.com/office/drawing/2014/main" id="{7C5E89F2-E736-EBEA-6671-D3A5B34F5EEC}"/>
               </a:ext>
             </a:extLst>
           </p:cNvPr>
@@ -19503,7 +19773,7 @@
           <p:cNvPr id="8" name="item_2_title">
             <a:extLst>
               <a:ext uri="{FF2B5EF4-FFF2-40B4-BE49-F238E27FC236}">
-                <a16:creationId xmlns:a16="http://schemas.microsoft.com/office/drawing/2014/main" id="{E14EA6F2-C6ED-C25D-F65B-7891B356AE66}"/>
+                <a16:creationId xmlns:a16="http://schemas.microsoft.com/office/drawing/2014/main" id="{BD45B82E-D04D-5B9C-AD1D-6195F61C10F3}"/>
               </a:ext>
             </a:extLst>
           </p:cNvPr>
@@ -19536,7 +19806,10 @@
               <a:buNone/>
               <a:defRPr sz="2000" b="1">
                 <a:solidFill>
-                  <a:schemeClr val="accent1"/>
+                  <a:schemeClr val="accent1">
+                    <a:lumMod val="70000"/>
+                    <a:lumOff val="30000"/>
+                  </a:schemeClr>
                 </a:solidFill>
                 <a:latin typeface="+mj-lt"/>
               </a:defRPr>
@@ -19556,7 +19829,7 @@
           <p:cNvPr id="9" name="item_2">
             <a:extLst>
               <a:ext uri="{FF2B5EF4-FFF2-40B4-BE49-F238E27FC236}">
-                <a16:creationId xmlns:a16="http://schemas.microsoft.com/office/drawing/2014/main" id="{6D46133A-EE1C-CFDB-CD57-F371219A766D}"/>
+                <a16:creationId xmlns:a16="http://schemas.microsoft.com/office/drawing/2014/main" id="{B7876620-597B-7FF8-3BF3-857D0CA07C58}"/>
               </a:ext>
             </a:extLst>
           </p:cNvPr>
@@ -19604,7 +19877,7 @@
           <p:cNvPr id="10" name="item_3_title">
             <a:extLst>
               <a:ext uri="{FF2B5EF4-FFF2-40B4-BE49-F238E27FC236}">
-                <a16:creationId xmlns:a16="http://schemas.microsoft.com/office/drawing/2014/main" id="{B403539A-CAD4-0E4F-0E64-6121FF534AFA}"/>
+                <a16:creationId xmlns:a16="http://schemas.microsoft.com/office/drawing/2014/main" id="{EB381F0B-B9DC-5DB2-53D6-DCA1C1D74F58}"/>
               </a:ext>
             </a:extLst>
           </p:cNvPr>
@@ -19637,7 +19910,10 @@
               <a:buNone/>
               <a:defRPr sz="2000" b="1">
                 <a:solidFill>
-                  <a:schemeClr val="accent1"/>
+                  <a:schemeClr val="accent1">
+                    <a:lumMod val="70000"/>
+                    <a:lumOff val="30000"/>
+                  </a:schemeClr>
                 </a:solidFill>
                 <a:latin typeface="+mj-lt"/>
               </a:defRPr>
@@ -19657,7 +19933,7 @@
           <p:cNvPr id="11" name="item_3">
             <a:extLst>
               <a:ext uri="{FF2B5EF4-FFF2-40B4-BE49-F238E27FC236}">
-                <a16:creationId xmlns:a16="http://schemas.microsoft.com/office/drawing/2014/main" id="{F8B962A1-E761-CB19-605E-242A824D9F31}"/>
+                <a16:creationId xmlns:a16="http://schemas.microsoft.com/office/drawing/2014/main" id="{6D09D6D2-19DC-61E2-24D2-A35FA07B47F7}"/>
               </a:ext>
             </a:extLst>
           </p:cNvPr>
@@ -19705,7 +19981,7 @@
           <p:cNvPr id="12" name="item_4_title">
             <a:extLst>
               <a:ext uri="{FF2B5EF4-FFF2-40B4-BE49-F238E27FC236}">
-                <a16:creationId xmlns:a16="http://schemas.microsoft.com/office/drawing/2014/main" id="{B95C9DEF-F503-54E1-8115-73D530CC0BEA}"/>
+                <a16:creationId xmlns:a16="http://schemas.microsoft.com/office/drawing/2014/main" id="{3FC2BA7E-929E-C8E9-EE83-D574E2CF3489}"/>
               </a:ext>
             </a:extLst>
           </p:cNvPr>
@@ -19738,7 +20014,10 @@
               <a:buNone/>
               <a:defRPr sz="2000" b="1">
                 <a:solidFill>
-                  <a:schemeClr val="accent1"/>
+                  <a:schemeClr val="accent1">
+                    <a:lumMod val="70000"/>
+                    <a:lumOff val="30000"/>
+                  </a:schemeClr>
                 </a:solidFill>
                 <a:latin typeface="+mj-lt"/>
               </a:defRPr>
@@ -19758,7 +20037,7 @@
           <p:cNvPr id="13" name="item_4">
             <a:extLst>
               <a:ext uri="{FF2B5EF4-FFF2-40B4-BE49-F238E27FC236}">
-                <a16:creationId xmlns:a16="http://schemas.microsoft.com/office/drawing/2014/main" id="{7CDE13AD-2C76-1F42-3ED3-208E8304F58E}"/>
+                <a16:creationId xmlns:a16="http://schemas.microsoft.com/office/drawing/2014/main" id="{C86609EC-4D0C-E003-FF51-6EF8D908FB32}"/>
               </a:ext>
             </a:extLst>
           </p:cNvPr>
@@ -19806,7 +20085,7 @@
           <p:cNvPr id="14" name="source">
             <a:extLst>
               <a:ext uri="{FF2B5EF4-FFF2-40B4-BE49-F238E27FC236}">
-                <a16:creationId xmlns:a16="http://schemas.microsoft.com/office/drawing/2014/main" id="{17663D33-18ED-21FB-68B3-751A6A3220D0}"/>
+                <a16:creationId xmlns:a16="http://schemas.microsoft.com/office/drawing/2014/main" id="{AD57FBBF-1983-78FD-F8D8-4064BF8A518F}"/>
               </a:ext>
             </a:extLst>
           </p:cNvPr>
@@ -19828,7 +20107,10 @@
             </a:avLst>
           </a:prstGeom>
           <a:solidFill>
-            <a:schemeClr val="accent1"/>
+            <a:schemeClr val="accent1">
+              <a:lumMod val="70000"/>
+              <a:lumOff val="30000"/>
+            </a:schemeClr>
           </a:solidFill>
         </p:spPr>
         <p:txBody>
@@ -19861,7 +20143,7 @@
     </p:spTree>
     <p:extLst>
       <p:ext uri="{BB962C8B-B14F-4D97-AF65-F5344CB8AC3E}">
-        <p14:creationId xmlns:p14="http://schemas.microsoft.com/office/powerpoint/2010/main" val="2452371502"/>
+        <p14:creationId xmlns:p14="http://schemas.microsoft.com/office/powerpoint/2010/main" val="2229624562"/>
       </p:ext>
     </p:extLst>
   </p:cSld>
@@ -20023,9 +20305,9 @@
             </a:lvl1pPr>
           </a:lstStyle>
           <a:p>
-            <a:fld id="{C108DDE1-F741-4F4F-A7D2-FBD0359B97CD}" type="datetimeFigureOut">
+            <a:fld id="{374EEE4F-B349-4B31-9811-90D259E0D621}" type="datetimeFigureOut">
               <a:rPr lang="en-US" smtClean="0"/>
-              <a:t>10/3/2026</a:t>
+              <a:t>10/4/2026</a:t>
             </a:fld>
             <a:endParaRPr lang="en-US"/>
           </a:p>
@@ -20105,7 +20387,7 @@
             </a:lvl1pPr>
           </a:lstStyle>
           <a:p>
-            <a:fld id="{D07356AB-B086-4690-8078-803F810DAE76}" type="slidenum">
+            <a:fld id="{6622063C-0B57-47EC-9E6E-D170EF750DAF}" type="slidenum">
               <a:rPr lang="en-US" smtClean="0"/>
               <a:t>‹#›</a:t>
             </a:fld>
@@ -20151,7 +20433,7 @@
     </p:spTree>
     <p:extLst>
       <p:ext uri="{BB962C8B-B14F-4D97-AF65-F5344CB8AC3E}">
-        <p14:creationId xmlns:p14="http://schemas.microsoft.com/office/powerpoint/2010/main" val="957607581"/>
+        <p14:creationId xmlns:p14="http://schemas.microsoft.com/office/powerpoint/2010/main" val="3522531734"/>
       </p:ext>
     </p:extLst>
   </p:cSld>
